--- a/marketing/presentation/Smart-Assess-Ja-Manchester-Presentation-v2.pptx
+++ b/marketing/presentation/Smart-Assess-Ja-Manchester-Presentation-v2.pptx
@@ -157,7 +157,7 @@
               <c:strCache>
                 <c:ptCount val="1"/>
                 <c:pt idx="0">
-                  <c:v>Students</c:v>
+                  <c:v>Percent of students</c:v>
                 </c:pt>
               </c:strCache>
             </c:strRef>
@@ -170,7 +170,7 @@
           </c:spPr>
           <c:invertIfNegative val="0"/>
           <c:dLbls>
-            <c:numFmt formatCode="#,##0" sourceLinked="0"/>
+            <c:numFmt formatCode="0&quot;%&quot;" sourceLinked="0"/>
             <c:txPr>
               <a:bodyPr/>
               <a:lstStyle/>
@@ -228,29 +228,29 @@
                 <c:formatCode>General</c:formatCode>
                 <c:ptCount val="6"/>
                 <c:pt idx="0">
-                  <c:v>11</c:v>
+                  <c:v>92</c:v>
                 </c:pt>
                 <c:pt idx="1">
-                  <c:v>7</c:v>
+                  <c:v>58</c:v>
                 </c:pt>
                 <c:pt idx="2">
-                  <c:v>6</c:v>
+                  <c:v>50</c:v>
                 </c:pt>
                 <c:pt idx="3">
-                  <c:v>4</c:v>
+                  <c:v>33</c:v>
                 </c:pt>
                 <c:pt idx="4">
-                  <c:v>3</c:v>
+                  <c:v>25</c:v>
                 </c:pt>
                 <c:pt idx="5">
-                  <c:v>3</c:v>
+                  <c:v>25</c:v>
                 </c:pt>
               </c:numCache>
             </c:numRef>
           </c:val>
         </c:ser>
         <c:dLbls>
-          <c:numFmt formatCode="#,##0" sourceLinked="0"/>
+          <c:numFmt formatCode="0&quot;%&quot;" sourceLinked="0"/>
           <c:txPr>
             <a:bodyPr/>
             <a:lstStyle/>
@@ -324,7 +324,7 @@
         <c:axId val="2094734552"/>
         <c:scaling>
           <c:orientation val="minMax"/>
-          <c:max val="13"/>
+          <c:max val="105"/>
           <c:min val="0"/>
         </c:scaling>
         <c:delete val="1"/>
@@ -406,7 +406,7 @@
               <c:strCache>
                 <c:ptCount val="1"/>
                 <c:pt idx="0">
-                  <c:v>Students</c:v>
+                  <c:v>Percent of students</c:v>
                 </c:pt>
               </c:strCache>
             </c:strRef>
@@ -419,7 +419,7 @@
           </c:spPr>
           <c:invertIfNegative val="0"/>
           <c:dLbls>
-            <c:numFmt formatCode="#,##0" sourceLinked="0"/>
+            <c:numFmt formatCode="0&quot;%&quot;" sourceLinked="0"/>
             <c:txPr>
               <a:bodyPr/>
               <a:lstStyle/>
@@ -474,26 +474,26 @@
                 <c:formatCode>General</c:formatCode>
                 <c:ptCount val="5"/>
                 <c:pt idx="0">
-                  <c:v>9</c:v>
+                  <c:v>75</c:v>
                 </c:pt>
                 <c:pt idx="1">
-                  <c:v>7</c:v>
+                  <c:v>58</c:v>
                 </c:pt>
                 <c:pt idx="2">
-                  <c:v>6</c:v>
+                  <c:v>50</c:v>
                 </c:pt>
                 <c:pt idx="3">
-                  <c:v>5</c:v>
+                  <c:v>42</c:v>
                 </c:pt>
                 <c:pt idx="4">
-                  <c:v>5</c:v>
+                  <c:v>42</c:v>
                 </c:pt>
               </c:numCache>
             </c:numRef>
           </c:val>
         </c:ser>
         <c:dLbls>
-          <c:numFmt formatCode="#,##0" sourceLinked="0"/>
+          <c:numFmt formatCode="0&quot;%&quot;" sourceLinked="0"/>
           <c:txPr>
             <a:bodyPr/>
             <a:lstStyle/>
@@ -567,7 +567,7 @@
         <c:axId val="2094734552"/>
         <c:scaling>
           <c:orientation val="minMax"/>
-          <c:max val="13"/>
+          <c:max val="105"/>
           <c:min val="0"/>
         </c:scaling>
         <c:delete val="1"/>
@@ -649,7 +649,7 @@
               <c:strCache>
                 <c:ptCount val="1"/>
                 <c:pt idx="0">
-                  <c:v>Teachers</c:v>
+                  <c:v>Percent of teachers</c:v>
                 </c:pt>
               </c:strCache>
             </c:strRef>
@@ -662,7 +662,7 @@
           </c:spPr>
           <c:invertIfNegative val="0"/>
           <c:dLbls>
-            <c:numFmt formatCode="#,##0" sourceLinked="0"/>
+            <c:numFmt formatCode="0&quot;%&quot;" sourceLinked="0"/>
             <c:txPr>
               <a:bodyPr/>
               <a:lstStyle/>
@@ -717,26 +717,26 @@
                 <c:formatCode>General</c:formatCode>
                 <c:ptCount val="5"/>
                 <c:pt idx="0">
-                  <c:v>8</c:v>
+                  <c:v>80</c:v>
                 </c:pt>
                 <c:pt idx="1">
-                  <c:v>6</c:v>
+                  <c:v>60</c:v>
                 </c:pt>
                 <c:pt idx="2">
-                  <c:v>5</c:v>
+                  <c:v>50</c:v>
                 </c:pt>
                 <c:pt idx="3">
-                  <c:v>4</c:v>
+                  <c:v>40</c:v>
                 </c:pt>
                 <c:pt idx="4">
-                  <c:v>3</c:v>
+                  <c:v>30</c:v>
                 </c:pt>
               </c:numCache>
             </c:numRef>
           </c:val>
         </c:ser>
         <c:dLbls>
-          <c:numFmt formatCode="#,##0" sourceLinked="0"/>
+          <c:numFmt formatCode="0&quot;%&quot;" sourceLinked="0"/>
           <c:txPr>
             <a:bodyPr/>
             <a:lstStyle/>
@@ -810,7 +810,7 @@
         <c:axId val="2094734552"/>
         <c:scaling>
           <c:orientation val="minMax"/>
-          <c:max val="10"/>
+          <c:max val="105"/>
           <c:min val="0"/>
         </c:scaling>
         <c:delete val="1"/>
@@ -1445,7 +1445,7 @@
             <a:r>
               <a:rPr lang="en-US" dirty="0"/>
               <a:t>About 1.5 minutes.
-Teachers asked who is struggling and what the common mistakes are (8 and 7 of 10). Exam insight shows, per test, which questions the class missed, the wrong answer most students chose, which students may need support and why, and the class against its last five tests. Students get My Topics: their own results by topic, with a practise button. Leaders get department and school analytics.</a:t>
+Teachers asked who is struggling and what the common mistakes are (80% and 70%). Exam insight shows, per test, which questions the class missed, the wrong answer most students chose, which students may need support and why, and the class against its last five tests. Students get My Topics: their own results by topic, with a practise button. Leaders get department and school analytics.</a:t>
             </a:r>
             <a:endParaRPr lang="en-US" dirty="0"/>
           </a:p>
@@ -1712,7 +1712,7 @@
             <a:r>
               <a:rPr lang="en-US" dirty="0"/>
               <a:t>About 1.5 minutes.
-Smart Learning is for learning only: lessons, study support, catch-up and reading. Assessment tells you what happened; Learning helps you act on it. Lessons follow the national curriculum 5E model. Short check questions come at three levels, support, core and stretch, which answers the 9 of 10 who asked for different activities for different ability levels. The AI drafts a lesson plan from a subject, grade and topic; the teacher reviews it.</a:t>
+Smart Learning is for learning only: lessons, study support, catch-up and reading. Assessment tells you what happened; Learning helps you act on it. Lessons follow the national curriculum 5E model. Short check questions come at three levels, support, core and stretch, which answers the 90% who asked for different activities for different ability levels. The AI drafts a lesson plan from a subject, grade and topic; the teacher reviews it.</a:t>
             </a:r>
             <a:endParaRPr lang="en-US" dirty="0"/>
           </a:p>
@@ -1801,7 +1801,7 @@
             <a:r>
               <a:rPr lang="en-US" dirty="0"/>
               <a:t>About 1.5 minutes.
-The scenario: a student misses three days. The teacher records when each lesson was taught. The absent student is offered the lesson as a catch-up, works through it at their own pace, and the teacher sees who has caught up. 9 of 10 teachers asked for exactly this. The screen on the left is a real lesson from the Manchester demo school.</a:t>
+The scenario: a student misses three days. The teacher records when each lesson was taught. The absent student is offered the lesson as a catch-up, works through it at their own pace, and the teacher sees who has caught up. 90% of teachers asked for exactly this. The screen on the left is a real lesson from the Manchester demo school.</a:t>
             </a:r>
             <a:endParaRPr lang="en-US" dirty="0"/>
           </a:p>
@@ -1890,7 +1890,7 @@
             <a:r>
               <a:rPr lang="en-US" dirty="0"/>
               <a:t>About 1.5 minutes.
-What students and teachers told us they want, and what is built: flashcards (7 of 12 students chose them) with review spacing, so cards you miss come back sooner; support, core and stretch practice per lesson; a "Current and future" page for students and teachers (what is happening now and what is coming, including upcoming assignment reminders, with no email); and the teacher resource space. The screen on the right is a real lesson builder from the demo school, with the optional AI drafting button.</a:t>
+What students and teachers told us they want, and what is built: flashcards (58% of students chose them) with review spacing, so cards you miss come back sooner; support, core and stretch practice per lesson; a "Current and future" page for students and teachers (what is happening now and what is coming, including upcoming assignment reminders, with no email); and the teacher resource space. The screen on the right is a real lesson builder from the demo school, with the optional AI drafting button.</a:t>
             </a:r>
             <a:endParaRPr lang="en-US" dirty="0"/>
           </a:p>
@@ -3405,7 +3405,7 @@
             <a:r>
               <a:rPr lang="en-US" dirty="0"/>
               <a:t>About 1 minute.
-Manchester High School is about 1,800 students. Every test, lesson and class produces information. The question is whether teachers and leaders can see it, in time to act.</a:t>
+Manchester High School is about 1,800 students and more than 100 members of staff. Every test, lesson and class produces information. The question is whether teachers and leaders can see it, in time to act.</a:t>
             </a:r>
             <a:endParaRPr lang="en-US" dirty="0"/>
           </a:p>
@@ -3583,7 +3583,7 @@
             <a:r>
               <a:rPr lang="en-US" dirty="0"/>
               <a:t>About 1.5 minutes.
-Ten teachers. Marking is the biggest time cost (8 of 10). Nine of ten want the system to show what an absent student missed, and nine of ten want activities for different ability levels. Eight of ten want AI-assisted lesson planning. Everything on this slide is something we have now built; the last two slides before the demo show how.</a:t>
+Ten teachers. Marking is the biggest time cost (80% of teachers). 90% want the system to show what an absent student missed, and 90% want activities for different ability levels. 80% want AI-assisted lesson planning. Everything on this slide is something we have now built; the last two slides before the demo show how.</a:t>
             </a:r>
             <a:endParaRPr lang="en-US" dirty="0"/>
           </a:p>
@@ -3672,7 +3672,7 @@
             <a:r>
               <a:rPr lang="en-US" dirty="0"/>
               <a:t>About 1 minute.
-One school, three products with three different jobs. Assess measures learning. Learning delivers and recovers it. Play makes practice engaging. Two are already built and in use at Manchester; Play is built and held back until you choose to launch it.</a:t>
+One platform, three products with three different jobs. Assess measures learning. Learning delivers and recovers it. Play makes practice engaging. Two are already built and in use at Manchester; Play is built and held back until you choose to launch it.</a:t>
             </a:r>
             <a:endParaRPr lang="en-US" dirty="0"/>
           </a:p>
@@ -3760,7 +3760,7 @@
           <a:p>
             <a:r>
               <a:rPr lang="en-US" dirty="0"/>
-              <a:t>About half a minute. One line: Smart Assess is for assessment only. The next four slides show building, marking, results and security. 8 of 10 teachers named marking as their biggest time cost, so that is where we start.</a:t>
+              <a:t>About half a minute. One line: Smart Assess is for assessment only. The next four slides show building, marking, results and security. 80% of teachers named marking as their biggest time cost, so that is where we start.</a:t>
             </a:r>
             <a:endParaRPr lang="en-US" dirty="0"/>
           </a:p>
@@ -6261,7 +6261,7 @@
                 <a:ea typeface="Arial" pitchFamily="34" charset="-122"/>
                 <a:cs typeface="Arial" pitchFamily="34" charset="-120"/>
               </a:rPr>
-              <a:t>8 of 10 teachers named marking as the biggest drain on their time.</a:t>
+              <a:t>80% of teachers named marking as the biggest drain on their time.</a:t>
             </a:r>
             <a:endParaRPr lang="en-US" sz="1400" dirty="0"/>
           </a:p>
@@ -7537,7 +7537,7 @@
                 <a:ea typeface="Arial" pitchFamily="34" charset="-122"/>
                 <a:cs typeface="Arial" pitchFamily="34" charset="-120"/>
               </a:rPr>
-              <a:t>Teachers asked who is struggling (8 of 10) and what mistakes are common (7 of 10).</a:t>
+              <a:t>Teachers asked who is struggling (80%) and what mistakes are common (70%).</a:t>
             </a:r>
             <a:endParaRPr lang="en-US" sz="1400" dirty="0"/>
           </a:p>
@@ -7968,7 +7968,7 @@
               <a:buNone/>
             </a:pPr>
             <a:r>
-              <a:rPr lang="en-US" sz="4600" dirty="0">
+              <a:rPr lang="en-US" sz="3600" dirty="0">
                 <a:solidFill>
                   <a:srgbClr val="1E1208"/>
                 </a:solidFill>
@@ -7976,9 +7976,9 @@
                 <a:ea typeface="Impact" pitchFamily="34" charset="-122"/>
                 <a:cs typeface="Impact" pitchFamily="34" charset="-120"/>
               </a:rPr>
-              <a:t>FAIR, SECURE AND ACCESSIBLE BY DESIGN</a:t>
-            </a:r>
-            <a:endParaRPr lang="en-US" sz="4600" dirty="0"/>
+              <a:t>FAIR, SECURE AND SUPPORTIVE OF EACH STUDENT'S ACCESSIBILITY</a:t>
+            </a:r>
+            <a:endParaRPr lang="en-US" sz="3600" dirty="0"/>
           </a:p>
         </p:txBody>
       </p:sp>
@@ -13847,7 +13847,7 @@
                 <a:ea typeface="Arial" pitchFamily="34" charset="-122"/>
                 <a:cs typeface="Arial" pitchFamily="34" charset="-120"/>
               </a:rPr>
-              <a:t>7 of 12 students chose flashcards. 9 of 10 teachers asked for activities at different ability levels.</a:t>
+              <a:t>58% of students chose flashcards. 90% of teachers asked for activities at different ability levels.</a:t>
             </a:r>
             <a:endParaRPr lang="en-US" sz="1300" dirty="0"/>
           </a:p>
@@ -28674,7 +28674,7 @@
                           <a:ea typeface="Arial" pitchFamily="34" charset="-122"/>
                           <a:cs typeface="Arial" pitchFamily="34" charset="-120"/>
                         </a:rPr>
-                        <a:t>Marking takes the most time (8 of 10 teachers)</a:t>
+                        <a:t>Marking takes the most time (80% of teachers)</a:t>
                       </a:r>
                       <a:endParaRPr lang="en-US" sz="1200" dirty="0">
                         <a:latin typeface="Arial" charset="0"/>
@@ -28880,7 +28880,7 @@
                           <a:ea typeface="Arial" pitchFamily="34" charset="-122"/>
                           <a:cs typeface="Arial" pitchFamily="34" charset="-120"/>
                         </a:rPr>
-                        <a:t>Who is struggling, what mistakes are common (8 and 7 of 10)</a:t>
+                        <a:t>Who is struggling, what mistakes are common (80% and 70% of teachers)</a:t>
                       </a:r>
                       <a:endParaRPr lang="en-US" sz="1200" dirty="0">
                         <a:latin typeface="Arial" charset="0"/>
@@ -29086,7 +29086,7 @@
                           <a:ea typeface="Arial" pitchFamily="34" charset="-122"/>
                           <a:cs typeface="Arial" pitchFamily="34" charset="-120"/>
                         </a:rPr>
-                        <a:t>What a missed student missed (9 of 10)</a:t>
+                        <a:t>What a missed student missed (90% of teachers)</a:t>
                       </a:r>
                       <a:endParaRPr lang="en-US" sz="1200" dirty="0">
                         <a:latin typeface="Arial" charset="0"/>
@@ -29292,7 +29292,7 @@
                           <a:ea typeface="Arial" pitchFamily="34" charset="-122"/>
                           <a:cs typeface="Arial" pitchFamily="34" charset="-120"/>
                         </a:rPr>
-                        <a:t>Activities for different ability levels (9 of 10)</a:t>
+                        <a:t>Activities for different ability levels (90% of teachers)</a:t>
                       </a:r>
                       <a:endParaRPr lang="en-US" sz="1200" dirty="0">
                         <a:latin typeface="Arial" charset="0"/>
@@ -29498,7 +29498,7 @@
                           <a:ea typeface="Arial" pitchFamily="34" charset="-122"/>
                           <a:cs typeface="Arial" pitchFamily="34" charset="-120"/>
                         </a:rPr>
-                        <a:t>AI-assisted lesson planning (8 of 10)</a:t>
+                        <a:t>AI-assisted lesson planning (80% of teachers)</a:t>
                       </a:r>
                       <a:endParaRPr lang="en-US" sz="1200" dirty="0">
                         <a:latin typeface="Arial" charset="0"/>
@@ -29704,7 +29704,7 @@
                           <a:ea typeface="Arial" pitchFamily="34" charset="-122"/>
                           <a:cs typeface="Arial" pitchFamily="34" charset="-120"/>
                         </a:rPr>
-                        <a:t>Topics I need to improve (9 of 12 students)</a:t>
+                        <a:t>Topics I need to improve (75% of students)</a:t>
                       </a:r>
                       <a:endParaRPr lang="en-US" sz="1200" dirty="0">
                         <a:latin typeface="Arial" charset="0"/>
@@ -29910,7 +29910,7 @@
                           <a:ea typeface="Arial" pitchFamily="34" charset="-122"/>
                           <a:cs typeface="Arial" pitchFamily="34" charset="-120"/>
                         </a:rPr>
-                        <a:t>Flashcards (7 of 12 students)</a:t>
+                        <a:t>Flashcards (58% of students)</a:t>
                       </a:r>
                       <a:endParaRPr lang="en-US" sz="1200" dirty="0">
                         <a:latin typeface="Arial" charset="0"/>
@@ -30116,7 +30116,7 @@
                           <a:ea typeface="Arial" pitchFamily="34" charset="-122"/>
                           <a:cs typeface="Arial" pitchFamily="34" charset="-120"/>
                         </a:rPr>
-                        <a:t>Step-by-step explanations (11 of 12 students)</a:t>
+                        <a:t>Step-by-step explanations (92% of students)</a:t>
                       </a:r>
                       <a:endParaRPr lang="en-US" sz="1200" dirty="0">
                         <a:latin typeface="Arial" charset="0"/>
@@ -34155,7 +34155,7 @@
                 <a:ea typeface="Arial" pitchFamily="34" charset="-122"/>
                 <a:cs typeface="Arial" pitchFamily="34" charset="-120"/>
               </a:rPr>
-              <a:t>Time. Cost. Paper. Administration. Repetition.</a:t>
+              <a:t>This consumes time, money, paper and administrative effort.</a:t>
             </a:r>
             <a:endParaRPr lang="en-US" sz="1500" dirty="0"/>
           </a:p>
@@ -35237,7 +35237,7 @@
               <a:buNone/>
             </a:pPr>
             <a:r>
-              <a:rPr lang="en-US" sz="4600" dirty="0">
+              <a:rPr lang="en-US" sz="4300" dirty="0">
                 <a:solidFill>
                   <a:srgbClr val="1E1208"/>
                 </a:solidFill>
@@ -35245,9 +35245,9 @@
                 <a:ea typeface="Impact" pitchFamily="34" charset="-122"/>
                 <a:cs typeface="Impact" pitchFamily="34" charset="-120"/>
               </a:rPr>
-              <a:t>ONE SCHOOL OF ABOUT 1,800 STUDENTS</a:t>
-            </a:r>
-            <a:endParaRPr lang="en-US" sz="4600" dirty="0"/>
+              <a:t>ONE SCHOOL OF ABOUT 1,800 STUDENTS AND 100+ STAFF</a:t>
+            </a:r>
+            <a:endParaRPr lang="en-US" sz="4300" dirty="0"/>
           </a:p>
         </p:txBody>
       </p:sp>
@@ -35284,8 +35284,8 @@
         </p:nvSpPr>
         <p:spPr>
           <a:xfrm>
-            <a:off x="1645920" y="2194560"/>
-            <a:ext cx="3474720" cy="1645920"/>
+            <a:off x="1645920" y="2057400"/>
+            <a:ext cx="3474720" cy="1005840"/>
           </a:xfrm>
           <a:prstGeom prst="rect">
             <a:avLst/>
@@ -35304,7 +35304,7 @@
               <a:buNone/>
             </a:pPr>
             <a:r>
-              <a:rPr lang="en-US" sz="8800" dirty="0">
+              <a:rPr lang="en-US" sz="6600" dirty="0">
                 <a:solidFill>
                   <a:srgbClr val="1E1208"/>
                 </a:solidFill>
@@ -35314,7 +35314,7 @@
               </a:rPr>
               <a:t>≈1,800</a:t>
             </a:r>
-            <a:endParaRPr lang="en-US" sz="8800" dirty="0"/>
+            <a:endParaRPr lang="en-US" sz="6600" dirty="0"/>
           </a:p>
         </p:txBody>
       </p:sp>
@@ -35326,8 +35326,8 @@
         </p:nvSpPr>
         <p:spPr>
           <a:xfrm>
-            <a:off x="1645920" y="3840480"/>
-            <a:ext cx="3383280" cy="640080"/>
+            <a:off x="1645920" y="3017520"/>
+            <a:ext cx="3383280" cy="411480"/>
           </a:xfrm>
           <a:prstGeom prst="rect">
             <a:avLst/>
@@ -35346,7 +35346,7 @@
               <a:buNone/>
             </a:pPr>
             <a:r>
-              <a:rPr lang="en-US" sz="3000" dirty="0">
+              <a:rPr lang="en-US" sz="2400" dirty="0">
                 <a:solidFill>
                   <a:srgbClr val="1E1208"/>
                 </a:solidFill>
@@ -35356,7 +35356,7 @@
               </a:rPr>
               <a:t>STUDENTS</a:t>
             </a:r>
-            <a:endParaRPr lang="en-US" sz="3000" dirty="0"/>
+            <a:endParaRPr lang="en-US" sz="2400" dirty="0"/>
           </a:p>
         </p:txBody>
       </p:sp>
@@ -35368,8 +35368,8 @@
         </p:nvSpPr>
         <p:spPr>
           <a:xfrm>
-            <a:off x="1645920" y="4526280"/>
-            <a:ext cx="3383280" cy="1005840"/>
+            <a:off x="1645920" y="3474720"/>
+            <a:ext cx="3474720" cy="914400"/>
           </a:xfrm>
           <a:prstGeom prst="rect">
             <a:avLst/>
@@ -35388,7 +35388,91 @@
               <a:buNone/>
             </a:pPr>
             <a:r>
-              <a:rPr lang="en-US" sz="1400" b="1" dirty="0">
+              <a:rPr lang="en-US" sz="6600" dirty="0">
+                <a:solidFill>
+                  <a:srgbClr val="1E1208"/>
+                </a:solidFill>
+                <a:latin typeface="Impact" pitchFamily="34" charset="0"/>
+                <a:ea typeface="Impact" pitchFamily="34" charset="-122"/>
+                <a:cs typeface="Impact" pitchFamily="34" charset="-120"/>
+              </a:rPr>
+              <a:t>100+</a:t>
+            </a:r>
+            <a:endParaRPr lang="en-US" sz="6600" dirty="0"/>
+          </a:p>
+        </p:txBody>
+      </p:sp>
+      <p:sp>
+        <p:nvSpPr>
+          <p:cNvPr id="19" name="Text 16"/>
+          <p:cNvSpPr/>
+          <p:nvPr/>
+        </p:nvSpPr>
+        <p:spPr>
+          <a:xfrm>
+            <a:off x="1645920" y="4389120"/>
+            <a:ext cx="3383280" cy="411480"/>
+          </a:xfrm>
+          <a:prstGeom prst="rect">
+            <a:avLst/>
+          </a:prstGeom>
+          <a:noFill/>
+          <a:ln/>
+        </p:spPr>
+        <p:txBody>
+          <a:bodyPr wrap="square" lIns="0" tIns="0" rIns="0" bIns="0" rtlCol="0" anchor="t"/>
+          <a:lstStyle/>
+          <a:p>
+            <a:pPr algn="l" indent="0" marL="0">
+              <a:lnSpc>
+                <a:spcPct val="110000"/>
+              </a:lnSpc>
+              <a:buNone/>
+            </a:pPr>
+            <a:r>
+              <a:rPr lang="en-US" sz="2400" dirty="0">
+                <a:solidFill>
+                  <a:srgbClr val="1E1208"/>
+                </a:solidFill>
+                <a:latin typeface="Impact" pitchFamily="34" charset="0"/>
+                <a:ea typeface="Impact" pitchFamily="34" charset="-122"/>
+                <a:cs typeface="Impact" pitchFamily="34" charset="-120"/>
+              </a:rPr>
+              <a:t>MEMBERS OF STAFF</a:t>
+            </a:r>
+            <a:endParaRPr lang="en-US" sz="2400" dirty="0"/>
+          </a:p>
+        </p:txBody>
+      </p:sp>
+      <p:sp>
+        <p:nvSpPr>
+          <p:cNvPr id="20" name="Text 17"/>
+          <p:cNvSpPr/>
+          <p:nvPr/>
+        </p:nvSpPr>
+        <p:spPr>
+          <a:xfrm>
+            <a:off x="1645920" y="4937760"/>
+            <a:ext cx="3383280" cy="731520"/>
+          </a:xfrm>
+          <a:prstGeom prst="rect">
+            <a:avLst/>
+          </a:prstGeom>
+          <a:noFill/>
+          <a:ln/>
+        </p:spPr>
+        <p:txBody>
+          <a:bodyPr wrap="square" lIns="0" tIns="0" rIns="0" bIns="0" rtlCol="0" anchor="t"/>
+          <a:lstStyle/>
+          <a:p>
+            <a:pPr algn="l" indent="0" marL="0">
+              <a:lnSpc>
+                <a:spcPct val="110000"/>
+              </a:lnSpc>
+              <a:buNone/>
+            </a:pPr>
+            <a:r>
+              <a:rPr lang="en-US" sz="1300" b="1" dirty="0">
                 <a:solidFill>
                   <a:srgbClr val="1E1208"/>
                 </a:solidFill>
@@ -35396,15 +35480,15 @@
                 <a:ea typeface="Arial" pitchFamily="34" charset="-122"/>
                 <a:cs typeface="Arial" pitchFamily="34" charset="-120"/>
               </a:rPr>
-              <a:t>Every test, lesson and class creates information. The question is whether teachers and leaders can see it.</a:t>
-            </a:r>
-            <a:endParaRPr lang="en-US" sz="1400" dirty="0"/>
-          </a:p>
-        </p:txBody>
-      </p:sp>
-      <p:sp>
-        <p:nvSpPr>
-          <p:cNvPr id="19" name="Shape 16"/>
+              <a:t>Every test, lesson and class creates information. Can teachers and leaders see it?</a:t>
+            </a:r>
+            <a:endParaRPr lang="en-US" sz="1300" dirty="0"/>
+          </a:p>
+        </p:txBody>
+      </p:sp>
+      <p:sp>
+        <p:nvSpPr>
+          <p:cNvPr id="21" name="Shape 18"/>
           <p:cNvSpPr/>
           <p:nvPr/>
         </p:nvSpPr>
@@ -35429,7 +35513,7 @@
       </p:sp>
       <p:sp>
         <p:nvSpPr>
-          <p:cNvPr id="20" name="Text 17"/>
+          <p:cNvPr id="22" name="Text 19"/>
           <p:cNvSpPr/>
           <p:nvPr/>
         </p:nvSpPr>
@@ -35471,7 +35555,7 @@
       </p:sp>
       <p:sp>
         <p:nvSpPr>
-          <p:cNvPr id="21" name="Text 18"/>
+          <p:cNvPr id="23" name="Text 20"/>
           <p:cNvSpPr/>
           <p:nvPr/>
         </p:nvSpPr>
@@ -35513,7 +35597,7 @@
       </p:sp>
       <p:sp>
         <p:nvSpPr>
-          <p:cNvPr id="22" name="Shape 19"/>
+          <p:cNvPr id="24" name="Shape 21"/>
           <p:cNvSpPr/>
           <p:nvPr/>
         </p:nvSpPr>
@@ -35538,7 +35622,7 @@
       </p:sp>
       <p:sp>
         <p:nvSpPr>
-          <p:cNvPr id="23" name="Text 20"/>
+          <p:cNvPr id="25" name="Text 22"/>
           <p:cNvSpPr/>
           <p:nvPr/>
         </p:nvSpPr>
@@ -35580,7 +35664,7 @@
       </p:sp>
       <p:sp>
         <p:nvSpPr>
-          <p:cNvPr id="24" name="Text 21"/>
+          <p:cNvPr id="26" name="Text 23"/>
           <p:cNvSpPr/>
           <p:nvPr/>
         </p:nvSpPr>
@@ -35622,7 +35706,7 @@
       </p:sp>
       <p:sp>
         <p:nvSpPr>
-          <p:cNvPr id="25" name="Shape 22"/>
+          <p:cNvPr id="27" name="Shape 24"/>
           <p:cNvSpPr/>
           <p:nvPr/>
         </p:nvSpPr>
@@ -35647,7 +35731,7 @@
       </p:sp>
       <p:sp>
         <p:nvSpPr>
-          <p:cNvPr id="26" name="Text 23"/>
+          <p:cNvPr id="28" name="Text 25"/>
           <p:cNvSpPr/>
           <p:nvPr/>
         </p:nvSpPr>
@@ -35689,7 +35773,7 @@
       </p:sp>
       <p:sp>
         <p:nvSpPr>
-          <p:cNvPr id="27" name="Text 24"/>
+          <p:cNvPr id="29" name="Text 26"/>
           <p:cNvSpPr/>
           <p:nvPr/>
         </p:nvSpPr>
@@ -35731,7 +35815,7 @@
       </p:sp>
       <p:sp>
         <p:nvSpPr>
-          <p:cNvPr id="28" name="Shape 25"/>
+          <p:cNvPr id="30" name="Shape 27"/>
           <p:cNvSpPr/>
           <p:nvPr/>
         </p:nvSpPr>
@@ -35756,7 +35840,7 @@
       </p:sp>
       <p:sp>
         <p:nvSpPr>
-          <p:cNvPr id="29" name="Text 26"/>
+          <p:cNvPr id="31" name="Text 28"/>
           <p:cNvSpPr/>
           <p:nvPr/>
         </p:nvSpPr>
@@ -35798,7 +35882,7 @@
       </p:sp>
       <p:sp>
         <p:nvSpPr>
-          <p:cNvPr id="30" name="Text 27"/>
+          <p:cNvPr id="32" name="Text 29"/>
           <p:cNvSpPr/>
           <p:nvPr/>
         </p:nvSpPr>
@@ -36230,7 +36314,7 @@
                 <a:ea typeface="Courier New" pitchFamily="34" charset="-122"/>
                 <a:cs typeface="Courier New" pitchFamily="34" charset="-120"/>
               </a:rPr>
-              <a:t>WHAT 12 MANCHESTER STUDENTS TOLD US</a:t>
+              <a:t>WHAT MANCHESTER STUDENTS TOLD US</a:t>
             </a:r>
             <a:endParaRPr lang="en-US" sz="1150" dirty="0"/>
           </a:p>
@@ -36449,7 +36533,7 @@
                 <a:ea typeface="Arial" pitchFamily="34" charset="-122"/>
                 <a:cs typeface="Arial" pitchFamily="34" charset="-120"/>
               </a:rPr>
-              <a:t>10 of 12 want help studying for exams. 7 of 12 chose flashcards for practice.</a:t>
+              <a:t>83% want help studying for exams. 58% chose flashcards for practice.</a:t>
             </a:r>
             <a:endParaRPr lang="en-US" sz="1500" dirty="0"/>
           </a:p>
@@ -36889,7 +36973,7 @@
                 <a:ea typeface="Courier New" pitchFamily="34" charset="-122"/>
                 <a:cs typeface="Courier New" pitchFamily="34" charset="-120"/>
               </a:rPr>
-              <a:t>WHAT 10 MANCHESTER TEACHERS TOLD US</a:t>
+              <a:t>WHAT MANCHESTER TEACHERS TOLD US</a:t>
             </a:r>
             <a:endParaRPr lang="en-US" sz="1150" dirty="0"/>
           </a:p>
@@ -37028,7 +37112,7 @@
         <p:spPr>
           <a:xfrm>
             <a:off x="7452360" y="1965960"/>
-            <a:ext cx="640080" cy="960120"/>
+            <a:ext cx="1325880" cy="960120"/>
           </a:xfrm>
           <a:prstGeom prst="rect">
             <a:avLst/>
@@ -37047,7 +37131,7 @@
               <a:buNone/>
             </a:pPr>
             <a:r>
-              <a:rPr lang="en-US" sz="4600" dirty="0">
+              <a:rPr lang="en-US" sz="4000" dirty="0">
                 <a:solidFill>
                   <a:srgbClr val="1E1208"/>
                 </a:solidFill>
@@ -37055,9 +37139,9 @@
                 <a:ea typeface="Impact" pitchFamily="34" charset="-122"/>
                 <a:cs typeface="Impact" pitchFamily="34" charset="-120"/>
               </a:rPr>
-              <a:t>9</a:t>
-            </a:r>
-            <a:endParaRPr lang="en-US" sz="4600" dirty="0"/>
+              <a:t>90%</a:t>
+            </a:r>
+            <a:endParaRPr lang="en-US" sz="4000" dirty="0"/>
           </a:p>
         </p:txBody>
       </p:sp>
@@ -37069,17 +37153,17 @@
         </p:nvSpPr>
         <p:spPr>
           <a:xfrm>
-            <a:off x="8092440" y="2075688"/>
-            <a:ext cx="914400" cy="274320"/>
-          </a:xfrm>
-          <a:prstGeom prst="rect">
-            <a:avLst/>
-          </a:prstGeom>
-          <a:noFill/>
-          <a:ln/>
-        </p:spPr>
-        <p:txBody>
-          <a:bodyPr wrap="square" lIns="0" tIns="0" rIns="0" bIns="0" rtlCol="0" anchor="t"/>
+            <a:off x="8778240" y="1965960"/>
+            <a:ext cx="2057400" cy="960120"/>
+          </a:xfrm>
+          <a:prstGeom prst="rect">
+            <a:avLst/>
+          </a:prstGeom>
+          <a:noFill/>
+          <a:ln/>
+        </p:spPr>
+        <p:txBody>
+          <a:bodyPr wrap="square" lIns="0" tIns="0" rIns="0" bIns="0" rtlCol="0" anchor="ctr"/>
           <a:lstStyle/>
           <a:p>
             <a:pPr algn="l" indent="0" marL="0">
@@ -37089,49 +37173,7 @@
               <a:buNone/>
             </a:pPr>
             <a:r>
-              <a:rPr lang="en-US" sz="1400" dirty="0">
-                <a:solidFill>
-                  <a:srgbClr val="1E1208"/>
-                </a:solidFill>
-                <a:latin typeface="Impact" pitchFamily="34" charset="0"/>
-                <a:ea typeface="Impact" pitchFamily="34" charset="-122"/>
-                <a:cs typeface="Impact" pitchFamily="34" charset="-120"/>
-              </a:rPr>
-              <a:t>OF 10</a:t>
-            </a:r>
-            <a:endParaRPr lang="en-US" sz="1400" dirty="0"/>
-          </a:p>
-        </p:txBody>
-      </p:sp>
-      <p:sp>
-        <p:nvSpPr>
-          <p:cNvPr id="20" name="Text 16"/>
-          <p:cNvSpPr/>
-          <p:nvPr/>
-        </p:nvSpPr>
-        <p:spPr>
-          <a:xfrm>
-            <a:off x="8092440" y="2313432"/>
-            <a:ext cx="2743200" cy="594360"/>
-          </a:xfrm>
-          <a:prstGeom prst="rect">
-            <a:avLst/>
-          </a:prstGeom>
-          <a:noFill/>
-          <a:ln/>
-        </p:spPr>
-        <p:txBody>
-          <a:bodyPr wrap="square" lIns="0" tIns="0" rIns="0" bIns="0" rtlCol="0" anchor="t"/>
-          <a:lstStyle/>
-          <a:p>
-            <a:pPr algn="l" indent="0" marL="0">
-              <a:lnSpc>
-                <a:spcPct val="110000"/>
-              </a:lnSpc>
-              <a:buNone/>
-            </a:pPr>
-            <a:r>
-              <a:rPr lang="en-US" sz="1150" b="1" dirty="0">
+              <a:rPr lang="en-US" sz="1100" b="1" dirty="0">
                 <a:solidFill>
                   <a:srgbClr val="1E1208"/>
                 </a:solidFill>
@@ -37141,13 +37183,13 @@
               </a:rPr>
               <a:t>want the system to show what an absent student missed</a:t>
             </a:r>
-            <a:endParaRPr lang="en-US" sz="1150" dirty="0"/>
-          </a:p>
-        </p:txBody>
-      </p:sp>
-      <p:sp>
-        <p:nvSpPr>
-          <p:cNvPr id="21" name="Shape 17"/>
+            <a:endParaRPr lang="en-US" sz="1100" dirty="0"/>
+          </a:p>
+        </p:txBody>
+      </p:sp>
+      <p:sp>
+        <p:nvSpPr>
+          <p:cNvPr id="20" name="Shape 16"/>
           <p:cNvSpPr/>
           <p:nvPr/>
         </p:nvSpPr>
@@ -37172,14 +37214,14 @@
       </p:sp>
       <p:sp>
         <p:nvSpPr>
-          <p:cNvPr id="22" name="Text 18"/>
+          <p:cNvPr id="21" name="Text 17"/>
           <p:cNvSpPr/>
           <p:nvPr/>
         </p:nvSpPr>
         <p:spPr>
           <a:xfrm>
             <a:off x="7452360" y="3063240"/>
-            <a:ext cx="640080" cy="960120"/>
+            <a:ext cx="1325880" cy="960120"/>
           </a:xfrm>
           <a:prstGeom prst="rect">
             <a:avLst/>
@@ -37198,7 +37240,7 @@
               <a:buNone/>
             </a:pPr>
             <a:r>
-              <a:rPr lang="en-US" sz="4600" dirty="0">
+              <a:rPr lang="en-US" sz="4000" dirty="0">
                 <a:solidFill>
                   <a:srgbClr val="1E1208"/>
                 </a:solidFill>
@@ -37206,31 +37248,31 @@
                 <a:ea typeface="Impact" pitchFamily="34" charset="-122"/>
                 <a:cs typeface="Impact" pitchFamily="34" charset="-120"/>
               </a:rPr>
-              <a:t>9</a:t>
-            </a:r>
-            <a:endParaRPr lang="en-US" sz="4600" dirty="0"/>
-          </a:p>
-        </p:txBody>
-      </p:sp>
-      <p:sp>
-        <p:nvSpPr>
-          <p:cNvPr id="23" name="Text 19"/>
-          <p:cNvSpPr/>
-          <p:nvPr/>
-        </p:nvSpPr>
-        <p:spPr>
-          <a:xfrm>
-            <a:off x="8092440" y="3172968"/>
-            <a:ext cx="914400" cy="274320"/>
-          </a:xfrm>
-          <a:prstGeom prst="rect">
-            <a:avLst/>
-          </a:prstGeom>
-          <a:noFill/>
-          <a:ln/>
-        </p:spPr>
-        <p:txBody>
-          <a:bodyPr wrap="square" lIns="0" tIns="0" rIns="0" bIns="0" rtlCol="0" anchor="t"/>
+              <a:t>90%</a:t>
+            </a:r>
+            <a:endParaRPr lang="en-US" sz="4000" dirty="0"/>
+          </a:p>
+        </p:txBody>
+      </p:sp>
+      <p:sp>
+        <p:nvSpPr>
+          <p:cNvPr id="22" name="Text 18"/>
+          <p:cNvSpPr/>
+          <p:nvPr/>
+        </p:nvSpPr>
+        <p:spPr>
+          <a:xfrm>
+            <a:off x="8778240" y="3063240"/>
+            <a:ext cx="2057400" cy="960120"/>
+          </a:xfrm>
+          <a:prstGeom prst="rect">
+            <a:avLst/>
+          </a:prstGeom>
+          <a:noFill/>
+          <a:ln/>
+        </p:spPr>
+        <p:txBody>
+          <a:bodyPr wrap="square" lIns="0" tIns="0" rIns="0" bIns="0" rtlCol="0" anchor="ctr"/>
           <a:lstStyle/>
           <a:p>
             <a:pPr algn="l" indent="0" marL="0">
@@ -37240,49 +37282,7 @@
               <a:buNone/>
             </a:pPr>
             <a:r>
-              <a:rPr lang="en-US" sz="1400" dirty="0">
-                <a:solidFill>
-                  <a:srgbClr val="1E1208"/>
-                </a:solidFill>
-                <a:latin typeface="Impact" pitchFamily="34" charset="0"/>
-                <a:ea typeface="Impact" pitchFamily="34" charset="-122"/>
-                <a:cs typeface="Impact" pitchFamily="34" charset="-120"/>
-              </a:rPr>
-              <a:t>OF 10</a:t>
-            </a:r>
-            <a:endParaRPr lang="en-US" sz="1400" dirty="0"/>
-          </a:p>
-        </p:txBody>
-      </p:sp>
-      <p:sp>
-        <p:nvSpPr>
-          <p:cNvPr id="24" name="Text 20"/>
-          <p:cNvSpPr/>
-          <p:nvPr/>
-        </p:nvSpPr>
-        <p:spPr>
-          <a:xfrm>
-            <a:off x="8092440" y="3410712"/>
-            <a:ext cx="2743200" cy="594360"/>
-          </a:xfrm>
-          <a:prstGeom prst="rect">
-            <a:avLst/>
-          </a:prstGeom>
-          <a:noFill/>
-          <a:ln/>
-        </p:spPr>
-        <p:txBody>
-          <a:bodyPr wrap="square" lIns="0" tIns="0" rIns="0" bIns="0" rtlCol="0" anchor="t"/>
-          <a:lstStyle/>
-          <a:p>
-            <a:pPr algn="l" indent="0" marL="0">
-              <a:lnSpc>
-                <a:spcPct val="110000"/>
-              </a:lnSpc>
-              <a:buNone/>
-            </a:pPr>
-            <a:r>
-              <a:rPr lang="en-US" sz="1150" b="1" dirty="0">
+              <a:rPr lang="en-US" sz="1100" b="1" dirty="0">
                 <a:solidFill>
                   <a:srgbClr val="1E1208"/>
                 </a:solidFill>
@@ -37292,13 +37292,13 @@
               </a:rPr>
               <a:t>want different activities for different ability levels</a:t>
             </a:r>
-            <a:endParaRPr lang="en-US" sz="1150" dirty="0"/>
-          </a:p>
-        </p:txBody>
-      </p:sp>
-      <p:sp>
-        <p:nvSpPr>
-          <p:cNvPr id="25" name="Shape 21"/>
+            <a:endParaRPr lang="en-US" sz="1100" dirty="0"/>
+          </a:p>
+        </p:txBody>
+      </p:sp>
+      <p:sp>
+        <p:nvSpPr>
+          <p:cNvPr id="23" name="Shape 19"/>
           <p:cNvSpPr/>
           <p:nvPr/>
         </p:nvSpPr>
@@ -37323,14 +37323,14 @@
       </p:sp>
       <p:sp>
         <p:nvSpPr>
-          <p:cNvPr id="26" name="Text 22"/>
+          <p:cNvPr id="24" name="Text 20"/>
           <p:cNvSpPr/>
           <p:nvPr/>
         </p:nvSpPr>
         <p:spPr>
           <a:xfrm>
             <a:off x="7452360" y="4160520"/>
-            <a:ext cx="640080" cy="960120"/>
+            <a:ext cx="1325880" cy="960120"/>
           </a:xfrm>
           <a:prstGeom prst="rect">
             <a:avLst/>
@@ -37349,7 +37349,7 @@
               <a:buNone/>
             </a:pPr>
             <a:r>
-              <a:rPr lang="en-US" sz="4600" dirty="0">
+              <a:rPr lang="en-US" sz="4000" dirty="0">
                 <a:solidFill>
                   <a:srgbClr val="1E1208"/>
                 </a:solidFill>
@@ -37357,31 +37357,31 @@
                 <a:ea typeface="Impact" pitchFamily="34" charset="-122"/>
                 <a:cs typeface="Impact" pitchFamily="34" charset="-120"/>
               </a:rPr>
-              <a:t>8</a:t>
-            </a:r>
-            <a:endParaRPr lang="en-US" sz="4600" dirty="0"/>
-          </a:p>
-        </p:txBody>
-      </p:sp>
-      <p:sp>
-        <p:nvSpPr>
-          <p:cNvPr id="27" name="Text 23"/>
-          <p:cNvSpPr/>
-          <p:nvPr/>
-        </p:nvSpPr>
-        <p:spPr>
-          <a:xfrm>
-            <a:off x="8092440" y="4270248"/>
-            <a:ext cx="914400" cy="274320"/>
-          </a:xfrm>
-          <a:prstGeom prst="rect">
-            <a:avLst/>
-          </a:prstGeom>
-          <a:noFill/>
-          <a:ln/>
-        </p:spPr>
-        <p:txBody>
-          <a:bodyPr wrap="square" lIns="0" tIns="0" rIns="0" bIns="0" rtlCol="0" anchor="t"/>
+              <a:t>80%</a:t>
+            </a:r>
+            <a:endParaRPr lang="en-US" sz="4000" dirty="0"/>
+          </a:p>
+        </p:txBody>
+      </p:sp>
+      <p:sp>
+        <p:nvSpPr>
+          <p:cNvPr id="25" name="Text 21"/>
+          <p:cNvSpPr/>
+          <p:nvPr/>
+        </p:nvSpPr>
+        <p:spPr>
+          <a:xfrm>
+            <a:off x="8778240" y="4160520"/>
+            <a:ext cx="2057400" cy="960120"/>
+          </a:xfrm>
+          <a:prstGeom prst="rect">
+            <a:avLst/>
+          </a:prstGeom>
+          <a:noFill/>
+          <a:ln/>
+        </p:spPr>
+        <p:txBody>
+          <a:bodyPr wrap="square" lIns="0" tIns="0" rIns="0" bIns="0" rtlCol="0" anchor="ctr"/>
           <a:lstStyle/>
           <a:p>
             <a:pPr algn="l" indent="0" marL="0">
@@ -37391,39 +37391,59 @@
               <a:buNone/>
             </a:pPr>
             <a:r>
-              <a:rPr lang="en-US" sz="1400" dirty="0">
+              <a:rPr lang="en-US" sz="1100" b="1" dirty="0">
                 <a:solidFill>
                   <a:srgbClr val="1E1208"/>
                 </a:solidFill>
-                <a:latin typeface="Impact" pitchFamily="34" charset="0"/>
-                <a:ea typeface="Impact" pitchFamily="34" charset="-122"/>
-                <a:cs typeface="Impact" pitchFamily="34" charset="-120"/>
-              </a:rPr>
-              <a:t>OF 10</a:t>
-            </a:r>
-            <a:endParaRPr lang="en-US" sz="1400" dirty="0"/>
-          </a:p>
-        </p:txBody>
-      </p:sp>
-      <p:sp>
-        <p:nvSpPr>
-          <p:cNvPr id="28" name="Text 24"/>
-          <p:cNvSpPr/>
-          <p:nvPr/>
-        </p:nvSpPr>
-        <p:spPr>
-          <a:xfrm>
-            <a:off x="8092440" y="4507992"/>
-            <a:ext cx="2743200" cy="594360"/>
-          </a:xfrm>
-          <a:prstGeom prst="rect">
-            <a:avLst/>
-          </a:prstGeom>
-          <a:noFill/>
-          <a:ln/>
-        </p:spPr>
-        <p:txBody>
-          <a:bodyPr wrap="square" lIns="0" tIns="0" rIns="0" bIns="0" rtlCol="0" anchor="t"/>
+                <a:latin typeface="Arial" pitchFamily="34" charset="0"/>
+                <a:ea typeface="Arial" pitchFamily="34" charset="-122"/>
+                <a:cs typeface="Arial" pitchFamily="34" charset="-120"/>
+              </a:rPr>
+              <a:t>want AI-assisted lesson planning</a:t>
+            </a:r>
+            <a:endParaRPr lang="en-US" sz="1100" dirty="0"/>
+          </a:p>
+        </p:txBody>
+      </p:sp>
+      <p:sp>
+        <p:nvSpPr>
+          <p:cNvPr id="26" name="Shape 22"/>
+          <p:cNvSpPr/>
+          <p:nvPr/>
+        </p:nvSpPr>
+        <p:spPr>
+          <a:xfrm>
+            <a:off x="1417320" y="5394960"/>
+            <a:ext cx="9509760" cy="502920"/>
+          </a:xfrm>
+          <a:prstGeom prst="rect">
+            <a:avLst/>
+          </a:prstGeom>
+          <a:solidFill>
+            <a:srgbClr val="1E1208"/>
+          </a:solidFill>
+          <a:ln/>
+        </p:spPr>
+      </p:sp>
+      <p:sp>
+        <p:nvSpPr>
+          <p:cNvPr id="27" name="Text 23"/>
+          <p:cNvSpPr/>
+          <p:nvPr/>
+        </p:nvSpPr>
+        <p:spPr>
+          <a:xfrm>
+            <a:off x="1600200" y="5394960"/>
+            <a:ext cx="9144000" cy="502920"/>
+          </a:xfrm>
+          <a:prstGeom prst="rect">
+            <a:avLst/>
+          </a:prstGeom>
+          <a:noFill/>
+          <a:ln/>
+        </p:spPr>
+        <p:txBody>
+          <a:bodyPr wrap="square" lIns="0" tIns="0" rIns="0" bIns="0" rtlCol="0" anchor="ctr"/>
           <a:lstStyle/>
           <a:p>
             <a:pPr algn="l" indent="0" marL="0">
@@ -37433,76 +37453,14 @@
               <a:buNone/>
             </a:pPr>
             <a:r>
-              <a:rPr lang="en-US" sz="1150" b="1" dirty="0">
-                <a:solidFill>
-                  <a:srgbClr val="1E1208"/>
+              <a:rPr lang="en-US" sz="1300" b="1" dirty="0">
+                <a:solidFill>
+                  <a:srgbClr val="FFFFFF"/>
                 </a:solidFill>
                 <a:latin typeface="Arial" pitchFamily="34" charset="0"/>
                 <a:ea typeface="Arial" pitchFamily="34" charset="-122"/>
                 <a:cs typeface="Arial" pitchFamily="34" charset="-120"/>
               </a:rPr>
-              <a:t>want AI-assisted lesson planning</a:t>
-            </a:r>
-            <a:endParaRPr lang="en-US" sz="1150" dirty="0"/>
-          </a:p>
-        </p:txBody>
-      </p:sp>
-      <p:sp>
-        <p:nvSpPr>
-          <p:cNvPr id="29" name="Shape 25"/>
-          <p:cNvSpPr/>
-          <p:nvPr/>
-        </p:nvSpPr>
-        <p:spPr>
-          <a:xfrm>
-            <a:off x="1417320" y="5394960"/>
-            <a:ext cx="9509760" cy="502920"/>
-          </a:xfrm>
-          <a:prstGeom prst="rect">
-            <a:avLst/>
-          </a:prstGeom>
-          <a:solidFill>
-            <a:srgbClr val="1E1208"/>
-          </a:solidFill>
-          <a:ln/>
-        </p:spPr>
-      </p:sp>
-      <p:sp>
-        <p:nvSpPr>
-          <p:cNvPr id="30" name="Text 26"/>
-          <p:cNvSpPr/>
-          <p:nvPr/>
-        </p:nvSpPr>
-        <p:spPr>
-          <a:xfrm>
-            <a:off x="1600200" y="5394960"/>
-            <a:ext cx="9144000" cy="502920"/>
-          </a:xfrm>
-          <a:prstGeom prst="rect">
-            <a:avLst/>
-          </a:prstGeom>
-          <a:noFill/>
-          <a:ln/>
-        </p:spPr>
-        <p:txBody>
-          <a:bodyPr wrap="square" lIns="0" tIns="0" rIns="0" bIns="0" rtlCol="0" anchor="ctr"/>
-          <a:lstStyle/>
-          <a:p>
-            <a:pPr algn="l" indent="0" marL="0">
-              <a:lnSpc>
-                <a:spcPct val="110000"/>
-              </a:lnSpc>
-              <a:buNone/>
-            </a:pPr>
-            <a:r>
-              <a:rPr lang="en-US" sz="1300" b="1" dirty="0">
-                <a:solidFill>
-                  <a:srgbClr val="FFFFFF"/>
-                </a:solidFill>
-                <a:latin typeface="Arial" pitchFamily="34" charset="0"/>
-                <a:ea typeface="Arial" pitchFamily="34" charset="-122"/>
-                <a:cs typeface="Arial" pitchFamily="34" charset="-120"/>
-              </a:rPr>
               <a:t>"A learning gap tracker that analyses assessment results and suggests activities for reteaching and practice."</a:t>
             </a:r>
             <a:endParaRPr lang="en-US" sz="1300" dirty="0"/>
@@ -37511,7 +37469,7 @@
       </p:sp>
       <p:sp>
         <p:nvSpPr>
-          <p:cNvPr id="31" name="Text 27"/>
+          <p:cNvPr id="28" name="Text 24"/>
           <p:cNvSpPr/>
           <p:nvPr/>
         </p:nvSpPr>
@@ -37943,7 +37901,7 @@
                 <a:ea typeface="Courier New" pitchFamily="34" charset="-122"/>
                 <a:cs typeface="Courier New" pitchFamily="34" charset="-120"/>
               </a:rPr>
-              <a:t>ONE SCHOOL, THREE PRODUCTS</a:t>
+              <a:t>ONE PLATFORM, THREE PRODUCTS</a:t>
             </a:r>
             <a:endParaRPr lang="en-US" sz="1150" dirty="0"/>
           </a:p>

--- a/marketing/presentation/Smart-Assess-Ja-Manchester-Presentation-v2.pptx
+++ b/marketing/presentation/Smart-Assess-Ja-Manchester-Presentation-v2.pptx
@@ -36,9 +36,10 @@
     <p:sldId id="284" r:id="rId30"/>
     <p:sldId id="285" r:id="rId31"/>
     <p:sldId id="286" r:id="rId32"/>
+    <p:sldId id="287" r:id="rId33"/>
   </p:sldIdLst>
   <p:notesMasterIdLst>
-    <p:notesMasterId r:id="rId33"/>
+    <p:notesMasterId r:id="rId34"/>
   </p:notesMasterIdLst>
   <p:sldSz cx="12192000" cy="6858000"/>
   <p:notesSz cx="6858000" cy="12192000"/>
@@ -2871,8 +2872,8 @@
           <a:p>
             <a:r>
               <a:rPr lang="en-US" dirty="0"/>
-              <a:t>About 1.5 minutes.
-Be fair to the other tools: they are strong at their own jobs. Each has its own way of locking down an exam: Google needs school-managed Chromebooks, Microsoft the Windows Take a Test app, Moodle uses Safe Exam Browser, Canvas uses a third-party browser. All four auto-mark objective questions, and Moodle and Canvas report on each question, quiz by quiz. Kahoot and Quizizz are built for live games and practice. Our point is not that others cannot do one of these things; it is how many tools and handoffs a school needs. Sources are in Competitor-claims-verified.md.</a:t>
+              <a:t>About 1 minute.
+Be fair to the other tools: they are good at what they do. Our point is not that they cannot do a job; it is that the jobs are connected here. Assess, learn and practise around the same students, classes and curriculum topics. The goal is to reduce the work teachers do between those activities: one login, one set of people, one topic list.</a:t>
             </a:r>
             <a:endParaRPr lang="en-US" dirty="0"/>
           </a:p>
@@ -2961,7 +2962,7 @@
             <a:r>
               <a:rPr lang="en-US" dirty="0"/>
               <a:t>About 1 minute.
-Be clear about what this is not. It is not a teacher replacement: teachers stay in control of questions, marking and decisions. AI can assist with drafting and review; a person decides. It is not just a PDF on a screen: it supports the work before, during and after an assessment. And it is not three disconnected apps: the products share the school, the people and the topics.</a:t>
+The question teachers may ask: why not just use Google Classroom? Be fair. It is useful for managing classwork, sharing materials and organising assignments. Where a locked exam is needed, Google Classroom needs school-managed Chromebooks; Forms auto-marks and the grades can be imported into Classroom. Smart Assess Ja goes further into the assessment process: create, administer, mark, understand results and support learning. The difference is the connected workflow, not just a longer feature list. Sources are in Competitor-claims-verified.md.</a:t>
             </a:r>
             <a:endParaRPr lang="en-US" dirty="0"/>
           </a:p>
@@ -3049,8 +3050,8 @@
           <a:p>
             <a:r>
               <a:rPr lang="en-US" dirty="0"/>
-              <a:t>About 1.5 minutes.
-Trust, data and AI. Each school's data lives in its own separate environment. Access rules are enforced by the database itself. Two-factor sign-in is required for every staff account, which you set up today. AI helps a teacher write and suggest; it never saves a mark and never decides. Every suggestion is reviewed by a person before it is used. The optional AI tutor stays inside a lesson, is switched on by the school, can be switched off by the principal at any time, and its conversations can be read by the teacher; worrying conversations are flagged for an adult.</a:t>
+              <a:t>About 1 minute.
+Be clear about what this is not. It is not a teacher replacement: teachers stay in control of questions, marking and decisions. AI can assist with drafting and review; a person decides. It is not just a PDF on a screen: it supports the work before, during and after an assessment. And it is not three disconnected apps: the products share the school, the people and the topics.</a:t>
             </a:r>
             <a:endParaRPr lang="en-US" dirty="0"/>
           </a:p>
@@ -3139,7 +3140,7 @@
             <a:r>
               <a:rPr lang="en-US" dirty="0"/>
               <a:t>About 1.5 minutes.
-This closes the loop on the survey. Left: what Manchester students and teachers told us. Right: what now exists. Be honest about the two that are not finished: step-by-step explanations are partly covered by lessons and the optional AI tutor, and offline use of flashcards and opened lessons is built and in testing.</a:t>
+Trust, data and AI. Each school's data lives in its own separate environment. Access rules are enforced by the database itself. Two-factor sign-in is required for every staff account, which you set up today. AI helps a teacher write and suggest; it never saves a mark and never decides. Every suggestion is reviewed by a person before it is used. The optional AI tutor stays inside a lesson, is switched on by the school, can be switched off by the principal at any time, and its conversations can be read by the teacher; worrying conversations are flagged for an adult.</a:t>
             </a:r>
             <a:endParaRPr lang="en-US" dirty="0"/>
           </a:p>
@@ -3316,8 +3317,8 @@
           <a:p>
             <a:r>
               <a:rPr lang="en-US" dirty="0"/>
-              <a:t>About 1 minute.
-A starting proposal, not a plan handed down. Today is step one: experience it. Then choose where to start, pilot it with real classes, review the evidence together, and decide how to widen it. Scope, timing and measures are decided with you.</a:t>
+              <a:t>About 1.5 minutes.
+This closes the loop on the survey. Left: what Manchester students and teachers told us. Right: what now exists. Be honest about the two that are not finished: step-by-step explanations are partly covered by lessons and the optional AI tutor, and offline use of flashcards and opened lessons is built and in testing.</a:t>
             </a:r>
             <a:endParaRPr lang="en-US" dirty="0"/>
           </a:p>
@@ -3405,8 +3406,8 @@
           <a:p>
             <a:r>
               <a:rPr lang="en-US" dirty="0"/>
-              <a:t>About 0.5 minutes.
-Hand over to the live demo. Teacher, student, leadership. Everyone signs in using page 6 of their guide. Remind them the password changes on first sign-in and that they will need their authenticator app. The system administrator is signed in by the facilitator. The questions page of the guide is for anything that comes up; we come back to questions at the end.</a:t>
+              <a:t>About 1 minute.
+A starting proposal, not a plan handed down. Today is step one: experience it. Then choose where to start, pilot it with real classes, review the evidence together, and decide how to widen it. Scope, timing and measures are decided with you.</a:t>
             </a:r>
             <a:endParaRPr lang="en-US" dirty="0"/>
           </a:p>
@@ -3430,6 +3431,95 @@
             <a:fld id="{F7021451-1387-4CA6-816F-3879F97B5CBC}" type="slidenum">
               <a:rPr lang="en-US"/>
               <a:t>31</a:t>
+            </a:fld>
+            <a:endParaRPr lang="en-US"/>
+          </a:p>
+        </p:txBody>
+      </p:sp>
+    </p:spTree>
+    <p:extLst>
+      <p:ext uri="{BB962C8B-B14F-4D97-AF65-F5344CB8AC3E}">
+        <p14:creationId xmlns:p14="http://schemas.microsoft.com/office/powerpoint/2010/main" val="1024086991"/>
+      </p:ext>
+    </p:extLst>
+  </p:cSld>
+  <p:clrMapOvr>
+    <a:masterClrMapping/>
+  </p:clrMapOvr>
+</p:notes>
+</file>
+
+<file path=ppt/notesSlides/notesSlide32.xml><?xml version="1.0" encoding="utf-8"?>
+<p:notes xmlns:a="http://schemas.openxmlformats.org/drawingml/2006/main" xmlns:r="http://schemas.openxmlformats.org/officeDocument/2006/relationships" xmlns:p="http://schemas.openxmlformats.org/presentationml/2006/main">
+  <p:cSld>
+    <p:spTree>
+      <p:nvGrpSpPr>
+        <p:cNvPr id="1" name=""/>
+        <p:cNvGrpSpPr/>
+        <p:nvPr/>
+      </p:nvGrpSpPr>
+      <p:grpSpPr>
+        <a:xfrm>
+          <a:off x="0" y="0"/>
+          <a:ext cx="0" cy="0"/>
+          <a:chOff x="0" y="0"/>
+          <a:chExt cx="0" cy="0"/>
+        </a:xfrm>
+      </p:grpSpPr>
+      <p:sp>
+        <p:nvSpPr>
+          <p:cNvPr id="2" name="Slide Image Placeholder 1"/>
+          <p:cNvSpPr>
+            <a:spLocks noGrp="1" noRot="1" noChangeAspect="1"/>
+          </p:cNvSpPr>
+          <p:nvPr>
+            <p:ph type="sldImg"/>
+          </p:nvPr>
+        </p:nvSpPr>
+        <p:spPr/>
+      </p:sp>
+      <p:sp>
+        <p:nvSpPr>
+          <p:cNvPr id="3" name="Notes Placeholder 2"/>
+          <p:cNvSpPr>
+            <a:spLocks noGrp="1"/>
+          </p:cNvSpPr>
+          <p:nvPr>
+            <p:ph type="body" idx="1"/>
+          </p:nvPr>
+        </p:nvSpPr>
+        <p:spPr/>
+        <p:txBody>
+          <a:bodyPr/>
+          <a:lstStyle/>
+          <a:p>
+            <a:r>
+              <a:rPr lang="en-US" dirty="0"/>
+              <a:t>About 0.5 minutes.
+Hand over to the live demo. Teacher, student, leadership. Everyone signs in using page 6 of their guide. Remind them the password changes on first sign-in and that they will need their authenticator app. The system administrator is signed in by the facilitator. The questions page of the guide is for anything that comes up; we come back to questions at the end.</a:t>
+            </a:r>
+            <a:endParaRPr lang="en-US" dirty="0"/>
+          </a:p>
+        </p:txBody>
+      </p:sp>
+      <p:sp>
+        <p:nvSpPr>
+          <p:cNvPr id="4" name="Slide Number Placeholder 3"/>
+          <p:cNvSpPr>
+            <a:spLocks noGrp="1"/>
+          </p:cNvSpPr>
+          <p:nvPr>
+            <p:ph type="sldNum" sz="quarter" idx="10"/>
+          </p:nvPr>
+        </p:nvSpPr>
+        <p:spPr/>
+        <p:txBody>
+          <a:bodyPr/>
+          <a:lstStyle/>
+          <a:p>
+            <a:fld id="{F7021451-1387-4CA6-816F-3879F97B5CBC}" type="slidenum">
+              <a:rPr lang="en-US"/>
+              <a:t>32</a:t>
             </a:fld>
             <a:endParaRPr lang="en-US"/>
           </a:p>
@@ -26495,7 +26585,7 @@
                 <a:ea typeface="Courier New" pitchFamily="34" charset="-122"/>
                 <a:cs typeface="Courier New" pitchFamily="34" charset="-120"/>
               </a:rPr>
-              <a:t>THE LANDSCAPE</a:t>
+              <a:t>THE DIFFERENCE</a:t>
             </a:r>
             <a:endParaRPr lang="en-US" sz="1150" dirty="0"/>
           </a:p>
@@ -26536,1318 +26626,31 @@
                 <a:ea typeface="Impact" pitchFamily="34" charset="-122"/>
                 <a:cs typeface="Impact" pitchFamily="34" charset="-120"/>
               </a:rPr>
-              <a:t>STRONG TOOLS. DIFFERENT JOBS.</a:t>
+              <a:t>GOOD TOOLS. ONE CONNECTED JOURNEY.</a:t>
             </a:r>
             <a:endParaRPr lang="en-US" sz="4800" dirty="0"/>
           </a:p>
         </p:txBody>
       </p:sp>
-      <p:graphicFrame>
-        <p:nvGraphicFramePr>
-          <p:cNvPr id="27" name="Table 0"/>
-          <p:cNvGraphicFramePr>
-            <a:graphicFrameLocks noGrp="1"/>
-          </p:cNvGraphicFramePr>
-          <p:nvPr>
-            <p:extLst>
-              <p:ext uri="{D42A27DB-BD31-4B8C-83A1-F6EECF244321}">
-                <p14:modId xmlns:p14="http://schemas.microsoft.com/office/powerpoint/2010/main" val="1579011935"/>
-              </p:ext>
-            </p:extLst>
-          </p:nvPr>
-        </p:nvGraphicFramePr>
-        <p:xfrm>
-          <a:off x="1417320" y="1783080"/>
-          <a:ext cx="9509760" cy="914400"/>
-        </p:xfrm>
-        <a:graphic>
-          <a:graphicData uri="http://schemas.openxmlformats.org/drawingml/2006/table">
-            <a:tbl>
-              <a:tblPr/>
-              <a:tblGrid>
-                <a:gridCol w="1737360"/>
-                <a:gridCol w="4206240"/>
-                <a:gridCol w="3566160"/>
-              </a:tblGrid>
-              <a:tr h="347472">
-                <a:tc>
-                  <a:txBody>
-                    <a:bodyPr/>
-                    <a:lstStyle/>
-                    <a:p>
-                      <a:pPr indent="0" marL="0">
-                        <a:buNone/>
-                      </a:pPr>
-                      <a:r>
-                        <a:rPr lang="en-US" sz="1050" b="1" dirty="0">
-                          <a:solidFill>
-                            <a:srgbClr val="FFFFFF"/>
-                          </a:solidFill>
-                          <a:latin typeface="Courier New" pitchFamily="34" charset="0"/>
-                          <a:ea typeface="Courier New" pitchFamily="34" charset="-122"/>
-                          <a:cs typeface="Courier New" pitchFamily="34" charset="-120"/>
-                        </a:rPr>
-                        <a:t>WHAT A SCHOOL NEEDS</a:t>
-                      </a:r>
-                      <a:endParaRPr lang="en-US" sz="1050" dirty="0">
-                        <a:latin typeface="Courier New" charset="0"/>
-                        <a:ea typeface="Courier New" charset="0"/>
-                        <a:cs typeface="Courier New" charset="0"/>
-                      </a:endParaRPr>
-                    </a:p>
-                  </a:txBody>
-                  <a:tcPr marL="91440" marR="91440" marT="54864" marB="54864">
-                    <a:lnL w="19050" cap="flat" cmpd="sng" algn="ctr">
-                      <a:solidFill>
-                        <a:srgbClr val="1E1208"/>
-                      </a:solidFill>
-                      <a:prstDash val="solid"/>
-                      <a:round/>
-                      <a:headEnd type="none" w="med" len="med"/>
-                      <a:tailEnd type="none" w="med" len="med"/>
-                    </a:lnL>
-                    <a:lnR w="19050" cap="flat" cmpd="sng" algn="ctr">
-                      <a:solidFill>
-                        <a:srgbClr val="1E1208"/>
-                      </a:solidFill>
-                      <a:prstDash val="solid"/>
-                      <a:round/>
-                      <a:headEnd type="none" w="med" len="med"/>
-                      <a:tailEnd type="none" w="med" len="med"/>
-                    </a:lnR>
-                    <a:lnT w="19050" cap="flat" cmpd="sng" algn="ctr">
-                      <a:solidFill>
-                        <a:srgbClr val="1E1208"/>
-                      </a:solidFill>
-                      <a:prstDash val="solid"/>
-                      <a:round/>
-                      <a:headEnd type="none" w="med" len="med"/>
-                      <a:tailEnd type="none" w="med" len="med"/>
-                    </a:lnT>
-                    <a:lnB w="19050" cap="flat" cmpd="sng" algn="ctr">
-                      <a:solidFill>
-                        <a:srgbClr val="1E1208"/>
-                      </a:solidFill>
-                      <a:prstDash val="solid"/>
-                      <a:round/>
-                      <a:headEnd type="none" w="med" len="med"/>
-                      <a:tailEnd type="none" w="med" len="med"/>
-                    </a:lnB>
-                    <a:solidFill>
-                      <a:srgbClr val="1E1208"/>
-                    </a:solidFill>
-                  </a:tcPr>
-                </a:tc>
-                <a:tc>
-                  <a:txBody>
-                    <a:bodyPr/>
-                    <a:lstStyle/>
-                    <a:p>
-                      <a:pPr indent="0" marL="0">
-                        <a:buNone/>
-                      </a:pPr>
-                      <a:r>
-                        <a:rPr lang="en-US" sz="1050" b="1" dirty="0">
-                          <a:solidFill>
-                            <a:srgbClr val="FFFFFF"/>
-                          </a:solidFill>
-                          <a:latin typeface="Courier New" pitchFamily="34" charset="0"/>
-                          <a:ea typeface="Courier New" pitchFamily="34" charset="-122"/>
-                          <a:cs typeface="Courier New" pitchFamily="34" charset="-120"/>
-                        </a:rPr>
-                        <a:t>HOW THE COMMON TOOLS HANDLE IT</a:t>
-                      </a:r>
-                      <a:endParaRPr lang="en-US" sz="1050" dirty="0">
-                        <a:latin typeface="Courier New" charset="0"/>
-                        <a:ea typeface="Courier New" charset="0"/>
-                        <a:cs typeface="Courier New" charset="0"/>
-                      </a:endParaRPr>
-                    </a:p>
-                  </a:txBody>
-                  <a:tcPr marL="91440" marR="91440" marT="54864" marB="54864">
-                    <a:lnL w="19050" cap="flat" cmpd="sng" algn="ctr">
-                      <a:solidFill>
-                        <a:srgbClr val="1E1208"/>
-                      </a:solidFill>
-                      <a:prstDash val="solid"/>
-                      <a:round/>
-                      <a:headEnd type="none" w="med" len="med"/>
-                      <a:tailEnd type="none" w="med" len="med"/>
-                    </a:lnL>
-                    <a:lnR w="19050" cap="flat" cmpd="sng" algn="ctr">
-                      <a:solidFill>
-                        <a:srgbClr val="1E1208"/>
-                      </a:solidFill>
-                      <a:prstDash val="solid"/>
-                      <a:round/>
-                      <a:headEnd type="none" w="med" len="med"/>
-                      <a:tailEnd type="none" w="med" len="med"/>
-                    </a:lnR>
-                    <a:lnT w="19050" cap="flat" cmpd="sng" algn="ctr">
-                      <a:solidFill>
-                        <a:srgbClr val="1E1208"/>
-                      </a:solidFill>
-                      <a:prstDash val="solid"/>
-                      <a:round/>
-                      <a:headEnd type="none" w="med" len="med"/>
-                      <a:tailEnd type="none" w="med" len="med"/>
-                    </a:lnT>
-                    <a:lnB w="19050" cap="flat" cmpd="sng" algn="ctr">
-                      <a:solidFill>
-                        <a:srgbClr val="1E1208"/>
-                      </a:solidFill>
-                      <a:prstDash val="solid"/>
-                      <a:round/>
-                      <a:headEnd type="none" w="med" len="med"/>
-                      <a:tailEnd type="none" w="med" len="med"/>
-                    </a:lnB>
-                    <a:solidFill>
-                      <a:srgbClr val="1E1208"/>
-                    </a:solidFill>
-                  </a:tcPr>
-                </a:tc>
-                <a:tc>
-                  <a:txBody>
-                    <a:bodyPr/>
-                    <a:lstStyle/>
-                    <a:p>
-                      <a:pPr indent="0" marL="0">
-                        <a:buNone/>
-                      </a:pPr>
-                      <a:r>
-                        <a:rPr lang="en-US" sz="1050" b="1" dirty="0">
-                          <a:solidFill>
-                            <a:srgbClr val="1E1208"/>
-                          </a:solidFill>
-                          <a:latin typeface="Courier New" pitchFamily="34" charset="0"/>
-                          <a:ea typeface="Courier New" pitchFamily="34" charset="-122"/>
-                          <a:cs typeface="Courier New" pitchFamily="34" charset="-120"/>
-                        </a:rPr>
-                        <a:t>SMART ASSESS JA</a:t>
-                      </a:r>
-                      <a:endParaRPr lang="en-US" sz="1050" dirty="0">
-                        <a:latin typeface="Courier New" charset="0"/>
-                        <a:ea typeface="Courier New" charset="0"/>
-                        <a:cs typeface="Courier New" charset="0"/>
-                      </a:endParaRPr>
-                    </a:p>
-                  </a:txBody>
-                  <a:tcPr marL="91440" marR="91440" marT="54864" marB="54864">
-                    <a:lnL w="19050" cap="flat" cmpd="sng" algn="ctr">
-                      <a:solidFill>
-                        <a:srgbClr val="1E1208"/>
-                      </a:solidFill>
-                      <a:prstDash val="solid"/>
-                      <a:round/>
-                      <a:headEnd type="none" w="med" len="med"/>
-                      <a:tailEnd type="none" w="med" len="med"/>
-                    </a:lnL>
-                    <a:lnR w="19050" cap="flat" cmpd="sng" algn="ctr">
-                      <a:solidFill>
-                        <a:srgbClr val="1E1208"/>
-                      </a:solidFill>
-                      <a:prstDash val="solid"/>
-                      <a:round/>
-                      <a:headEnd type="none" w="med" len="med"/>
-                      <a:tailEnd type="none" w="med" len="med"/>
-                    </a:lnR>
-                    <a:lnT w="19050" cap="flat" cmpd="sng" algn="ctr">
-                      <a:solidFill>
-                        <a:srgbClr val="1E1208"/>
-                      </a:solidFill>
-                      <a:prstDash val="solid"/>
-                      <a:round/>
-                      <a:headEnd type="none" w="med" len="med"/>
-                      <a:tailEnd type="none" w="med" len="med"/>
-                    </a:lnT>
-                    <a:lnB w="19050" cap="flat" cmpd="sng" algn="ctr">
-                      <a:solidFill>
-                        <a:srgbClr val="1E1208"/>
-                      </a:solidFill>
-                      <a:prstDash val="solid"/>
-                      <a:round/>
-                      <a:headEnd type="none" w="med" len="med"/>
-                      <a:tailEnd type="none" w="med" len="med"/>
-                    </a:lnB>
-                    <a:solidFill>
-                      <a:srgbClr val="D4762A"/>
-                    </a:solidFill>
-                  </a:tcPr>
-                </a:tc>
-              </a:tr>
-              <a:tr h="868680">
-                <a:tc>
-                  <a:txBody>
-                    <a:bodyPr/>
-                    <a:lstStyle/>
-                    <a:p>
-                      <a:pPr indent="0" marL="0">
-                        <a:buNone/>
-                      </a:pPr>
-                      <a:r>
-                        <a:rPr lang="en-US" sz="1250" b="1" dirty="0">
-                          <a:solidFill>
-                            <a:srgbClr val="1E1208"/>
-                          </a:solidFill>
-                          <a:latin typeface="Arial" pitchFamily="34" charset="0"/>
-                          <a:ea typeface="Arial" pitchFamily="34" charset="-122"/>
-                          <a:cs typeface="Arial" pitchFamily="34" charset="-120"/>
-                        </a:rPr>
-                        <a:t>Secure exams</a:t>
-                      </a:r>
-                      <a:endParaRPr lang="en-US" sz="1250" dirty="0">
-                        <a:latin typeface="Arial" charset="0"/>
-                        <a:ea typeface="Arial" charset="0"/>
-                        <a:cs typeface="Arial" charset="0"/>
-                      </a:endParaRPr>
-                    </a:p>
-                  </a:txBody>
-                  <a:tcPr marL="91440" marR="91440" marT="54864" marB="54864" anchor="ctr">
-                    <a:lnL w="19050" cap="flat" cmpd="sng" algn="ctr">
-                      <a:solidFill>
-                        <a:srgbClr val="1E1208"/>
-                      </a:solidFill>
-                      <a:prstDash val="solid"/>
-                      <a:round/>
-                      <a:headEnd type="none" w="med" len="med"/>
-                      <a:tailEnd type="none" w="med" len="med"/>
-                    </a:lnL>
-                    <a:lnR w="19050" cap="flat" cmpd="sng" algn="ctr">
-                      <a:solidFill>
-                        <a:srgbClr val="1E1208"/>
-                      </a:solidFill>
-                      <a:prstDash val="solid"/>
-                      <a:round/>
-                      <a:headEnd type="none" w="med" len="med"/>
-                      <a:tailEnd type="none" w="med" len="med"/>
-                    </a:lnR>
-                    <a:lnT w="19050" cap="flat" cmpd="sng" algn="ctr">
-                      <a:solidFill>
-                        <a:srgbClr val="1E1208"/>
-                      </a:solidFill>
-                      <a:prstDash val="solid"/>
-                      <a:round/>
-                      <a:headEnd type="none" w="med" len="med"/>
-                      <a:tailEnd type="none" w="med" len="med"/>
-                    </a:lnT>
-                    <a:lnB w="19050" cap="flat" cmpd="sng" algn="ctr">
-                      <a:solidFill>
-                        <a:srgbClr val="1E1208"/>
-                      </a:solidFill>
-                      <a:prstDash val="solid"/>
-                      <a:round/>
-                      <a:headEnd type="none" w="med" len="med"/>
-                      <a:tailEnd type="none" w="med" len="med"/>
-                    </a:lnB>
-                    <a:solidFill>
-                      <a:srgbClr val="FFFFFF"/>
-                    </a:solidFill>
-                  </a:tcPr>
-                </a:tc>
-                <a:tc>
-                  <a:txBody>
-                    <a:bodyPr/>
-                    <a:lstStyle/>
-                    <a:p>
-                      <a:pPr indent="0" marL="0">
-                        <a:buNone/>
-                      </a:pPr>
-                      <a:r>
-                        <a:rPr lang="en-US" sz="1250" dirty="0">
-                          <a:solidFill>
-                            <a:srgbClr val="1E1208"/>
-                          </a:solidFill>
-                          <a:latin typeface="Arial" pitchFamily="34" charset="0"/>
-                          <a:ea typeface="Arial" pitchFamily="34" charset="-122"/>
-                          <a:cs typeface="Arial" pitchFamily="34" charset="-120"/>
-                        </a:rPr>
-                        <a:t>Each has its own lock-down. Google needs managed Chromebooks, Microsoft the Windows Take a Test app, Moodle Safe Exam Browser, Canvas a third-party browser.</a:t>
-                      </a:r>
-                      <a:endParaRPr lang="en-US" sz="1250" dirty="0">
-                        <a:latin typeface="Arial" charset="0"/>
-                        <a:ea typeface="Arial" charset="0"/>
-                        <a:cs typeface="Arial" charset="0"/>
-                      </a:endParaRPr>
-                    </a:p>
-                  </a:txBody>
-                  <a:tcPr marL="91440" marR="91440" marT="54864" marB="54864" anchor="ctr">
-                    <a:lnL w="19050" cap="flat" cmpd="sng" algn="ctr">
-                      <a:solidFill>
-                        <a:srgbClr val="1E1208"/>
-                      </a:solidFill>
-                      <a:prstDash val="solid"/>
-                      <a:round/>
-                      <a:headEnd type="none" w="med" len="med"/>
-                      <a:tailEnd type="none" w="med" len="med"/>
-                    </a:lnL>
-                    <a:lnR w="19050" cap="flat" cmpd="sng" algn="ctr">
-                      <a:solidFill>
-                        <a:srgbClr val="1E1208"/>
-                      </a:solidFill>
-                      <a:prstDash val="solid"/>
-                      <a:round/>
-                      <a:headEnd type="none" w="med" len="med"/>
-                      <a:tailEnd type="none" w="med" len="med"/>
-                    </a:lnR>
-                    <a:lnT w="19050" cap="flat" cmpd="sng" algn="ctr">
-                      <a:solidFill>
-                        <a:srgbClr val="1E1208"/>
-                      </a:solidFill>
-                      <a:prstDash val="solid"/>
-                      <a:round/>
-                      <a:headEnd type="none" w="med" len="med"/>
-                      <a:tailEnd type="none" w="med" len="med"/>
-                    </a:lnT>
-                    <a:lnB w="19050" cap="flat" cmpd="sng" algn="ctr">
-                      <a:solidFill>
-                        <a:srgbClr val="1E1208"/>
-                      </a:solidFill>
-                      <a:prstDash val="solid"/>
-                      <a:round/>
-                      <a:headEnd type="none" w="med" len="med"/>
-                      <a:tailEnd type="none" w="med" len="med"/>
-                    </a:lnB>
-                    <a:solidFill>
-                      <a:srgbClr val="FFFFFF"/>
-                    </a:solidFill>
-                  </a:tcPr>
-                </a:tc>
-                <a:tc>
-                  <a:txBody>
-                    <a:bodyPr/>
-                    <a:lstStyle/>
-                    <a:p>
-                      <a:pPr indent="0" marL="0">
-                        <a:buNone/>
-                      </a:pPr>
-                      <a:r>
-                        <a:rPr lang="en-US" sz="1250" b="1" dirty="0">
-                          <a:solidFill>
-                            <a:srgbClr val="1E1208"/>
-                          </a:solidFill>
-                          <a:latin typeface="Arial" pitchFamily="34" charset="0"/>
-                          <a:ea typeface="Arial" pitchFamily="34" charset="-122"/>
-                          <a:cs typeface="Arial" pitchFamily="34" charset="-120"/>
-                        </a:rPr>
-                        <a:t>Built in, plus a lock-down desktop app for Windows and Mac</a:t>
-                      </a:r>
-                      <a:endParaRPr lang="en-US" sz="1250" dirty="0">
-                        <a:latin typeface="Arial" charset="0"/>
-                        <a:ea typeface="Arial" charset="0"/>
-                        <a:cs typeface="Arial" charset="0"/>
-                      </a:endParaRPr>
-                    </a:p>
-                  </a:txBody>
-                  <a:tcPr marL="91440" marR="91440" marT="54864" marB="54864" anchor="ctr">
-                    <a:lnL w="19050" cap="flat" cmpd="sng" algn="ctr">
-                      <a:solidFill>
-                        <a:srgbClr val="1E1208"/>
-                      </a:solidFill>
-                      <a:prstDash val="solid"/>
-                      <a:round/>
-                      <a:headEnd type="none" w="med" len="med"/>
-                      <a:tailEnd type="none" w="med" len="med"/>
-                    </a:lnL>
-                    <a:lnR w="19050" cap="flat" cmpd="sng" algn="ctr">
-                      <a:solidFill>
-                        <a:srgbClr val="1E1208"/>
-                      </a:solidFill>
-                      <a:prstDash val="solid"/>
-                      <a:round/>
-                      <a:headEnd type="none" w="med" len="med"/>
-                      <a:tailEnd type="none" w="med" len="med"/>
-                    </a:lnR>
-                    <a:lnT w="19050" cap="flat" cmpd="sng" algn="ctr">
-                      <a:solidFill>
-                        <a:srgbClr val="1E1208"/>
-                      </a:solidFill>
-                      <a:prstDash val="solid"/>
-                      <a:round/>
-                      <a:headEnd type="none" w="med" len="med"/>
-                      <a:tailEnd type="none" w="med" len="med"/>
-                    </a:lnT>
-                    <a:lnB w="19050" cap="flat" cmpd="sng" algn="ctr">
-                      <a:solidFill>
-                        <a:srgbClr val="1E1208"/>
-                      </a:solidFill>
-                      <a:prstDash val="solid"/>
-                      <a:round/>
-                      <a:headEnd type="none" w="med" len="med"/>
-                      <a:tailEnd type="none" w="med" len="med"/>
-                    </a:lnB>
-                    <a:solidFill>
-                      <a:srgbClr val="FBE9D6"/>
-                    </a:solidFill>
-                  </a:tcPr>
-                </a:tc>
-              </a:tr>
-              <a:tr h="685800">
-                <a:tc>
-                  <a:txBody>
-                    <a:bodyPr/>
-                    <a:lstStyle/>
-                    <a:p>
-                      <a:pPr indent="0" marL="0">
-                        <a:buNone/>
-                      </a:pPr>
-                      <a:r>
-                        <a:rPr lang="en-US" sz="1250" b="1" dirty="0">
-                          <a:solidFill>
-                            <a:srgbClr val="1E1208"/>
-                          </a:solidFill>
-                          <a:latin typeface="Arial" pitchFamily="34" charset="0"/>
-                          <a:ea typeface="Arial" pitchFamily="34" charset="-122"/>
-                          <a:cs typeface="Arial" pitchFamily="34" charset="-120"/>
-                        </a:rPr>
-                        <a:t>Marking</a:t>
-                      </a:r>
-                      <a:endParaRPr lang="en-US" sz="1250" dirty="0">
-                        <a:latin typeface="Arial" charset="0"/>
-                        <a:ea typeface="Arial" charset="0"/>
-                        <a:cs typeface="Arial" charset="0"/>
-                      </a:endParaRPr>
-                    </a:p>
-                  </a:txBody>
-                  <a:tcPr marL="91440" marR="91440" marT="54864" marB="54864" anchor="ctr">
-                    <a:lnL w="19050" cap="flat" cmpd="sng" algn="ctr">
-                      <a:solidFill>
-                        <a:srgbClr val="1E1208"/>
-                      </a:solidFill>
-                      <a:prstDash val="solid"/>
-                      <a:round/>
-                      <a:headEnd type="none" w="med" len="med"/>
-                      <a:tailEnd type="none" w="med" len="med"/>
-                    </a:lnL>
-                    <a:lnR w="19050" cap="flat" cmpd="sng" algn="ctr">
-                      <a:solidFill>
-                        <a:srgbClr val="1E1208"/>
-                      </a:solidFill>
-                      <a:prstDash val="solid"/>
-                      <a:round/>
-                      <a:headEnd type="none" w="med" len="med"/>
-                      <a:tailEnd type="none" w="med" len="med"/>
-                    </a:lnR>
-                    <a:lnT w="19050" cap="flat" cmpd="sng" algn="ctr">
-                      <a:solidFill>
-                        <a:srgbClr val="1E1208"/>
-                      </a:solidFill>
-                      <a:prstDash val="solid"/>
-                      <a:round/>
-                      <a:headEnd type="none" w="med" len="med"/>
-                      <a:tailEnd type="none" w="med" len="med"/>
-                    </a:lnT>
-                    <a:lnB w="19050" cap="flat" cmpd="sng" algn="ctr">
-                      <a:solidFill>
-                        <a:srgbClr val="1E1208"/>
-                      </a:solidFill>
-                      <a:prstDash val="solid"/>
-                      <a:round/>
-                      <a:headEnd type="none" w="med" len="med"/>
-                      <a:tailEnd type="none" w="med" len="med"/>
-                    </a:lnB>
-                    <a:solidFill>
-                      <a:srgbClr val="FFFFFF"/>
-                    </a:solidFill>
-                  </a:tcPr>
-                </a:tc>
-                <a:tc>
-                  <a:txBody>
-                    <a:bodyPr/>
-                    <a:lstStyle/>
-                    <a:p>
-                      <a:pPr indent="0" marL="0">
-                        <a:buNone/>
-                      </a:pPr>
-                      <a:r>
-                        <a:rPr lang="en-US" sz="1250" dirty="0">
-                          <a:solidFill>
-                            <a:srgbClr val="1E1208"/>
-                          </a:solidFill>
-                          <a:latin typeface="Arial" pitchFamily="34" charset="0"/>
-                          <a:ea typeface="Arial" pitchFamily="34" charset="-122"/>
-                          <a:cs typeface="Arial" pitchFamily="34" charset="-120"/>
-                        </a:rPr>
-                        <a:t>Objective questions auto-mark in all four. Google Classroom imports the grades from Forms.</a:t>
-                      </a:r>
-                      <a:endParaRPr lang="en-US" sz="1250" dirty="0">
-                        <a:latin typeface="Arial" charset="0"/>
-                        <a:ea typeface="Arial" charset="0"/>
-                        <a:cs typeface="Arial" charset="0"/>
-                      </a:endParaRPr>
-                    </a:p>
-                  </a:txBody>
-                  <a:tcPr marL="91440" marR="91440" marT="54864" marB="54864" anchor="ctr">
-                    <a:lnL w="19050" cap="flat" cmpd="sng" algn="ctr">
-                      <a:solidFill>
-                        <a:srgbClr val="1E1208"/>
-                      </a:solidFill>
-                      <a:prstDash val="solid"/>
-                      <a:round/>
-                      <a:headEnd type="none" w="med" len="med"/>
-                      <a:tailEnd type="none" w="med" len="med"/>
-                    </a:lnL>
-                    <a:lnR w="19050" cap="flat" cmpd="sng" algn="ctr">
-                      <a:solidFill>
-                        <a:srgbClr val="1E1208"/>
-                      </a:solidFill>
-                      <a:prstDash val="solid"/>
-                      <a:round/>
-                      <a:headEnd type="none" w="med" len="med"/>
-                      <a:tailEnd type="none" w="med" len="med"/>
-                    </a:lnR>
-                    <a:lnT w="19050" cap="flat" cmpd="sng" algn="ctr">
-                      <a:solidFill>
-                        <a:srgbClr val="1E1208"/>
-                      </a:solidFill>
-                      <a:prstDash val="solid"/>
-                      <a:round/>
-                      <a:headEnd type="none" w="med" len="med"/>
-                      <a:tailEnd type="none" w="med" len="med"/>
-                    </a:lnT>
-                    <a:lnB w="19050" cap="flat" cmpd="sng" algn="ctr">
-                      <a:solidFill>
-                        <a:srgbClr val="1E1208"/>
-                      </a:solidFill>
-                      <a:prstDash val="solid"/>
-                      <a:round/>
-                      <a:headEnd type="none" w="med" len="med"/>
-                      <a:tailEnd type="none" w="med" len="med"/>
-                    </a:lnB>
-                    <a:solidFill>
-                      <a:srgbClr val="FFFFFF"/>
-                    </a:solidFill>
-                  </a:tcPr>
-                </a:tc>
-                <a:tc>
-                  <a:txBody>
-                    <a:bodyPr/>
-                    <a:lstStyle/>
-                    <a:p>
-                      <a:pPr indent="0" marL="0">
-                        <a:buNone/>
-                      </a:pPr>
-                      <a:r>
-                        <a:rPr lang="en-US" sz="1250" b="1" dirty="0">
-                          <a:solidFill>
-                            <a:srgbClr val="1E1208"/>
-                          </a:solidFill>
-                          <a:latin typeface="Arial" pitchFamily="34" charset="0"/>
-                          <a:ea typeface="Arial" pitchFamily="34" charset="-122"/>
-                          <a:cs typeface="Arial" pitchFamily="34" charset="-120"/>
-                        </a:rPr>
-                        <a:t>Auto-marks, plus essay marking points and AI-suggested marks a teacher always edits</a:t>
-                      </a:r>
-                      <a:endParaRPr lang="en-US" sz="1250" dirty="0">
-                        <a:latin typeface="Arial" charset="0"/>
-                        <a:ea typeface="Arial" charset="0"/>
-                        <a:cs typeface="Arial" charset="0"/>
-                      </a:endParaRPr>
-                    </a:p>
-                  </a:txBody>
-                  <a:tcPr marL="91440" marR="91440" marT="54864" marB="54864" anchor="ctr">
-                    <a:lnL w="19050" cap="flat" cmpd="sng" algn="ctr">
-                      <a:solidFill>
-                        <a:srgbClr val="1E1208"/>
-                      </a:solidFill>
-                      <a:prstDash val="solid"/>
-                      <a:round/>
-                      <a:headEnd type="none" w="med" len="med"/>
-                      <a:tailEnd type="none" w="med" len="med"/>
-                    </a:lnL>
-                    <a:lnR w="19050" cap="flat" cmpd="sng" algn="ctr">
-                      <a:solidFill>
-                        <a:srgbClr val="1E1208"/>
-                      </a:solidFill>
-                      <a:prstDash val="solid"/>
-                      <a:round/>
-                      <a:headEnd type="none" w="med" len="med"/>
-                      <a:tailEnd type="none" w="med" len="med"/>
-                    </a:lnR>
-                    <a:lnT w="19050" cap="flat" cmpd="sng" algn="ctr">
-                      <a:solidFill>
-                        <a:srgbClr val="1E1208"/>
-                      </a:solidFill>
-                      <a:prstDash val="solid"/>
-                      <a:round/>
-                      <a:headEnd type="none" w="med" len="med"/>
-                      <a:tailEnd type="none" w="med" len="med"/>
-                    </a:lnT>
-                    <a:lnB w="19050" cap="flat" cmpd="sng" algn="ctr">
-                      <a:solidFill>
-                        <a:srgbClr val="1E1208"/>
-                      </a:solidFill>
-                      <a:prstDash val="solid"/>
-                      <a:round/>
-                      <a:headEnd type="none" w="med" len="med"/>
-                      <a:tailEnd type="none" w="med" len="med"/>
-                    </a:lnB>
-                    <a:solidFill>
-                      <a:srgbClr val="FBE9D6"/>
-                    </a:solidFill>
-                  </a:tcPr>
-                </a:tc>
-              </a:tr>
-              <a:tr h="640080">
-                <a:tc>
-                  <a:txBody>
-                    <a:bodyPr/>
-                    <a:lstStyle/>
-                    <a:p>
-                      <a:pPr indent="0" marL="0">
-                        <a:buNone/>
-                      </a:pPr>
-                      <a:r>
-                        <a:rPr lang="en-US" sz="1250" b="1" dirty="0">
-                          <a:solidFill>
-                            <a:srgbClr val="1E1208"/>
-                          </a:solidFill>
-                          <a:latin typeface="Arial" pitchFamily="34" charset="0"/>
-                          <a:ea typeface="Arial" pitchFamily="34" charset="-122"/>
-                          <a:cs typeface="Arial" pitchFamily="34" charset="-120"/>
-                        </a:rPr>
-                        <a:t>Question-level insight</a:t>
-                      </a:r>
-                      <a:endParaRPr lang="en-US" sz="1250" dirty="0">
-                        <a:latin typeface="Arial" charset="0"/>
-                        <a:ea typeface="Arial" charset="0"/>
-                        <a:cs typeface="Arial" charset="0"/>
-                      </a:endParaRPr>
-                    </a:p>
-                  </a:txBody>
-                  <a:tcPr marL="91440" marR="91440" marT="54864" marB="54864" anchor="ctr">
-                    <a:lnL w="19050" cap="flat" cmpd="sng" algn="ctr">
-                      <a:solidFill>
-                        <a:srgbClr val="1E1208"/>
-                      </a:solidFill>
-                      <a:prstDash val="solid"/>
-                      <a:round/>
-                      <a:headEnd type="none" w="med" len="med"/>
-                      <a:tailEnd type="none" w="med" len="med"/>
-                    </a:lnL>
-                    <a:lnR w="19050" cap="flat" cmpd="sng" algn="ctr">
-                      <a:solidFill>
-                        <a:srgbClr val="1E1208"/>
-                      </a:solidFill>
-                      <a:prstDash val="solid"/>
-                      <a:round/>
-                      <a:headEnd type="none" w="med" len="med"/>
-                      <a:tailEnd type="none" w="med" len="med"/>
-                    </a:lnR>
-                    <a:lnT w="19050" cap="flat" cmpd="sng" algn="ctr">
-                      <a:solidFill>
-                        <a:srgbClr val="1E1208"/>
-                      </a:solidFill>
-                      <a:prstDash val="solid"/>
-                      <a:round/>
-                      <a:headEnd type="none" w="med" len="med"/>
-                      <a:tailEnd type="none" w="med" len="med"/>
-                    </a:lnT>
-                    <a:lnB w="19050" cap="flat" cmpd="sng" algn="ctr">
-                      <a:solidFill>
-                        <a:srgbClr val="1E1208"/>
-                      </a:solidFill>
-                      <a:prstDash val="solid"/>
-                      <a:round/>
-                      <a:headEnd type="none" w="med" len="med"/>
-                      <a:tailEnd type="none" w="med" len="med"/>
-                    </a:lnB>
-                    <a:solidFill>
-                      <a:srgbClr val="FFFFFF"/>
-                    </a:solidFill>
-                  </a:tcPr>
-                </a:tc>
-                <a:tc>
-                  <a:txBody>
-                    <a:bodyPr/>
-                    <a:lstStyle/>
-                    <a:p>
-                      <a:pPr indent="0" marL="0">
-                        <a:buNone/>
-                      </a:pPr>
-                      <a:r>
-                        <a:rPr lang="en-US" sz="1250" dirty="0">
-                          <a:solidFill>
-                            <a:srgbClr val="1E1208"/>
-                          </a:solidFill>
-                          <a:latin typeface="Arial" pitchFamily="34" charset="0"/>
-                          <a:ea typeface="Arial" pitchFamily="34" charset="-122"/>
-                          <a:cs typeface="Arial" pitchFamily="34" charset="-120"/>
-                        </a:rPr>
-                        <a:t>Moodle and Canvas report on each question, quiz by quiz.</a:t>
-                      </a:r>
-                      <a:endParaRPr lang="en-US" sz="1250" dirty="0">
-                        <a:latin typeface="Arial" charset="0"/>
-                        <a:ea typeface="Arial" charset="0"/>
-                        <a:cs typeface="Arial" charset="0"/>
-                      </a:endParaRPr>
-                    </a:p>
-                  </a:txBody>
-                  <a:tcPr marL="91440" marR="91440" marT="54864" marB="54864" anchor="ctr">
-                    <a:lnL w="19050" cap="flat" cmpd="sng" algn="ctr">
-                      <a:solidFill>
-                        <a:srgbClr val="1E1208"/>
-                      </a:solidFill>
-                      <a:prstDash val="solid"/>
-                      <a:round/>
-                      <a:headEnd type="none" w="med" len="med"/>
-                      <a:tailEnd type="none" w="med" len="med"/>
-                    </a:lnL>
-                    <a:lnR w="19050" cap="flat" cmpd="sng" algn="ctr">
-                      <a:solidFill>
-                        <a:srgbClr val="1E1208"/>
-                      </a:solidFill>
-                      <a:prstDash val="solid"/>
-                      <a:round/>
-                      <a:headEnd type="none" w="med" len="med"/>
-                      <a:tailEnd type="none" w="med" len="med"/>
-                    </a:lnR>
-                    <a:lnT w="19050" cap="flat" cmpd="sng" algn="ctr">
-                      <a:solidFill>
-                        <a:srgbClr val="1E1208"/>
-                      </a:solidFill>
-                      <a:prstDash val="solid"/>
-                      <a:round/>
-                      <a:headEnd type="none" w="med" len="med"/>
-                      <a:tailEnd type="none" w="med" len="med"/>
-                    </a:lnT>
-                    <a:lnB w="19050" cap="flat" cmpd="sng" algn="ctr">
-                      <a:solidFill>
-                        <a:srgbClr val="1E1208"/>
-                      </a:solidFill>
-                      <a:prstDash val="solid"/>
-                      <a:round/>
-                      <a:headEnd type="none" w="med" len="med"/>
-                      <a:tailEnd type="none" w="med" len="med"/>
-                    </a:lnB>
-                    <a:solidFill>
-                      <a:srgbClr val="FFFFFF"/>
-                    </a:solidFill>
-                  </a:tcPr>
-                </a:tc>
-                <a:tc>
-                  <a:txBody>
-                    <a:bodyPr/>
-                    <a:lstStyle/>
-                    <a:p>
-                      <a:pPr indent="0" marL="0">
-                        <a:buNone/>
-                      </a:pPr>
-                      <a:r>
-                        <a:rPr lang="en-US" sz="1250" b="1" dirty="0">
-                          <a:solidFill>
-                            <a:srgbClr val="1E1208"/>
-                          </a:solidFill>
-                          <a:latin typeface="Arial" pitchFamily="34" charset="0"/>
-                          <a:ea typeface="Arial" pitchFamily="34" charset="-122"/>
-                          <a:cs typeface="Arial" pitchFamily="34" charset="-120"/>
-                        </a:rPr>
-                        <a:t>Missed questions, the common wrong answer, who needs support, and results by topic</a:t>
-                      </a:r>
-                      <a:endParaRPr lang="en-US" sz="1250" dirty="0">
-                        <a:latin typeface="Arial" charset="0"/>
-                        <a:ea typeface="Arial" charset="0"/>
-                        <a:cs typeface="Arial" charset="0"/>
-                      </a:endParaRPr>
-                    </a:p>
-                  </a:txBody>
-                  <a:tcPr marL="91440" marR="91440" marT="54864" marB="54864" anchor="ctr">
-                    <a:lnL w="19050" cap="flat" cmpd="sng" algn="ctr">
-                      <a:solidFill>
-                        <a:srgbClr val="1E1208"/>
-                      </a:solidFill>
-                      <a:prstDash val="solid"/>
-                      <a:round/>
-                      <a:headEnd type="none" w="med" len="med"/>
-                      <a:tailEnd type="none" w="med" len="med"/>
-                    </a:lnL>
-                    <a:lnR w="19050" cap="flat" cmpd="sng" algn="ctr">
-                      <a:solidFill>
-                        <a:srgbClr val="1E1208"/>
-                      </a:solidFill>
-                      <a:prstDash val="solid"/>
-                      <a:round/>
-                      <a:headEnd type="none" w="med" len="med"/>
-                      <a:tailEnd type="none" w="med" len="med"/>
-                    </a:lnR>
-                    <a:lnT w="19050" cap="flat" cmpd="sng" algn="ctr">
-                      <a:solidFill>
-                        <a:srgbClr val="1E1208"/>
-                      </a:solidFill>
-                      <a:prstDash val="solid"/>
-                      <a:round/>
-                      <a:headEnd type="none" w="med" len="med"/>
-                      <a:tailEnd type="none" w="med" len="med"/>
-                    </a:lnT>
-                    <a:lnB w="19050" cap="flat" cmpd="sng" algn="ctr">
-                      <a:solidFill>
-                        <a:srgbClr val="1E1208"/>
-                      </a:solidFill>
-                      <a:prstDash val="solid"/>
-                      <a:round/>
-                      <a:headEnd type="none" w="med" len="med"/>
-                      <a:tailEnd type="none" w="med" len="med"/>
-                    </a:lnB>
-                    <a:solidFill>
-                      <a:srgbClr val="FBE9D6"/>
-                    </a:solidFill>
-                  </a:tcPr>
-                </a:tc>
-              </a:tr>
-              <a:tr h="566928">
-                <a:tc>
-                  <a:txBody>
-                    <a:bodyPr/>
-                    <a:lstStyle/>
-                    <a:p>
-                      <a:pPr indent="0" marL="0">
-                        <a:buNone/>
-                      </a:pPr>
-                      <a:r>
-                        <a:rPr lang="en-US" sz="1250" b="1" dirty="0">
-                          <a:solidFill>
-                            <a:srgbClr val="1E1208"/>
-                          </a:solidFill>
-                          <a:latin typeface="Arial" pitchFamily="34" charset="0"/>
-                          <a:ea typeface="Arial" pitchFamily="34" charset="-122"/>
-                          <a:cs typeface="Arial" pitchFamily="34" charset="-120"/>
-                        </a:rPr>
-                        <a:t>Practice games</a:t>
-                      </a:r>
-                      <a:endParaRPr lang="en-US" sz="1250" dirty="0">
-                        <a:latin typeface="Arial" charset="0"/>
-                        <a:ea typeface="Arial" charset="0"/>
-                        <a:cs typeface="Arial" charset="0"/>
-                      </a:endParaRPr>
-                    </a:p>
-                  </a:txBody>
-                  <a:tcPr marL="91440" marR="91440" marT="54864" marB="54864" anchor="ctr">
-                    <a:lnL w="19050" cap="flat" cmpd="sng" algn="ctr">
-                      <a:solidFill>
-                        <a:srgbClr val="1E1208"/>
-                      </a:solidFill>
-                      <a:prstDash val="solid"/>
-                      <a:round/>
-                      <a:headEnd type="none" w="med" len="med"/>
-                      <a:tailEnd type="none" w="med" len="med"/>
-                    </a:lnL>
-                    <a:lnR w="19050" cap="flat" cmpd="sng" algn="ctr">
-                      <a:solidFill>
-                        <a:srgbClr val="1E1208"/>
-                      </a:solidFill>
-                      <a:prstDash val="solid"/>
-                      <a:round/>
-                      <a:headEnd type="none" w="med" len="med"/>
-                      <a:tailEnd type="none" w="med" len="med"/>
-                    </a:lnR>
-                    <a:lnT w="19050" cap="flat" cmpd="sng" algn="ctr">
-                      <a:solidFill>
-                        <a:srgbClr val="1E1208"/>
-                      </a:solidFill>
-                      <a:prstDash val="solid"/>
-                      <a:round/>
-                      <a:headEnd type="none" w="med" len="med"/>
-                      <a:tailEnd type="none" w="med" len="med"/>
-                    </a:lnT>
-                    <a:lnB w="19050" cap="flat" cmpd="sng" algn="ctr">
-                      <a:solidFill>
-                        <a:srgbClr val="1E1208"/>
-                      </a:solidFill>
-                      <a:prstDash val="solid"/>
-                      <a:round/>
-                      <a:headEnd type="none" w="med" len="med"/>
-                      <a:tailEnd type="none" w="med" len="med"/>
-                    </a:lnB>
-                    <a:solidFill>
-                      <a:srgbClr val="FFFFFF"/>
-                    </a:solidFill>
-                  </a:tcPr>
-                </a:tc>
-                <a:tc>
-                  <a:txBody>
-                    <a:bodyPr/>
-                    <a:lstStyle/>
-                    <a:p>
-                      <a:pPr indent="0" marL="0">
-                        <a:buNone/>
-                      </a:pPr>
-                      <a:r>
-                        <a:rPr lang="en-US" sz="1250" dirty="0">
-                          <a:solidFill>
-                            <a:srgbClr val="1E1208"/>
-                          </a:solidFill>
-                          <a:latin typeface="Arial" pitchFamily="34" charset="0"/>
-                          <a:ea typeface="Arial" pitchFamily="34" charset="-122"/>
-                          <a:cs typeface="Arial" pitchFamily="34" charset="-120"/>
-                        </a:rPr>
-                        <a:t>Kahoot and Quizizz are built for live games and practice.</a:t>
-                      </a:r>
-                      <a:endParaRPr lang="en-US" sz="1250" dirty="0">
-                        <a:latin typeface="Arial" charset="0"/>
-                        <a:ea typeface="Arial" charset="0"/>
-                        <a:cs typeface="Arial" charset="0"/>
-                      </a:endParaRPr>
-                    </a:p>
-                  </a:txBody>
-                  <a:tcPr marL="91440" marR="91440" marT="54864" marB="54864" anchor="ctr">
-                    <a:lnL w="19050" cap="flat" cmpd="sng" algn="ctr">
-                      <a:solidFill>
-                        <a:srgbClr val="1E1208"/>
-                      </a:solidFill>
-                      <a:prstDash val="solid"/>
-                      <a:round/>
-                      <a:headEnd type="none" w="med" len="med"/>
-                      <a:tailEnd type="none" w="med" len="med"/>
-                    </a:lnL>
-                    <a:lnR w="19050" cap="flat" cmpd="sng" algn="ctr">
-                      <a:solidFill>
-                        <a:srgbClr val="1E1208"/>
-                      </a:solidFill>
-                      <a:prstDash val="solid"/>
-                      <a:round/>
-                      <a:headEnd type="none" w="med" len="med"/>
-                      <a:tailEnd type="none" w="med" len="med"/>
-                    </a:lnR>
-                    <a:lnT w="19050" cap="flat" cmpd="sng" algn="ctr">
-                      <a:solidFill>
-                        <a:srgbClr val="1E1208"/>
-                      </a:solidFill>
-                      <a:prstDash val="solid"/>
-                      <a:round/>
-                      <a:headEnd type="none" w="med" len="med"/>
-                      <a:tailEnd type="none" w="med" len="med"/>
-                    </a:lnT>
-                    <a:lnB w="19050" cap="flat" cmpd="sng" algn="ctr">
-                      <a:solidFill>
-                        <a:srgbClr val="1E1208"/>
-                      </a:solidFill>
-                      <a:prstDash val="solid"/>
-                      <a:round/>
-                      <a:headEnd type="none" w="med" len="med"/>
-                      <a:tailEnd type="none" w="med" len="med"/>
-                    </a:lnB>
-                    <a:solidFill>
-                      <a:srgbClr val="FFFFFF"/>
-                    </a:solidFill>
-                  </a:tcPr>
-                </a:tc>
-                <a:tc>
-                  <a:txBody>
-                    <a:bodyPr/>
-                    <a:lstStyle/>
-                    <a:p>
-                      <a:pPr indent="0" marL="0">
-                        <a:buNone/>
-                      </a:pPr>
-                      <a:r>
-                        <a:rPr lang="en-US" sz="1250" b="1" dirty="0">
-                          <a:solidFill>
-                            <a:srgbClr val="1E1208"/>
-                          </a:solidFill>
-                          <a:latin typeface="Arial" pitchFamily="34" charset="0"/>
-                          <a:ea typeface="Arial" pitchFamily="34" charset="-122"/>
-                          <a:cs typeface="Arial" pitchFamily="34" charset="-120"/>
-                        </a:rPr>
-                        <a:t>Smart Play, coming soon, shares the school's topic list</a:t>
-                      </a:r>
-                      <a:endParaRPr lang="en-US" sz="1250" dirty="0">
-                        <a:latin typeface="Arial" charset="0"/>
-                        <a:ea typeface="Arial" charset="0"/>
-                        <a:cs typeface="Arial" charset="0"/>
-                      </a:endParaRPr>
-                    </a:p>
-                  </a:txBody>
-                  <a:tcPr marL="91440" marR="91440" marT="54864" marB="54864" anchor="ctr">
-                    <a:lnL w="19050" cap="flat" cmpd="sng" algn="ctr">
-                      <a:solidFill>
-                        <a:srgbClr val="1E1208"/>
-                      </a:solidFill>
-                      <a:prstDash val="solid"/>
-                      <a:round/>
-                      <a:headEnd type="none" w="med" len="med"/>
-                      <a:tailEnd type="none" w="med" len="med"/>
-                    </a:lnL>
-                    <a:lnR w="19050" cap="flat" cmpd="sng" algn="ctr">
-                      <a:solidFill>
-                        <a:srgbClr val="1E1208"/>
-                      </a:solidFill>
-                      <a:prstDash val="solid"/>
-                      <a:round/>
-                      <a:headEnd type="none" w="med" len="med"/>
-                      <a:tailEnd type="none" w="med" len="med"/>
-                    </a:lnR>
-                    <a:lnT w="19050" cap="flat" cmpd="sng" algn="ctr">
-                      <a:solidFill>
-                        <a:srgbClr val="1E1208"/>
-                      </a:solidFill>
-                      <a:prstDash val="solid"/>
-                      <a:round/>
-                      <a:headEnd type="none" w="med" len="med"/>
-                      <a:tailEnd type="none" w="med" len="med"/>
-                    </a:lnT>
-                    <a:lnB w="19050" cap="flat" cmpd="sng" algn="ctr">
-                      <a:solidFill>
-                        <a:srgbClr val="1E1208"/>
-                      </a:solidFill>
-                      <a:prstDash val="solid"/>
-                      <a:round/>
-                      <a:headEnd type="none" w="med" len="med"/>
-                      <a:tailEnd type="none" w="med" len="med"/>
-                    </a:lnB>
-                    <a:solidFill>
-                      <a:srgbClr val="FBE9D6"/>
-                    </a:solidFill>
-                  </a:tcPr>
-                </a:tc>
-              </a:tr>
-              <a:tr h="566928">
-                <a:tc>
-                  <a:txBody>
-                    <a:bodyPr/>
-                    <a:lstStyle/>
-                    <a:p>
-                      <a:pPr indent="0" marL="0">
-                        <a:buNone/>
-                      </a:pPr>
-                      <a:r>
-                        <a:rPr lang="en-US" sz="1250" b="1" dirty="0">
-                          <a:solidFill>
-                            <a:srgbClr val="1E1208"/>
-                          </a:solidFill>
-                          <a:latin typeface="Arial" pitchFamily="34" charset="0"/>
-                          <a:ea typeface="Arial" pitchFamily="34" charset="-122"/>
-                          <a:cs typeface="Arial" pitchFamily="34" charset="-120"/>
-                        </a:rPr>
-                        <a:t>One system</a:t>
-                      </a:r>
-                      <a:endParaRPr lang="en-US" sz="1250" dirty="0">
-                        <a:latin typeface="Arial" charset="0"/>
-                        <a:ea typeface="Arial" charset="0"/>
-                        <a:cs typeface="Arial" charset="0"/>
-                      </a:endParaRPr>
-                    </a:p>
-                  </a:txBody>
-                  <a:tcPr marL="91440" marR="91440" marT="54864" marB="54864" anchor="ctr">
-                    <a:lnL w="19050" cap="flat" cmpd="sng" algn="ctr">
-                      <a:solidFill>
-                        <a:srgbClr val="1E1208"/>
-                      </a:solidFill>
-                      <a:prstDash val="solid"/>
-                      <a:round/>
-                      <a:headEnd type="none" w="med" len="med"/>
-                      <a:tailEnd type="none" w="med" len="med"/>
-                    </a:lnL>
-                    <a:lnR w="19050" cap="flat" cmpd="sng" algn="ctr">
-                      <a:solidFill>
-                        <a:srgbClr val="1E1208"/>
-                      </a:solidFill>
-                      <a:prstDash val="solid"/>
-                      <a:round/>
-                      <a:headEnd type="none" w="med" len="med"/>
-                      <a:tailEnd type="none" w="med" len="med"/>
-                    </a:lnR>
-                    <a:lnT w="19050" cap="flat" cmpd="sng" algn="ctr">
-                      <a:solidFill>
-                        <a:srgbClr val="1E1208"/>
-                      </a:solidFill>
-                      <a:prstDash val="solid"/>
-                      <a:round/>
-                      <a:headEnd type="none" w="med" len="med"/>
-                      <a:tailEnd type="none" w="med" len="med"/>
-                    </a:lnT>
-                    <a:lnB w="19050" cap="flat" cmpd="sng" algn="ctr">
-                      <a:solidFill>
-                        <a:srgbClr val="1E1208"/>
-                      </a:solidFill>
-                      <a:prstDash val="solid"/>
-                      <a:round/>
-                      <a:headEnd type="none" w="med" len="med"/>
-                      <a:tailEnd type="none" w="med" len="med"/>
-                    </a:lnB>
-                    <a:solidFill>
-                      <a:srgbClr val="FFFFFF"/>
-                    </a:solidFill>
-                  </a:tcPr>
-                </a:tc>
-                <a:tc>
-                  <a:txBody>
-                    <a:bodyPr/>
-                    <a:lstStyle/>
-                    <a:p>
-                      <a:pPr indent="0" marL="0">
-                        <a:buNone/>
-                      </a:pPr>
-                      <a:r>
-                        <a:rPr lang="en-US" sz="1250" dirty="0">
-                          <a:solidFill>
-                            <a:srgbClr val="1E1208"/>
-                          </a:solidFill>
-                          <a:latin typeface="Arial" pitchFamily="34" charset="0"/>
-                          <a:ea typeface="Arial" pitchFamily="34" charset="-122"/>
-                          <a:cs typeface="Arial" pitchFamily="34" charset="-120"/>
-                        </a:rPr>
-                        <a:t>Schools often combine several of these.</a:t>
-                      </a:r>
-                      <a:endParaRPr lang="en-US" sz="1250" dirty="0">
-                        <a:latin typeface="Arial" charset="0"/>
-                        <a:ea typeface="Arial" charset="0"/>
-                        <a:cs typeface="Arial" charset="0"/>
-                      </a:endParaRPr>
-                    </a:p>
-                  </a:txBody>
-                  <a:tcPr marL="91440" marR="91440" marT="54864" marB="54864" anchor="ctr">
-                    <a:lnL w="19050" cap="flat" cmpd="sng" algn="ctr">
-                      <a:solidFill>
-                        <a:srgbClr val="1E1208"/>
-                      </a:solidFill>
-                      <a:prstDash val="solid"/>
-                      <a:round/>
-                      <a:headEnd type="none" w="med" len="med"/>
-                      <a:tailEnd type="none" w="med" len="med"/>
-                    </a:lnL>
-                    <a:lnR w="19050" cap="flat" cmpd="sng" algn="ctr">
-                      <a:solidFill>
-                        <a:srgbClr val="1E1208"/>
-                      </a:solidFill>
-                      <a:prstDash val="solid"/>
-                      <a:round/>
-                      <a:headEnd type="none" w="med" len="med"/>
-                      <a:tailEnd type="none" w="med" len="med"/>
-                    </a:lnR>
-                    <a:lnT w="19050" cap="flat" cmpd="sng" algn="ctr">
-                      <a:solidFill>
-                        <a:srgbClr val="1E1208"/>
-                      </a:solidFill>
-                      <a:prstDash val="solid"/>
-                      <a:round/>
-                      <a:headEnd type="none" w="med" len="med"/>
-                      <a:tailEnd type="none" w="med" len="med"/>
-                    </a:lnT>
-                    <a:lnB w="19050" cap="flat" cmpd="sng" algn="ctr">
-                      <a:solidFill>
-                        <a:srgbClr val="1E1208"/>
-                      </a:solidFill>
-                      <a:prstDash val="solid"/>
-                      <a:round/>
-                      <a:headEnd type="none" w="med" len="med"/>
-                      <a:tailEnd type="none" w="med" len="med"/>
-                    </a:lnB>
-                    <a:solidFill>
-                      <a:srgbClr val="FFFFFF"/>
-                    </a:solidFill>
-                  </a:tcPr>
-                </a:tc>
-                <a:tc>
-                  <a:txBody>
-                    <a:bodyPr/>
-                    <a:lstStyle/>
-                    <a:p>
-                      <a:pPr indent="0" marL="0">
-                        <a:buNone/>
-                      </a:pPr>
-                      <a:r>
-                        <a:rPr lang="en-US" sz="1250" b="1" dirty="0">
-                          <a:solidFill>
-                            <a:srgbClr val="1E1208"/>
-                          </a:solidFill>
-                          <a:latin typeface="Arial" pitchFamily="34" charset="0"/>
-                          <a:ea typeface="Arial" pitchFamily="34" charset="-122"/>
-                          <a:cs typeface="Arial" pitchFamily="34" charset="-120"/>
-                        </a:rPr>
-                        <a:t>One login, one topic list, plus attendance, timetable and cover</a:t>
-                      </a:r>
-                      <a:endParaRPr lang="en-US" sz="1250" dirty="0">
-                        <a:latin typeface="Arial" charset="0"/>
-                        <a:ea typeface="Arial" charset="0"/>
-                        <a:cs typeface="Arial" charset="0"/>
-                      </a:endParaRPr>
-                    </a:p>
-                  </a:txBody>
-                  <a:tcPr marL="91440" marR="91440" marT="54864" marB="54864" anchor="ctr">
-                    <a:lnL w="19050" cap="flat" cmpd="sng" algn="ctr">
-                      <a:solidFill>
-                        <a:srgbClr val="1E1208"/>
-                      </a:solidFill>
-                      <a:prstDash val="solid"/>
-                      <a:round/>
-                      <a:headEnd type="none" w="med" len="med"/>
-                      <a:tailEnd type="none" w="med" len="med"/>
-                    </a:lnL>
-                    <a:lnR w="19050" cap="flat" cmpd="sng" algn="ctr">
-                      <a:solidFill>
-                        <a:srgbClr val="1E1208"/>
-                      </a:solidFill>
-                      <a:prstDash val="solid"/>
-                      <a:round/>
-                      <a:headEnd type="none" w="med" len="med"/>
-                      <a:tailEnd type="none" w="med" len="med"/>
-                    </a:lnR>
-                    <a:lnT w="19050" cap="flat" cmpd="sng" algn="ctr">
-                      <a:solidFill>
-                        <a:srgbClr val="1E1208"/>
-                      </a:solidFill>
-                      <a:prstDash val="solid"/>
-                      <a:round/>
-                      <a:headEnd type="none" w="med" len="med"/>
-                      <a:tailEnd type="none" w="med" len="med"/>
-                    </a:lnT>
-                    <a:lnB w="19050" cap="flat" cmpd="sng" algn="ctr">
-                      <a:solidFill>
-                        <a:srgbClr val="1E1208"/>
-                      </a:solidFill>
-                      <a:prstDash val="solid"/>
-                      <a:round/>
-                      <a:headEnd type="none" w="med" len="med"/>
-                      <a:tailEnd type="none" w="med" len="med"/>
-                    </a:lnB>
-                    <a:solidFill>
-                      <a:srgbClr val="FBE9D6"/>
-                    </a:solidFill>
-                  </a:tcPr>
-                </a:tc>
-              </a:tr>
-            </a:tbl>
-          </a:graphicData>
-        </a:graphic>
-      </p:graphicFrame>
-      <p:sp>
-        <p:nvSpPr>
-          <p:cNvPr id="16" name="Shape 12"/>
-          <p:cNvSpPr/>
-          <p:nvPr/>
-        </p:nvSpPr>
-        <p:spPr>
-          <a:xfrm>
-            <a:off x="1417320" y="5852160"/>
-            <a:ext cx="9509760" cy="502920"/>
-          </a:xfrm>
-          <a:prstGeom prst="rect">
-            <a:avLst/>
-          </a:prstGeom>
-          <a:solidFill>
-            <a:srgbClr val="1E1208"/>
-          </a:solidFill>
-          <a:ln/>
-        </p:spPr>
-      </p:sp>
-      <p:sp>
-        <p:nvSpPr>
-          <p:cNvPr id="17" name="Text 13"/>
-          <p:cNvSpPr/>
-          <p:nvPr/>
-        </p:nvSpPr>
-        <p:spPr>
-          <a:xfrm>
-            <a:off x="1600200" y="5852160"/>
-            <a:ext cx="9144000" cy="502920"/>
-          </a:xfrm>
-          <a:prstGeom prst="rect">
-            <a:avLst/>
-          </a:prstGeom>
-          <a:noFill/>
-          <a:ln/>
-        </p:spPr>
-        <p:txBody>
-          <a:bodyPr wrap="square" lIns="0" tIns="0" rIns="0" bIns="0" rtlCol="0" anchor="ctr"/>
+      <p:sp>
+        <p:nvSpPr>
+          <p:cNvPr id="15" name="Text 12"/>
+          <p:cNvSpPr/>
+          <p:nvPr/>
+        </p:nvSpPr>
+        <p:spPr>
+          <a:xfrm>
+            <a:off x="1417320" y="2011680"/>
+            <a:ext cx="9509760" cy="457200"/>
+          </a:xfrm>
+          <a:prstGeom prst="rect">
+            <a:avLst/>
+          </a:prstGeom>
+          <a:noFill/>
+          <a:ln/>
+        </p:spPr>
+        <p:txBody>
+          <a:bodyPr wrap="square" lIns="0" tIns="0" rIns="0" bIns="0" rtlCol="0" anchor="t"/>
           <a:lstStyle/>
           <a:p>
             <a:pPr algn="l" indent="0" marL="0">
@@ -27857,30 +26660,30 @@
               <a:buNone/>
             </a:pPr>
             <a:r>
-              <a:rPr lang="en-US" sz="1250" b="1" dirty="0">
-                <a:solidFill>
-                  <a:srgbClr val="FFFFFF"/>
+              <a:rPr lang="en-US" sz="2200" b="1" dirty="0">
+                <a:solidFill>
+                  <a:srgbClr val="1E1208"/>
                 </a:solidFill>
                 <a:latin typeface="Arial" pitchFamily="34" charset="0"/>
                 <a:ea typeface="Arial" pitchFamily="34" charset="-122"/>
                 <a:cs typeface="Arial" pitchFamily="34" charset="-120"/>
               </a:rPr>
-              <a:t>The question is not "can another tool do one of these things?" It is "how many tools and handoffs does the school need?"</a:t>
-            </a:r>
-            <a:endParaRPr lang="en-US" sz="1250" dirty="0"/>
-          </a:p>
-        </p:txBody>
-      </p:sp>
-      <p:sp>
-        <p:nvSpPr>
-          <p:cNvPr id="18" name="Text 14"/>
-          <p:cNvSpPr/>
-          <p:nvPr/>
-        </p:nvSpPr>
-        <p:spPr>
-          <a:xfrm>
-            <a:off x="1417320" y="6583680"/>
-            <a:ext cx="9509760" cy="274320"/>
+              <a:t>Other platforms are good at what they do.</a:t>
+            </a:r>
+            <a:endParaRPr lang="en-US" sz="2200" dirty="0"/>
+          </a:p>
+        </p:txBody>
+      </p:sp>
+      <p:sp>
+        <p:nvSpPr>
+          <p:cNvPr id="16" name="Text 13"/>
+          <p:cNvSpPr/>
+          <p:nvPr/>
+        </p:nvSpPr>
+        <p:spPr>
+          <a:xfrm>
+            <a:off x="1417320" y="2606040"/>
+            <a:ext cx="9326880" cy="914400"/>
           </a:xfrm>
           <a:prstGeom prst="rect">
             <a:avLst/>
@@ -27899,7 +26702,7 @@
               <a:buNone/>
             </a:pPr>
             <a:r>
-              <a:rPr lang="en-US" sz="900" dirty="0">
+              <a:rPr lang="en-US" sz="1800" dirty="0">
                 <a:solidFill>
                   <a:srgbClr val="555555"/>
                 </a:solidFill>
@@ -27907,9 +26710,312 @@
                 <a:ea typeface="Arial" pitchFamily="34" charset="-122"/>
                 <a:cs typeface="Arial" pitchFamily="34" charset="-120"/>
               </a:rPr>
-              <a:t>Google Classroom, Microsoft Teams, Moodle, Canvas, Kahoot and Quizizz: from public documentation, October 2026. Every school sets them up differently.</a:t>
-            </a:r>
-            <a:endParaRPr lang="en-US" sz="900" dirty="0"/>
+              <a:t>Smart Assess Ja is designed to connect assessment, learning and practice around the same students, classes and curriculum topics.</a:t>
+            </a:r>
+            <a:endParaRPr lang="en-US" sz="1800" dirty="0"/>
+          </a:p>
+        </p:txBody>
+      </p:sp>
+      <p:sp>
+        <p:nvSpPr>
+          <p:cNvPr id="17" name="Shape 14"/>
+          <p:cNvSpPr/>
+          <p:nvPr/>
+        </p:nvSpPr>
+        <p:spPr>
+          <a:xfrm>
+            <a:off x="1417320" y="3840480"/>
+            <a:ext cx="3017520" cy="1143000"/>
+          </a:xfrm>
+          <a:prstGeom prst="rect">
+            <a:avLst/>
+          </a:prstGeom>
+          <a:solidFill>
+            <a:srgbClr val="D4762A"/>
+          </a:solidFill>
+          <a:ln w="25400">
+            <a:solidFill>
+              <a:srgbClr val="1E1208"/>
+            </a:solidFill>
+            <a:prstDash val="solid"/>
+          </a:ln>
+        </p:spPr>
+      </p:sp>
+      <p:sp>
+        <p:nvSpPr>
+          <p:cNvPr id="18" name="Text 15"/>
+          <p:cNvSpPr/>
+          <p:nvPr/>
+        </p:nvSpPr>
+        <p:spPr>
+          <a:xfrm>
+            <a:off x="1417320" y="3840480"/>
+            <a:ext cx="3017520" cy="1143000"/>
+          </a:xfrm>
+          <a:prstGeom prst="rect">
+            <a:avLst/>
+          </a:prstGeom>
+          <a:noFill/>
+          <a:ln/>
+        </p:spPr>
+        <p:txBody>
+          <a:bodyPr wrap="square" lIns="0" tIns="0" rIns="0" bIns="0" rtlCol="0" anchor="ctr"/>
+          <a:lstStyle/>
+          <a:p>
+            <a:pPr algn="ctr" indent="0" marL="0">
+              <a:lnSpc>
+                <a:spcPct val="110000"/>
+              </a:lnSpc>
+              <a:buNone/>
+            </a:pPr>
+            <a:r>
+              <a:rPr lang="en-US" sz="3200" dirty="0">
+                <a:solidFill>
+                  <a:srgbClr val="1E1208"/>
+                </a:solidFill>
+                <a:latin typeface="Impact" pitchFamily="34" charset="0"/>
+                <a:ea typeface="Impact" pitchFamily="34" charset="-122"/>
+                <a:cs typeface="Impact" pitchFamily="34" charset="-120"/>
+              </a:rPr>
+              <a:t>ASSESS</a:t>
+            </a:r>
+            <a:endParaRPr lang="en-US" sz="3200" dirty="0"/>
+          </a:p>
+        </p:txBody>
+      </p:sp>
+      <p:sp>
+        <p:nvSpPr>
+          <p:cNvPr id="19" name="Shape 16"/>
+          <p:cNvSpPr/>
+          <p:nvPr/>
+        </p:nvSpPr>
+        <p:spPr>
+          <a:xfrm>
+            <a:off x="4462272" y="4251960"/>
+            <a:ext cx="173736" cy="320040"/>
+          </a:xfrm>
+          <a:prstGeom prst="rightArrow">
+            <a:avLst/>
+          </a:prstGeom>
+          <a:solidFill>
+            <a:srgbClr val="1E1208"/>
+          </a:solidFill>
+          <a:ln/>
+        </p:spPr>
+      </p:sp>
+      <p:sp>
+        <p:nvSpPr>
+          <p:cNvPr id="20" name="Shape 17"/>
+          <p:cNvSpPr/>
+          <p:nvPr/>
+        </p:nvSpPr>
+        <p:spPr>
+          <a:xfrm>
+            <a:off x="4663440" y="3840480"/>
+            <a:ext cx="3017520" cy="1143000"/>
+          </a:xfrm>
+          <a:prstGeom prst="rect">
+            <a:avLst/>
+          </a:prstGeom>
+          <a:solidFill>
+            <a:srgbClr val="1F8A84"/>
+          </a:solidFill>
+          <a:ln w="25400">
+            <a:solidFill>
+              <a:srgbClr val="1E1208"/>
+            </a:solidFill>
+            <a:prstDash val="solid"/>
+          </a:ln>
+        </p:spPr>
+      </p:sp>
+      <p:sp>
+        <p:nvSpPr>
+          <p:cNvPr id="21" name="Text 18"/>
+          <p:cNvSpPr/>
+          <p:nvPr/>
+        </p:nvSpPr>
+        <p:spPr>
+          <a:xfrm>
+            <a:off x="4663440" y="3840480"/>
+            <a:ext cx="3017520" cy="1143000"/>
+          </a:xfrm>
+          <a:prstGeom prst="rect">
+            <a:avLst/>
+          </a:prstGeom>
+          <a:noFill/>
+          <a:ln/>
+        </p:spPr>
+        <p:txBody>
+          <a:bodyPr wrap="square" lIns="0" tIns="0" rIns="0" bIns="0" rtlCol="0" anchor="ctr"/>
+          <a:lstStyle/>
+          <a:p>
+            <a:pPr algn="ctr" indent="0" marL="0">
+              <a:lnSpc>
+                <a:spcPct val="110000"/>
+              </a:lnSpc>
+              <a:buNone/>
+            </a:pPr>
+            <a:r>
+              <a:rPr lang="en-US" sz="3200" dirty="0">
+                <a:solidFill>
+                  <a:srgbClr val="FFFFFF"/>
+                </a:solidFill>
+                <a:latin typeface="Impact" pitchFamily="34" charset="0"/>
+                <a:ea typeface="Impact" pitchFamily="34" charset="-122"/>
+                <a:cs typeface="Impact" pitchFamily="34" charset="-120"/>
+              </a:rPr>
+              <a:t>LEARN</a:t>
+            </a:r>
+            <a:endParaRPr lang="en-US" sz="3200" dirty="0"/>
+          </a:p>
+        </p:txBody>
+      </p:sp>
+      <p:sp>
+        <p:nvSpPr>
+          <p:cNvPr id="22" name="Shape 19"/>
+          <p:cNvSpPr/>
+          <p:nvPr/>
+        </p:nvSpPr>
+        <p:spPr>
+          <a:xfrm>
+            <a:off x="7708392" y="4251960"/>
+            <a:ext cx="173736" cy="320040"/>
+          </a:xfrm>
+          <a:prstGeom prst="rightArrow">
+            <a:avLst/>
+          </a:prstGeom>
+          <a:solidFill>
+            <a:srgbClr val="1E1208"/>
+          </a:solidFill>
+          <a:ln/>
+        </p:spPr>
+      </p:sp>
+      <p:sp>
+        <p:nvSpPr>
+          <p:cNvPr id="23" name="Shape 20"/>
+          <p:cNvSpPr/>
+          <p:nvPr/>
+        </p:nvSpPr>
+        <p:spPr>
+          <a:xfrm>
+            <a:off x="7909560" y="3840480"/>
+            <a:ext cx="3017520" cy="1143000"/>
+          </a:xfrm>
+          <a:prstGeom prst="rect">
+            <a:avLst/>
+          </a:prstGeom>
+          <a:solidFill>
+            <a:srgbClr val="E3B51E"/>
+          </a:solidFill>
+          <a:ln w="25400">
+            <a:solidFill>
+              <a:srgbClr val="1E1208"/>
+            </a:solidFill>
+            <a:prstDash val="solid"/>
+          </a:ln>
+        </p:spPr>
+      </p:sp>
+      <p:sp>
+        <p:nvSpPr>
+          <p:cNvPr id="24" name="Text 21"/>
+          <p:cNvSpPr/>
+          <p:nvPr/>
+        </p:nvSpPr>
+        <p:spPr>
+          <a:xfrm>
+            <a:off x="7909560" y="3840480"/>
+            <a:ext cx="3017520" cy="1143000"/>
+          </a:xfrm>
+          <a:prstGeom prst="rect">
+            <a:avLst/>
+          </a:prstGeom>
+          <a:noFill/>
+          <a:ln/>
+        </p:spPr>
+        <p:txBody>
+          <a:bodyPr wrap="square" lIns="0" tIns="0" rIns="0" bIns="0" rtlCol="0" anchor="ctr"/>
+          <a:lstStyle/>
+          <a:p>
+            <a:pPr algn="ctr" indent="0" marL="0">
+              <a:lnSpc>
+                <a:spcPct val="110000"/>
+              </a:lnSpc>
+              <a:buNone/>
+            </a:pPr>
+            <a:r>
+              <a:rPr lang="en-US" sz="3200" dirty="0">
+                <a:solidFill>
+                  <a:srgbClr val="1E1208"/>
+                </a:solidFill>
+                <a:latin typeface="Impact" pitchFamily="34" charset="0"/>
+                <a:ea typeface="Impact" pitchFamily="34" charset="-122"/>
+                <a:cs typeface="Impact" pitchFamily="34" charset="-120"/>
+              </a:rPr>
+              <a:t>PRACTISE</a:t>
+            </a:r>
+            <a:endParaRPr lang="en-US" sz="3200" dirty="0"/>
+          </a:p>
+        </p:txBody>
+      </p:sp>
+      <p:sp>
+        <p:nvSpPr>
+          <p:cNvPr id="25" name="Shape 22"/>
+          <p:cNvSpPr/>
+          <p:nvPr/>
+        </p:nvSpPr>
+        <p:spPr>
+          <a:xfrm>
+            <a:off x="1417320" y="5440680"/>
+            <a:ext cx="9509760" cy="502920"/>
+          </a:xfrm>
+          <a:prstGeom prst="rect">
+            <a:avLst/>
+          </a:prstGeom>
+          <a:solidFill>
+            <a:srgbClr val="1E1208"/>
+          </a:solidFill>
+          <a:ln/>
+        </p:spPr>
+      </p:sp>
+      <p:sp>
+        <p:nvSpPr>
+          <p:cNvPr id="26" name="Text 23"/>
+          <p:cNvSpPr/>
+          <p:nvPr/>
+        </p:nvSpPr>
+        <p:spPr>
+          <a:xfrm>
+            <a:off x="1600200" y="5440680"/>
+            <a:ext cx="9144000" cy="502920"/>
+          </a:xfrm>
+          <a:prstGeom prst="rect">
+            <a:avLst/>
+          </a:prstGeom>
+          <a:noFill/>
+          <a:ln/>
+        </p:spPr>
+        <p:txBody>
+          <a:bodyPr wrap="square" lIns="0" tIns="0" rIns="0" bIns="0" rtlCol="0" anchor="ctr"/>
+          <a:lstStyle/>
+          <a:p>
+            <a:pPr algn="l" indent="0" marL="0">
+              <a:lnSpc>
+                <a:spcPct val="110000"/>
+              </a:lnSpc>
+              <a:buNone/>
+            </a:pPr>
+            <a:r>
+              <a:rPr lang="en-US" sz="1600" b="1" dirty="0">
+                <a:solidFill>
+                  <a:srgbClr val="FFFFFF"/>
+                </a:solidFill>
+                <a:latin typeface="Arial" pitchFamily="34" charset="0"/>
+                <a:ea typeface="Arial" pitchFamily="34" charset="-122"/>
+                <a:cs typeface="Arial" pitchFamily="34" charset="-120"/>
+              </a:rPr>
+              <a:t>The goal: reduce the work teachers do between those activities.</a:t>
+            </a:r>
+            <a:endParaRPr lang="en-US" sz="1600" dirty="0"/>
           </a:p>
         </p:txBody>
       </p:sp>
@@ -28305,7 +27411,7 @@
                 <a:ea typeface="Courier New" pitchFamily="34" charset="-122"/>
                 <a:cs typeface="Courier New" pitchFamily="34" charset="-120"/>
               </a:rPr>
-              <a:t>CLARITY</a:t>
+              <a:t>THE QUESTION TEACHERS MAY ASK</a:t>
             </a:r>
             <a:endParaRPr lang="en-US" sz="1150" dirty="0"/>
           </a:p>
@@ -28338,7 +27444,7 @@
               <a:buNone/>
             </a:pPr>
             <a:r>
-              <a:rPr lang="en-US" sz="5000" dirty="0">
+              <a:rPr lang="en-US" sz="4800" dirty="0">
                 <a:solidFill>
                   <a:srgbClr val="1E1208"/>
                 </a:solidFill>
@@ -28346,9 +27452,9 @@
                 <a:ea typeface="Impact" pitchFamily="34" charset="-122"/>
                 <a:cs typeface="Impact" pitchFamily="34" charset="-120"/>
               </a:rPr>
-              <a:t>WHAT SMART ASSESS IS NOT</a:t>
-            </a:r>
-            <a:endParaRPr lang="en-US" sz="5000" dirty="0"/>
+              <a:t>WHY NOT JUST USE GOOGLE CLASSROOM?</a:t>
+            </a:r>
+            <a:endParaRPr lang="en-US" sz="4800" dirty="0"/>
           </a:p>
         </p:txBody>
       </p:sp>
@@ -28360,14 +27466,14 @@
         </p:nvSpPr>
         <p:spPr>
           <a:xfrm>
-            <a:off x="1417320" y="1965960"/>
-            <a:ext cx="4663440" cy="1783080"/>
-          </a:xfrm>
-          <a:prstGeom prst="rect">
-            <a:avLst/>
-          </a:prstGeom>
-          <a:solidFill>
-            <a:srgbClr val="FBE9D6"/>
+            <a:off x="1417320" y="2011680"/>
+            <a:ext cx="4663440" cy="2468880"/>
+          </a:xfrm>
+          <a:prstGeom prst="rect">
+            <a:avLst/>
+          </a:prstGeom>
+          <a:solidFill>
+            <a:srgbClr val="F3E9DC"/>
           </a:solidFill>
           <a:ln w="25400">
             <a:solidFill>
@@ -28379,33 +27485,13 @@
       </p:sp>
       <p:sp>
         <p:nvSpPr>
-          <p:cNvPr id="16" name="Shape 13"/>
-          <p:cNvSpPr/>
-          <p:nvPr/>
-        </p:nvSpPr>
-        <p:spPr>
-          <a:xfrm>
-            <a:off x="1417320" y="1965960"/>
-            <a:ext cx="128016" cy="1783080"/>
-          </a:xfrm>
-          <a:prstGeom prst="rect">
-            <a:avLst/>
-          </a:prstGeom>
-          <a:solidFill>
-            <a:srgbClr val="D4762A"/>
-          </a:solidFill>
-          <a:ln/>
-        </p:spPr>
-      </p:sp>
-      <p:sp>
-        <p:nvSpPr>
-          <p:cNvPr id="17" name="Text 14"/>
-          <p:cNvSpPr/>
-          <p:nvPr/>
-        </p:nvSpPr>
-        <p:spPr>
-          <a:xfrm>
-            <a:off x="1783080" y="2194560"/>
+          <p:cNvPr id="16" name="Text 13"/>
+          <p:cNvSpPr/>
+          <p:nvPr/>
+        </p:nvSpPr>
+        <p:spPr>
+          <a:xfrm>
+            <a:off x="1737360" y="2286000"/>
             <a:ext cx="4114800" cy="548640"/>
           </a:xfrm>
           <a:prstGeom prst="rect">
@@ -28425,7 +27511,7 @@
               <a:buNone/>
             </a:pPr>
             <a:r>
-              <a:rPr lang="en-US" sz="2300" dirty="0">
+              <a:rPr lang="en-US" sz="2600" dirty="0">
                 <a:solidFill>
                   <a:srgbClr val="1E1208"/>
                 </a:solidFill>
@@ -28433,22 +27519,22 @@
                 <a:ea typeface="Impact" pitchFamily="34" charset="-122"/>
                 <a:cs typeface="Impact" pitchFamily="34" charset="-120"/>
               </a:rPr>
-              <a:t>NOT A TEACHER REPLACEMENT</a:t>
-            </a:r>
-            <a:endParaRPr lang="en-US" sz="2300" dirty="0"/>
-          </a:p>
-        </p:txBody>
-      </p:sp>
-      <p:sp>
-        <p:nvSpPr>
-          <p:cNvPr id="18" name="Text 15"/>
-          <p:cNvSpPr/>
-          <p:nvPr/>
-        </p:nvSpPr>
-        <p:spPr>
-          <a:xfrm>
-            <a:off x="1783080" y="2834640"/>
-            <a:ext cx="4114800" cy="822960"/>
+              <a:t>GOOGLE CLASSROOM</a:t>
+            </a:r>
+            <a:endParaRPr lang="en-US" sz="2600" dirty="0"/>
+          </a:p>
+        </p:txBody>
+      </p:sp>
+      <p:sp>
+        <p:nvSpPr>
+          <p:cNvPr id="17" name="Text 14"/>
+          <p:cNvSpPr/>
+          <p:nvPr/>
+        </p:nvSpPr>
+        <p:spPr>
+          <a:xfrm>
+            <a:off x="1737360" y="3017520"/>
+            <a:ext cx="4023360" cy="1280160"/>
           </a:xfrm>
           <a:prstGeom prst="rect">
             <a:avLst/>
@@ -28467,7 +27553,7 @@
               <a:buNone/>
             </a:pPr>
             <a:r>
-              <a:rPr lang="en-US" sz="1400" dirty="0">
+              <a:rPr lang="en-US" sz="1700" dirty="0">
                 <a:solidFill>
                   <a:srgbClr val="555555"/>
                 </a:solidFill>
@@ -28475,28 +27561,28 @@
                 <a:ea typeface="Arial" pitchFamily="34" charset="-122"/>
                 <a:cs typeface="Arial" pitchFamily="34" charset="-120"/>
               </a:rPr>
-              <a:t>Teachers stay in control of questions, marking and decisions.</a:t>
-            </a:r>
-            <a:endParaRPr lang="en-US" sz="1400" dirty="0"/>
-          </a:p>
-        </p:txBody>
-      </p:sp>
-      <p:sp>
-        <p:nvSpPr>
-          <p:cNvPr id="19" name="Shape 16"/>
-          <p:cNvSpPr/>
-          <p:nvPr/>
-        </p:nvSpPr>
-        <p:spPr>
-          <a:xfrm>
-            <a:off x="6217920" y="1965960"/>
-            <a:ext cx="4663440" cy="1783080"/>
-          </a:xfrm>
-          <a:prstGeom prst="rect">
-            <a:avLst/>
-          </a:prstGeom>
-          <a:solidFill>
-            <a:srgbClr val="FFFFFF"/>
+              <a:t>Useful for managing classwork, sharing materials and organising assignments.</a:t>
+            </a:r>
+            <a:endParaRPr lang="en-US" sz="1700" dirty="0"/>
+          </a:p>
+        </p:txBody>
+      </p:sp>
+      <p:sp>
+        <p:nvSpPr>
+          <p:cNvPr id="18" name="Shape 15"/>
+          <p:cNvSpPr/>
+          <p:nvPr/>
+        </p:nvSpPr>
+        <p:spPr>
+          <a:xfrm>
+            <a:off x="6263640" y="2011680"/>
+            <a:ext cx="4663440" cy="2468880"/>
+          </a:xfrm>
+          <a:prstGeom prst="rect">
+            <a:avLst/>
+          </a:prstGeom>
+          <a:solidFill>
+            <a:srgbClr val="FBE9D6"/>
           </a:solidFill>
           <a:ln w="25400">
             <a:solidFill>
@@ -28508,14 +27594,14 @@
       </p:sp>
       <p:sp>
         <p:nvSpPr>
-          <p:cNvPr id="20" name="Shape 17"/>
-          <p:cNvSpPr/>
-          <p:nvPr/>
-        </p:nvSpPr>
-        <p:spPr>
-          <a:xfrm>
-            <a:off x="6217920" y="1965960"/>
-            <a:ext cx="128016" cy="1783080"/>
+          <p:cNvPr id="19" name="Shape 16"/>
+          <p:cNvSpPr/>
+          <p:nvPr/>
+        </p:nvSpPr>
+        <p:spPr>
+          <a:xfrm>
+            <a:off x="6263640" y="2011680"/>
+            <a:ext cx="128016" cy="2468880"/>
           </a:xfrm>
           <a:prstGeom prst="rect">
             <a:avLst/>
@@ -28528,13 +27614,13 @@
       </p:sp>
       <p:sp>
         <p:nvSpPr>
-          <p:cNvPr id="21" name="Text 18"/>
-          <p:cNvSpPr/>
-          <p:nvPr/>
-        </p:nvSpPr>
-        <p:spPr>
-          <a:xfrm>
-            <a:off x="6583680" y="2194560"/>
+          <p:cNvPr id="20" name="Text 17"/>
+          <p:cNvSpPr/>
+          <p:nvPr/>
+        </p:nvSpPr>
+        <p:spPr>
+          <a:xfrm>
+            <a:off x="6675120" y="2286000"/>
             <a:ext cx="4114800" cy="548640"/>
           </a:xfrm>
           <a:prstGeom prst="rect">
@@ -28554,7 +27640,7 @@
               <a:buNone/>
             </a:pPr>
             <a:r>
-              <a:rPr lang="en-US" sz="2300" dirty="0">
+              <a:rPr lang="en-US" sz="2600" dirty="0">
                 <a:solidFill>
                   <a:srgbClr val="1E1208"/>
                 </a:solidFill>
@@ -28562,22 +27648,22 @@
                 <a:ea typeface="Impact" pitchFamily="34" charset="-122"/>
                 <a:cs typeface="Impact" pitchFamily="34" charset="-120"/>
               </a:rPr>
-              <a:t>NOT AI MAKING FINAL DECISIONS</a:t>
-            </a:r>
-            <a:endParaRPr lang="en-US" sz="2300" dirty="0"/>
-          </a:p>
-        </p:txBody>
-      </p:sp>
-      <p:sp>
-        <p:nvSpPr>
-          <p:cNvPr id="22" name="Text 19"/>
-          <p:cNvSpPr/>
-          <p:nvPr/>
-        </p:nvSpPr>
-        <p:spPr>
-          <a:xfrm>
-            <a:off x="6583680" y="2834640"/>
-            <a:ext cx="4114800" cy="822960"/>
+              <a:t>SMART ASSESS JA</a:t>
+            </a:r>
+            <a:endParaRPr lang="en-US" sz="2600" dirty="0"/>
+          </a:p>
+        </p:txBody>
+      </p:sp>
+      <p:sp>
+        <p:nvSpPr>
+          <p:cNvPr id="21" name="Text 18"/>
+          <p:cNvSpPr/>
+          <p:nvPr/>
+        </p:nvSpPr>
+        <p:spPr>
+          <a:xfrm>
+            <a:off x="6675120" y="3017520"/>
+            <a:ext cx="4023360" cy="1371600"/>
           </a:xfrm>
           <a:prstGeom prst="rect">
             <a:avLst/>
@@ -28596,84 +27682,59 @@
               <a:buNone/>
             </a:pPr>
             <a:r>
-              <a:rPr lang="en-US" sz="1400" dirty="0">
-                <a:solidFill>
-                  <a:srgbClr val="555555"/>
+              <a:rPr lang="en-US" sz="1700" b="1" dirty="0">
+                <a:solidFill>
+                  <a:srgbClr val="1E1208"/>
                 </a:solidFill>
                 <a:latin typeface="Arial" pitchFamily="34" charset="0"/>
                 <a:ea typeface="Arial" pitchFamily="34" charset="-122"/>
                 <a:cs typeface="Arial" pitchFamily="34" charset="-120"/>
               </a:rPr>
-              <a:t>AI can help draft and suggest. A person decides, every time.</a:t>
-            </a:r>
-            <a:endParaRPr lang="en-US" sz="1400" dirty="0"/>
-          </a:p>
-        </p:txBody>
-      </p:sp>
-      <p:sp>
-        <p:nvSpPr>
-          <p:cNvPr id="23" name="Shape 20"/>
-          <p:cNvSpPr/>
-          <p:nvPr/>
-        </p:nvSpPr>
-        <p:spPr>
-          <a:xfrm>
-            <a:off x="1417320" y="3931920"/>
-            <a:ext cx="4663440" cy="1783080"/>
-          </a:xfrm>
-          <a:prstGeom prst="rect">
-            <a:avLst/>
-          </a:prstGeom>
-          <a:solidFill>
-            <a:srgbClr val="FFFFFF"/>
-          </a:solidFill>
-          <a:ln w="25400">
-            <a:solidFill>
-              <a:srgbClr val="1E1208"/>
-            </a:solidFill>
-            <a:prstDash val="solid"/>
-          </a:ln>
-        </p:spPr>
-      </p:sp>
-      <p:sp>
-        <p:nvSpPr>
-          <p:cNvPr id="24" name="Shape 21"/>
-          <p:cNvSpPr/>
-          <p:nvPr/>
-        </p:nvSpPr>
-        <p:spPr>
-          <a:xfrm>
-            <a:off x="1417320" y="3931920"/>
-            <a:ext cx="128016" cy="1783080"/>
-          </a:xfrm>
-          <a:prstGeom prst="rect">
-            <a:avLst/>
-          </a:prstGeom>
-          <a:solidFill>
-            <a:srgbClr val="D4762A"/>
-          </a:solidFill>
-          <a:ln/>
-        </p:spPr>
-      </p:sp>
-      <p:sp>
-        <p:nvSpPr>
-          <p:cNvPr id="25" name="Text 22"/>
-          <p:cNvSpPr/>
-          <p:nvPr/>
-        </p:nvSpPr>
-        <p:spPr>
-          <a:xfrm>
-            <a:off x="1783080" y="4160520"/>
-            <a:ext cx="4114800" cy="548640"/>
-          </a:xfrm>
-          <a:prstGeom prst="rect">
-            <a:avLst/>
-          </a:prstGeom>
-          <a:noFill/>
-          <a:ln/>
-        </p:spPr>
-        <p:txBody>
-          <a:bodyPr wrap="square" lIns="0" tIns="0" rIns="0" bIns="0" rtlCol="0" anchor="t"/>
+              <a:t>Designed to go further into the assessment process: create, administer, mark, understand results and support learning.</a:t>
+            </a:r>
+            <a:endParaRPr lang="en-US" sz="1700" dirty="0"/>
+          </a:p>
+        </p:txBody>
+      </p:sp>
+      <p:sp>
+        <p:nvSpPr>
+          <p:cNvPr id="22" name="Shape 19"/>
+          <p:cNvSpPr/>
+          <p:nvPr/>
+        </p:nvSpPr>
+        <p:spPr>
+          <a:xfrm>
+            <a:off x="1417320" y="4937760"/>
+            <a:ext cx="9509760" cy="502920"/>
+          </a:xfrm>
+          <a:prstGeom prst="rect">
+            <a:avLst/>
+          </a:prstGeom>
+          <a:solidFill>
+            <a:srgbClr val="1E1208"/>
+          </a:solidFill>
+          <a:ln/>
+        </p:spPr>
+      </p:sp>
+      <p:sp>
+        <p:nvSpPr>
+          <p:cNvPr id="23" name="Text 20"/>
+          <p:cNvSpPr/>
+          <p:nvPr/>
+        </p:nvSpPr>
+        <p:spPr>
+          <a:xfrm>
+            <a:off x="1600200" y="4937760"/>
+            <a:ext cx="9144000" cy="502920"/>
+          </a:xfrm>
+          <a:prstGeom prst="rect">
+            <a:avLst/>
+          </a:prstGeom>
+          <a:noFill/>
+          <a:ln/>
+        </p:spPr>
+        <p:txBody>
+          <a:bodyPr wrap="square" lIns="0" tIns="0" rIns="0" bIns="0" rtlCol="0" anchor="ctr"/>
           <a:lstStyle/>
           <a:p>
             <a:pPr algn="l" indent="0" marL="0">
@@ -28683,30 +27744,30 @@
               <a:buNone/>
             </a:pPr>
             <a:r>
-              <a:rPr lang="en-US" sz="2300" dirty="0">
-                <a:solidFill>
-                  <a:srgbClr val="1E1208"/>
-                </a:solidFill>
-                <a:latin typeface="Impact" pitchFamily="34" charset="0"/>
-                <a:ea typeface="Impact" pitchFamily="34" charset="-122"/>
-                <a:cs typeface="Impact" pitchFamily="34" charset="-120"/>
-              </a:rPr>
-              <a:t>NOT JUST A PDF ON A SCREEN</a:t>
-            </a:r>
-            <a:endParaRPr lang="en-US" sz="2300" dirty="0"/>
-          </a:p>
-        </p:txBody>
-      </p:sp>
-      <p:sp>
-        <p:nvSpPr>
-          <p:cNvPr id="26" name="Text 23"/>
-          <p:cNvSpPr/>
-          <p:nvPr/>
-        </p:nvSpPr>
-        <p:spPr>
-          <a:xfrm>
-            <a:off x="1783080" y="4800600"/>
-            <a:ext cx="4114800" cy="822960"/>
+              <a:rPr lang="en-US" sz="1600" b="1" dirty="0">
+                <a:solidFill>
+                  <a:srgbClr val="FFFFFF"/>
+                </a:solidFill>
+                <a:latin typeface="Arial" pitchFamily="34" charset="0"/>
+                <a:ea typeface="Arial" pitchFamily="34" charset="-122"/>
+                <a:cs typeface="Arial" pitchFamily="34" charset="-120"/>
+              </a:rPr>
+              <a:t>The difference is the connected workflow, not just a longer feature list.</a:t>
+            </a:r>
+            <a:endParaRPr lang="en-US" sz="1600" dirty="0"/>
+          </a:p>
+        </p:txBody>
+      </p:sp>
+      <p:sp>
+        <p:nvSpPr>
+          <p:cNvPr id="24" name="Text 21"/>
+          <p:cNvSpPr/>
+          <p:nvPr/>
+        </p:nvSpPr>
+        <p:spPr>
+          <a:xfrm>
+            <a:off x="1417320" y="6583680"/>
+            <a:ext cx="9509760" cy="274320"/>
           </a:xfrm>
           <a:prstGeom prst="rect">
             <a:avLst/>
@@ -28725,7 +27786,7 @@
               <a:buNone/>
             </a:pPr>
             <a:r>
-              <a:rPr lang="en-US" sz="1400" dirty="0">
+              <a:rPr lang="en-US" sz="900" dirty="0">
                 <a:solidFill>
                   <a:srgbClr val="555555"/>
                 </a:solidFill>
@@ -28733,138 +27794,9 @@
                 <a:ea typeface="Arial" pitchFamily="34" charset="-122"/>
                 <a:cs typeface="Arial" pitchFamily="34" charset="-120"/>
               </a:rPr>
-              <a:t>It supports the work before, during and after an assessment.</a:t>
-            </a:r>
-            <a:endParaRPr lang="en-US" sz="1400" dirty="0"/>
-          </a:p>
-        </p:txBody>
-      </p:sp>
-      <p:sp>
-        <p:nvSpPr>
-          <p:cNvPr id="27" name="Shape 24"/>
-          <p:cNvSpPr/>
-          <p:nvPr/>
-        </p:nvSpPr>
-        <p:spPr>
-          <a:xfrm>
-            <a:off x="6217920" y="3931920"/>
-            <a:ext cx="4663440" cy="1783080"/>
-          </a:xfrm>
-          <a:prstGeom prst="rect">
-            <a:avLst/>
-          </a:prstGeom>
-          <a:solidFill>
-            <a:srgbClr val="FBE9D6"/>
-          </a:solidFill>
-          <a:ln w="25400">
-            <a:solidFill>
-              <a:srgbClr val="1E1208"/>
-            </a:solidFill>
-            <a:prstDash val="solid"/>
-          </a:ln>
-        </p:spPr>
-      </p:sp>
-      <p:sp>
-        <p:nvSpPr>
-          <p:cNvPr id="28" name="Shape 25"/>
-          <p:cNvSpPr/>
-          <p:nvPr/>
-        </p:nvSpPr>
-        <p:spPr>
-          <a:xfrm>
-            <a:off x="6217920" y="3931920"/>
-            <a:ext cx="128016" cy="1783080"/>
-          </a:xfrm>
-          <a:prstGeom prst="rect">
-            <a:avLst/>
-          </a:prstGeom>
-          <a:solidFill>
-            <a:srgbClr val="D4762A"/>
-          </a:solidFill>
-          <a:ln/>
-        </p:spPr>
-      </p:sp>
-      <p:sp>
-        <p:nvSpPr>
-          <p:cNvPr id="29" name="Text 26"/>
-          <p:cNvSpPr/>
-          <p:nvPr/>
-        </p:nvSpPr>
-        <p:spPr>
-          <a:xfrm>
-            <a:off x="6583680" y="4160520"/>
-            <a:ext cx="4114800" cy="548640"/>
-          </a:xfrm>
-          <a:prstGeom prst="rect">
-            <a:avLst/>
-          </a:prstGeom>
-          <a:noFill/>
-          <a:ln/>
-        </p:spPr>
-        <p:txBody>
-          <a:bodyPr wrap="square" lIns="0" tIns="0" rIns="0" bIns="0" rtlCol="0" anchor="t"/>
-          <a:lstStyle/>
-          <a:p>
-            <a:pPr algn="l" indent="0" marL="0">
-              <a:lnSpc>
-                <a:spcPct val="110000"/>
-              </a:lnSpc>
-              <a:buNone/>
-            </a:pPr>
-            <a:r>
-              <a:rPr lang="en-US" sz="2300" dirty="0">
-                <a:solidFill>
-                  <a:srgbClr val="1E1208"/>
-                </a:solidFill>
-                <a:latin typeface="Impact" pitchFamily="34" charset="0"/>
-                <a:ea typeface="Impact" pitchFamily="34" charset="-122"/>
-                <a:cs typeface="Impact" pitchFamily="34" charset="-120"/>
-              </a:rPr>
-              <a:t>NOT THREE DISCONNECTED APPS</a:t>
-            </a:r>
-            <a:endParaRPr lang="en-US" sz="2300" dirty="0"/>
-          </a:p>
-        </p:txBody>
-      </p:sp>
-      <p:sp>
-        <p:nvSpPr>
-          <p:cNvPr id="30" name="Text 27"/>
-          <p:cNvSpPr/>
-          <p:nvPr/>
-        </p:nvSpPr>
-        <p:spPr>
-          <a:xfrm>
-            <a:off x="6583680" y="4800600"/>
-            <a:ext cx="4114800" cy="822960"/>
-          </a:xfrm>
-          <a:prstGeom prst="rect">
-            <a:avLst/>
-          </a:prstGeom>
-          <a:noFill/>
-          <a:ln/>
-        </p:spPr>
-        <p:txBody>
-          <a:bodyPr wrap="square" lIns="0" tIns="0" rIns="0" bIns="0" rtlCol="0" anchor="t"/>
-          <a:lstStyle/>
-          <a:p>
-            <a:pPr algn="l" indent="0" marL="0">
-              <a:lnSpc>
-                <a:spcPct val="110000"/>
-              </a:lnSpc>
-              <a:buNone/>
-            </a:pPr>
-            <a:r>
-              <a:rPr lang="en-US" sz="1400" dirty="0">
-                <a:solidFill>
-                  <a:srgbClr val="555555"/>
-                </a:solidFill>
-                <a:latin typeface="Arial" pitchFamily="34" charset="0"/>
-                <a:ea typeface="Arial" pitchFamily="34" charset="-122"/>
-                <a:cs typeface="Arial" pitchFamily="34" charset="-120"/>
-              </a:rPr>
-              <a:t>The products share the school, the people and the topic list.</a:t>
-            </a:r>
-            <a:endParaRPr lang="en-US" sz="1400" dirty="0"/>
+              <a:t>Google Classroom: public documentation, October 2026. Every school sets it up differently.</a:t>
+            </a:r>
+            <a:endParaRPr lang="en-US" sz="900" dirty="0"/>
           </a:p>
         </p:txBody>
       </p:sp>
@@ -29260,7 +28192,7 @@
                 <a:ea typeface="Courier New" pitchFamily="34" charset="-122"/>
                 <a:cs typeface="Courier New" pitchFamily="34" charset="-120"/>
               </a:rPr>
-              <a:t>TRUST</a:t>
+              <a:t>CLARITY</a:t>
             </a:r>
             <a:endParaRPr lang="en-US" sz="1150" dirty="0"/>
           </a:p>
@@ -29293,7 +28225,7 @@
               <a:buNone/>
             </a:pPr>
             <a:r>
-              <a:rPr lang="en-US" sz="4300" dirty="0">
+              <a:rPr lang="en-US" sz="5000" dirty="0">
                 <a:solidFill>
                   <a:srgbClr val="1E1208"/>
                 </a:solidFill>
@@ -29301,9 +28233,9 @@
                 <a:ea typeface="Impact" pitchFamily="34" charset="-122"/>
                 <a:cs typeface="Impact" pitchFamily="34" charset="-120"/>
               </a:rPr>
-              <a:t>TRUST, DATA AND AI WITH A PERSON IN CHARGE</a:t>
-            </a:r>
-            <a:endParaRPr lang="en-US" sz="4300" dirty="0"/>
+              <a:t>WHAT SMART ASSESS IS NOT</a:t>
+            </a:r>
+            <a:endParaRPr lang="en-US" sz="5000" dirty="0"/>
           </a:p>
         </p:txBody>
       </p:sp>
@@ -29316,13 +28248,13 @@
         <p:spPr>
           <a:xfrm>
             <a:off x="1417320" y="1965960"/>
-            <a:ext cx="4663440" cy="4114800"/>
-          </a:xfrm>
-          <a:prstGeom prst="rect">
-            <a:avLst/>
-          </a:prstGeom>
-          <a:solidFill>
-            <a:srgbClr val="FFFFFF"/>
+            <a:ext cx="4663440" cy="1783080"/>
+          </a:xfrm>
+          <a:prstGeom prst="rect">
+            <a:avLst/>
+          </a:prstGeom>
+          <a:solidFill>
+            <a:srgbClr val="FBE9D6"/>
           </a:solidFill>
           <a:ln w="25400">
             <a:solidFill>
@@ -29341,13 +28273,117 @@
         <p:spPr>
           <a:xfrm>
             <a:off x="1417320" y="1965960"/>
-            <a:ext cx="4663440" cy="731520"/>
-          </a:xfrm>
-          <a:prstGeom prst="rect">
-            <a:avLst/>
-          </a:prstGeom>
-          <a:solidFill>
-            <a:srgbClr val="1E1208"/>
+            <a:ext cx="128016" cy="1783080"/>
+          </a:xfrm>
+          <a:prstGeom prst="rect">
+            <a:avLst/>
+          </a:prstGeom>
+          <a:solidFill>
+            <a:srgbClr val="D4762A"/>
+          </a:solidFill>
+          <a:ln/>
+        </p:spPr>
+      </p:sp>
+      <p:sp>
+        <p:nvSpPr>
+          <p:cNvPr id="17" name="Text 14"/>
+          <p:cNvSpPr/>
+          <p:nvPr/>
+        </p:nvSpPr>
+        <p:spPr>
+          <a:xfrm>
+            <a:off x="1783080" y="2194560"/>
+            <a:ext cx="4114800" cy="548640"/>
+          </a:xfrm>
+          <a:prstGeom prst="rect">
+            <a:avLst/>
+          </a:prstGeom>
+          <a:noFill/>
+          <a:ln/>
+        </p:spPr>
+        <p:txBody>
+          <a:bodyPr wrap="square" lIns="0" tIns="0" rIns="0" bIns="0" rtlCol="0" anchor="t"/>
+          <a:lstStyle/>
+          <a:p>
+            <a:pPr algn="l" indent="0" marL="0">
+              <a:lnSpc>
+                <a:spcPct val="110000"/>
+              </a:lnSpc>
+              <a:buNone/>
+            </a:pPr>
+            <a:r>
+              <a:rPr lang="en-US" sz="2300" dirty="0">
+                <a:solidFill>
+                  <a:srgbClr val="1E1208"/>
+                </a:solidFill>
+                <a:latin typeface="Impact" pitchFamily="34" charset="0"/>
+                <a:ea typeface="Impact" pitchFamily="34" charset="-122"/>
+                <a:cs typeface="Impact" pitchFamily="34" charset="-120"/>
+              </a:rPr>
+              <a:t>NOT A TEACHER REPLACEMENT</a:t>
+            </a:r>
+            <a:endParaRPr lang="en-US" sz="2300" dirty="0"/>
+          </a:p>
+        </p:txBody>
+      </p:sp>
+      <p:sp>
+        <p:nvSpPr>
+          <p:cNvPr id="18" name="Text 15"/>
+          <p:cNvSpPr/>
+          <p:nvPr/>
+        </p:nvSpPr>
+        <p:spPr>
+          <a:xfrm>
+            <a:off x="1783080" y="2834640"/>
+            <a:ext cx="4114800" cy="822960"/>
+          </a:xfrm>
+          <a:prstGeom prst="rect">
+            <a:avLst/>
+          </a:prstGeom>
+          <a:noFill/>
+          <a:ln/>
+        </p:spPr>
+        <p:txBody>
+          <a:bodyPr wrap="square" lIns="0" tIns="0" rIns="0" bIns="0" rtlCol="0" anchor="t"/>
+          <a:lstStyle/>
+          <a:p>
+            <a:pPr algn="l" indent="0" marL="0">
+              <a:lnSpc>
+                <a:spcPct val="110000"/>
+              </a:lnSpc>
+              <a:buNone/>
+            </a:pPr>
+            <a:r>
+              <a:rPr lang="en-US" sz="1400" dirty="0">
+                <a:solidFill>
+                  <a:srgbClr val="555555"/>
+                </a:solidFill>
+                <a:latin typeface="Arial" pitchFamily="34" charset="0"/>
+                <a:ea typeface="Arial" pitchFamily="34" charset="-122"/>
+                <a:cs typeface="Arial" pitchFamily="34" charset="-120"/>
+              </a:rPr>
+              <a:t>Teachers stay in control of questions, marking and decisions.</a:t>
+            </a:r>
+            <a:endParaRPr lang="en-US" sz="1400" dirty="0"/>
+          </a:p>
+        </p:txBody>
+      </p:sp>
+      <p:sp>
+        <p:nvSpPr>
+          <p:cNvPr id="19" name="Shape 16"/>
+          <p:cNvSpPr/>
+          <p:nvPr/>
+        </p:nvSpPr>
+        <p:spPr>
+          <a:xfrm>
+            <a:off x="6217920" y="1965960"/>
+            <a:ext cx="4663440" cy="1783080"/>
+          </a:xfrm>
+          <a:prstGeom prst="rect">
+            <a:avLst/>
+          </a:prstGeom>
+          <a:solidFill>
+            <a:srgbClr val="FFFFFF"/>
           </a:solidFill>
           <a:ln w="25400">
             <a:solidFill>
@@ -29359,23 +28395,43 @@
       </p:sp>
       <p:sp>
         <p:nvSpPr>
-          <p:cNvPr id="17" name="Text 14"/>
-          <p:cNvSpPr/>
-          <p:nvPr/>
-        </p:nvSpPr>
-        <p:spPr>
-          <a:xfrm>
-            <a:off x="1645920" y="1965960"/>
-            <a:ext cx="4206240" cy="731520"/>
-          </a:xfrm>
-          <a:prstGeom prst="rect">
-            <a:avLst/>
-          </a:prstGeom>
-          <a:noFill/>
-          <a:ln/>
-        </p:spPr>
-        <p:txBody>
-          <a:bodyPr wrap="square" lIns="0" tIns="0" rIns="0" bIns="0" rtlCol="0" anchor="ctr"/>
+          <p:cNvPr id="20" name="Shape 17"/>
+          <p:cNvSpPr/>
+          <p:nvPr/>
+        </p:nvSpPr>
+        <p:spPr>
+          <a:xfrm>
+            <a:off x="6217920" y="1965960"/>
+            <a:ext cx="128016" cy="1783080"/>
+          </a:xfrm>
+          <a:prstGeom prst="rect">
+            <a:avLst/>
+          </a:prstGeom>
+          <a:solidFill>
+            <a:srgbClr val="D4762A"/>
+          </a:solidFill>
+          <a:ln/>
+        </p:spPr>
+      </p:sp>
+      <p:sp>
+        <p:nvSpPr>
+          <p:cNvPr id="21" name="Text 18"/>
+          <p:cNvSpPr/>
+          <p:nvPr/>
+        </p:nvSpPr>
+        <p:spPr>
+          <a:xfrm>
+            <a:off x="6583680" y="2194560"/>
+            <a:ext cx="4114800" cy="548640"/>
+          </a:xfrm>
+          <a:prstGeom prst="rect">
+            <a:avLst/>
+          </a:prstGeom>
+          <a:noFill/>
+          <a:ln/>
+        </p:spPr>
+        <p:txBody>
+          <a:bodyPr wrap="square" lIns="0" tIns="0" rIns="0" bIns="0" rtlCol="0" anchor="t"/>
           <a:lstStyle/>
           <a:p>
             <a:pPr algn="l" indent="0" marL="0">
@@ -29385,30 +28441,30 @@
               <a:buNone/>
             </a:pPr>
             <a:r>
-              <a:rPr lang="en-US" sz="2400" dirty="0">
-                <a:solidFill>
-                  <a:srgbClr val="FFFFFF"/>
+              <a:rPr lang="en-US" sz="2300" dirty="0">
+                <a:solidFill>
+                  <a:srgbClr val="1E1208"/>
                 </a:solidFill>
                 <a:latin typeface="Impact" pitchFamily="34" charset="0"/>
                 <a:ea typeface="Impact" pitchFamily="34" charset="-122"/>
                 <a:cs typeface="Impact" pitchFamily="34" charset="-120"/>
               </a:rPr>
-              <a:t>YOUR DATA</a:t>
-            </a:r>
-            <a:endParaRPr lang="en-US" sz="2400" dirty="0"/>
-          </a:p>
-        </p:txBody>
-      </p:sp>
-      <p:sp>
-        <p:nvSpPr>
-          <p:cNvPr id="18" name="Text 15"/>
-          <p:cNvSpPr/>
-          <p:nvPr/>
-        </p:nvSpPr>
-        <p:spPr>
-          <a:xfrm>
-            <a:off x="1645920" y="2926080"/>
-            <a:ext cx="4206240" cy="3063240"/>
+              <a:t>NOT AI MAKING FINAL DECISIONS</a:t>
+            </a:r>
+            <a:endParaRPr lang="en-US" sz="2300" dirty="0"/>
+          </a:p>
+        </p:txBody>
+      </p:sp>
+      <p:sp>
+        <p:nvSpPr>
+          <p:cNvPr id="22" name="Text 19"/>
+          <p:cNvSpPr/>
+          <p:nvPr/>
+        </p:nvSpPr>
+        <p:spPr>
+          <a:xfrm>
+            <a:off x="6583680" y="2834640"/>
+            <a:ext cx="4114800" cy="822960"/>
           </a:xfrm>
           <a:prstGeom prst="rect">
             <a:avLst/>
@@ -29420,101 +28476,37 @@
           <a:bodyPr wrap="square" lIns="0" tIns="0" rIns="0" bIns="0" rtlCol="0" anchor="t"/>
           <a:lstStyle/>
           <a:p>
-            <a:pPr algn="l" marL="342900" indent="-342900">
+            <a:pPr algn="l" indent="0" marL="0">
               <a:lnSpc>
-                <a:spcPct val="120000"/>
+                <a:spcPct val="110000"/>
               </a:lnSpc>
-              <a:buSzPct val="100000"/>
-              <a:buChar char="■"/>
-            </a:pPr>
-            <a:r>
-              <a:rPr lang="en-US" sz="1300" dirty="0">
-                <a:solidFill>
-                  <a:srgbClr val="1E1208"/>
+              <a:buNone/>
+            </a:pPr>
+            <a:r>
+              <a:rPr lang="en-US" sz="1400" dirty="0">
+                <a:solidFill>
+                  <a:srgbClr val="555555"/>
                 </a:solidFill>
                 <a:latin typeface="Arial" pitchFamily="34" charset="0"/>
                 <a:ea typeface="Arial" pitchFamily="34" charset="-122"/>
                 <a:cs typeface="Arial" pitchFamily="34" charset="-120"/>
               </a:rPr>
-              <a:t>Each school's data lives in its own separate environment</a:t>
-            </a:r>
-            <a:endParaRPr lang="en-US" sz="1300" dirty="0"/>
-          </a:p>
-          <a:p>
-            <a:pPr algn="l" marL="342900" indent="-342900">
-              <a:lnSpc>
-                <a:spcPct val="120000"/>
-              </a:lnSpc>
-              <a:buSzPct val="100000"/>
-              <a:buChar char="■"/>
-            </a:pPr>
-            <a:r>
-              <a:rPr lang="en-US" sz="1300" dirty="0">
-                <a:solidFill>
-                  <a:srgbClr val="1E1208"/>
-                </a:solidFill>
-                <a:latin typeface="Arial" pitchFamily="34" charset="0"/>
-                <a:ea typeface="Arial" pitchFamily="34" charset="-122"/>
-                <a:cs typeface="Arial" pitchFamily="34" charset="-120"/>
-              </a:rPr>
-              <a:t>Access rules are enforced by the database itself</a:t>
-            </a:r>
-            <a:endParaRPr lang="en-US" sz="1300" dirty="0"/>
-          </a:p>
-          <a:p>
-            <a:pPr algn="l" marL="342900" indent="-342900">
-              <a:lnSpc>
-                <a:spcPct val="120000"/>
-              </a:lnSpc>
-              <a:buSzPct val="100000"/>
-              <a:buChar char="■"/>
-            </a:pPr>
-            <a:r>
-              <a:rPr lang="en-US" sz="1300" dirty="0">
-                <a:solidFill>
-                  <a:srgbClr val="1E1208"/>
-                </a:solidFill>
-                <a:latin typeface="Arial" pitchFamily="34" charset="0"/>
-                <a:ea typeface="Arial" pitchFamily="34" charset="-122"/>
-                <a:cs typeface="Arial" pitchFamily="34" charset="-120"/>
-              </a:rPr>
-              <a:t>Two-factor sign-in is required for all staff</a:t>
-            </a:r>
-            <a:endParaRPr lang="en-US" sz="1300" dirty="0"/>
-          </a:p>
-          <a:p>
-            <a:pPr algn="l" marL="342900" indent="-342900">
-              <a:lnSpc>
-                <a:spcPct val="120000"/>
-              </a:lnSpc>
-              <a:buSzPct val="100000"/>
-              <a:buChar char="■"/>
-            </a:pPr>
-            <a:r>
-              <a:rPr lang="en-US" sz="1300" dirty="0">
-                <a:solidFill>
-                  <a:srgbClr val="1E1208"/>
-                </a:solidFill>
-                <a:latin typeface="Arial" pitchFamily="34" charset="0"/>
-                <a:ea typeface="Arial" pitchFamily="34" charset="-122"/>
-                <a:cs typeface="Arial" pitchFamily="34" charset="-120"/>
-              </a:rPr>
-              <a:t>Handled in line with Jamaica's Data Protection Act</a:t>
-            </a:r>
-            <a:endParaRPr lang="en-US" sz="1300" dirty="0"/>
-          </a:p>
-        </p:txBody>
-      </p:sp>
-      <p:sp>
-        <p:nvSpPr>
-          <p:cNvPr id="19" name="Shape 16"/>
-          <p:cNvSpPr/>
-          <p:nvPr/>
-        </p:nvSpPr>
-        <p:spPr>
-          <a:xfrm>
-            <a:off x="6217920" y="1965960"/>
-            <a:ext cx="4663440" cy="4114800"/>
+              <a:t>AI can help draft and suggest. A person decides, every time.</a:t>
+            </a:r>
+            <a:endParaRPr lang="en-US" sz="1400" dirty="0"/>
+          </a:p>
+        </p:txBody>
+      </p:sp>
+      <p:sp>
+        <p:nvSpPr>
+          <p:cNvPr id="23" name="Shape 20"/>
+          <p:cNvSpPr/>
+          <p:nvPr/>
+        </p:nvSpPr>
+        <p:spPr>
+          <a:xfrm>
+            <a:off x="1417320" y="3931920"/>
+            <a:ext cx="4663440" cy="1783080"/>
           </a:xfrm>
           <a:prstGeom prst="rect">
             <a:avLst/>
@@ -29532,20 +28524,124 @@
       </p:sp>
       <p:sp>
         <p:nvSpPr>
-          <p:cNvPr id="20" name="Shape 17"/>
-          <p:cNvSpPr/>
-          <p:nvPr/>
-        </p:nvSpPr>
-        <p:spPr>
-          <a:xfrm>
-            <a:off x="6217920" y="1965960"/>
-            <a:ext cx="4663440" cy="731520"/>
+          <p:cNvPr id="24" name="Shape 21"/>
+          <p:cNvSpPr/>
+          <p:nvPr/>
+        </p:nvSpPr>
+        <p:spPr>
+          <a:xfrm>
+            <a:off x="1417320" y="3931920"/>
+            <a:ext cx="128016" cy="1783080"/>
           </a:xfrm>
           <a:prstGeom prst="rect">
             <a:avLst/>
           </a:prstGeom>
           <a:solidFill>
             <a:srgbClr val="D4762A"/>
+          </a:solidFill>
+          <a:ln/>
+        </p:spPr>
+      </p:sp>
+      <p:sp>
+        <p:nvSpPr>
+          <p:cNvPr id="25" name="Text 22"/>
+          <p:cNvSpPr/>
+          <p:nvPr/>
+        </p:nvSpPr>
+        <p:spPr>
+          <a:xfrm>
+            <a:off x="1783080" y="4160520"/>
+            <a:ext cx="4114800" cy="548640"/>
+          </a:xfrm>
+          <a:prstGeom prst="rect">
+            <a:avLst/>
+          </a:prstGeom>
+          <a:noFill/>
+          <a:ln/>
+        </p:spPr>
+        <p:txBody>
+          <a:bodyPr wrap="square" lIns="0" tIns="0" rIns="0" bIns="0" rtlCol="0" anchor="t"/>
+          <a:lstStyle/>
+          <a:p>
+            <a:pPr algn="l" indent="0" marL="0">
+              <a:lnSpc>
+                <a:spcPct val="110000"/>
+              </a:lnSpc>
+              <a:buNone/>
+            </a:pPr>
+            <a:r>
+              <a:rPr lang="en-US" sz="2300" dirty="0">
+                <a:solidFill>
+                  <a:srgbClr val="1E1208"/>
+                </a:solidFill>
+                <a:latin typeface="Impact" pitchFamily="34" charset="0"/>
+                <a:ea typeface="Impact" pitchFamily="34" charset="-122"/>
+                <a:cs typeface="Impact" pitchFamily="34" charset="-120"/>
+              </a:rPr>
+              <a:t>NOT JUST A PDF ON A SCREEN</a:t>
+            </a:r>
+            <a:endParaRPr lang="en-US" sz="2300" dirty="0"/>
+          </a:p>
+        </p:txBody>
+      </p:sp>
+      <p:sp>
+        <p:nvSpPr>
+          <p:cNvPr id="26" name="Text 23"/>
+          <p:cNvSpPr/>
+          <p:nvPr/>
+        </p:nvSpPr>
+        <p:spPr>
+          <a:xfrm>
+            <a:off x="1783080" y="4800600"/>
+            <a:ext cx="4114800" cy="822960"/>
+          </a:xfrm>
+          <a:prstGeom prst="rect">
+            <a:avLst/>
+          </a:prstGeom>
+          <a:noFill/>
+          <a:ln/>
+        </p:spPr>
+        <p:txBody>
+          <a:bodyPr wrap="square" lIns="0" tIns="0" rIns="0" bIns="0" rtlCol="0" anchor="t"/>
+          <a:lstStyle/>
+          <a:p>
+            <a:pPr algn="l" indent="0" marL="0">
+              <a:lnSpc>
+                <a:spcPct val="110000"/>
+              </a:lnSpc>
+              <a:buNone/>
+            </a:pPr>
+            <a:r>
+              <a:rPr lang="en-US" sz="1400" dirty="0">
+                <a:solidFill>
+                  <a:srgbClr val="555555"/>
+                </a:solidFill>
+                <a:latin typeface="Arial" pitchFamily="34" charset="0"/>
+                <a:ea typeface="Arial" pitchFamily="34" charset="-122"/>
+                <a:cs typeface="Arial" pitchFamily="34" charset="-120"/>
+              </a:rPr>
+              <a:t>It supports the work before, during and after an assessment.</a:t>
+            </a:r>
+            <a:endParaRPr lang="en-US" sz="1400" dirty="0"/>
+          </a:p>
+        </p:txBody>
+      </p:sp>
+      <p:sp>
+        <p:nvSpPr>
+          <p:cNvPr id="27" name="Shape 24"/>
+          <p:cNvSpPr/>
+          <p:nvPr/>
+        </p:nvSpPr>
+        <p:spPr>
+          <a:xfrm>
+            <a:off x="6217920" y="3931920"/>
+            <a:ext cx="4663440" cy="1783080"/>
+          </a:xfrm>
+          <a:prstGeom prst="rect">
+            <a:avLst/>
+          </a:prstGeom>
+          <a:solidFill>
+            <a:srgbClr val="FBE9D6"/>
           </a:solidFill>
           <a:ln w="25400">
             <a:solidFill>
@@ -29557,23 +28653,43 @@
       </p:sp>
       <p:sp>
         <p:nvSpPr>
-          <p:cNvPr id="21" name="Text 18"/>
-          <p:cNvSpPr/>
-          <p:nvPr/>
-        </p:nvSpPr>
-        <p:spPr>
-          <a:xfrm>
-            <a:off x="6446520" y="1965960"/>
-            <a:ext cx="4206240" cy="731520"/>
-          </a:xfrm>
-          <a:prstGeom prst="rect">
-            <a:avLst/>
-          </a:prstGeom>
-          <a:noFill/>
-          <a:ln/>
-        </p:spPr>
-        <p:txBody>
-          <a:bodyPr wrap="square" lIns="0" tIns="0" rIns="0" bIns="0" rtlCol="0" anchor="ctr"/>
+          <p:cNvPr id="28" name="Shape 25"/>
+          <p:cNvSpPr/>
+          <p:nvPr/>
+        </p:nvSpPr>
+        <p:spPr>
+          <a:xfrm>
+            <a:off x="6217920" y="3931920"/>
+            <a:ext cx="128016" cy="1783080"/>
+          </a:xfrm>
+          <a:prstGeom prst="rect">
+            <a:avLst/>
+          </a:prstGeom>
+          <a:solidFill>
+            <a:srgbClr val="D4762A"/>
+          </a:solidFill>
+          <a:ln/>
+        </p:spPr>
+      </p:sp>
+      <p:sp>
+        <p:nvSpPr>
+          <p:cNvPr id="29" name="Text 26"/>
+          <p:cNvSpPr/>
+          <p:nvPr/>
+        </p:nvSpPr>
+        <p:spPr>
+          <a:xfrm>
+            <a:off x="6583680" y="4160520"/>
+            <a:ext cx="4114800" cy="548640"/>
+          </a:xfrm>
+          <a:prstGeom prst="rect">
+            <a:avLst/>
+          </a:prstGeom>
+          <a:noFill/>
+          <a:ln/>
+        </p:spPr>
+        <p:txBody>
+          <a:bodyPr wrap="square" lIns="0" tIns="0" rIns="0" bIns="0" rtlCol="0" anchor="t"/>
           <a:lstStyle/>
           <a:p>
             <a:pPr algn="l" indent="0" marL="0">
@@ -29583,7 +28699,7 @@
               <a:buNone/>
             </a:pPr>
             <a:r>
-              <a:rPr lang="en-US" sz="2400" dirty="0">
+              <a:rPr lang="en-US" sz="2300" dirty="0">
                 <a:solidFill>
                   <a:srgbClr val="1E1208"/>
                 </a:solidFill>
@@ -29591,22 +28707,22 @@
                 <a:ea typeface="Impact" pitchFamily="34" charset="-122"/>
                 <a:cs typeface="Impact" pitchFamily="34" charset="-120"/>
               </a:rPr>
-              <a:t>AI ON A SHORT LEASH</a:t>
-            </a:r>
-            <a:endParaRPr lang="en-US" sz="2400" dirty="0"/>
-          </a:p>
-        </p:txBody>
-      </p:sp>
-      <p:sp>
-        <p:nvSpPr>
-          <p:cNvPr id="22" name="Text 19"/>
-          <p:cNvSpPr/>
-          <p:nvPr/>
-        </p:nvSpPr>
-        <p:spPr>
-          <a:xfrm>
-            <a:off x="6446520" y="2926080"/>
-            <a:ext cx="4206240" cy="3063240"/>
+              <a:t>NOT THREE DISCONNECTED APPS</a:t>
+            </a:r>
+            <a:endParaRPr lang="en-US" sz="2300" dirty="0"/>
+          </a:p>
+        </p:txBody>
+      </p:sp>
+      <p:sp>
+        <p:nvSpPr>
+          <p:cNvPr id="30" name="Text 27"/>
+          <p:cNvSpPr/>
+          <p:nvPr/>
+        </p:nvSpPr>
+        <p:spPr>
+          <a:xfrm>
+            <a:off x="6583680" y="4800600"/>
+            <a:ext cx="4114800" cy="822960"/>
           </a:xfrm>
           <a:prstGeom prst="rect">
             <a:avLst/>
@@ -29618,109 +28734,24 @@
           <a:bodyPr wrap="square" lIns="0" tIns="0" rIns="0" bIns="0" rtlCol="0" anchor="t"/>
           <a:lstStyle/>
           <a:p>
-            <a:pPr algn="l" marL="342900" indent="-342900">
+            <a:pPr algn="l" indent="0" marL="0">
               <a:lnSpc>
-                <a:spcPct val="120000"/>
+                <a:spcPct val="110000"/>
               </a:lnSpc>
-              <a:buSzPct val="100000"/>
-              <a:buChar char="■"/>
-            </a:pPr>
-            <a:r>
-              <a:rPr lang="en-US" sz="1300" dirty="0">
-                <a:solidFill>
-                  <a:srgbClr val="1E1208"/>
+              <a:buNone/>
+            </a:pPr>
+            <a:r>
+              <a:rPr lang="en-US" sz="1400" dirty="0">
+                <a:solidFill>
+                  <a:srgbClr val="555555"/>
                 </a:solidFill>
                 <a:latin typeface="Arial" pitchFamily="34" charset="0"/>
                 <a:ea typeface="Arial" pitchFamily="34" charset="-122"/>
                 <a:cs typeface="Arial" pitchFamily="34" charset="-120"/>
               </a:rPr>
-              <a:t>AI helps a teacher write: polish a question, import a PDF, draft a lesson plan</a:t>
-            </a:r>
-            <a:endParaRPr lang="en-US" sz="1300" dirty="0"/>
-          </a:p>
-          <a:p>
-            <a:pPr algn="l" marL="342900" indent="-342900">
-              <a:lnSpc>
-                <a:spcPct val="120000"/>
-              </a:lnSpc>
-              <a:buSzPct val="100000"/>
-              <a:buChar char="■"/>
-            </a:pPr>
-            <a:r>
-              <a:rPr lang="en-US" sz="1300" dirty="0">
-                <a:solidFill>
-                  <a:srgbClr val="1E1208"/>
-                </a:solidFill>
-                <a:latin typeface="Arial" pitchFamily="34" charset="0"/>
-                <a:ea typeface="Arial" pitchFamily="34" charset="-122"/>
-                <a:cs typeface="Arial" pitchFamily="34" charset="-120"/>
-              </a:rPr>
-              <a:t>AI suggests essay marks. It never saves one; the teacher edits and decides</a:t>
-            </a:r>
-            <a:endParaRPr lang="en-US" sz="1300" dirty="0"/>
-          </a:p>
-          <a:p>
-            <a:pPr algn="l" marL="342900" indent="-342900">
-              <a:lnSpc>
-                <a:spcPct val="120000"/>
-              </a:lnSpc>
-              <a:buSzPct val="100000"/>
-              <a:buChar char="■"/>
-            </a:pPr>
-            <a:r>
-              <a:rPr lang="en-US" sz="1300" dirty="0">
-                <a:solidFill>
-                  <a:srgbClr val="1E1208"/>
-                </a:solidFill>
-                <a:latin typeface="Arial" pitchFamily="34" charset="0"/>
-                <a:ea typeface="Arial" pitchFamily="34" charset="-122"/>
-                <a:cs typeface="Arial" pitchFamily="34" charset="-120"/>
-              </a:rPr>
-              <a:t>Every suggestion is reviewed by a person before it is used</a:t>
-            </a:r>
-            <a:endParaRPr lang="en-US" sz="1300" dirty="0"/>
-          </a:p>
-          <a:p>
-            <a:pPr algn="l" marL="342900" indent="-342900">
-              <a:lnSpc>
-                <a:spcPct val="120000"/>
-              </a:lnSpc>
-              <a:buSzPct val="100000"/>
-              <a:buChar char="■"/>
-            </a:pPr>
-            <a:r>
-              <a:rPr lang="en-US" sz="1300" dirty="0">
-                <a:solidFill>
-                  <a:srgbClr val="1E1208"/>
-                </a:solidFill>
-                <a:latin typeface="Arial" pitchFamily="34" charset="0"/>
-                <a:ea typeface="Arial" pitchFamily="34" charset="-122"/>
-                <a:cs typeface="Arial" pitchFamily="34" charset="-120"/>
-              </a:rPr>
-              <a:t>The optional AI tutor stays inside a lesson; the principal can switch it off</a:t>
-            </a:r>
-            <a:endParaRPr lang="en-US" sz="1300" dirty="0"/>
-          </a:p>
-          <a:p>
-            <a:pPr algn="l" marL="342900" indent="-342900">
-              <a:lnSpc>
-                <a:spcPct val="120000"/>
-              </a:lnSpc>
-              <a:buSzPct val="100000"/>
-              <a:buChar char="■"/>
-            </a:pPr>
-            <a:r>
-              <a:rPr lang="en-US" sz="1300" dirty="0">
-                <a:solidFill>
-                  <a:srgbClr val="1E1208"/>
-                </a:solidFill>
-                <a:latin typeface="Arial" pitchFamily="34" charset="0"/>
-                <a:ea typeface="Arial" pitchFamily="34" charset="-122"/>
-                <a:cs typeface="Arial" pitchFamily="34" charset="-120"/>
-              </a:rPr>
-              <a:t>AI is told to use Jamaican examples, the National Standards Curriculum and Vision 2030</a:t>
-            </a:r>
-            <a:endParaRPr lang="en-US" sz="1300" dirty="0"/>
+              <a:t>The products share the school, the people and the topic list.</a:t>
+            </a:r>
+            <a:endParaRPr lang="en-US" sz="1400" dirty="0"/>
           </a:p>
         </p:txBody>
       </p:sp>
@@ -30116,7 +29147,7 @@
                 <a:ea typeface="Courier New" pitchFamily="34" charset="-122"/>
                 <a:cs typeface="Courier New" pitchFamily="34" charset="-120"/>
               </a:rPr>
-              <a:t>YOU ASKED. WE BUILT.</a:t>
+              <a:t>TRUST</a:t>
             </a:r>
             <a:endParaRPr lang="en-US" sz="1150" dirty="0"/>
           </a:p>
@@ -30149,7 +29180,7 @@
               <a:buNone/>
             </a:pPr>
             <a:r>
-              <a:rPr lang="en-US" sz="4100" dirty="0">
+              <a:rPr lang="en-US" sz="4300" dirty="0">
                 <a:solidFill>
                   <a:srgbClr val="1E1208"/>
                 </a:solidFill>
@@ -30157,6 +29188,2813 @@
                 <a:ea typeface="Impact" pitchFamily="34" charset="-122"/>
                 <a:cs typeface="Impact" pitchFamily="34" charset="-120"/>
               </a:rPr>
+              <a:t>TRUST, DATA AND AI WITH A PERSON IN CHARGE</a:t>
+            </a:r>
+            <a:endParaRPr lang="en-US" sz="4300" dirty="0"/>
+          </a:p>
+        </p:txBody>
+      </p:sp>
+      <p:sp>
+        <p:nvSpPr>
+          <p:cNvPr id="15" name="Shape 12"/>
+          <p:cNvSpPr/>
+          <p:nvPr/>
+        </p:nvSpPr>
+        <p:spPr>
+          <a:xfrm>
+            <a:off x="1417320" y="1965960"/>
+            <a:ext cx="4663440" cy="4114800"/>
+          </a:xfrm>
+          <a:prstGeom prst="rect">
+            <a:avLst/>
+          </a:prstGeom>
+          <a:solidFill>
+            <a:srgbClr val="FFFFFF"/>
+          </a:solidFill>
+          <a:ln w="25400">
+            <a:solidFill>
+              <a:srgbClr val="1E1208"/>
+            </a:solidFill>
+            <a:prstDash val="solid"/>
+          </a:ln>
+        </p:spPr>
+      </p:sp>
+      <p:sp>
+        <p:nvSpPr>
+          <p:cNvPr id="16" name="Shape 13"/>
+          <p:cNvSpPr/>
+          <p:nvPr/>
+        </p:nvSpPr>
+        <p:spPr>
+          <a:xfrm>
+            <a:off x="1417320" y="1965960"/>
+            <a:ext cx="4663440" cy="731520"/>
+          </a:xfrm>
+          <a:prstGeom prst="rect">
+            <a:avLst/>
+          </a:prstGeom>
+          <a:solidFill>
+            <a:srgbClr val="1E1208"/>
+          </a:solidFill>
+          <a:ln w="25400">
+            <a:solidFill>
+              <a:srgbClr val="1E1208"/>
+            </a:solidFill>
+            <a:prstDash val="solid"/>
+          </a:ln>
+        </p:spPr>
+      </p:sp>
+      <p:sp>
+        <p:nvSpPr>
+          <p:cNvPr id="17" name="Text 14"/>
+          <p:cNvSpPr/>
+          <p:nvPr/>
+        </p:nvSpPr>
+        <p:spPr>
+          <a:xfrm>
+            <a:off x="1645920" y="1965960"/>
+            <a:ext cx="4206240" cy="731520"/>
+          </a:xfrm>
+          <a:prstGeom prst="rect">
+            <a:avLst/>
+          </a:prstGeom>
+          <a:noFill/>
+          <a:ln/>
+        </p:spPr>
+        <p:txBody>
+          <a:bodyPr wrap="square" lIns="0" tIns="0" rIns="0" bIns="0" rtlCol="0" anchor="ctr"/>
+          <a:lstStyle/>
+          <a:p>
+            <a:pPr algn="l" indent="0" marL="0">
+              <a:lnSpc>
+                <a:spcPct val="110000"/>
+              </a:lnSpc>
+              <a:buNone/>
+            </a:pPr>
+            <a:r>
+              <a:rPr lang="en-US" sz="2400" dirty="0">
+                <a:solidFill>
+                  <a:srgbClr val="FFFFFF"/>
+                </a:solidFill>
+                <a:latin typeface="Impact" pitchFamily="34" charset="0"/>
+                <a:ea typeface="Impact" pitchFamily="34" charset="-122"/>
+                <a:cs typeface="Impact" pitchFamily="34" charset="-120"/>
+              </a:rPr>
+              <a:t>YOUR DATA</a:t>
+            </a:r>
+            <a:endParaRPr lang="en-US" sz="2400" dirty="0"/>
+          </a:p>
+        </p:txBody>
+      </p:sp>
+      <p:sp>
+        <p:nvSpPr>
+          <p:cNvPr id="18" name="Text 15"/>
+          <p:cNvSpPr/>
+          <p:nvPr/>
+        </p:nvSpPr>
+        <p:spPr>
+          <a:xfrm>
+            <a:off x="1645920" y="2926080"/>
+            <a:ext cx="4206240" cy="3063240"/>
+          </a:xfrm>
+          <a:prstGeom prst="rect">
+            <a:avLst/>
+          </a:prstGeom>
+          <a:noFill/>
+          <a:ln/>
+        </p:spPr>
+        <p:txBody>
+          <a:bodyPr wrap="square" lIns="0" tIns="0" rIns="0" bIns="0" rtlCol="0" anchor="t"/>
+          <a:lstStyle/>
+          <a:p>
+            <a:pPr algn="l" marL="342900" indent="-342900">
+              <a:lnSpc>
+                <a:spcPct val="120000"/>
+              </a:lnSpc>
+              <a:buSzPct val="100000"/>
+              <a:buChar char="■"/>
+            </a:pPr>
+            <a:r>
+              <a:rPr lang="en-US" sz="1300" dirty="0">
+                <a:solidFill>
+                  <a:srgbClr val="1E1208"/>
+                </a:solidFill>
+                <a:latin typeface="Arial" pitchFamily="34" charset="0"/>
+                <a:ea typeface="Arial" pitchFamily="34" charset="-122"/>
+                <a:cs typeface="Arial" pitchFamily="34" charset="-120"/>
+              </a:rPr>
+              <a:t>Each school's data lives in its own separate environment</a:t>
+            </a:r>
+            <a:endParaRPr lang="en-US" sz="1300" dirty="0"/>
+          </a:p>
+          <a:p>
+            <a:pPr algn="l" marL="342900" indent="-342900">
+              <a:lnSpc>
+                <a:spcPct val="120000"/>
+              </a:lnSpc>
+              <a:buSzPct val="100000"/>
+              <a:buChar char="■"/>
+            </a:pPr>
+            <a:r>
+              <a:rPr lang="en-US" sz="1300" dirty="0">
+                <a:solidFill>
+                  <a:srgbClr val="1E1208"/>
+                </a:solidFill>
+                <a:latin typeface="Arial" pitchFamily="34" charset="0"/>
+                <a:ea typeface="Arial" pitchFamily="34" charset="-122"/>
+                <a:cs typeface="Arial" pitchFamily="34" charset="-120"/>
+              </a:rPr>
+              <a:t>Access rules are enforced by the database itself</a:t>
+            </a:r>
+            <a:endParaRPr lang="en-US" sz="1300" dirty="0"/>
+          </a:p>
+          <a:p>
+            <a:pPr algn="l" marL="342900" indent="-342900">
+              <a:lnSpc>
+                <a:spcPct val="120000"/>
+              </a:lnSpc>
+              <a:buSzPct val="100000"/>
+              <a:buChar char="■"/>
+            </a:pPr>
+            <a:r>
+              <a:rPr lang="en-US" sz="1300" dirty="0">
+                <a:solidFill>
+                  <a:srgbClr val="1E1208"/>
+                </a:solidFill>
+                <a:latin typeface="Arial" pitchFamily="34" charset="0"/>
+                <a:ea typeface="Arial" pitchFamily="34" charset="-122"/>
+                <a:cs typeface="Arial" pitchFamily="34" charset="-120"/>
+              </a:rPr>
+              <a:t>Two-factor sign-in is required for all staff</a:t>
+            </a:r>
+            <a:endParaRPr lang="en-US" sz="1300" dirty="0"/>
+          </a:p>
+          <a:p>
+            <a:pPr algn="l" marL="342900" indent="-342900">
+              <a:lnSpc>
+                <a:spcPct val="120000"/>
+              </a:lnSpc>
+              <a:buSzPct val="100000"/>
+              <a:buChar char="■"/>
+            </a:pPr>
+            <a:r>
+              <a:rPr lang="en-US" sz="1300" dirty="0">
+                <a:solidFill>
+                  <a:srgbClr val="1E1208"/>
+                </a:solidFill>
+                <a:latin typeface="Arial" pitchFamily="34" charset="0"/>
+                <a:ea typeface="Arial" pitchFamily="34" charset="-122"/>
+                <a:cs typeface="Arial" pitchFamily="34" charset="-120"/>
+              </a:rPr>
+              <a:t>Handled in line with Jamaica's Data Protection Act</a:t>
+            </a:r>
+            <a:endParaRPr lang="en-US" sz="1300" dirty="0"/>
+          </a:p>
+        </p:txBody>
+      </p:sp>
+      <p:sp>
+        <p:nvSpPr>
+          <p:cNvPr id="19" name="Shape 16"/>
+          <p:cNvSpPr/>
+          <p:nvPr/>
+        </p:nvSpPr>
+        <p:spPr>
+          <a:xfrm>
+            <a:off x="6217920" y="1965960"/>
+            <a:ext cx="4663440" cy="4114800"/>
+          </a:xfrm>
+          <a:prstGeom prst="rect">
+            <a:avLst/>
+          </a:prstGeom>
+          <a:solidFill>
+            <a:srgbClr val="FFFFFF"/>
+          </a:solidFill>
+          <a:ln w="25400">
+            <a:solidFill>
+              <a:srgbClr val="1E1208"/>
+            </a:solidFill>
+            <a:prstDash val="solid"/>
+          </a:ln>
+        </p:spPr>
+      </p:sp>
+      <p:sp>
+        <p:nvSpPr>
+          <p:cNvPr id="20" name="Shape 17"/>
+          <p:cNvSpPr/>
+          <p:nvPr/>
+        </p:nvSpPr>
+        <p:spPr>
+          <a:xfrm>
+            <a:off x="6217920" y="1965960"/>
+            <a:ext cx="4663440" cy="731520"/>
+          </a:xfrm>
+          <a:prstGeom prst="rect">
+            <a:avLst/>
+          </a:prstGeom>
+          <a:solidFill>
+            <a:srgbClr val="D4762A"/>
+          </a:solidFill>
+          <a:ln w="25400">
+            <a:solidFill>
+              <a:srgbClr val="1E1208"/>
+            </a:solidFill>
+            <a:prstDash val="solid"/>
+          </a:ln>
+        </p:spPr>
+      </p:sp>
+      <p:sp>
+        <p:nvSpPr>
+          <p:cNvPr id="21" name="Text 18"/>
+          <p:cNvSpPr/>
+          <p:nvPr/>
+        </p:nvSpPr>
+        <p:spPr>
+          <a:xfrm>
+            <a:off x="6446520" y="1965960"/>
+            <a:ext cx="4206240" cy="731520"/>
+          </a:xfrm>
+          <a:prstGeom prst="rect">
+            <a:avLst/>
+          </a:prstGeom>
+          <a:noFill/>
+          <a:ln/>
+        </p:spPr>
+        <p:txBody>
+          <a:bodyPr wrap="square" lIns="0" tIns="0" rIns="0" bIns="0" rtlCol="0" anchor="ctr"/>
+          <a:lstStyle/>
+          <a:p>
+            <a:pPr algn="l" indent="0" marL="0">
+              <a:lnSpc>
+                <a:spcPct val="110000"/>
+              </a:lnSpc>
+              <a:buNone/>
+            </a:pPr>
+            <a:r>
+              <a:rPr lang="en-US" sz="2400" dirty="0">
+                <a:solidFill>
+                  <a:srgbClr val="1E1208"/>
+                </a:solidFill>
+                <a:latin typeface="Impact" pitchFamily="34" charset="0"/>
+                <a:ea typeface="Impact" pitchFamily="34" charset="-122"/>
+                <a:cs typeface="Impact" pitchFamily="34" charset="-120"/>
+              </a:rPr>
+              <a:t>AI ON A SHORT LEASH</a:t>
+            </a:r>
+            <a:endParaRPr lang="en-US" sz="2400" dirty="0"/>
+          </a:p>
+        </p:txBody>
+      </p:sp>
+      <p:sp>
+        <p:nvSpPr>
+          <p:cNvPr id="22" name="Text 19"/>
+          <p:cNvSpPr/>
+          <p:nvPr/>
+        </p:nvSpPr>
+        <p:spPr>
+          <a:xfrm>
+            <a:off x="6446520" y="2926080"/>
+            <a:ext cx="4206240" cy="3063240"/>
+          </a:xfrm>
+          <a:prstGeom prst="rect">
+            <a:avLst/>
+          </a:prstGeom>
+          <a:noFill/>
+          <a:ln/>
+        </p:spPr>
+        <p:txBody>
+          <a:bodyPr wrap="square" lIns="0" tIns="0" rIns="0" bIns="0" rtlCol="0" anchor="t"/>
+          <a:lstStyle/>
+          <a:p>
+            <a:pPr algn="l" marL="342900" indent="-342900">
+              <a:lnSpc>
+                <a:spcPct val="120000"/>
+              </a:lnSpc>
+              <a:buSzPct val="100000"/>
+              <a:buChar char="■"/>
+            </a:pPr>
+            <a:r>
+              <a:rPr lang="en-US" sz="1300" dirty="0">
+                <a:solidFill>
+                  <a:srgbClr val="1E1208"/>
+                </a:solidFill>
+                <a:latin typeface="Arial" pitchFamily="34" charset="0"/>
+                <a:ea typeface="Arial" pitchFamily="34" charset="-122"/>
+                <a:cs typeface="Arial" pitchFamily="34" charset="-120"/>
+              </a:rPr>
+              <a:t>AI helps a teacher write: polish a question, import a PDF, draft a lesson plan</a:t>
+            </a:r>
+            <a:endParaRPr lang="en-US" sz="1300" dirty="0"/>
+          </a:p>
+          <a:p>
+            <a:pPr algn="l" marL="342900" indent="-342900">
+              <a:lnSpc>
+                <a:spcPct val="120000"/>
+              </a:lnSpc>
+              <a:buSzPct val="100000"/>
+              <a:buChar char="■"/>
+            </a:pPr>
+            <a:r>
+              <a:rPr lang="en-US" sz="1300" dirty="0">
+                <a:solidFill>
+                  <a:srgbClr val="1E1208"/>
+                </a:solidFill>
+                <a:latin typeface="Arial" pitchFamily="34" charset="0"/>
+                <a:ea typeface="Arial" pitchFamily="34" charset="-122"/>
+                <a:cs typeface="Arial" pitchFamily="34" charset="-120"/>
+              </a:rPr>
+              <a:t>AI suggests essay marks. It never saves one; the teacher edits and decides</a:t>
+            </a:r>
+            <a:endParaRPr lang="en-US" sz="1300" dirty="0"/>
+          </a:p>
+          <a:p>
+            <a:pPr algn="l" marL="342900" indent="-342900">
+              <a:lnSpc>
+                <a:spcPct val="120000"/>
+              </a:lnSpc>
+              <a:buSzPct val="100000"/>
+              <a:buChar char="■"/>
+            </a:pPr>
+            <a:r>
+              <a:rPr lang="en-US" sz="1300" dirty="0">
+                <a:solidFill>
+                  <a:srgbClr val="1E1208"/>
+                </a:solidFill>
+                <a:latin typeface="Arial" pitchFamily="34" charset="0"/>
+                <a:ea typeface="Arial" pitchFamily="34" charset="-122"/>
+                <a:cs typeface="Arial" pitchFamily="34" charset="-120"/>
+              </a:rPr>
+              <a:t>Every suggestion is reviewed by a person before it is used</a:t>
+            </a:r>
+            <a:endParaRPr lang="en-US" sz="1300" dirty="0"/>
+          </a:p>
+          <a:p>
+            <a:pPr algn="l" marL="342900" indent="-342900">
+              <a:lnSpc>
+                <a:spcPct val="120000"/>
+              </a:lnSpc>
+              <a:buSzPct val="100000"/>
+              <a:buChar char="■"/>
+            </a:pPr>
+            <a:r>
+              <a:rPr lang="en-US" sz="1300" dirty="0">
+                <a:solidFill>
+                  <a:srgbClr val="1E1208"/>
+                </a:solidFill>
+                <a:latin typeface="Arial" pitchFamily="34" charset="0"/>
+                <a:ea typeface="Arial" pitchFamily="34" charset="-122"/>
+                <a:cs typeface="Arial" pitchFamily="34" charset="-120"/>
+              </a:rPr>
+              <a:t>The optional AI tutor stays inside a lesson; the principal can switch it off</a:t>
+            </a:r>
+            <a:endParaRPr lang="en-US" sz="1300" dirty="0"/>
+          </a:p>
+          <a:p>
+            <a:pPr algn="l" marL="342900" indent="-342900">
+              <a:lnSpc>
+                <a:spcPct val="120000"/>
+              </a:lnSpc>
+              <a:buSzPct val="100000"/>
+              <a:buChar char="■"/>
+            </a:pPr>
+            <a:r>
+              <a:rPr lang="en-US" sz="1300" dirty="0">
+                <a:solidFill>
+                  <a:srgbClr val="1E1208"/>
+                </a:solidFill>
+                <a:latin typeface="Arial" pitchFamily="34" charset="0"/>
+                <a:ea typeface="Arial" pitchFamily="34" charset="-122"/>
+                <a:cs typeface="Arial" pitchFamily="34" charset="-120"/>
+              </a:rPr>
+              <a:t>AI is told to use Jamaican examples, the National Standards Curriculum and Vision 2030</a:t>
+            </a:r>
+            <a:endParaRPr lang="en-US" sz="1300" dirty="0"/>
+          </a:p>
+        </p:txBody>
+      </p:sp>
+    </p:spTree>
+  </p:cSld>
+  <p:clrMapOvr>
+    <a:masterClrMapping/>
+  </p:clrMapOvr>
+</p:sld>
+</file>
+
+<file path=ppt/slides/slide3.xml><?xml version="1.0" encoding="utf-8"?>
+<p:sld xmlns:a="http://schemas.openxmlformats.org/drawingml/2006/main" xmlns:r="http://schemas.openxmlformats.org/officeDocument/2006/relationships" xmlns:p="http://schemas.openxmlformats.org/presentationml/2006/main">
+  <p:cSld name="Slide 3">
+    <p:bg>
+      <p:bgPr>
+        <a:blipFill dpi="0" rotWithShape="1">
+          <a:blip r:embed="rId1">
+            <a:lum/>
+          </a:blip>
+          <a:srcRect/>
+          <a:stretch>
+            <a:fillRect/>
+          </a:stretch>
+        </a:blipFill>
+        <a:effectLst/>
+      </p:bgPr>
+    </p:bg>
+    <p:spTree>
+      <p:nvGrpSpPr>
+        <p:cNvPr id="1" name=""/>
+        <p:cNvGrpSpPr/>
+        <p:nvPr/>
+      </p:nvGrpSpPr>
+      <p:grpSpPr>
+        <a:xfrm>
+          <a:off x="0" y="0"/>
+          <a:ext cx="0" cy="0"/>
+          <a:chOff x="0" y="0"/>
+          <a:chExt cx="0" cy="0"/>
+        </a:xfrm>
+      </p:grpSpPr>
+      <p:sp>
+        <p:nvSpPr>
+          <p:cNvPr id="2" name="Shape 0"/>
+          <p:cNvSpPr/>
+          <p:nvPr/>
+        </p:nvSpPr>
+        <p:spPr>
+          <a:xfrm>
+            <a:off x="11588191" y="502920"/>
+            <a:ext cx="603504" cy="1152144"/>
+          </a:xfrm>
+          <a:prstGeom prst="rect">
+            <a:avLst/>
+          </a:prstGeom>
+          <a:solidFill>
+            <a:srgbClr val="FDFDFB"/>
+          </a:solidFill>
+          <a:ln w="25400">
+            <a:solidFill>
+              <a:srgbClr val="1E1208"/>
+            </a:solidFill>
+            <a:prstDash val="solid"/>
+          </a:ln>
+        </p:spPr>
+      </p:sp>
+      <p:sp>
+        <p:nvSpPr>
+          <p:cNvPr id="3" name="Text 1"/>
+          <p:cNvSpPr/>
+          <p:nvPr/>
+        </p:nvSpPr>
+        <p:spPr>
+          <a:xfrm>
+            <a:off x="11588191" y="502920"/>
+            <a:ext cx="603504" cy="1152144"/>
+          </a:xfrm>
+          <a:prstGeom prst="rect">
+            <a:avLst/>
+          </a:prstGeom>
+          <a:noFill/>
+          <a:ln/>
+        </p:spPr>
+        <p:txBody>
+          <a:bodyPr wrap="square" lIns="0" tIns="0" rIns="0" bIns="0" rtlCol="0" anchor="ctr" vert="vert270"/>
+          <a:lstStyle/>
+          <a:p>
+            <a:pPr algn="ctr" indent="0" marL="0">
+              <a:buNone/>
+            </a:pPr>
+            <a:r>
+              <a:rPr lang="en-US" sz="1200" b="1" spc="300" kern="0" dirty="0">
+                <a:solidFill>
+                  <a:srgbClr val="1E1208"/>
+                </a:solidFill>
+                <a:latin typeface="Courier New" pitchFamily="34" charset="0"/>
+                <a:ea typeface="Courier New" pitchFamily="34" charset="-122"/>
+                <a:cs typeface="Courier New" pitchFamily="34" charset="-120"/>
+              </a:rPr>
+              <a:t>SURVEY</a:t>
+            </a:r>
+            <a:endParaRPr lang="en-US" sz="1200" dirty="0"/>
+          </a:p>
+        </p:txBody>
+      </p:sp>
+      <p:sp>
+        <p:nvSpPr>
+          <p:cNvPr id="4" name="Shape 2"/>
+          <p:cNvSpPr/>
+          <p:nvPr/>
+        </p:nvSpPr>
+        <p:spPr>
+          <a:xfrm>
+            <a:off x="11588191" y="1764792"/>
+            <a:ext cx="603504" cy="1152144"/>
+          </a:xfrm>
+          <a:prstGeom prst="rect">
+            <a:avLst/>
+          </a:prstGeom>
+          <a:solidFill>
+            <a:srgbClr val="D4762A"/>
+          </a:solidFill>
+          <a:ln w="25400">
+            <a:solidFill>
+              <a:srgbClr val="1E1208"/>
+            </a:solidFill>
+            <a:prstDash val="solid"/>
+          </a:ln>
+        </p:spPr>
+      </p:sp>
+      <p:sp>
+        <p:nvSpPr>
+          <p:cNvPr id="5" name="Text 3"/>
+          <p:cNvSpPr/>
+          <p:nvPr/>
+        </p:nvSpPr>
+        <p:spPr>
+          <a:xfrm>
+            <a:off x="11588191" y="1764792"/>
+            <a:ext cx="603504" cy="1152144"/>
+          </a:xfrm>
+          <a:prstGeom prst="rect">
+            <a:avLst/>
+          </a:prstGeom>
+          <a:noFill/>
+          <a:ln/>
+        </p:spPr>
+        <p:txBody>
+          <a:bodyPr wrap="square" lIns="0" tIns="0" rIns="0" bIns="0" rtlCol="0" anchor="ctr" vert="vert270"/>
+          <a:lstStyle/>
+          <a:p>
+            <a:pPr algn="ctr" indent="0" marL="0">
+              <a:buNone/>
+            </a:pPr>
+            <a:r>
+              <a:rPr lang="en-US" sz="1200" b="1" spc="300" kern="0" dirty="0">
+                <a:solidFill>
+                  <a:srgbClr val="1E1208"/>
+                </a:solidFill>
+                <a:latin typeface="Courier New" pitchFamily="34" charset="0"/>
+                <a:ea typeface="Courier New" pitchFamily="34" charset="-122"/>
+                <a:cs typeface="Courier New" pitchFamily="34" charset="-120"/>
+              </a:rPr>
+              <a:t>ASSESS</a:t>
+            </a:r>
+            <a:endParaRPr lang="en-US" sz="1200" dirty="0"/>
+          </a:p>
+        </p:txBody>
+      </p:sp>
+      <p:sp>
+        <p:nvSpPr>
+          <p:cNvPr id="6" name="Shape 4"/>
+          <p:cNvSpPr/>
+          <p:nvPr/>
+        </p:nvSpPr>
+        <p:spPr>
+          <a:xfrm>
+            <a:off x="11588191" y="3026664"/>
+            <a:ext cx="603504" cy="1152144"/>
+          </a:xfrm>
+          <a:prstGeom prst="rect">
+            <a:avLst/>
+          </a:prstGeom>
+          <a:solidFill>
+            <a:srgbClr val="E3B51E"/>
+          </a:solidFill>
+          <a:ln w="25400">
+            <a:solidFill>
+              <a:srgbClr val="1E1208"/>
+            </a:solidFill>
+            <a:prstDash val="solid"/>
+          </a:ln>
+        </p:spPr>
+      </p:sp>
+      <p:sp>
+        <p:nvSpPr>
+          <p:cNvPr id="7" name="Text 5"/>
+          <p:cNvSpPr/>
+          <p:nvPr/>
+        </p:nvSpPr>
+        <p:spPr>
+          <a:xfrm>
+            <a:off x="11588191" y="3026664"/>
+            <a:ext cx="603504" cy="1152144"/>
+          </a:xfrm>
+          <a:prstGeom prst="rect">
+            <a:avLst/>
+          </a:prstGeom>
+          <a:noFill/>
+          <a:ln/>
+        </p:spPr>
+        <p:txBody>
+          <a:bodyPr wrap="square" lIns="0" tIns="0" rIns="0" bIns="0" rtlCol="0" anchor="ctr" vert="vert270"/>
+          <a:lstStyle/>
+          <a:p>
+            <a:pPr algn="ctr" indent="0" marL="0">
+              <a:buNone/>
+            </a:pPr>
+            <a:r>
+              <a:rPr lang="en-US" sz="1200" b="1" spc="300" kern="0" dirty="0">
+                <a:solidFill>
+                  <a:srgbClr val="1E1208"/>
+                </a:solidFill>
+                <a:latin typeface="Courier New" pitchFamily="34" charset="0"/>
+                <a:ea typeface="Courier New" pitchFamily="34" charset="-122"/>
+                <a:cs typeface="Courier New" pitchFamily="34" charset="-120"/>
+              </a:rPr>
+              <a:t>LEARN</a:t>
+            </a:r>
+            <a:endParaRPr lang="en-US" sz="1200" dirty="0"/>
+          </a:p>
+        </p:txBody>
+      </p:sp>
+      <p:sp>
+        <p:nvSpPr>
+          <p:cNvPr id="8" name="Shape 6"/>
+          <p:cNvSpPr/>
+          <p:nvPr/>
+        </p:nvSpPr>
+        <p:spPr>
+          <a:xfrm>
+            <a:off x="11588191" y="4288536"/>
+            <a:ext cx="603504" cy="1152144"/>
+          </a:xfrm>
+          <a:prstGeom prst="rect">
+            <a:avLst/>
+          </a:prstGeom>
+          <a:solidFill>
+            <a:srgbClr val="1E1208"/>
+          </a:solidFill>
+          <a:ln w="25400">
+            <a:solidFill>
+              <a:srgbClr val="1E1208"/>
+            </a:solidFill>
+            <a:prstDash val="solid"/>
+          </a:ln>
+        </p:spPr>
+      </p:sp>
+      <p:sp>
+        <p:nvSpPr>
+          <p:cNvPr id="9" name="Text 7"/>
+          <p:cNvSpPr/>
+          <p:nvPr/>
+        </p:nvSpPr>
+        <p:spPr>
+          <a:xfrm>
+            <a:off x="11588191" y="4288536"/>
+            <a:ext cx="603504" cy="1152144"/>
+          </a:xfrm>
+          <a:prstGeom prst="rect">
+            <a:avLst/>
+          </a:prstGeom>
+          <a:noFill/>
+          <a:ln/>
+        </p:spPr>
+        <p:txBody>
+          <a:bodyPr wrap="square" lIns="0" tIns="0" rIns="0" bIns="0" rtlCol="0" anchor="ctr" vert="vert270"/>
+          <a:lstStyle/>
+          <a:p>
+            <a:pPr algn="ctr" indent="0" marL="0">
+              <a:buNone/>
+            </a:pPr>
+            <a:r>
+              <a:rPr lang="en-US" sz="1200" b="1" spc="300" kern="0" dirty="0">
+                <a:solidFill>
+                  <a:srgbClr val="FFFFFF"/>
+                </a:solidFill>
+                <a:latin typeface="Courier New" pitchFamily="34" charset="0"/>
+                <a:ea typeface="Courier New" pitchFamily="34" charset="-122"/>
+                <a:cs typeface="Courier New" pitchFamily="34" charset="-120"/>
+              </a:rPr>
+              <a:t>PLAY</a:t>
+            </a:r>
+            <a:endParaRPr lang="en-US" sz="1200" dirty="0"/>
+          </a:p>
+        </p:txBody>
+      </p:sp>
+      <p:sp>
+        <p:nvSpPr>
+          <p:cNvPr id="10" name="Shape 8"/>
+          <p:cNvSpPr/>
+          <p:nvPr/>
+        </p:nvSpPr>
+        <p:spPr>
+          <a:xfrm>
+            <a:off x="11588191" y="5550408"/>
+            <a:ext cx="603504" cy="1152144"/>
+          </a:xfrm>
+          <a:prstGeom prst="rect">
+            <a:avLst/>
+          </a:prstGeom>
+          <a:solidFill>
+            <a:srgbClr val="FDFDFB"/>
+          </a:solidFill>
+          <a:ln w="25400">
+            <a:solidFill>
+              <a:srgbClr val="1E1208"/>
+            </a:solidFill>
+            <a:prstDash val="solid"/>
+          </a:ln>
+        </p:spPr>
+      </p:sp>
+      <p:sp>
+        <p:nvSpPr>
+          <p:cNvPr id="11" name="Text 9"/>
+          <p:cNvSpPr/>
+          <p:nvPr/>
+        </p:nvSpPr>
+        <p:spPr>
+          <a:xfrm>
+            <a:off x="11588191" y="5550408"/>
+            <a:ext cx="603504" cy="1152144"/>
+          </a:xfrm>
+          <a:prstGeom prst="rect">
+            <a:avLst/>
+          </a:prstGeom>
+          <a:noFill/>
+          <a:ln/>
+        </p:spPr>
+        <p:txBody>
+          <a:bodyPr wrap="square" lIns="0" tIns="0" rIns="0" bIns="0" rtlCol="0" anchor="ctr" vert="vert270"/>
+          <a:lstStyle/>
+          <a:p>
+            <a:pPr algn="ctr" indent="0" marL="0">
+              <a:buNone/>
+            </a:pPr>
+            <a:r>
+              <a:rPr lang="en-US" sz="1200" b="1" spc="300" kern="0" dirty="0">
+                <a:solidFill>
+                  <a:srgbClr val="1E1208"/>
+                </a:solidFill>
+                <a:latin typeface="Courier New" pitchFamily="34" charset="0"/>
+                <a:ea typeface="Courier New" pitchFamily="34" charset="-122"/>
+                <a:cs typeface="Courier New" pitchFamily="34" charset="-120"/>
+              </a:rPr>
+              <a:t>WHY US</a:t>
+            </a:r>
+            <a:endParaRPr lang="en-US" sz="1200" dirty="0"/>
+          </a:p>
+        </p:txBody>
+      </p:sp>
+      <p:sp>
+        <p:nvSpPr>
+          <p:cNvPr id="13" name="Text 10"/>
+          <p:cNvSpPr/>
+          <p:nvPr/>
+        </p:nvSpPr>
+        <p:spPr>
+          <a:xfrm>
+            <a:off x="1417320" y="457200"/>
+            <a:ext cx="9144000" cy="274320"/>
+          </a:xfrm>
+          <a:prstGeom prst="rect">
+            <a:avLst/>
+          </a:prstGeom>
+          <a:noFill/>
+          <a:ln/>
+        </p:spPr>
+        <p:txBody>
+          <a:bodyPr wrap="square" lIns="0" tIns="0" rIns="0" bIns="0" rtlCol="0" anchor="ctr"/>
+          <a:lstStyle/>
+          <a:p>
+            <a:pPr indent="0" marL="0">
+              <a:buNone/>
+            </a:pPr>
+            <a:r>
+              <a:rPr lang="en-US" sz="1150" b="1" spc="300" kern="0" dirty="0">
+                <a:solidFill>
+                  <a:srgbClr val="1E1208"/>
+                </a:solidFill>
+                <a:latin typeface="Courier New" pitchFamily="34" charset="0"/>
+                <a:ea typeface="Courier New" pitchFamily="34" charset="-122"/>
+                <a:cs typeface="Courier New" pitchFamily="34" charset="-120"/>
+              </a:rPr>
+              <a:t>THE PROBLEM</a:t>
+            </a:r>
+            <a:endParaRPr lang="en-US" sz="1150" dirty="0"/>
+          </a:p>
+        </p:txBody>
+      </p:sp>
+      <p:sp>
+        <p:nvSpPr>
+          <p:cNvPr id="14" name="Text 11"/>
+          <p:cNvSpPr/>
+          <p:nvPr/>
+        </p:nvSpPr>
+        <p:spPr>
+          <a:xfrm>
+            <a:off x="1417320" y="777240"/>
+            <a:ext cx="9509760" cy="1005840"/>
+          </a:xfrm>
+          <a:prstGeom prst="rect">
+            <a:avLst/>
+          </a:prstGeom>
+          <a:noFill/>
+          <a:ln/>
+        </p:spPr>
+        <p:txBody>
+          <a:bodyPr wrap="square" lIns="0" tIns="0" rIns="0" bIns="0" rtlCol="0" anchor="t">
+            <a:normAutofit/>
+          </a:bodyPr>
+          <a:lstStyle/>
+          <a:p>
+            <a:pPr indent="0" marL="0">
+              <a:buNone/>
+            </a:pPr>
+            <a:r>
+              <a:rPr lang="en-US" sz="4300" dirty="0">
+                <a:solidFill>
+                  <a:srgbClr val="1E1208"/>
+                </a:solidFill>
+                <a:latin typeface="Impact" pitchFamily="34" charset="0"/>
+                <a:ea typeface="Impact" pitchFamily="34" charset="-122"/>
+                <a:cs typeface="Impact" pitchFamily="34" charset="-120"/>
+              </a:rPr>
+              <a:t>EVERY TERM, LEARNING TRAVELS ONTO PAPER, AND BACK AGAIN</a:t>
+            </a:r>
+            <a:endParaRPr lang="en-US" sz="4300" dirty="0"/>
+          </a:p>
+        </p:txBody>
+      </p:sp>
+      <p:sp>
+        <p:nvSpPr>
+          <p:cNvPr id="15" name="Shape 12"/>
+          <p:cNvSpPr/>
+          <p:nvPr/>
+        </p:nvSpPr>
+        <p:spPr>
+          <a:xfrm>
+            <a:off x="1417320" y="2148840"/>
+            <a:ext cx="2240280" cy="1508760"/>
+          </a:xfrm>
+          <a:prstGeom prst="rect">
+            <a:avLst/>
+          </a:prstGeom>
+          <a:solidFill>
+            <a:srgbClr val="FFFFFF"/>
+          </a:solidFill>
+          <a:ln w="25400">
+            <a:solidFill>
+              <a:srgbClr val="1E1208"/>
+            </a:solidFill>
+            <a:prstDash val="solid"/>
+          </a:ln>
+        </p:spPr>
+      </p:sp>
+      <p:sp>
+        <p:nvSpPr>
+          <p:cNvPr id="16" name="Shape 13"/>
+          <p:cNvSpPr/>
+          <p:nvPr/>
+        </p:nvSpPr>
+        <p:spPr>
+          <a:xfrm>
+            <a:off x="1417320" y="2148840"/>
+            <a:ext cx="640080" cy="1508760"/>
+          </a:xfrm>
+          <a:prstGeom prst="rect">
+            <a:avLst/>
+          </a:prstGeom>
+          <a:solidFill>
+            <a:srgbClr val="FBE9D6"/>
+          </a:solidFill>
+          <a:ln w="25400">
+            <a:solidFill>
+              <a:srgbClr val="1E1208"/>
+            </a:solidFill>
+            <a:prstDash val="solid"/>
+          </a:ln>
+        </p:spPr>
+      </p:sp>
+      <p:sp>
+        <p:nvSpPr>
+          <p:cNvPr id="17" name="Text 14"/>
+          <p:cNvSpPr/>
+          <p:nvPr/>
+        </p:nvSpPr>
+        <p:spPr>
+          <a:xfrm>
+            <a:off x="1417320" y="2148840"/>
+            <a:ext cx="640080" cy="1508760"/>
+          </a:xfrm>
+          <a:prstGeom prst="rect">
+            <a:avLst/>
+          </a:prstGeom>
+          <a:noFill/>
+          <a:ln/>
+        </p:spPr>
+        <p:txBody>
+          <a:bodyPr wrap="square" lIns="0" tIns="0" rIns="0" bIns="0" rtlCol="0" anchor="ctr"/>
+          <a:lstStyle/>
+          <a:p>
+            <a:pPr algn="ctr" indent="0" marL="0">
+              <a:lnSpc>
+                <a:spcPct val="110000"/>
+              </a:lnSpc>
+              <a:buNone/>
+            </a:pPr>
+            <a:r>
+              <a:rPr lang="en-US" sz="3600" dirty="0">
+                <a:solidFill>
+                  <a:srgbClr val="1E1208"/>
+                </a:solidFill>
+                <a:latin typeface="Impact" pitchFamily="34" charset="0"/>
+                <a:ea typeface="Impact" pitchFamily="34" charset="-122"/>
+                <a:cs typeface="Impact" pitchFamily="34" charset="-120"/>
+              </a:rPr>
+              <a:t>1</a:t>
+            </a:r>
+            <a:endParaRPr lang="en-US" sz="3600" dirty="0"/>
+          </a:p>
+        </p:txBody>
+      </p:sp>
+      <p:sp>
+        <p:nvSpPr>
+          <p:cNvPr id="18" name="Text 15"/>
+          <p:cNvSpPr/>
+          <p:nvPr/>
+        </p:nvSpPr>
+        <p:spPr>
+          <a:xfrm>
+            <a:off x="2167128" y="2377440"/>
+            <a:ext cx="1417320" cy="365760"/>
+          </a:xfrm>
+          <a:prstGeom prst="rect">
+            <a:avLst/>
+          </a:prstGeom>
+          <a:noFill/>
+          <a:ln/>
+        </p:spPr>
+        <p:txBody>
+          <a:bodyPr wrap="square" lIns="0" tIns="0" rIns="0" bIns="0" rtlCol="0" anchor="t"/>
+          <a:lstStyle/>
+          <a:p>
+            <a:pPr algn="l" indent="0" marL="0">
+              <a:lnSpc>
+                <a:spcPct val="110000"/>
+              </a:lnSpc>
+              <a:buNone/>
+            </a:pPr>
+            <a:r>
+              <a:rPr lang="en-US" sz="2000" dirty="0">
+                <a:solidFill>
+                  <a:srgbClr val="1E1208"/>
+                </a:solidFill>
+                <a:latin typeface="Impact" pitchFamily="34" charset="0"/>
+                <a:ea typeface="Impact" pitchFamily="34" charset="-122"/>
+                <a:cs typeface="Impact" pitchFamily="34" charset="-120"/>
+              </a:rPr>
+              <a:t>CREATE</a:t>
+            </a:r>
+            <a:endParaRPr lang="en-US" sz="2000" dirty="0"/>
+          </a:p>
+        </p:txBody>
+      </p:sp>
+      <p:sp>
+        <p:nvSpPr>
+          <p:cNvPr id="19" name="Text 16"/>
+          <p:cNvSpPr/>
+          <p:nvPr/>
+        </p:nvSpPr>
+        <p:spPr>
+          <a:xfrm>
+            <a:off x="2167128" y="2834640"/>
+            <a:ext cx="1417320" cy="731520"/>
+          </a:xfrm>
+          <a:prstGeom prst="rect">
+            <a:avLst/>
+          </a:prstGeom>
+          <a:noFill/>
+          <a:ln/>
+        </p:spPr>
+        <p:txBody>
+          <a:bodyPr wrap="square" lIns="0" tIns="0" rIns="0" bIns="0" rtlCol="0" anchor="t"/>
+          <a:lstStyle/>
+          <a:p>
+            <a:pPr algn="l" indent="0" marL="0">
+              <a:lnSpc>
+                <a:spcPct val="110000"/>
+              </a:lnSpc>
+              <a:buNone/>
+            </a:pPr>
+            <a:r>
+              <a:rPr lang="en-US" sz="1250" dirty="0">
+                <a:solidFill>
+                  <a:srgbClr val="555555"/>
+                </a:solidFill>
+                <a:latin typeface="Arial" pitchFamily="34" charset="0"/>
+                <a:ea typeface="Arial" pitchFamily="34" charset="-122"/>
+                <a:cs typeface="Arial" pitchFamily="34" charset="-120"/>
+              </a:rPr>
+              <a:t>Teacher creates the exam</a:t>
+            </a:r>
+            <a:endParaRPr lang="en-US" sz="1250" dirty="0"/>
+          </a:p>
+        </p:txBody>
+      </p:sp>
+      <p:sp>
+        <p:nvSpPr>
+          <p:cNvPr id="20" name="Shape 17"/>
+          <p:cNvSpPr/>
+          <p:nvPr/>
+        </p:nvSpPr>
+        <p:spPr>
+          <a:xfrm>
+            <a:off x="3813048" y="2148840"/>
+            <a:ext cx="2240280" cy="1508760"/>
+          </a:xfrm>
+          <a:prstGeom prst="rect">
+            <a:avLst/>
+          </a:prstGeom>
+          <a:solidFill>
+            <a:srgbClr val="FFFFFF"/>
+          </a:solidFill>
+          <a:ln w="25400">
+            <a:solidFill>
+              <a:srgbClr val="1E1208"/>
+            </a:solidFill>
+            <a:prstDash val="solid"/>
+          </a:ln>
+        </p:spPr>
+      </p:sp>
+      <p:sp>
+        <p:nvSpPr>
+          <p:cNvPr id="21" name="Shape 18"/>
+          <p:cNvSpPr/>
+          <p:nvPr/>
+        </p:nvSpPr>
+        <p:spPr>
+          <a:xfrm>
+            <a:off x="3813048" y="2148840"/>
+            <a:ext cx="640080" cy="1508760"/>
+          </a:xfrm>
+          <a:prstGeom prst="rect">
+            <a:avLst/>
+          </a:prstGeom>
+          <a:solidFill>
+            <a:srgbClr val="FBE9D6"/>
+          </a:solidFill>
+          <a:ln w="25400">
+            <a:solidFill>
+              <a:srgbClr val="1E1208"/>
+            </a:solidFill>
+            <a:prstDash val="solid"/>
+          </a:ln>
+        </p:spPr>
+      </p:sp>
+      <p:sp>
+        <p:nvSpPr>
+          <p:cNvPr id="22" name="Text 19"/>
+          <p:cNvSpPr/>
+          <p:nvPr/>
+        </p:nvSpPr>
+        <p:spPr>
+          <a:xfrm>
+            <a:off x="3813048" y="2148840"/>
+            <a:ext cx="640080" cy="1508760"/>
+          </a:xfrm>
+          <a:prstGeom prst="rect">
+            <a:avLst/>
+          </a:prstGeom>
+          <a:noFill/>
+          <a:ln/>
+        </p:spPr>
+        <p:txBody>
+          <a:bodyPr wrap="square" lIns="0" tIns="0" rIns="0" bIns="0" rtlCol="0" anchor="ctr"/>
+          <a:lstStyle/>
+          <a:p>
+            <a:pPr algn="ctr" indent="0" marL="0">
+              <a:lnSpc>
+                <a:spcPct val="110000"/>
+              </a:lnSpc>
+              <a:buNone/>
+            </a:pPr>
+            <a:r>
+              <a:rPr lang="en-US" sz="3600" dirty="0">
+                <a:solidFill>
+                  <a:srgbClr val="1E1208"/>
+                </a:solidFill>
+                <a:latin typeface="Impact" pitchFamily="34" charset="0"/>
+                <a:ea typeface="Impact" pitchFamily="34" charset="-122"/>
+                <a:cs typeface="Impact" pitchFamily="34" charset="-120"/>
+              </a:rPr>
+              <a:t>2</a:t>
+            </a:r>
+            <a:endParaRPr lang="en-US" sz="3600" dirty="0"/>
+          </a:p>
+        </p:txBody>
+      </p:sp>
+      <p:sp>
+        <p:nvSpPr>
+          <p:cNvPr id="23" name="Text 20"/>
+          <p:cNvSpPr/>
+          <p:nvPr/>
+        </p:nvSpPr>
+        <p:spPr>
+          <a:xfrm>
+            <a:off x="4562856" y="2377440"/>
+            <a:ext cx="1417320" cy="365760"/>
+          </a:xfrm>
+          <a:prstGeom prst="rect">
+            <a:avLst/>
+          </a:prstGeom>
+          <a:noFill/>
+          <a:ln/>
+        </p:spPr>
+        <p:txBody>
+          <a:bodyPr wrap="square" lIns="0" tIns="0" rIns="0" bIns="0" rtlCol="0" anchor="t"/>
+          <a:lstStyle/>
+          <a:p>
+            <a:pPr algn="l" indent="0" marL="0">
+              <a:lnSpc>
+                <a:spcPct val="110000"/>
+              </a:lnSpc>
+              <a:buNone/>
+            </a:pPr>
+            <a:r>
+              <a:rPr lang="en-US" sz="2000" dirty="0">
+                <a:solidFill>
+                  <a:srgbClr val="1E1208"/>
+                </a:solidFill>
+                <a:latin typeface="Impact" pitchFamily="34" charset="0"/>
+                <a:ea typeface="Impact" pitchFamily="34" charset="-122"/>
+                <a:cs typeface="Impact" pitchFamily="34" charset="-120"/>
+              </a:rPr>
+              <a:t>PRINT</a:t>
+            </a:r>
+            <a:endParaRPr lang="en-US" sz="2000" dirty="0"/>
+          </a:p>
+        </p:txBody>
+      </p:sp>
+      <p:sp>
+        <p:nvSpPr>
+          <p:cNvPr id="24" name="Text 21"/>
+          <p:cNvSpPr/>
+          <p:nvPr/>
+        </p:nvSpPr>
+        <p:spPr>
+          <a:xfrm>
+            <a:off x="4562856" y="2834640"/>
+            <a:ext cx="1417320" cy="731520"/>
+          </a:xfrm>
+          <a:prstGeom prst="rect">
+            <a:avLst/>
+          </a:prstGeom>
+          <a:noFill/>
+          <a:ln/>
+        </p:spPr>
+        <p:txBody>
+          <a:bodyPr wrap="square" lIns="0" tIns="0" rIns="0" bIns="0" rtlCol="0" anchor="t"/>
+          <a:lstStyle/>
+          <a:p>
+            <a:pPr algn="l" indent="0" marL="0">
+              <a:lnSpc>
+                <a:spcPct val="110000"/>
+              </a:lnSpc>
+              <a:buNone/>
+            </a:pPr>
+            <a:r>
+              <a:rPr lang="en-US" sz="1250" dirty="0">
+                <a:solidFill>
+                  <a:srgbClr val="555555"/>
+                </a:solidFill>
+                <a:latin typeface="Arial" pitchFamily="34" charset="0"/>
+                <a:ea typeface="Arial" pitchFamily="34" charset="-122"/>
+                <a:cs typeface="Arial" pitchFamily="34" charset="-120"/>
+              </a:rPr>
+              <a:t>Copies are printed</a:t>
+            </a:r>
+            <a:endParaRPr lang="en-US" sz="1250" dirty="0"/>
+          </a:p>
+        </p:txBody>
+      </p:sp>
+      <p:sp>
+        <p:nvSpPr>
+          <p:cNvPr id="25" name="Shape 22"/>
+          <p:cNvSpPr/>
+          <p:nvPr/>
+        </p:nvSpPr>
+        <p:spPr>
+          <a:xfrm>
+            <a:off x="6208776" y="2148840"/>
+            <a:ext cx="2240280" cy="1508760"/>
+          </a:xfrm>
+          <a:prstGeom prst="rect">
+            <a:avLst/>
+          </a:prstGeom>
+          <a:solidFill>
+            <a:srgbClr val="FFFFFF"/>
+          </a:solidFill>
+          <a:ln w="25400">
+            <a:solidFill>
+              <a:srgbClr val="1E1208"/>
+            </a:solidFill>
+            <a:prstDash val="solid"/>
+          </a:ln>
+        </p:spPr>
+      </p:sp>
+      <p:sp>
+        <p:nvSpPr>
+          <p:cNvPr id="26" name="Shape 23"/>
+          <p:cNvSpPr/>
+          <p:nvPr/>
+        </p:nvSpPr>
+        <p:spPr>
+          <a:xfrm>
+            <a:off x="6208776" y="2148840"/>
+            <a:ext cx="640080" cy="1508760"/>
+          </a:xfrm>
+          <a:prstGeom prst="rect">
+            <a:avLst/>
+          </a:prstGeom>
+          <a:solidFill>
+            <a:srgbClr val="FBE9D6"/>
+          </a:solidFill>
+          <a:ln w="25400">
+            <a:solidFill>
+              <a:srgbClr val="1E1208"/>
+            </a:solidFill>
+            <a:prstDash val="solid"/>
+          </a:ln>
+        </p:spPr>
+      </p:sp>
+      <p:sp>
+        <p:nvSpPr>
+          <p:cNvPr id="27" name="Text 24"/>
+          <p:cNvSpPr/>
+          <p:nvPr/>
+        </p:nvSpPr>
+        <p:spPr>
+          <a:xfrm>
+            <a:off x="6208776" y="2148840"/>
+            <a:ext cx="640080" cy="1508760"/>
+          </a:xfrm>
+          <a:prstGeom prst="rect">
+            <a:avLst/>
+          </a:prstGeom>
+          <a:noFill/>
+          <a:ln/>
+        </p:spPr>
+        <p:txBody>
+          <a:bodyPr wrap="square" lIns="0" tIns="0" rIns="0" bIns="0" rtlCol="0" anchor="ctr"/>
+          <a:lstStyle/>
+          <a:p>
+            <a:pPr algn="ctr" indent="0" marL="0">
+              <a:lnSpc>
+                <a:spcPct val="110000"/>
+              </a:lnSpc>
+              <a:buNone/>
+            </a:pPr>
+            <a:r>
+              <a:rPr lang="en-US" sz="3600" dirty="0">
+                <a:solidFill>
+                  <a:srgbClr val="1E1208"/>
+                </a:solidFill>
+                <a:latin typeface="Impact" pitchFamily="34" charset="0"/>
+                <a:ea typeface="Impact" pitchFamily="34" charset="-122"/>
+                <a:cs typeface="Impact" pitchFamily="34" charset="-120"/>
+              </a:rPr>
+              <a:t>3</a:t>
+            </a:r>
+            <a:endParaRPr lang="en-US" sz="3600" dirty="0"/>
+          </a:p>
+        </p:txBody>
+      </p:sp>
+      <p:sp>
+        <p:nvSpPr>
+          <p:cNvPr id="28" name="Text 25"/>
+          <p:cNvSpPr/>
+          <p:nvPr/>
+        </p:nvSpPr>
+        <p:spPr>
+          <a:xfrm>
+            <a:off x="6958584" y="2377440"/>
+            <a:ext cx="1417320" cy="365760"/>
+          </a:xfrm>
+          <a:prstGeom prst="rect">
+            <a:avLst/>
+          </a:prstGeom>
+          <a:noFill/>
+          <a:ln/>
+        </p:spPr>
+        <p:txBody>
+          <a:bodyPr wrap="square" lIns="0" tIns="0" rIns="0" bIns="0" rtlCol="0" anchor="t"/>
+          <a:lstStyle/>
+          <a:p>
+            <a:pPr algn="l" indent="0" marL="0">
+              <a:lnSpc>
+                <a:spcPct val="110000"/>
+              </a:lnSpc>
+              <a:buNone/>
+            </a:pPr>
+            <a:r>
+              <a:rPr lang="en-US" sz="2000" dirty="0">
+                <a:solidFill>
+                  <a:srgbClr val="1E1208"/>
+                </a:solidFill>
+                <a:latin typeface="Impact" pitchFamily="34" charset="0"/>
+                <a:ea typeface="Impact" pitchFamily="34" charset="-122"/>
+                <a:cs typeface="Impact" pitchFamily="34" charset="-120"/>
+              </a:rPr>
+              <a:t>COPY</a:t>
+            </a:r>
+            <a:endParaRPr lang="en-US" sz="2000" dirty="0"/>
+          </a:p>
+        </p:txBody>
+      </p:sp>
+      <p:sp>
+        <p:nvSpPr>
+          <p:cNvPr id="29" name="Text 26"/>
+          <p:cNvSpPr/>
+          <p:nvPr/>
+        </p:nvSpPr>
+        <p:spPr>
+          <a:xfrm>
+            <a:off x="6958584" y="2834640"/>
+            <a:ext cx="1417320" cy="731520"/>
+          </a:xfrm>
+          <a:prstGeom prst="rect">
+            <a:avLst/>
+          </a:prstGeom>
+          <a:noFill/>
+          <a:ln/>
+        </p:spPr>
+        <p:txBody>
+          <a:bodyPr wrap="square" lIns="0" tIns="0" rIns="0" bIns="0" rtlCol="0" anchor="t"/>
+          <a:lstStyle/>
+          <a:p>
+            <a:pPr algn="l" indent="0" marL="0">
+              <a:lnSpc>
+                <a:spcPct val="110000"/>
+              </a:lnSpc>
+              <a:buNone/>
+            </a:pPr>
+            <a:r>
+              <a:rPr lang="en-US" sz="1250" dirty="0">
+                <a:solidFill>
+                  <a:srgbClr val="555555"/>
+                </a:solidFill>
+                <a:latin typeface="Arial" pitchFamily="34" charset="0"/>
+                <a:ea typeface="Arial" pitchFamily="34" charset="-122"/>
+                <a:cs typeface="Arial" pitchFamily="34" charset="-120"/>
+              </a:rPr>
+              <a:t>Enough papers are prepared</a:t>
+            </a:r>
+            <a:endParaRPr lang="en-US" sz="1250" dirty="0"/>
+          </a:p>
+        </p:txBody>
+      </p:sp>
+      <p:sp>
+        <p:nvSpPr>
+          <p:cNvPr id="30" name="Shape 27"/>
+          <p:cNvSpPr/>
+          <p:nvPr/>
+        </p:nvSpPr>
+        <p:spPr>
+          <a:xfrm>
+            <a:off x="8604504" y="2148840"/>
+            <a:ext cx="2240280" cy="1508760"/>
+          </a:xfrm>
+          <a:prstGeom prst="rect">
+            <a:avLst/>
+          </a:prstGeom>
+          <a:solidFill>
+            <a:srgbClr val="FFFFFF"/>
+          </a:solidFill>
+          <a:ln w="25400">
+            <a:solidFill>
+              <a:srgbClr val="1E1208"/>
+            </a:solidFill>
+            <a:prstDash val="solid"/>
+          </a:ln>
+        </p:spPr>
+      </p:sp>
+      <p:sp>
+        <p:nvSpPr>
+          <p:cNvPr id="31" name="Shape 28"/>
+          <p:cNvSpPr/>
+          <p:nvPr/>
+        </p:nvSpPr>
+        <p:spPr>
+          <a:xfrm>
+            <a:off x="8604504" y="2148840"/>
+            <a:ext cx="640080" cy="1508760"/>
+          </a:xfrm>
+          <a:prstGeom prst="rect">
+            <a:avLst/>
+          </a:prstGeom>
+          <a:solidFill>
+            <a:srgbClr val="FBE9D6"/>
+          </a:solidFill>
+          <a:ln w="25400">
+            <a:solidFill>
+              <a:srgbClr val="1E1208"/>
+            </a:solidFill>
+            <a:prstDash val="solid"/>
+          </a:ln>
+        </p:spPr>
+      </p:sp>
+      <p:sp>
+        <p:nvSpPr>
+          <p:cNvPr id="32" name="Text 29"/>
+          <p:cNvSpPr/>
+          <p:nvPr/>
+        </p:nvSpPr>
+        <p:spPr>
+          <a:xfrm>
+            <a:off x="8604504" y="2148840"/>
+            <a:ext cx="640080" cy="1508760"/>
+          </a:xfrm>
+          <a:prstGeom prst="rect">
+            <a:avLst/>
+          </a:prstGeom>
+          <a:noFill/>
+          <a:ln/>
+        </p:spPr>
+        <p:txBody>
+          <a:bodyPr wrap="square" lIns="0" tIns="0" rIns="0" bIns="0" rtlCol="0" anchor="ctr"/>
+          <a:lstStyle/>
+          <a:p>
+            <a:pPr algn="ctr" indent="0" marL="0">
+              <a:lnSpc>
+                <a:spcPct val="110000"/>
+              </a:lnSpc>
+              <a:buNone/>
+            </a:pPr>
+            <a:r>
+              <a:rPr lang="en-US" sz="3600" dirty="0">
+                <a:solidFill>
+                  <a:srgbClr val="1E1208"/>
+                </a:solidFill>
+                <a:latin typeface="Impact" pitchFamily="34" charset="0"/>
+                <a:ea typeface="Impact" pitchFamily="34" charset="-122"/>
+                <a:cs typeface="Impact" pitchFamily="34" charset="-120"/>
+              </a:rPr>
+              <a:t>4</a:t>
+            </a:r>
+            <a:endParaRPr lang="en-US" sz="3600" dirty="0"/>
+          </a:p>
+        </p:txBody>
+      </p:sp>
+      <p:sp>
+        <p:nvSpPr>
+          <p:cNvPr id="33" name="Text 30"/>
+          <p:cNvSpPr/>
+          <p:nvPr/>
+        </p:nvSpPr>
+        <p:spPr>
+          <a:xfrm>
+            <a:off x="9354312" y="2377440"/>
+            <a:ext cx="1417320" cy="365760"/>
+          </a:xfrm>
+          <a:prstGeom prst="rect">
+            <a:avLst/>
+          </a:prstGeom>
+          <a:noFill/>
+          <a:ln/>
+        </p:spPr>
+        <p:txBody>
+          <a:bodyPr wrap="square" lIns="0" tIns="0" rIns="0" bIns="0" rtlCol="0" anchor="t"/>
+          <a:lstStyle/>
+          <a:p>
+            <a:pPr algn="l" indent="0" marL="0">
+              <a:lnSpc>
+                <a:spcPct val="110000"/>
+              </a:lnSpc>
+              <a:buNone/>
+            </a:pPr>
+            <a:r>
+              <a:rPr lang="en-US" sz="2000" dirty="0">
+                <a:solidFill>
+                  <a:srgbClr val="1E1208"/>
+                </a:solidFill>
+                <a:latin typeface="Impact" pitchFamily="34" charset="0"/>
+                <a:ea typeface="Impact" pitchFamily="34" charset="-122"/>
+                <a:cs typeface="Impact" pitchFamily="34" charset="-120"/>
+              </a:rPr>
+              <a:t>ADMINISTER</a:t>
+            </a:r>
+            <a:endParaRPr lang="en-US" sz="2000" dirty="0"/>
+          </a:p>
+        </p:txBody>
+      </p:sp>
+      <p:sp>
+        <p:nvSpPr>
+          <p:cNvPr id="34" name="Text 31"/>
+          <p:cNvSpPr/>
+          <p:nvPr/>
+        </p:nvSpPr>
+        <p:spPr>
+          <a:xfrm>
+            <a:off x="9354312" y="2834640"/>
+            <a:ext cx="1417320" cy="731520"/>
+          </a:xfrm>
+          <a:prstGeom prst="rect">
+            <a:avLst/>
+          </a:prstGeom>
+          <a:noFill/>
+          <a:ln/>
+        </p:spPr>
+        <p:txBody>
+          <a:bodyPr wrap="square" lIns="0" tIns="0" rIns="0" bIns="0" rtlCol="0" anchor="t"/>
+          <a:lstStyle/>
+          <a:p>
+            <a:pPr algn="l" indent="0" marL="0">
+              <a:lnSpc>
+                <a:spcPct val="110000"/>
+              </a:lnSpc>
+              <a:buNone/>
+            </a:pPr>
+            <a:r>
+              <a:rPr lang="en-US" sz="1250" dirty="0">
+                <a:solidFill>
+                  <a:srgbClr val="555555"/>
+                </a:solidFill>
+                <a:latin typeface="Arial" pitchFamily="34" charset="0"/>
+                <a:ea typeface="Arial" pitchFamily="34" charset="-122"/>
+                <a:cs typeface="Arial" pitchFamily="34" charset="-120"/>
+              </a:rPr>
+              <a:t>Students sit the exam</a:t>
+            </a:r>
+            <a:endParaRPr lang="en-US" sz="1250" dirty="0"/>
+          </a:p>
+        </p:txBody>
+      </p:sp>
+      <p:sp>
+        <p:nvSpPr>
+          <p:cNvPr id="35" name="Shape 32"/>
+          <p:cNvSpPr/>
+          <p:nvPr/>
+        </p:nvSpPr>
+        <p:spPr>
+          <a:xfrm>
+            <a:off x="1417320" y="3840480"/>
+            <a:ext cx="2240280" cy="1508760"/>
+          </a:xfrm>
+          <a:prstGeom prst="rect">
+            <a:avLst/>
+          </a:prstGeom>
+          <a:solidFill>
+            <a:srgbClr val="FFFFFF"/>
+          </a:solidFill>
+          <a:ln w="25400">
+            <a:solidFill>
+              <a:srgbClr val="1E1208"/>
+            </a:solidFill>
+            <a:prstDash val="solid"/>
+          </a:ln>
+        </p:spPr>
+      </p:sp>
+      <p:sp>
+        <p:nvSpPr>
+          <p:cNvPr id="36" name="Shape 33"/>
+          <p:cNvSpPr/>
+          <p:nvPr/>
+        </p:nvSpPr>
+        <p:spPr>
+          <a:xfrm>
+            <a:off x="1417320" y="3840480"/>
+            <a:ext cx="640080" cy="1508760"/>
+          </a:xfrm>
+          <a:prstGeom prst="rect">
+            <a:avLst/>
+          </a:prstGeom>
+          <a:solidFill>
+            <a:srgbClr val="FBE9D6"/>
+          </a:solidFill>
+          <a:ln w="25400">
+            <a:solidFill>
+              <a:srgbClr val="1E1208"/>
+            </a:solidFill>
+            <a:prstDash val="solid"/>
+          </a:ln>
+        </p:spPr>
+      </p:sp>
+      <p:sp>
+        <p:nvSpPr>
+          <p:cNvPr id="37" name="Text 34"/>
+          <p:cNvSpPr/>
+          <p:nvPr/>
+        </p:nvSpPr>
+        <p:spPr>
+          <a:xfrm>
+            <a:off x="1417320" y="3840480"/>
+            <a:ext cx="640080" cy="1508760"/>
+          </a:xfrm>
+          <a:prstGeom prst="rect">
+            <a:avLst/>
+          </a:prstGeom>
+          <a:noFill/>
+          <a:ln/>
+        </p:spPr>
+        <p:txBody>
+          <a:bodyPr wrap="square" lIns="0" tIns="0" rIns="0" bIns="0" rtlCol="0" anchor="ctr"/>
+          <a:lstStyle/>
+          <a:p>
+            <a:pPr algn="ctr" indent="0" marL="0">
+              <a:lnSpc>
+                <a:spcPct val="110000"/>
+              </a:lnSpc>
+              <a:buNone/>
+            </a:pPr>
+            <a:r>
+              <a:rPr lang="en-US" sz="3600" dirty="0">
+                <a:solidFill>
+                  <a:srgbClr val="1E1208"/>
+                </a:solidFill>
+                <a:latin typeface="Impact" pitchFamily="34" charset="0"/>
+                <a:ea typeface="Impact" pitchFamily="34" charset="-122"/>
+                <a:cs typeface="Impact" pitchFamily="34" charset="-120"/>
+              </a:rPr>
+              <a:t>5</a:t>
+            </a:r>
+            <a:endParaRPr lang="en-US" sz="3600" dirty="0"/>
+          </a:p>
+        </p:txBody>
+      </p:sp>
+      <p:sp>
+        <p:nvSpPr>
+          <p:cNvPr id="38" name="Text 35"/>
+          <p:cNvSpPr/>
+          <p:nvPr/>
+        </p:nvSpPr>
+        <p:spPr>
+          <a:xfrm>
+            <a:off x="2167128" y="4069080"/>
+            <a:ext cx="1417320" cy="365760"/>
+          </a:xfrm>
+          <a:prstGeom prst="rect">
+            <a:avLst/>
+          </a:prstGeom>
+          <a:noFill/>
+          <a:ln/>
+        </p:spPr>
+        <p:txBody>
+          <a:bodyPr wrap="square" lIns="0" tIns="0" rIns="0" bIns="0" rtlCol="0" anchor="t"/>
+          <a:lstStyle/>
+          <a:p>
+            <a:pPr algn="l" indent="0" marL="0">
+              <a:lnSpc>
+                <a:spcPct val="110000"/>
+              </a:lnSpc>
+              <a:buNone/>
+            </a:pPr>
+            <a:r>
+              <a:rPr lang="en-US" sz="2000" dirty="0">
+                <a:solidFill>
+                  <a:srgbClr val="1E1208"/>
+                </a:solidFill>
+                <a:latin typeface="Impact" pitchFamily="34" charset="0"/>
+                <a:ea typeface="Impact" pitchFamily="34" charset="-122"/>
+                <a:cs typeface="Impact" pitchFamily="34" charset="-120"/>
+              </a:rPr>
+              <a:t>COLLECT</a:t>
+            </a:r>
+            <a:endParaRPr lang="en-US" sz="2000" dirty="0"/>
+          </a:p>
+        </p:txBody>
+      </p:sp>
+      <p:sp>
+        <p:nvSpPr>
+          <p:cNvPr id="39" name="Text 36"/>
+          <p:cNvSpPr/>
+          <p:nvPr/>
+        </p:nvSpPr>
+        <p:spPr>
+          <a:xfrm>
+            <a:off x="2167128" y="4526280"/>
+            <a:ext cx="1417320" cy="731520"/>
+          </a:xfrm>
+          <a:prstGeom prst="rect">
+            <a:avLst/>
+          </a:prstGeom>
+          <a:noFill/>
+          <a:ln/>
+        </p:spPr>
+        <p:txBody>
+          <a:bodyPr wrap="square" lIns="0" tIns="0" rIns="0" bIns="0" rtlCol="0" anchor="t"/>
+          <a:lstStyle/>
+          <a:p>
+            <a:pPr algn="l" indent="0" marL="0">
+              <a:lnSpc>
+                <a:spcPct val="110000"/>
+              </a:lnSpc>
+              <a:buNone/>
+            </a:pPr>
+            <a:r>
+              <a:rPr lang="en-US" sz="1250" dirty="0">
+                <a:solidFill>
+                  <a:srgbClr val="555555"/>
+                </a:solidFill>
+                <a:latin typeface="Arial" pitchFamily="34" charset="0"/>
+                <a:ea typeface="Arial" pitchFamily="34" charset="-122"/>
+                <a:cs typeface="Arial" pitchFamily="34" charset="-120"/>
+              </a:rPr>
+              <a:t>Papers come back</a:t>
+            </a:r>
+            <a:endParaRPr lang="en-US" sz="1250" dirty="0"/>
+          </a:p>
+        </p:txBody>
+      </p:sp>
+      <p:sp>
+        <p:nvSpPr>
+          <p:cNvPr id="40" name="Shape 37"/>
+          <p:cNvSpPr/>
+          <p:nvPr/>
+        </p:nvSpPr>
+        <p:spPr>
+          <a:xfrm>
+            <a:off x="3813048" y="3840480"/>
+            <a:ext cx="2240280" cy="1508760"/>
+          </a:xfrm>
+          <a:prstGeom prst="rect">
+            <a:avLst/>
+          </a:prstGeom>
+          <a:solidFill>
+            <a:srgbClr val="FFFFFF"/>
+          </a:solidFill>
+          <a:ln w="25400">
+            <a:solidFill>
+              <a:srgbClr val="1E1208"/>
+            </a:solidFill>
+            <a:prstDash val="solid"/>
+          </a:ln>
+        </p:spPr>
+      </p:sp>
+      <p:sp>
+        <p:nvSpPr>
+          <p:cNvPr id="41" name="Shape 38"/>
+          <p:cNvSpPr/>
+          <p:nvPr/>
+        </p:nvSpPr>
+        <p:spPr>
+          <a:xfrm>
+            <a:off x="3813048" y="3840480"/>
+            <a:ext cx="640080" cy="1508760"/>
+          </a:xfrm>
+          <a:prstGeom prst="rect">
+            <a:avLst/>
+          </a:prstGeom>
+          <a:solidFill>
+            <a:srgbClr val="FBE9D6"/>
+          </a:solidFill>
+          <a:ln w="25400">
+            <a:solidFill>
+              <a:srgbClr val="1E1208"/>
+            </a:solidFill>
+            <a:prstDash val="solid"/>
+          </a:ln>
+        </p:spPr>
+      </p:sp>
+      <p:sp>
+        <p:nvSpPr>
+          <p:cNvPr id="42" name="Text 39"/>
+          <p:cNvSpPr/>
+          <p:nvPr/>
+        </p:nvSpPr>
+        <p:spPr>
+          <a:xfrm>
+            <a:off x="3813048" y="3840480"/>
+            <a:ext cx="640080" cy="1508760"/>
+          </a:xfrm>
+          <a:prstGeom prst="rect">
+            <a:avLst/>
+          </a:prstGeom>
+          <a:noFill/>
+          <a:ln/>
+        </p:spPr>
+        <p:txBody>
+          <a:bodyPr wrap="square" lIns="0" tIns="0" rIns="0" bIns="0" rtlCol="0" anchor="ctr"/>
+          <a:lstStyle/>
+          <a:p>
+            <a:pPr algn="ctr" indent="0" marL="0">
+              <a:lnSpc>
+                <a:spcPct val="110000"/>
+              </a:lnSpc>
+              <a:buNone/>
+            </a:pPr>
+            <a:r>
+              <a:rPr lang="en-US" sz="3600" dirty="0">
+                <a:solidFill>
+                  <a:srgbClr val="1E1208"/>
+                </a:solidFill>
+                <a:latin typeface="Impact" pitchFamily="34" charset="0"/>
+                <a:ea typeface="Impact" pitchFamily="34" charset="-122"/>
+                <a:cs typeface="Impact" pitchFamily="34" charset="-120"/>
+              </a:rPr>
+              <a:t>6</a:t>
+            </a:r>
+            <a:endParaRPr lang="en-US" sz="3600" dirty="0"/>
+          </a:p>
+        </p:txBody>
+      </p:sp>
+      <p:sp>
+        <p:nvSpPr>
+          <p:cNvPr id="43" name="Text 40"/>
+          <p:cNvSpPr/>
+          <p:nvPr/>
+        </p:nvSpPr>
+        <p:spPr>
+          <a:xfrm>
+            <a:off x="4562856" y="4069080"/>
+            <a:ext cx="1417320" cy="365760"/>
+          </a:xfrm>
+          <a:prstGeom prst="rect">
+            <a:avLst/>
+          </a:prstGeom>
+          <a:noFill/>
+          <a:ln/>
+        </p:spPr>
+        <p:txBody>
+          <a:bodyPr wrap="square" lIns="0" tIns="0" rIns="0" bIns="0" rtlCol="0" anchor="t"/>
+          <a:lstStyle/>
+          <a:p>
+            <a:pPr algn="l" indent="0" marL="0">
+              <a:lnSpc>
+                <a:spcPct val="110000"/>
+              </a:lnSpc>
+              <a:buNone/>
+            </a:pPr>
+            <a:r>
+              <a:rPr lang="en-US" sz="2000" dirty="0">
+                <a:solidFill>
+                  <a:srgbClr val="1E1208"/>
+                </a:solidFill>
+                <a:latin typeface="Impact" pitchFamily="34" charset="0"/>
+                <a:ea typeface="Impact" pitchFamily="34" charset="-122"/>
+                <a:cs typeface="Impact" pitchFamily="34" charset="-120"/>
+              </a:rPr>
+              <a:t>MARK</a:t>
+            </a:r>
+            <a:endParaRPr lang="en-US" sz="2000" dirty="0"/>
+          </a:p>
+        </p:txBody>
+      </p:sp>
+      <p:sp>
+        <p:nvSpPr>
+          <p:cNvPr id="44" name="Text 41"/>
+          <p:cNvSpPr/>
+          <p:nvPr/>
+        </p:nvSpPr>
+        <p:spPr>
+          <a:xfrm>
+            <a:off x="4562856" y="4526280"/>
+            <a:ext cx="1417320" cy="731520"/>
+          </a:xfrm>
+          <a:prstGeom prst="rect">
+            <a:avLst/>
+          </a:prstGeom>
+          <a:noFill/>
+          <a:ln/>
+        </p:spPr>
+        <p:txBody>
+          <a:bodyPr wrap="square" lIns="0" tIns="0" rIns="0" bIns="0" rtlCol="0" anchor="t"/>
+          <a:lstStyle/>
+          <a:p>
+            <a:pPr algn="l" indent="0" marL="0">
+              <a:lnSpc>
+                <a:spcPct val="110000"/>
+              </a:lnSpc>
+              <a:buNone/>
+            </a:pPr>
+            <a:r>
+              <a:rPr lang="en-US" sz="1250" dirty="0">
+                <a:solidFill>
+                  <a:srgbClr val="555555"/>
+                </a:solidFill>
+                <a:latin typeface="Arial" pitchFamily="34" charset="0"/>
+                <a:ea typeface="Arial" pitchFamily="34" charset="-122"/>
+                <a:cs typeface="Arial" pitchFamily="34" charset="-120"/>
+              </a:rPr>
+              <a:t>Teacher marks</a:t>
+            </a:r>
+            <a:endParaRPr lang="en-US" sz="1250" dirty="0"/>
+          </a:p>
+        </p:txBody>
+      </p:sp>
+      <p:sp>
+        <p:nvSpPr>
+          <p:cNvPr id="45" name="Shape 42"/>
+          <p:cNvSpPr/>
+          <p:nvPr/>
+        </p:nvSpPr>
+        <p:spPr>
+          <a:xfrm>
+            <a:off x="6208776" y="3840480"/>
+            <a:ext cx="2240280" cy="1508760"/>
+          </a:xfrm>
+          <a:prstGeom prst="rect">
+            <a:avLst/>
+          </a:prstGeom>
+          <a:solidFill>
+            <a:srgbClr val="FFFFFF"/>
+          </a:solidFill>
+          <a:ln w="25400">
+            <a:solidFill>
+              <a:srgbClr val="1E1208"/>
+            </a:solidFill>
+            <a:prstDash val="solid"/>
+          </a:ln>
+        </p:spPr>
+      </p:sp>
+      <p:sp>
+        <p:nvSpPr>
+          <p:cNvPr id="46" name="Shape 43"/>
+          <p:cNvSpPr/>
+          <p:nvPr/>
+        </p:nvSpPr>
+        <p:spPr>
+          <a:xfrm>
+            <a:off x="6208776" y="3840480"/>
+            <a:ext cx="640080" cy="1508760"/>
+          </a:xfrm>
+          <a:prstGeom prst="rect">
+            <a:avLst/>
+          </a:prstGeom>
+          <a:solidFill>
+            <a:srgbClr val="FBE9D6"/>
+          </a:solidFill>
+          <a:ln w="25400">
+            <a:solidFill>
+              <a:srgbClr val="1E1208"/>
+            </a:solidFill>
+            <a:prstDash val="solid"/>
+          </a:ln>
+        </p:spPr>
+      </p:sp>
+      <p:sp>
+        <p:nvSpPr>
+          <p:cNvPr id="47" name="Text 44"/>
+          <p:cNvSpPr/>
+          <p:nvPr/>
+        </p:nvSpPr>
+        <p:spPr>
+          <a:xfrm>
+            <a:off x="6208776" y="3840480"/>
+            <a:ext cx="640080" cy="1508760"/>
+          </a:xfrm>
+          <a:prstGeom prst="rect">
+            <a:avLst/>
+          </a:prstGeom>
+          <a:noFill/>
+          <a:ln/>
+        </p:spPr>
+        <p:txBody>
+          <a:bodyPr wrap="square" lIns="0" tIns="0" rIns="0" bIns="0" rtlCol="0" anchor="ctr"/>
+          <a:lstStyle/>
+          <a:p>
+            <a:pPr algn="ctr" indent="0" marL="0">
+              <a:lnSpc>
+                <a:spcPct val="110000"/>
+              </a:lnSpc>
+              <a:buNone/>
+            </a:pPr>
+            <a:r>
+              <a:rPr lang="en-US" sz="3600" dirty="0">
+                <a:solidFill>
+                  <a:srgbClr val="1E1208"/>
+                </a:solidFill>
+                <a:latin typeface="Impact" pitchFamily="34" charset="0"/>
+                <a:ea typeface="Impact" pitchFamily="34" charset="-122"/>
+                <a:cs typeface="Impact" pitchFamily="34" charset="-120"/>
+              </a:rPr>
+              <a:t>7</a:t>
+            </a:r>
+            <a:endParaRPr lang="en-US" sz="3600" dirty="0"/>
+          </a:p>
+        </p:txBody>
+      </p:sp>
+      <p:sp>
+        <p:nvSpPr>
+          <p:cNvPr id="48" name="Text 45"/>
+          <p:cNvSpPr/>
+          <p:nvPr/>
+        </p:nvSpPr>
+        <p:spPr>
+          <a:xfrm>
+            <a:off x="6958584" y="4069080"/>
+            <a:ext cx="1417320" cy="365760"/>
+          </a:xfrm>
+          <a:prstGeom prst="rect">
+            <a:avLst/>
+          </a:prstGeom>
+          <a:noFill/>
+          <a:ln/>
+        </p:spPr>
+        <p:txBody>
+          <a:bodyPr wrap="square" lIns="0" tIns="0" rIns="0" bIns="0" rtlCol="0" anchor="t"/>
+          <a:lstStyle/>
+          <a:p>
+            <a:pPr algn="l" indent="0" marL="0">
+              <a:lnSpc>
+                <a:spcPct val="110000"/>
+              </a:lnSpc>
+              <a:buNone/>
+            </a:pPr>
+            <a:r>
+              <a:rPr lang="en-US" sz="2000" dirty="0">
+                <a:solidFill>
+                  <a:srgbClr val="1E1208"/>
+                </a:solidFill>
+                <a:latin typeface="Impact" pitchFamily="34" charset="0"/>
+                <a:ea typeface="Impact" pitchFamily="34" charset="-122"/>
+                <a:cs typeface="Impact" pitchFamily="34" charset="-120"/>
+              </a:rPr>
+              <a:t>RECORD</a:t>
+            </a:r>
+            <a:endParaRPr lang="en-US" sz="2000" dirty="0"/>
+          </a:p>
+        </p:txBody>
+      </p:sp>
+      <p:sp>
+        <p:nvSpPr>
+          <p:cNvPr id="49" name="Text 46"/>
+          <p:cNvSpPr/>
+          <p:nvPr/>
+        </p:nvSpPr>
+        <p:spPr>
+          <a:xfrm>
+            <a:off x="6958584" y="4526280"/>
+            <a:ext cx="1417320" cy="731520"/>
+          </a:xfrm>
+          <a:prstGeom prst="rect">
+            <a:avLst/>
+          </a:prstGeom>
+          <a:noFill/>
+          <a:ln/>
+        </p:spPr>
+        <p:txBody>
+          <a:bodyPr wrap="square" lIns="0" tIns="0" rIns="0" bIns="0" rtlCol="0" anchor="t"/>
+          <a:lstStyle/>
+          <a:p>
+            <a:pPr algn="l" indent="0" marL="0">
+              <a:lnSpc>
+                <a:spcPct val="110000"/>
+              </a:lnSpc>
+              <a:buNone/>
+            </a:pPr>
+            <a:r>
+              <a:rPr lang="en-US" sz="1250" dirty="0">
+                <a:solidFill>
+                  <a:srgbClr val="555555"/>
+                </a:solidFill>
+                <a:latin typeface="Arial" pitchFamily="34" charset="0"/>
+                <a:ea typeface="Arial" pitchFamily="34" charset="-122"/>
+                <a:cs typeface="Arial" pitchFamily="34" charset="-120"/>
+              </a:rPr>
+              <a:t>Grades are entered</a:t>
+            </a:r>
+            <a:endParaRPr lang="en-US" sz="1250" dirty="0"/>
+          </a:p>
+        </p:txBody>
+      </p:sp>
+      <p:sp>
+        <p:nvSpPr>
+          <p:cNvPr id="50" name="Shape 47"/>
+          <p:cNvSpPr/>
+          <p:nvPr/>
+        </p:nvSpPr>
+        <p:spPr>
+          <a:xfrm>
+            <a:off x="8604504" y="3840480"/>
+            <a:ext cx="2240280" cy="1508760"/>
+          </a:xfrm>
+          <a:prstGeom prst="rect">
+            <a:avLst/>
+          </a:prstGeom>
+          <a:solidFill>
+            <a:srgbClr val="FFFFFF"/>
+          </a:solidFill>
+          <a:ln w="25400">
+            <a:solidFill>
+              <a:srgbClr val="1E1208"/>
+            </a:solidFill>
+            <a:prstDash val="solid"/>
+          </a:ln>
+        </p:spPr>
+      </p:sp>
+      <p:sp>
+        <p:nvSpPr>
+          <p:cNvPr id="51" name="Shape 48"/>
+          <p:cNvSpPr/>
+          <p:nvPr/>
+        </p:nvSpPr>
+        <p:spPr>
+          <a:xfrm>
+            <a:off x="8604504" y="3840480"/>
+            <a:ext cx="640080" cy="1508760"/>
+          </a:xfrm>
+          <a:prstGeom prst="rect">
+            <a:avLst/>
+          </a:prstGeom>
+          <a:solidFill>
+            <a:srgbClr val="D4762A"/>
+          </a:solidFill>
+          <a:ln w="25400">
+            <a:solidFill>
+              <a:srgbClr val="1E1208"/>
+            </a:solidFill>
+            <a:prstDash val="solid"/>
+          </a:ln>
+        </p:spPr>
+      </p:sp>
+      <p:sp>
+        <p:nvSpPr>
+          <p:cNvPr id="52" name="Text 49"/>
+          <p:cNvSpPr/>
+          <p:nvPr/>
+        </p:nvSpPr>
+        <p:spPr>
+          <a:xfrm>
+            <a:off x="8604504" y="3840480"/>
+            <a:ext cx="640080" cy="1508760"/>
+          </a:xfrm>
+          <a:prstGeom prst="rect">
+            <a:avLst/>
+          </a:prstGeom>
+          <a:noFill/>
+          <a:ln/>
+        </p:spPr>
+        <p:txBody>
+          <a:bodyPr wrap="square" lIns="0" tIns="0" rIns="0" bIns="0" rtlCol="0" anchor="ctr"/>
+          <a:lstStyle/>
+          <a:p>
+            <a:pPr algn="ctr" indent="0" marL="0">
+              <a:lnSpc>
+                <a:spcPct val="110000"/>
+              </a:lnSpc>
+              <a:buNone/>
+            </a:pPr>
+            <a:r>
+              <a:rPr lang="en-US" sz="3600" dirty="0">
+                <a:solidFill>
+                  <a:srgbClr val="1E1208"/>
+                </a:solidFill>
+                <a:latin typeface="Impact" pitchFamily="34" charset="0"/>
+                <a:ea typeface="Impact" pitchFamily="34" charset="-122"/>
+                <a:cs typeface="Impact" pitchFamily="34" charset="-120"/>
+              </a:rPr>
+              <a:t>8</a:t>
+            </a:r>
+            <a:endParaRPr lang="en-US" sz="3600" dirty="0"/>
+          </a:p>
+        </p:txBody>
+      </p:sp>
+      <p:sp>
+        <p:nvSpPr>
+          <p:cNvPr id="53" name="Text 50"/>
+          <p:cNvSpPr/>
+          <p:nvPr/>
+        </p:nvSpPr>
+        <p:spPr>
+          <a:xfrm>
+            <a:off x="9354312" y="4069080"/>
+            <a:ext cx="1417320" cy="365760"/>
+          </a:xfrm>
+          <a:prstGeom prst="rect">
+            <a:avLst/>
+          </a:prstGeom>
+          <a:noFill/>
+          <a:ln/>
+        </p:spPr>
+        <p:txBody>
+          <a:bodyPr wrap="square" lIns="0" tIns="0" rIns="0" bIns="0" rtlCol="0" anchor="t"/>
+          <a:lstStyle/>
+          <a:p>
+            <a:pPr algn="l" indent="0" marL="0">
+              <a:lnSpc>
+                <a:spcPct val="110000"/>
+              </a:lnSpc>
+              <a:buNone/>
+            </a:pPr>
+            <a:r>
+              <a:rPr lang="en-US" sz="2000" dirty="0">
+                <a:solidFill>
+                  <a:srgbClr val="1E1208"/>
+                </a:solidFill>
+                <a:latin typeface="Impact" pitchFamily="34" charset="0"/>
+                <a:ea typeface="Impact" pitchFamily="34" charset="-122"/>
+                <a:cs typeface="Impact" pitchFamily="34" charset="-120"/>
+              </a:rPr>
+              <a:t>ANALYSE</a:t>
+            </a:r>
+            <a:endParaRPr lang="en-US" sz="2000" dirty="0"/>
+          </a:p>
+        </p:txBody>
+      </p:sp>
+      <p:sp>
+        <p:nvSpPr>
+          <p:cNvPr id="54" name="Text 51"/>
+          <p:cNvSpPr/>
+          <p:nvPr/>
+        </p:nvSpPr>
+        <p:spPr>
+          <a:xfrm>
+            <a:off x="9354312" y="4526280"/>
+            <a:ext cx="1417320" cy="731520"/>
+          </a:xfrm>
+          <a:prstGeom prst="rect">
+            <a:avLst/>
+          </a:prstGeom>
+          <a:noFill/>
+          <a:ln/>
+        </p:spPr>
+        <p:txBody>
+          <a:bodyPr wrap="square" lIns="0" tIns="0" rIns="0" bIns="0" rtlCol="0" anchor="t"/>
+          <a:lstStyle/>
+          <a:p>
+            <a:pPr algn="l" indent="0" marL="0">
+              <a:lnSpc>
+                <a:spcPct val="110000"/>
+              </a:lnSpc>
+              <a:buNone/>
+            </a:pPr>
+            <a:r>
+              <a:rPr lang="en-US" sz="1250" dirty="0">
+                <a:solidFill>
+                  <a:srgbClr val="555555"/>
+                </a:solidFill>
+                <a:latin typeface="Arial" pitchFamily="34" charset="0"/>
+                <a:ea typeface="Arial" pitchFamily="34" charset="-122"/>
+                <a:cs typeface="Arial" pitchFamily="34" charset="-120"/>
+              </a:rPr>
+              <a:t>Results are interpreted</a:t>
+            </a:r>
+            <a:endParaRPr lang="en-US" sz="1250" dirty="0"/>
+          </a:p>
+        </p:txBody>
+      </p:sp>
+      <p:sp>
+        <p:nvSpPr>
+          <p:cNvPr id="55" name="Shape 52"/>
+          <p:cNvSpPr/>
+          <p:nvPr/>
+        </p:nvSpPr>
+        <p:spPr>
+          <a:xfrm>
+            <a:off x="1417320" y="5623560"/>
+            <a:ext cx="9509760" cy="502920"/>
+          </a:xfrm>
+          <a:prstGeom prst="rect">
+            <a:avLst/>
+          </a:prstGeom>
+          <a:solidFill>
+            <a:srgbClr val="1E1208"/>
+          </a:solidFill>
+          <a:ln/>
+        </p:spPr>
+      </p:sp>
+      <p:sp>
+        <p:nvSpPr>
+          <p:cNvPr id="56" name="Text 53"/>
+          <p:cNvSpPr/>
+          <p:nvPr/>
+        </p:nvSpPr>
+        <p:spPr>
+          <a:xfrm>
+            <a:off x="1600200" y="5623560"/>
+            <a:ext cx="9144000" cy="502920"/>
+          </a:xfrm>
+          <a:prstGeom prst="rect">
+            <a:avLst/>
+          </a:prstGeom>
+          <a:noFill/>
+          <a:ln/>
+        </p:spPr>
+        <p:txBody>
+          <a:bodyPr wrap="square" lIns="0" tIns="0" rIns="0" bIns="0" rtlCol="0" anchor="ctr"/>
+          <a:lstStyle/>
+          <a:p>
+            <a:pPr algn="l" indent="0" marL="0">
+              <a:lnSpc>
+                <a:spcPct val="110000"/>
+              </a:lnSpc>
+              <a:buNone/>
+            </a:pPr>
+            <a:r>
+              <a:rPr lang="en-US" sz="1500" b="1" dirty="0">
+                <a:solidFill>
+                  <a:srgbClr val="FFFFFF"/>
+                </a:solidFill>
+                <a:latin typeface="Arial" pitchFamily="34" charset="0"/>
+                <a:ea typeface="Arial" pitchFamily="34" charset="-122"/>
+                <a:cs typeface="Arial" pitchFamily="34" charset="-120"/>
+              </a:rPr>
+              <a:t>This consumes time, money, paper and administrative effort.</a:t>
+            </a:r>
+            <a:endParaRPr lang="en-US" sz="1500" dirty="0"/>
+          </a:p>
+        </p:txBody>
+      </p:sp>
+      <p:sp>
+        <p:nvSpPr>
+          <p:cNvPr id="57" name="Text 54"/>
+          <p:cNvSpPr/>
+          <p:nvPr/>
+        </p:nvSpPr>
+        <p:spPr>
+          <a:xfrm>
+            <a:off x="1417320" y="6217920"/>
+            <a:ext cx="9509760" cy="320040"/>
+          </a:xfrm>
+          <a:prstGeom prst="rect">
+            <a:avLst/>
+          </a:prstGeom>
+          <a:noFill/>
+          <a:ln/>
+        </p:spPr>
+        <p:txBody>
+          <a:bodyPr wrap="square" lIns="0" tIns="0" rIns="0" bIns="0" rtlCol="0" anchor="t"/>
+          <a:lstStyle/>
+          <a:p>
+            <a:pPr algn="l" indent="0" marL="0">
+              <a:lnSpc>
+                <a:spcPct val="110000"/>
+              </a:lnSpc>
+              <a:buNone/>
+            </a:pPr>
+            <a:r>
+              <a:rPr lang="en-US" sz="1400" dirty="0">
+                <a:solidFill>
+                  <a:srgbClr val="555555"/>
+                </a:solidFill>
+                <a:latin typeface="Arial" pitchFamily="34" charset="0"/>
+                <a:ea typeface="Arial" pitchFamily="34" charset="-122"/>
+                <a:cs typeface="Arial" pitchFamily="34" charset="-120"/>
+              </a:rPr>
+              <a:t>The assessment itself may take one hour. The work around it can take much longer.</a:t>
+            </a:r>
+            <a:endParaRPr lang="en-US" sz="1400" dirty="0"/>
+          </a:p>
+        </p:txBody>
+      </p:sp>
+    </p:spTree>
+  </p:cSld>
+  <p:clrMapOvr>
+    <a:masterClrMapping/>
+  </p:clrMapOvr>
+</p:sld>
+</file>
+
+<file path=ppt/slides/slide30.xml><?xml version="1.0" encoding="utf-8"?>
+<p:sld xmlns:a="http://schemas.openxmlformats.org/drawingml/2006/main" xmlns:r="http://schemas.openxmlformats.org/officeDocument/2006/relationships" xmlns:p="http://schemas.openxmlformats.org/presentationml/2006/main">
+  <p:cSld name="Slide 30">
+    <p:bg>
+      <p:bgPr>
+        <a:blipFill dpi="0" rotWithShape="1">
+          <a:blip r:embed="rId1">
+            <a:lum/>
+          </a:blip>
+          <a:srcRect/>
+          <a:stretch>
+            <a:fillRect/>
+          </a:stretch>
+        </a:blipFill>
+        <a:effectLst/>
+      </p:bgPr>
+    </p:bg>
+    <p:spTree>
+      <p:nvGrpSpPr>
+        <p:cNvPr id="1" name=""/>
+        <p:cNvGrpSpPr/>
+        <p:nvPr/>
+      </p:nvGrpSpPr>
+      <p:grpSpPr>
+        <a:xfrm>
+          <a:off x="0" y="0"/>
+          <a:ext cx="0" cy="0"/>
+          <a:chOff x="0" y="0"/>
+          <a:chExt cx="0" cy="0"/>
+        </a:xfrm>
+      </p:grpSpPr>
+      <p:sp>
+        <p:nvSpPr>
+          <p:cNvPr id="2" name="Shape 0"/>
+          <p:cNvSpPr/>
+          <p:nvPr/>
+        </p:nvSpPr>
+        <p:spPr>
+          <a:xfrm>
+            <a:off x="11588191" y="502920"/>
+            <a:ext cx="603504" cy="1152144"/>
+          </a:xfrm>
+          <a:prstGeom prst="rect">
+            <a:avLst/>
+          </a:prstGeom>
+          <a:solidFill>
+            <a:srgbClr val="FDFDFB"/>
+          </a:solidFill>
+          <a:ln w="25400">
+            <a:solidFill>
+              <a:srgbClr val="1E1208"/>
+            </a:solidFill>
+            <a:prstDash val="solid"/>
+          </a:ln>
+        </p:spPr>
+      </p:sp>
+      <p:sp>
+        <p:nvSpPr>
+          <p:cNvPr id="3" name="Text 1"/>
+          <p:cNvSpPr/>
+          <p:nvPr/>
+        </p:nvSpPr>
+        <p:spPr>
+          <a:xfrm>
+            <a:off x="11588191" y="502920"/>
+            <a:ext cx="603504" cy="1152144"/>
+          </a:xfrm>
+          <a:prstGeom prst="rect">
+            <a:avLst/>
+          </a:prstGeom>
+          <a:noFill/>
+          <a:ln/>
+        </p:spPr>
+        <p:txBody>
+          <a:bodyPr wrap="square" lIns="0" tIns="0" rIns="0" bIns="0" rtlCol="0" anchor="ctr" vert="vert270"/>
+          <a:lstStyle/>
+          <a:p>
+            <a:pPr algn="ctr" indent="0" marL="0">
+              <a:buNone/>
+            </a:pPr>
+            <a:r>
+              <a:rPr lang="en-US" sz="1200" b="1" spc="300" kern="0" dirty="0">
+                <a:solidFill>
+                  <a:srgbClr val="1E1208"/>
+                </a:solidFill>
+                <a:latin typeface="Courier New" pitchFamily="34" charset="0"/>
+                <a:ea typeface="Courier New" pitchFamily="34" charset="-122"/>
+                <a:cs typeface="Courier New" pitchFamily="34" charset="-120"/>
+              </a:rPr>
+              <a:t>SURVEY</a:t>
+            </a:r>
+            <a:endParaRPr lang="en-US" sz="1200" dirty="0"/>
+          </a:p>
+        </p:txBody>
+      </p:sp>
+      <p:sp>
+        <p:nvSpPr>
+          <p:cNvPr id="4" name="Shape 2"/>
+          <p:cNvSpPr/>
+          <p:nvPr/>
+        </p:nvSpPr>
+        <p:spPr>
+          <a:xfrm>
+            <a:off x="11588191" y="1764792"/>
+            <a:ext cx="603504" cy="1152144"/>
+          </a:xfrm>
+          <a:prstGeom prst="rect">
+            <a:avLst/>
+          </a:prstGeom>
+          <a:solidFill>
+            <a:srgbClr val="D4762A"/>
+          </a:solidFill>
+          <a:ln w="25400">
+            <a:solidFill>
+              <a:srgbClr val="1E1208"/>
+            </a:solidFill>
+            <a:prstDash val="solid"/>
+          </a:ln>
+        </p:spPr>
+      </p:sp>
+      <p:sp>
+        <p:nvSpPr>
+          <p:cNvPr id="5" name="Text 3"/>
+          <p:cNvSpPr/>
+          <p:nvPr/>
+        </p:nvSpPr>
+        <p:spPr>
+          <a:xfrm>
+            <a:off x="11588191" y="1764792"/>
+            <a:ext cx="603504" cy="1152144"/>
+          </a:xfrm>
+          <a:prstGeom prst="rect">
+            <a:avLst/>
+          </a:prstGeom>
+          <a:noFill/>
+          <a:ln/>
+        </p:spPr>
+        <p:txBody>
+          <a:bodyPr wrap="square" lIns="0" tIns="0" rIns="0" bIns="0" rtlCol="0" anchor="ctr" vert="vert270"/>
+          <a:lstStyle/>
+          <a:p>
+            <a:pPr algn="ctr" indent="0" marL="0">
+              <a:buNone/>
+            </a:pPr>
+            <a:r>
+              <a:rPr lang="en-US" sz="1200" b="1" spc="300" kern="0" dirty="0">
+                <a:solidFill>
+                  <a:srgbClr val="1E1208"/>
+                </a:solidFill>
+                <a:latin typeface="Courier New" pitchFamily="34" charset="0"/>
+                <a:ea typeface="Courier New" pitchFamily="34" charset="-122"/>
+                <a:cs typeface="Courier New" pitchFamily="34" charset="-120"/>
+              </a:rPr>
+              <a:t>ASSESS</a:t>
+            </a:r>
+            <a:endParaRPr lang="en-US" sz="1200" dirty="0"/>
+          </a:p>
+        </p:txBody>
+      </p:sp>
+      <p:sp>
+        <p:nvSpPr>
+          <p:cNvPr id="6" name="Shape 4"/>
+          <p:cNvSpPr/>
+          <p:nvPr/>
+        </p:nvSpPr>
+        <p:spPr>
+          <a:xfrm>
+            <a:off x="11588191" y="3026664"/>
+            <a:ext cx="603504" cy="1152144"/>
+          </a:xfrm>
+          <a:prstGeom prst="rect">
+            <a:avLst/>
+          </a:prstGeom>
+          <a:solidFill>
+            <a:srgbClr val="E3B51E"/>
+          </a:solidFill>
+          <a:ln w="25400">
+            <a:solidFill>
+              <a:srgbClr val="1E1208"/>
+            </a:solidFill>
+            <a:prstDash val="solid"/>
+          </a:ln>
+        </p:spPr>
+      </p:sp>
+      <p:sp>
+        <p:nvSpPr>
+          <p:cNvPr id="7" name="Text 5"/>
+          <p:cNvSpPr/>
+          <p:nvPr/>
+        </p:nvSpPr>
+        <p:spPr>
+          <a:xfrm>
+            <a:off x="11588191" y="3026664"/>
+            <a:ext cx="603504" cy="1152144"/>
+          </a:xfrm>
+          <a:prstGeom prst="rect">
+            <a:avLst/>
+          </a:prstGeom>
+          <a:noFill/>
+          <a:ln/>
+        </p:spPr>
+        <p:txBody>
+          <a:bodyPr wrap="square" lIns="0" tIns="0" rIns="0" bIns="0" rtlCol="0" anchor="ctr" vert="vert270"/>
+          <a:lstStyle/>
+          <a:p>
+            <a:pPr algn="ctr" indent="0" marL="0">
+              <a:buNone/>
+            </a:pPr>
+            <a:r>
+              <a:rPr lang="en-US" sz="1200" b="1" spc="300" kern="0" dirty="0">
+                <a:solidFill>
+                  <a:srgbClr val="1E1208"/>
+                </a:solidFill>
+                <a:latin typeface="Courier New" pitchFamily="34" charset="0"/>
+                <a:ea typeface="Courier New" pitchFamily="34" charset="-122"/>
+                <a:cs typeface="Courier New" pitchFamily="34" charset="-120"/>
+              </a:rPr>
+              <a:t>LEARN</a:t>
+            </a:r>
+            <a:endParaRPr lang="en-US" sz="1200" dirty="0"/>
+          </a:p>
+        </p:txBody>
+      </p:sp>
+      <p:sp>
+        <p:nvSpPr>
+          <p:cNvPr id="8" name="Shape 6"/>
+          <p:cNvSpPr/>
+          <p:nvPr/>
+        </p:nvSpPr>
+        <p:spPr>
+          <a:xfrm>
+            <a:off x="11588191" y="4288536"/>
+            <a:ext cx="603504" cy="1152144"/>
+          </a:xfrm>
+          <a:prstGeom prst="rect">
+            <a:avLst/>
+          </a:prstGeom>
+          <a:solidFill>
+            <a:srgbClr val="1E1208"/>
+          </a:solidFill>
+          <a:ln w="25400">
+            <a:solidFill>
+              <a:srgbClr val="1E1208"/>
+            </a:solidFill>
+            <a:prstDash val="solid"/>
+          </a:ln>
+        </p:spPr>
+      </p:sp>
+      <p:sp>
+        <p:nvSpPr>
+          <p:cNvPr id="9" name="Text 7"/>
+          <p:cNvSpPr/>
+          <p:nvPr/>
+        </p:nvSpPr>
+        <p:spPr>
+          <a:xfrm>
+            <a:off x="11588191" y="4288536"/>
+            <a:ext cx="603504" cy="1152144"/>
+          </a:xfrm>
+          <a:prstGeom prst="rect">
+            <a:avLst/>
+          </a:prstGeom>
+          <a:noFill/>
+          <a:ln/>
+        </p:spPr>
+        <p:txBody>
+          <a:bodyPr wrap="square" lIns="0" tIns="0" rIns="0" bIns="0" rtlCol="0" anchor="ctr" vert="vert270"/>
+          <a:lstStyle/>
+          <a:p>
+            <a:pPr algn="ctr" indent="0" marL="0">
+              <a:buNone/>
+            </a:pPr>
+            <a:r>
+              <a:rPr lang="en-US" sz="1200" b="1" spc="300" kern="0" dirty="0">
+                <a:solidFill>
+                  <a:srgbClr val="FFFFFF"/>
+                </a:solidFill>
+                <a:latin typeface="Courier New" pitchFamily="34" charset="0"/>
+                <a:ea typeface="Courier New" pitchFamily="34" charset="-122"/>
+                <a:cs typeface="Courier New" pitchFamily="34" charset="-120"/>
+              </a:rPr>
+              <a:t>PLAY</a:t>
+            </a:r>
+            <a:endParaRPr lang="en-US" sz="1200" dirty="0"/>
+          </a:p>
+        </p:txBody>
+      </p:sp>
+      <p:sp>
+        <p:nvSpPr>
+          <p:cNvPr id="10" name="Shape 8"/>
+          <p:cNvSpPr/>
+          <p:nvPr/>
+        </p:nvSpPr>
+        <p:spPr>
+          <a:xfrm>
+            <a:off x="11368735" y="5550408"/>
+            <a:ext cx="822960" cy="1152144"/>
+          </a:xfrm>
+          <a:prstGeom prst="rect">
+            <a:avLst/>
+          </a:prstGeom>
+          <a:solidFill>
+            <a:srgbClr val="FDFDFB"/>
+          </a:solidFill>
+          <a:ln w="25400">
+            <a:solidFill>
+              <a:srgbClr val="1E1208"/>
+            </a:solidFill>
+            <a:prstDash val="solid"/>
+          </a:ln>
+        </p:spPr>
+      </p:sp>
+      <p:sp>
+        <p:nvSpPr>
+          <p:cNvPr id="11" name="Text 9"/>
+          <p:cNvSpPr/>
+          <p:nvPr/>
+        </p:nvSpPr>
+        <p:spPr>
+          <a:xfrm>
+            <a:off x="11368735" y="5550408"/>
+            <a:ext cx="822960" cy="1152144"/>
+          </a:xfrm>
+          <a:prstGeom prst="rect">
+            <a:avLst/>
+          </a:prstGeom>
+          <a:noFill/>
+          <a:ln/>
+        </p:spPr>
+        <p:txBody>
+          <a:bodyPr wrap="square" lIns="0" tIns="0" rIns="0" bIns="0" rtlCol="0" anchor="ctr" vert="vert270"/>
+          <a:lstStyle/>
+          <a:p>
+            <a:pPr algn="ctr" indent="0" marL="0">
+              <a:buNone/>
+            </a:pPr>
+            <a:r>
+              <a:rPr lang="en-US" sz="1200" b="1" spc="300" kern="0" dirty="0">
+                <a:solidFill>
+                  <a:srgbClr val="1E1208"/>
+                </a:solidFill>
+                <a:latin typeface="Courier New" pitchFamily="34" charset="0"/>
+                <a:ea typeface="Courier New" pitchFamily="34" charset="-122"/>
+                <a:cs typeface="Courier New" pitchFamily="34" charset="-120"/>
+              </a:rPr>
+              <a:t>WHY US</a:t>
+            </a:r>
+            <a:endParaRPr lang="en-US" sz="1200" dirty="0"/>
+          </a:p>
+        </p:txBody>
+      </p:sp>
+      <p:sp>
+        <p:nvSpPr>
+          <p:cNvPr id="13" name="Text 10"/>
+          <p:cNvSpPr/>
+          <p:nvPr/>
+        </p:nvSpPr>
+        <p:spPr>
+          <a:xfrm>
+            <a:off x="1417320" y="457200"/>
+            <a:ext cx="9144000" cy="274320"/>
+          </a:xfrm>
+          <a:prstGeom prst="rect">
+            <a:avLst/>
+          </a:prstGeom>
+          <a:noFill/>
+          <a:ln/>
+        </p:spPr>
+        <p:txBody>
+          <a:bodyPr wrap="square" lIns="0" tIns="0" rIns="0" bIns="0" rtlCol="0" anchor="ctr"/>
+          <a:lstStyle/>
+          <a:p>
+            <a:pPr indent="0" marL="0">
+              <a:buNone/>
+            </a:pPr>
+            <a:r>
+              <a:rPr lang="en-US" sz="1150" b="1" spc="300" kern="0" dirty="0">
+                <a:solidFill>
+                  <a:srgbClr val="1E1208"/>
+                </a:solidFill>
+                <a:latin typeface="Courier New" pitchFamily="34" charset="0"/>
+                <a:ea typeface="Courier New" pitchFamily="34" charset="-122"/>
+                <a:cs typeface="Courier New" pitchFamily="34" charset="-120"/>
+              </a:rPr>
+              <a:t>YOU ASKED. WE BUILT.</a:t>
+            </a:r>
+            <a:endParaRPr lang="en-US" sz="1150" dirty="0"/>
+          </a:p>
+        </p:txBody>
+      </p:sp>
+      <p:sp>
+        <p:nvSpPr>
+          <p:cNvPr id="14" name="Text 11"/>
+          <p:cNvSpPr/>
+          <p:nvPr/>
+        </p:nvSpPr>
+        <p:spPr>
+          <a:xfrm>
+            <a:off x="1417320" y="777240"/>
+            <a:ext cx="9509760" cy="1005840"/>
+          </a:xfrm>
+          <a:prstGeom prst="rect">
+            <a:avLst/>
+          </a:prstGeom>
+          <a:noFill/>
+          <a:ln/>
+        </p:spPr>
+        <p:txBody>
+          <a:bodyPr wrap="square" lIns="0" tIns="0" rIns="0" bIns="0" rtlCol="0" anchor="t">
+            <a:normAutofit/>
+          </a:bodyPr>
+          <a:lstStyle/>
+          <a:p>
+            <a:pPr indent="0" marL="0">
+              <a:buNone/>
+            </a:pPr>
+            <a:r>
+              <a:rPr lang="en-US" sz="4100" dirty="0">
+                <a:solidFill>
+                  <a:srgbClr val="1E1208"/>
+                </a:solidFill>
+                <a:latin typeface="Impact" pitchFamily="34" charset="0"/>
+                <a:ea typeface="Impact" pitchFamily="34" charset="-122"/>
+                <a:cs typeface="Impact" pitchFamily="34" charset="-120"/>
+              </a:rPr>
               <a:t>WHAT YOU TOLD US, AND WHAT IS BUILT</a:t>
             </a:r>
             <a:endParaRPr lang="en-US" sz="4100" dirty="0"/>
@@ -30165,7 +32003,7 @@
       </p:sp>
       <p:graphicFrame>
         <p:nvGraphicFramePr>
-          <p:cNvPr id="30" name="Table 0"/>
+          <p:cNvPr id="31" name="Table 0"/>
           <p:cNvGraphicFramePr>
             <a:graphicFrameLocks noGrp="1"/>
           </p:cNvGraphicFramePr>
@@ -32262,9 +34100,9 @@
 </p:sld>
 </file>
 
-<file path=ppt/slides/slide3.xml><?xml version="1.0" encoding="utf-8"?>
+<file path=ppt/slides/slide31.xml><?xml version="1.0" encoding="utf-8"?>
 <p:sld xmlns:a="http://schemas.openxmlformats.org/drawingml/2006/main" xmlns:r="http://schemas.openxmlformats.org/officeDocument/2006/relationships" xmlns:p="http://schemas.openxmlformats.org/presentationml/2006/main">
-  <p:cSld name="Slide 3">
+  <p:cSld name="Slide 31">
     <p:bg>
       <p:bgPr>
         <a:blipFill dpi="0" rotWithShape="1">
@@ -32557,8 +34395,8 @@
         </p:nvSpPr>
         <p:spPr>
           <a:xfrm>
-            <a:off x="11588191" y="5550408"/>
-            <a:ext cx="603504" cy="1152144"/>
+            <a:off x="11368735" y="5550408"/>
+            <a:ext cx="822960" cy="1152144"/>
           </a:xfrm>
           <a:prstGeom prst="rect">
             <a:avLst/>
@@ -32582,8 +34420,8 @@
         </p:nvSpPr>
         <p:spPr>
           <a:xfrm>
-            <a:off x="11588191" y="5550408"/>
-            <a:ext cx="603504" cy="1152144"/>
+            <a:off x="11368735" y="5550408"/>
+            <a:ext cx="822960" cy="1152144"/>
           </a:xfrm>
           <a:prstGeom prst="rect">
             <a:avLst/>
@@ -32646,7 +34484,7 @@
                 <a:ea typeface="Courier New" pitchFamily="34" charset="-122"/>
                 <a:cs typeface="Courier New" pitchFamily="34" charset="-120"/>
               </a:rPr>
-              <a:t>THE PROBLEM</a:t>
+              <a:t>THE NEXT STEP</a:t>
             </a:r>
             <a:endParaRPr lang="en-US" sz="1150" dirty="0"/>
           </a:p>
@@ -32679,7 +34517,7 @@
               <a:buNone/>
             </a:pPr>
             <a:r>
-              <a:rPr lang="en-US" sz="4300" dirty="0">
+              <a:rPr lang="en-US" sz="4800" dirty="0">
                 <a:solidFill>
                   <a:srgbClr val="1E1208"/>
                 </a:solidFill>
@@ -32687,9 +34525,9 @@
                 <a:ea typeface="Impact" pitchFamily="34" charset="-122"/>
                 <a:cs typeface="Impact" pitchFamily="34" charset="-120"/>
               </a:rPr>
-              <a:t>EVERY TERM, LEARNING TRAVELS ONTO PAPER, AND BACK AGAIN</a:t>
-            </a:r>
-            <a:endParaRPr lang="en-US" sz="4300" dirty="0"/>
+              <a:t>A PATHWAY WE CAN SHAPE TOGETHER</a:t>
+            </a:r>
+            <a:endParaRPr lang="en-US" sz="4800" dirty="0"/>
           </a:p>
         </p:txBody>
       </p:sp>
@@ -32701,14 +34539,14 @@
         </p:nvSpPr>
         <p:spPr>
           <a:xfrm>
-            <a:off x="1417320" y="2148840"/>
-            <a:ext cx="2240280" cy="1508760"/>
-          </a:xfrm>
-          <a:prstGeom prst="rect">
-            <a:avLst/>
-          </a:prstGeom>
-          <a:solidFill>
-            <a:srgbClr val="FFFFFF"/>
+            <a:off x="1417320" y="1965960"/>
+            <a:ext cx="1783080" cy="2148840"/>
+          </a:xfrm>
+          <a:prstGeom prst="rect">
+            <a:avLst/>
+          </a:prstGeom>
+          <a:solidFill>
+            <a:srgbClr val="FBE9D6"/>
           </a:solidFill>
           <a:ln w="25400">
             <a:solidFill>
@@ -32726,14 +34564,14 @@
         </p:nvSpPr>
         <p:spPr>
           <a:xfrm>
-            <a:off x="1417320" y="2148840"/>
-            <a:ext cx="640080" cy="1508760"/>
-          </a:xfrm>
-          <a:prstGeom prst="rect">
-            <a:avLst/>
-          </a:prstGeom>
-          <a:solidFill>
-            <a:srgbClr val="FBE9D6"/>
+            <a:off x="1417320" y="1965960"/>
+            <a:ext cx="1783080" cy="777240"/>
+          </a:xfrm>
+          <a:prstGeom prst="rect">
+            <a:avLst/>
+          </a:prstGeom>
+          <a:solidFill>
+            <a:srgbClr val="D4762A"/>
           </a:solidFill>
           <a:ln w="25400">
             <a:solidFill>
@@ -32751,8 +34589,8 @@
         </p:nvSpPr>
         <p:spPr>
           <a:xfrm>
-            <a:off x="1417320" y="2148840"/>
-            <a:ext cx="640080" cy="1508760"/>
+            <a:off x="1417320" y="1965960"/>
+            <a:ext cx="1783080" cy="777240"/>
           </a:xfrm>
           <a:prstGeom prst="rect">
             <a:avLst/>
@@ -32771,7 +34609,7 @@
               <a:buNone/>
             </a:pPr>
             <a:r>
-              <a:rPr lang="en-US" sz="3600" dirty="0">
+              <a:rPr lang="en-US" sz="4400" dirty="0">
                 <a:solidFill>
                   <a:srgbClr val="1E1208"/>
                 </a:solidFill>
@@ -32781,7 +34619,7 @@
               </a:rPr>
               <a:t>1</a:t>
             </a:r>
-            <a:endParaRPr lang="en-US" sz="3600" dirty="0"/>
+            <a:endParaRPr lang="en-US" sz="4400" dirty="0"/>
           </a:p>
         </p:txBody>
       </p:sp>
@@ -32793,8 +34631,8 @@
         </p:nvSpPr>
         <p:spPr>
           <a:xfrm>
-            <a:off x="2167128" y="2377440"/>
-            <a:ext cx="1417320" cy="365760"/>
+            <a:off x="1545336" y="2834640"/>
+            <a:ext cx="1554480" cy="365760"/>
           </a:xfrm>
           <a:prstGeom prst="rect">
             <a:avLst/>
@@ -32813,7 +34651,7 @@
               <a:buNone/>
             </a:pPr>
             <a:r>
-              <a:rPr lang="en-US" sz="2000" dirty="0">
+              <a:rPr lang="en-US" sz="1700" dirty="0">
                 <a:solidFill>
                   <a:srgbClr val="1E1208"/>
                 </a:solidFill>
@@ -32821,9 +34659,9 @@
                 <a:ea typeface="Impact" pitchFamily="34" charset="-122"/>
                 <a:cs typeface="Impact" pitchFamily="34" charset="-120"/>
               </a:rPr>
-              <a:t>CREATE</a:t>
-            </a:r>
-            <a:endParaRPr lang="en-US" sz="2000" dirty="0"/>
+              <a:t>EXPERIENCE</a:t>
+            </a:r>
+            <a:endParaRPr lang="en-US" sz="1700" dirty="0"/>
           </a:p>
         </p:txBody>
       </p:sp>
@@ -32835,8 +34673,8 @@
         </p:nvSpPr>
         <p:spPr>
           <a:xfrm>
-            <a:off x="2167128" y="2834640"/>
-            <a:ext cx="1417320" cy="731520"/>
+            <a:off x="1545336" y="3291840"/>
+            <a:ext cx="1554480" cy="822960"/>
           </a:xfrm>
           <a:prstGeom prst="rect">
             <a:avLst/>
@@ -32855,7 +34693,7 @@
               <a:buNone/>
             </a:pPr>
             <a:r>
-              <a:rPr lang="en-US" sz="1250" dirty="0">
+              <a:rPr lang="en-US" sz="1150" dirty="0">
                 <a:solidFill>
                   <a:srgbClr val="555555"/>
                 </a:solidFill>
@@ -32863,9 +34701,9 @@
                 <a:ea typeface="Arial" pitchFamily="34" charset="-122"/>
                 <a:cs typeface="Arial" pitchFamily="34" charset="-120"/>
               </a:rPr>
-              <a:t>Teacher creates the exam</a:t>
-            </a:r>
-            <a:endParaRPr lang="en-US" sz="1250" dirty="0"/>
+              <a:t>Today: use it hands-on and tell us what you see.</a:t>
+            </a:r>
+            <a:endParaRPr lang="en-US" sz="1150" dirty="0"/>
           </a:p>
         </p:txBody>
       </p:sp>
@@ -32877,8 +34715,8 @@
         </p:nvSpPr>
         <p:spPr>
           <a:xfrm>
-            <a:off x="3813048" y="2148840"/>
-            <a:ext cx="2240280" cy="1508760"/>
+            <a:off x="3337560" y="1965960"/>
+            <a:ext cx="1783080" cy="2148840"/>
           </a:xfrm>
           <a:prstGeom prst="rect">
             <a:avLst/>
@@ -32902,14 +34740,14 @@
         </p:nvSpPr>
         <p:spPr>
           <a:xfrm>
-            <a:off x="3813048" y="2148840"/>
-            <a:ext cx="640080" cy="1508760"/>
-          </a:xfrm>
-          <a:prstGeom prst="rect">
-            <a:avLst/>
-          </a:prstGeom>
-          <a:solidFill>
-            <a:srgbClr val="FBE9D6"/>
+            <a:off x="3337560" y="1965960"/>
+            <a:ext cx="1783080" cy="777240"/>
+          </a:xfrm>
+          <a:prstGeom prst="rect">
+            <a:avLst/>
+          </a:prstGeom>
+          <a:solidFill>
+            <a:srgbClr val="E3B51E"/>
           </a:solidFill>
           <a:ln w="25400">
             <a:solidFill>
@@ -32927,8 +34765,8 @@
         </p:nvSpPr>
         <p:spPr>
           <a:xfrm>
-            <a:off x="3813048" y="2148840"/>
-            <a:ext cx="640080" cy="1508760"/>
+            <a:off x="3337560" y="1965960"/>
+            <a:ext cx="1783080" cy="777240"/>
           </a:xfrm>
           <a:prstGeom prst="rect">
             <a:avLst/>
@@ -32947,7 +34785,7 @@
               <a:buNone/>
             </a:pPr>
             <a:r>
-              <a:rPr lang="en-US" sz="3600" dirty="0">
+              <a:rPr lang="en-US" sz="4400" dirty="0">
                 <a:solidFill>
                   <a:srgbClr val="1E1208"/>
                 </a:solidFill>
@@ -32957,7 +34795,7 @@
               </a:rPr>
               <a:t>2</a:t>
             </a:r>
-            <a:endParaRPr lang="en-US" sz="3600" dirty="0"/>
+            <a:endParaRPr lang="en-US" sz="4400" dirty="0"/>
           </a:p>
         </p:txBody>
       </p:sp>
@@ -32969,8 +34807,8 @@
         </p:nvSpPr>
         <p:spPr>
           <a:xfrm>
-            <a:off x="4562856" y="2377440"/>
-            <a:ext cx="1417320" cy="365760"/>
+            <a:off x="3465576" y="2834640"/>
+            <a:ext cx="1554480" cy="365760"/>
           </a:xfrm>
           <a:prstGeom prst="rect">
             <a:avLst/>
@@ -32989,7 +34827,7 @@
               <a:buNone/>
             </a:pPr>
             <a:r>
-              <a:rPr lang="en-US" sz="2000" dirty="0">
+              <a:rPr lang="en-US" sz="1700" dirty="0">
                 <a:solidFill>
                   <a:srgbClr val="1E1208"/>
                 </a:solidFill>
@@ -32997,9 +34835,9 @@
                 <a:ea typeface="Impact" pitchFamily="34" charset="-122"/>
                 <a:cs typeface="Impact" pitchFamily="34" charset="-120"/>
               </a:rPr>
-              <a:t>PRINT</a:t>
-            </a:r>
-            <a:endParaRPr lang="en-US" sz="2000" dirty="0"/>
+              <a:t>CHOOSE A START</a:t>
+            </a:r>
+            <a:endParaRPr lang="en-US" sz="1700" dirty="0"/>
           </a:p>
         </p:txBody>
       </p:sp>
@@ -33011,8 +34849,8 @@
         </p:nvSpPr>
         <p:spPr>
           <a:xfrm>
-            <a:off x="4562856" y="2834640"/>
-            <a:ext cx="1417320" cy="731520"/>
+            <a:off x="3465576" y="3291840"/>
+            <a:ext cx="1554480" cy="822960"/>
           </a:xfrm>
           <a:prstGeom prst="rect">
             <a:avLst/>
@@ -33031,7 +34869,7 @@
               <a:buNone/>
             </a:pPr>
             <a:r>
-              <a:rPr lang="en-US" sz="1250" dirty="0">
+              <a:rPr lang="en-US" sz="1150" dirty="0">
                 <a:solidFill>
                   <a:srgbClr val="555555"/>
                 </a:solidFill>
@@ -33039,9 +34877,9 @@
                 <a:ea typeface="Arial" pitchFamily="34" charset="-122"/>
                 <a:cs typeface="Arial" pitchFamily="34" charset="-120"/>
               </a:rPr>
-              <a:t>Copies are printed</a:t>
-            </a:r>
-            <a:endParaRPr lang="en-US" sz="1250" dirty="0"/>
+              <a:t>Pick departments, classes and assessment types.</a:t>
+            </a:r>
+            <a:endParaRPr lang="en-US" sz="1150" dirty="0"/>
           </a:p>
         </p:txBody>
       </p:sp>
@@ -33053,8 +34891,8 @@
         </p:nvSpPr>
         <p:spPr>
           <a:xfrm>
-            <a:off x="6208776" y="2148840"/>
-            <a:ext cx="2240280" cy="1508760"/>
+            <a:off x="5257800" y="1965960"/>
+            <a:ext cx="1783080" cy="2148840"/>
           </a:xfrm>
           <a:prstGeom prst="rect">
             <a:avLst/>
@@ -33078,14 +34916,14 @@
         </p:nvSpPr>
         <p:spPr>
           <a:xfrm>
-            <a:off x="6208776" y="2148840"/>
-            <a:ext cx="640080" cy="1508760"/>
-          </a:xfrm>
-          <a:prstGeom prst="rect">
-            <a:avLst/>
-          </a:prstGeom>
-          <a:solidFill>
-            <a:srgbClr val="FBE9D6"/>
+            <a:off x="5257800" y="1965960"/>
+            <a:ext cx="1783080" cy="777240"/>
+          </a:xfrm>
+          <a:prstGeom prst="rect">
+            <a:avLst/>
+          </a:prstGeom>
+          <a:solidFill>
+            <a:srgbClr val="E3B51E"/>
           </a:solidFill>
           <a:ln w="25400">
             <a:solidFill>
@@ -33103,8 +34941,8 @@
         </p:nvSpPr>
         <p:spPr>
           <a:xfrm>
-            <a:off x="6208776" y="2148840"/>
-            <a:ext cx="640080" cy="1508760"/>
+            <a:off x="5257800" y="1965960"/>
+            <a:ext cx="1783080" cy="777240"/>
           </a:xfrm>
           <a:prstGeom prst="rect">
             <a:avLst/>
@@ -33123,7 +34961,7 @@
               <a:buNone/>
             </a:pPr>
             <a:r>
-              <a:rPr lang="en-US" sz="3600" dirty="0">
+              <a:rPr lang="en-US" sz="4400" dirty="0">
                 <a:solidFill>
                   <a:srgbClr val="1E1208"/>
                 </a:solidFill>
@@ -33133,7 +34971,7 @@
               </a:rPr>
               <a:t>3</a:t>
             </a:r>
-            <a:endParaRPr lang="en-US" sz="3600" dirty="0"/>
+            <a:endParaRPr lang="en-US" sz="4400" dirty="0"/>
           </a:p>
         </p:txBody>
       </p:sp>
@@ -33145,8 +34983,8 @@
         </p:nvSpPr>
         <p:spPr>
           <a:xfrm>
-            <a:off x="6958584" y="2377440"/>
-            <a:ext cx="1417320" cy="365760"/>
+            <a:off x="5385816" y="2834640"/>
+            <a:ext cx="1554480" cy="365760"/>
           </a:xfrm>
           <a:prstGeom prst="rect">
             <a:avLst/>
@@ -33165,7 +35003,7 @@
               <a:buNone/>
             </a:pPr>
             <a:r>
-              <a:rPr lang="en-US" sz="2000" dirty="0">
+              <a:rPr lang="en-US" sz="1700" dirty="0">
                 <a:solidFill>
                   <a:srgbClr val="1E1208"/>
                 </a:solidFill>
@@ -33173,9 +35011,9 @@
                 <a:ea typeface="Impact" pitchFamily="34" charset="-122"/>
                 <a:cs typeface="Impact" pitchFamily="34" charset="-120"/>
               </a:rPr>
-              <a:t>COPY</a:t>
-            </a:r>
-            <a:endParaRPr lang="en-US" sz="2000" dirty="0"/>
+              <a:t>PILOT</a:t>
+            </a:r>
+            <a:endParaRPr lang="en-US" sz="1700" dirty="0"/>
           </a:p>
         </p:txBody>
       </p:sp>
@@ -33187,8 +35025,8 @@
         </p:nvSpPr>
         <p:spPr>
           <a:xfrm>
-            <a:off x="6958584" y="2834640"/>
-            <a:ext cx="1417320" cy="731520"/>
+            <a:off x="5385816" y="3291840"/>
+            <a:ext cx="1554480" cy="822960"/>
           </a:xfrm>
           <a:prstGeom prst="rect">
             <a:avLst/>
@@ -33207,7 +35045,7 @@
               <a:buNone/>
             </a:pPr>
             <a:r>
-              <a:rPr lang="en-US" sz="1250" dirty="0">
+              <a:rPr lang="en-US" sz="1150" dirty="0">
                 <a:solidFill>
                   <a:srgbClr val="555555"/>
                 </a:solidFill>
@@ -33215,9 +35053,9 @@
                 <a:ea typeface="Arial" pitchFamily="34" charset="-122"/>
                 <a:cs typeface="Arial" pitchFamily="34" charset="-120"/>
               </a:rPr>
-              <a:t>Enough papers are prepared</a:t>
-            </a:r>
-            <a:endParaRPr lang="en-US" sz="1250" dirty="0"/>
+              <a:t>Run it for a defined period with real classes.</a:t>
+            </a:r>
+            <a:endParaRPr lang="en-US" sz="1150" dirty="0"/>
           </a:p>
         </p:txBody>
       </p:sp>
@@ -33229,8 +35067,8 @@
         </p:nvSpPr>
         <p:spPr>
           <a:xfrm>
-            <a:off x="8604504" y="2148840"/>
-            <a:ext cx="2240280" cy="1508760"/>
+            <a:off x="7178040" y="1965960"/>
+            <a:ext cx="1783080" cy="2148840"/>
           </a:xfrm>
           <a:prstGeom prst="rect">
             <a:avLst/>
@@ -33254,14 +35092,14 @@
         </p:nvSpPr>
         <p:spPr>
           <a:xfrm>
-            <a:off x="8604504" y="2148840"/>
-            <a:ext cx="640080" cy="1508760"/>
-          </a:xfrm>
-          <a:prstGeom prst="rect">
-            <a:avLst/>
-          </a:prstGeom>
-          <a:solidFill>
-            <a:srgbClr val="FBE9D6"/>
+            <a:off x="7178040" y="1965960"/>
+            <a:ext cx="1783080" cy="777240"/>
+          </a:xfrm>
+          <a:prstGeom prst="rect">
+            <a:avLst/>
+          </a:prstGeom>
+          <a:solidFill>
+            <a:srgbClr val="E3B51E"/>
           </a:solidFill>
           <a:ln w="25400">
             <a:solidFill>
@@ -33279,8 +35117,8 @@
         </p:nvSpPr>
         <p:spPr>
           <a:xfrm>
-            <a:off x="8604504" y="2148840"/>
-            <a:ext cx="640080" cy="1508760"/>
+            <a:off x="7178040" y="1965960"/>
+            <a:ext cx="1783080" cy="777240"/>
           </a:xfrm>
           <a:prstGeom prst="rect">
             <a:avLst/>
@@ -33299,7 +35137,7 @@
               <a:buNone/>
             </a:pPr>
             <a:r>
-              <a:rPr lang="en-US" sz="3600" dirty="0">
+              <a:rPr lang="en-US" sz="4400" dirty="0">
                 <a:solidFill>
                   <a:srgbClr val="1E1208"/>
                 </a:solidFill>
@@ -33309,7 +35147,7 @@
               </a:rPr>
               <a:t>4</a:t>
             </a:r>
-            <a:endParaRPr lang="en-US" sz="3600" dirty="0"/>
+            <a:endParaRPr lang="en-US" sz="4400" dirty="0"/>
           </a:p>
         </p:txBody>
       </p:sp>
@@ -33321,8 +35159,8 @@
         </p:nvSpPr>
         <p:spPr>
           <a:xfrm>
-            <a:off x="9354312" y="2377440"/>
-            <a:ext cx="1417320" cy="365760"/>
+            <a:off x="7306056" y="2834640"/>
+            <a:ext cx="1554480" cy="365760"/>
           </a:xfrm>
           <a:prstGeom prst="rect">
             <a:avLst/>
@@ -33341,7 +35179,7 @@
               <a:buNone/>
             </a:pPr>
             <a:r>
-              <a:rPr lang="en-US" sz="2000" dirty="0">
+              <a:rPr lang="en-US" sz="1700" dirty="0">
                 <a:solidFill>
                   <a:srgbClr val="1E1208"/>
                 </a:solidFill>
@@ -33349,9 +35187,9 @@
                 <a:ea typeface="Impact" pitchFamily="34" charset="-122"/>
                 <a:cs typeface="Impact" pitchFamily="34" charset="-120"/>
               </a:rPr>
-              <a:t>ADMINISTER</a:t>
-            </a:r>
-            <a:endParaRPr lang="en-US" sz="2000" dirty="0"/>
+              <a:t>REVIEW</a:t>
+            </a:r>
+            <a:endParaRPr lang="en-US" sz="1700" dirty="0"/>
           </a:p>
         </p:txBody>
       </p:sp>
@@ -33363,8 +35201,8 @@
         </p:nvSpPr>
         <p:spPr>
           <a:xfrm>
-            <a:off x="9354312" y="2834640"/>
-            <a:ext cx="1417320" cy="731520"/>
+            <a:off x="7306056" y="3291840"/>
+            <a:ext cx="1554480" cy="822960"/>
           </a:xfrm>
           <a:prstGeom prst="rect">
             <a:avLst/>
@@ -33383,7 +35221,7 @@
               <a:buNone/>
             </a:pPr>
             <a:r>
-              <a:rPr lang="en-US" sz="1250" dirty="0">
+              <a:rPr lang="en-US" sz="1150" dirty="0">
                 <a:solidFill>
                   <a:srgbClr val="555555"/>
                 </a:solidFill>
@@ -33391,9 +35229,9 @@
                 <a:ea typeface="Arial" pitchFamily="34" charset="-122"/>
                 <a:cs typeface="Arial" pitchFamily="34" charset="-120"/>
               </a:rPr>
-              <a:t>Students sit the exam</a:t>
-            </a:r>
-            <a:endParaRPr lang="en-US" sz="1250" dirty="0"/>
+              <a:t>Look at the evidence together.</a:t>
+            </a:r>
+            <a:endParaRPr lang="en-US" sz="1150" dirty="0"/>
           </a:p>
         </p:txBody>
       </p:sp>
@@ -33405,8 +35243,8 @@
         </p:nvSpPr>
         <p:spPr>
           <a:xfrm>
-            <a:off x="1417320" y="3840480"/>
-            <a:ext cx="2240280" cy="1508760"/>
+            <a:off x="9098280" y="1965960"/>
+            <a:ext cx="1783080" cy="2148840"/>
           </a:xfrm>
           <a:prstGeom prst="rect">
             <a:avLst/>
@@ -33430,14 +35268,14 @@
         </p:nvSpPr>
         <p:spPr>
           <a:xfrm>
-            <a:off x="1417320" y="3840480"/>
-            <a:ext cx="640080" cy="1508760"/>
-          </a:xfrm>
-          <a:prstGeom prst="rect">
-            <a:avLst/>
-          </a:prstGeom>
-          <a:solidFill>
-            <a:srgbClr val="FBE9D6"/>
+            <a:off x="9098280" y="1965960"/>
+            <a:ext cx="1783080" cy="777240"/>
+          </a:xfrm>
+          <a:prstGeom prst="rect">
+            <a:avLst/>
+          </a:prstGeom>
+          <a:solidFill>
+            <a:srgbClr val="E3B51E"/>
           </a:solidFill>
           <a:ln w="25400">
             <a:solidFill>
@@ -33455,8 +35293,8 @@
         </p:nvSpPr>
         <p:spPr>
           <a:xfrm>
-            <a:off x="1417320" y="3840480"/>
-            <a:ext cx="640080" cy="1508760"/>
+            <a:off x="9098280" y="1965960"/>
+            <a:ext cx="1783080" cy="777240"/>
           </a:xfrm>
           <a:prstGeom prst="rect">
             <a:avLst/>
@@ -33475,7 +35313,7 @@
               <a:buNone/>
             </a:pPr>
             <a:r>
-              <a:rPr lang="en-US" sz="3600" dirty="0">
+              <a:rPr lang="en-US" sz="4400" dirty="0">
                 <a:solidFill>
                   <a:srgbClr val="1E1208"/>
                 </a:solidFill>
@@ -33485,7 +35323,7 @@
               </a:rPr>
               <a:t>5</a:t>
             </a:r>
-            <a:endParaRPr lang="en-US" sz="3600" dirty="0"/>
+            <a:endParaRPr lang="en-US" sz="4400" dirty="0"/>
           </a:p>
         </p:txBody>
       </p:sp>
@@ -33497,8 +35335,8 @@
         </p:nvSpPr>
         <p:spPr>
           <a:xfrm>
-            <a:off x="2167128" y="4069080"/>
-            <a:ext cx="1417320" cy="365760"/>
+            <a:off x="9226296" y="2834640"/>
+            <a:ext cx="1554480" cy="365760"/>
           </a:xfrm>
           <a:prstGeom prst="rect">
             <a:avLst/>
@@ -33517,7 +35355,7 @@
               <a:buNone/>
             </a:pPr>
             <a:r>
-              <a:rPr lang="en-US" sz="2000" dirty="0">
+              <a:rPr lang="en-US" sz="1700" dirty="0">
                 <a:solidFill>
                   <a:srgbClr val="1E1208"/>
                 </a:solidFill>
@@ -33525,9 +35363,9 @@
                 <a:ea typeface="Impact" pitchFamily="34" charset="-122"/>
                 <a:cs typeface="Impact" pitchFamily="34" charset="-120"/>
               </a:rPr>
-              <a:t>COLLECT</a:t>
-            </a:r>
-            <a:endParaRPr lang="en-US" sz="2000" dirty="0"/>
+              <a:t>EXPAND</a:t>
+            </a:r>
+            <a:endParaRPr lang="en-US" sz="1700" dirty="0"/>
           </a:p>
         </p:txBody>
       </p:sp>
@@ -33539,8 +35377,8 @@
         </p:nvSpPr>
         <p:spPr>
           <a:xfrm>
-            <a:off x="2167128" y="4526280"/>
-            <a:ext cx="1417320" cy="731520"/>
+            <a:off x="9226296" y="3291840"/>
+            <a:ext cx="1554480" cy="822960"/>
           </a:xfrm>
           <a:prstGeom prst="rect">
             <a:avLst/>
@@ -33559,7 +35397,7 @@
               <a:buNone/>
             </a:pPr>
             <a:r>
-              <a:rPr lang="en-US" sz="1250" dirty="0">
+              <a:rPr lang="en-US" sz="1150" dirty="0">
                 <a:solidFill>
                   <a:srgbClr val="555555"/>
                 </a:solidFill>
@@ -33567,28 +35405,70 @@
                 <a:ea typeface="Arial" pitchFamily="34" charset="-122"/>
                 <a:cs typeface="Arial" pitchFamily="34" charset="-120"/>
               </a:rPr>
-              <a:t>Papers come back</a:t>
-            </a:r>
-            <a:endParaRPr lang="en-US" sz="1250" dirty="0"/>
-          </a:p>
-        </p:txBody>
-      </p:sp>
-      <p:sp>
-        <p:nvSpPr>
-          <p:cNvPr id="40" name="Shape 37"/>
-          <p:cNvSpPr/>
-          <p:nvPr/>
-        </p:nvSpPr>
-        <p:spPr>
-          <a:xfrm>
-            <a:off x="3813048" y="3840480"/>
-            <a:ext cx="2240280" cy="1508760"/>
-          </a:xfrm>
-          <a:prstGeom prst="rect">
-            <a:avLst/>
-          </a:prstGeom>
-          <a:solidFill>
-            <a:srgbClr val="FFFFFF"/>
+              <a:t>Decide how and when to widen it.</a:t>
+            </a:r>
+            <a:endParaRPr lang="en-US" sz="1150" dirty="0"/>
+          </a:p>
+        </p:txBody>
+      </p:sp>
+      <p:sp>
+        <p:nvSpPr>
+          <p:cNvPr id="40" name="Text 37"/>
+          <p:cNvSpPr/>
+          <p:nvPr/>
+        </p:nvSpPr>
+        <p:spPr>
+          <a:xfrm>
+            <a:off x="1417320" y="4434840"/>
+            <a:ext cx="9144000" cy="274320"/>
+          </a:xfrm>
+          <a:prstGeom prst="rect">
+            <a:avLst/>
+          </a:prstGeom>
+          <a:noFill/>
+          <a:ln/>
+        </p:spPr>
+        <p:txBody>
+          <a:bodyPr wrap="square" lIns="0" tIns="0" rIns="0" bIns="0" rtlCol="0" anchor="t"/>
+          <a:lstStyle/>
+          <a:p>
+            <a:pPr algn="l" indent="0" marL="0">
+              <a:lnSpc>
+                <a:spcPct val="110000"/>
+              </a:lnSpc>
+              <a:buNone/>
+            </a:pPr>
+            <a:r>
+              <a:rPr lang="en-US" sz="1100" b="1" spc="200" kern="0" dirty="0">
+                <a:solidFill>
+                  <a:srgbClr val="1E1208"/>
+                </a:solidFill>
+                <a:latin typeface="Courier New" pitchFamily="34" charset="0"/>
+                <a:ea typeface="Courier New" pitchFamily="34" charset="-122"/>
+                <a:cs typeface="Courier New" pitchFamily="34" charset="-120"/>
+              </a:rPr>
+              <a:t>HOW WE WOULD MEASURE SUCCESS</a:t>
+            </a:r>
+            <a:endParaRPr lang="en-US" sz="1100" dirty="0"/>
+          </a:p>
+        </p:txBody>
+      </p:sp>
+      <p:sp>
+        <p:nvSpPr>
+          <p:cNvPr id="41" name="Shape 38"/>
+          <p:cNvSpPr/>
+          <p:nvPr/>
+        </p:nvSpPr>
+        <p:spPr>
+          <a:xfrm>
+            <a:off x="1417320" y="4800600"/>
+            <a:ext cx="1783080" cy="1005840"/>
+          </a:xfrm>
+          <a:prstGeom prst="rect">
+            <a:avLst/>
+          </a:prstGeom>
+          <a:solidFill>
+            <a:srgbClr val="FBE9D6"/>
           </a:solidFill>
           <a:ln w="25400">
             <a:solidFill>
@@ -33600,14 +35480,56 @@
       </p:sp>
       <p:sp>
         <p:nvSpPr>
-          <p:cNvPr id="41" name="Shape 38"/>
-          <p:cNvSpPr/>
-          <p:nvPr/>
-        </p:nvSpPr>
-        <p:spPr>
-          <a:xfrm>
-            <a:off x="3813048" y="3840480"/>
-            <a:ext cx="640080" cy="1508760"/>
+          <p:cNvPr id="42" name="Text 39"/>
+          <p:cNvSpPr/>
+          <p:nvPr/>
+        </p:nvSpPr>
+        <p:spPr>
+          <a:xfrm>
+            <a:off x="1527048" y="4800600"/>
+            <a:ext cx="1572768" cy="1005840"/>
+          </a:xfrm>
+          <a:prstGeom prst="rect">
+            <a:avLst/>
+          </a:prstGeom>
+          <a:noFill/>
+          <a:ln/>
+        </p:spPr>
+        <p:txBody>
+          <a:bodyPr wrap="square" lIns="0" tIns="0" rIns="0" bIns="0" rtlCol="0" anchor="ctr"/>
+          <a:lstStyle/>
+          <a:p>
+            <a:pPr algn="l" indent="0" marL="0">
+              <a:lnSpc>
+                <a:spcPct val="110000"/>
+              </a:lnSpc>
+              <a:buNone/>
+            </a:pPr>
+            <a:r>
+              <a:rPr lang="en-US" sz="1100" b="1" dirty="0">
+                <a:solidFill>
+                  <a:srgbClr val="1E1208"/>
+                </a:solidFill>
+                <a:latin typeface="Arial" pitchFamily="34" charset="0"/>
+                <a:ea typeface="Arial" pitchFamily="34" charset="-122"/>
+                <a:cs typeface="Arial" pitchFamily="34" charset="-120"/>
+              </a:rPr>
+              <a:t>Teacher hours saved marking and preparing</a:t>
+            </a:r>
+            <a:endParaRPr lang="en-US" sz="1100" dirty="0"/>
+          </a:p>
+        </p:txBody>
+      </p:sp>
+      <p:sp>
+        <p:nvSpPr>
+          <p:cNvPr id="43" name="Shape 40"/>
+          <p:cNvSpPr/>
+          <p:nvPr/>
+        </p:nvSpPr>
+        <p:spPr>
+          <a:xfrm>
+            <a:off x="3337560" y="4800600"/>
+            <a:ext cx="1783080" cy="1005840"/>
           </a:xfrm>
           <a:prstGeom prst="rect">
             <a:avLst/>
@@ -33625,14 +35547,14 @@
       </p:sp>
       <p:sp>
         <p:nvSpPr>
-          <p:cNvPr id="42" name="Text 39"/>
-          <p:cNvSpPr/>
-          <p:nvPr/>
-        </p:nvSpPr>
-        <p:spPr>
-          <a:xfrm>
-            <a:off x="3813048" y="3840480"/>
-            <a:ext cx="640080" cy="1508760"/>
+          <p:cNvPr id="44" name="Text 41"/>
+          <p:cNvSpPr/>
+          <p:nvPr/>
+        </p:nvSpPr>
+        <p:spPr>
+          <a:xfrm>
+            <a:off x="3447288" y="4800600"/>
+            <a:ext cx="1572768" cy="1005840"/>
           </a:xfrm>
           <a:prstGeom prst="rect">
             <a:avLst/>
@@ -33642,48 +35564,6 @@
         </p:spPr>
         <p:txBody>
           <a:bodyPr wrap="square" lIns="0" tIns="0" rIns="0" bIns="0" rtlCol="0" anchor="ctr"/>
-          <a:lstStyle/>
-          <a:p>
-            <a:pPr algn="ctr" indent="0" marL="0">
-              <a:lnSpc>
-                <a:spcPct val="110000"/>
-              </a:lnSpc>
-              <a:buNone/>
-            </a:pPr>
-            <a:r>
-              <a:rPr lang="en-US" sz="3600" dirty="0">
-                <a:solidFill>
-                  <a:srgbClr val="1E1208"/>
-                </a:solidFill>
-                <a:latin typeface="Impact" pitchFamily="34" charset="0"/>
-                <a:ea typeface="Impact" pitchFamily="34" charset="-122"/>
-                <a:cs typeface="Impact" pitchFamily="34" charset="-120"/>
-              </a:rPr>
-              <a:t>6</a:t>
-            </a:r>
-            <a:endParaRPr lang="en-US" sz="3600" dirty="0"/>
-          </a:p>
-        </p:txBody>
-      </p:sp>
-      <p:sp>
-        <p:nvSpPr>
-          <p:cNvPr id="43" name="Text 40"/>
-          <p:cNvSpPr/>
-          <p:nvPr/>
-        </p:nvSpPr>
-        <p:spPr>
-          <a:xfrm>
-            <a:off x="4562856" y="4069080"/>
-            <a:ext cx="1417320" cy="365760"/>
-          </a:xfrm>
-          <a:prstGeom prst="rect">
-            <a:avLst/>
-          </a:prstGeom>
-          <a:noFill/>
-          <a:ln/>
-        </p:spPr>
-        <p:txBody>
-          <a:bodyPr wrap="square" lIns="0" tIns="0" rIns="0" bIns="0" rtlCol="0" anchor="t"/>
           <a:lstStyle/>
           <a:p>
             <a:pPr algn="l" indent="0" marL="0">
@@ -33693,59 +35573,17 @@
               <a:buNone/>
             </a:pPr>
             <a:r>
-              <a:rPr lang="en-US" sz="2000" dirty="0">
-                <a:solidFill>
-                  <a:srgbClr val="1E1208"/>
-                </a:solidFill>
-                <a:latin typeface="Impact" pitchFamily="34" charset="0"/>
-                <a:ea typeface="Impact" pitchFamily="34" charset="-122"/>
-                <a:cs typeface="Impact" pitchFamily="34" charset="-120"/>
-              </a:rPr>
-              <a:t>MARK</a:t>
-            </a:r>
-            <a:endParaRPr lang="en-US" sz="2000" dirty="0"/>
-          </a:p>
-        </p:txBody>
-      </p:sp>
-      <p:sp>
-        <p:nvSpPr>
-          <p:cNvPr id="44" name="Text 41"/>
-          <p:cNvSpPr/>
-          <p:nvPr/>
-        </p:nvSpPr>
-        <p:spPr>
-          <a:xfrm>
-            <a:off x="4562856" y="4526280"/>
-            <a:ext cx="1417320" cy="731520"/>
-          </a:xfrm>
-          <a:prstGeom prst="rect">
-            <a:avLst/>
-          </a:prstGeom>
-          <a:noFill/>
-          <a:ln/>
-        </p:spPr>
-        <p:txBody>
-          <a:bodyPr wrap="square" lIns="0" tIns="0" rIns="0" bIns="0" rtlCol="0" anchor="t"/>
-          <a:lstStyle/>
-          <a:p>
-            <a:pPr algn="l" indent="0" marL="0">
-              <a:lnSpc>
-                <a:spcPct val="110000"/>
-              </a:lnSpc>
-              <a:buNone/>
-            </a:pPr>
-            <a:r>
-              <a:rPr lang="en-US" sz="1250" dirty="0">
-                <a:solidFill>
-                  <a:srgbClr val="555555"/>
+              <a:rPr lang="en-US" sz="1100" b="1" dirty="0">
+                <a:solidFill>
+                  <a:srgbClr val="1E1208"/>
                 </a:solidFill>
                 <a:latin typeface="Arial" pitchFamily="34" charset="0"/>
                 <a:ea typeface="Arial" pitchFamily="34" charset="-122"/>
                 <a:cs typeface="Arial" pitchFamily="34" charset="-120"/>
               </a:rPr>
-              <a:t>Teacher marks</a:t>
-            </a:r>
-            <a:endParaRPr lang="en-US" sz="1250" dirty="0"/>
+              <a:t>Paper no longer printed and copied</a:t>
+            </a:r>
+            <a:endParaRPr lang="en-US" sz="1100" dirty="0"/>
           </a:p>
         </p:txBody>
       </p:sp>
@@ -33757,14 +35595,14 @@
         </p:nvSpPr>
         <p:spPr>
           <a:xfrm>
-            <a:off x="6208776" y="3840480"/>
-            <a:ext cx="2240280" cy="1508760"/>
-          </a:xfrm>
-          <a:prstGeom prst="rect">
-            <a:avLst/>
-          </a:prstGeom>
-          <a:solidFill>
-            <a:srgbClr val="FFFFFF"/>
+            <a:off x="5257800" y="4800600"/>
+            <a:ext cx="1783080" cy="1005840"/>
+          </a:xfrm>
+          <a:prstGeom prst="rect">
+            <a:avLst/>
+          </a:prstGeom>
+          <a:solidFill>
+            <a:srgbClr val="FBE9D6"/>
           </a:solidFill>
           <a:ln w="25400">
             <a:solidFill>
@@ -33776,14 +35614,56 @@
       </p:sp>
       <p:sp>
         <p:nvSpPr>
-          <p:cNvPr id="46" name="Shape 43"/>
-          <p:cNvSpPr/>
-          <p:nvPr/>
-        </p:nvSpPr>
-        <p:spPr>
-          <a:xfrm>
-            <a:off x="6208776" y="3840480"/>
-            <a:ext cx="640080" cy="1508760"/>
+          <p:cNvPr id="46" name="Text 43"/>
+          <p:cNvSpPr/>
+          <p:nvPr/>
+        </p:nvSpPr>
+        <p:spPr>
+          <a:xfrm>
+            <a:off x="5367528" y="4800600"/>
+            <a:ext cx="1572768" cy="1005840"/>
+          </a:xfrm>
+          <a:prstGeom prst="rect">
+            <a:avLst/>
+          </a:prstGeom>
+          <a:noFill/>
+          <a:ln/>
+        </p:spPr>
+        <p:txBody>
+          <a:bodyPr wrap="square" lIns="0" tIns="0" rIns="0" bIns="0" rtlCol="0" anchor="ctr"/>
+          <a:lstStyle/>
+          <a:p>
+            <a:pPr algn="l" indent="0" marL="0">
+              <a:lnSpc>
+                <a:spcPct val="110000"/>
+              </a:lnSpc>
+              <a:buNone/>
+            </a:pPr>
+            <a:r>
+              <a:rPr lang="en-US" sz="1100" b="1" dirty="0">
+                <a:solidFill>
+                  <a:srgbClr val="1E1208"/>
+                </a:solidFill>
+                <a:latin typeface="Arial" pitchFamily="34" charset="0"/>
+                <a:ea typeface="Arial" pitchFamily="34" charset="-122"/>
+                <a:cs typeface="Arial" pitchFamily="34" charset="-120"/>
+              </a:rPr>
+              <a:t>Time from exam to usable results</a:t>
+            </a:r>
+            <a:endParaRPr lang="en-US" sz="1100" dirty="0"/>
+          </a:p>
+        </p:txBody>
+      </p:sp>
+      <p:sp>
+        <p:nvSpPr>
+          <p:cNvPr id="47" name="Shape 44"/>
+          <p:cNvSpPr/>
+          <p:nvPr/>
+        </p:nvSpPr>
+        <p:spPr>
+          <a:xfrm>
+            <a:off x="7178040" y="4800600"/>
+            <a:ext cx="1783080" cy="1005840"/>
           </a:xfrm>
           <a:prstGeom prst="rect">
             <a:avLst/>
@@ -33801,14 +35681,14 @@
       </p:sp>
       <p:sp>
         <p:nvSpPr>
-          <p:cNvPr id="47" name="Text 44"/>
-          <p:cNvSpPr/>
-          <p:nvPr/>
-        </p:nvSpPr>
-        <p:spPr>
-          <a:xfrm>
-            <a:off x="6208776" y="3840480"/>
-            <a:ext cx="640080" cy="1508760"/>
+          <p:cNvPr id="48" name="Text 45"/>
+          <p:cNvSpPr/>
+          <p:nvPr/>
+        </p:nvSpPr>
+        <p:spPr>
+          <a:xfrm>
+            <a:off x="7287768" y="4800600"/>
+            <a:ext cx="1572768" cy="1005840"/>
           </a:xfrm>
           <a:prstGeom prst="rect">
             <a:avLst/>
@@ -33818,48 +35698,6 @@
         </p:spPr>
         <p:txBody>
           <a:bodyPr wrap="square" lIns="0" tIns="0" rIns="0" bIns="0" rtlCol="0" anchor="ctr"/>
-          <a:lstStyle/>
-          <a:p>
-            <a:pPr algn="ctr" indent="0" marL="0">
-              <a:lnSpc>
-                <a:spcPct val="110000"/>
-              </a:lnSpc>
-              <a:buNone/>
-            </a:pPr>
-            <a:r>
-              <a:rPr lang="en-US" sz="3600" dirty="0">
-                <a:solidFill>
-                  <a:srgbClr val="1E1208"/>
-                </a:solidFill>
-                <a:latin typeface="Impact" pitchFamily="34" charset="0"/>
-                <a:ea typeface="Impact" pitchFamily="34" charset="-122"/>
-                <a:cs typeface="Impact" pitchFamily="34" charset="-120"/>
-              </a:rPr>
-              <a:t>7</a:t>
-            </a:r>
-            <a:endParaRPr lang="en-US" sz="3600" dirty="0"/>
-          </a:p>
-        </p:txBody>
-      </p:sp>
-      <p:sp>
-        <p:nvSpPr>
-          <p:cNvPr id="48" name="Text 45"/>
-          <p:cNvSpPr/>
-          <p:nvPr/>
-        </p:nvSpPr>
-        <p:spPr>
-          <a:xfrm>
-            <a:off x="6958584" y="4069080"/>
-            <a:ext cx="1417320" cy="365760"/>
-          </a:xfrm>
-          <a:prstGeom prst="rect">
-            <a:avLst/>
-          </a:prstGeom>
-          <a:noFill/>
-          <a:ln/>
-        </p:spPr>
-        <p:txBody>
-          <a:bodyPr wrap="square" lIns="0" tIns="0" rIns="0" bIns="0" rtlCol="0" anchor="t"/>
           <a:lstStyle/>
           <a:p>
             <a:pPr algn="l" indent="0" marL="0">
@@ -33869,78 +35707,36 @@
               <a:buNone/>
             </a:pPr>
             <a:r>
-              <a:rPr lang="en-US" sz="2000" dirty="0">
-                <a:solidFill>
-                  <a:srgbClr val="1E1208"/>
-                </a:solidFill>
-                <a:latin typeface="Impact" pitchFamily="34" charset="0"/>
-                <a:ea typeface="Impact" pitchFamily="34" charset="-122"/>
-                <a:cs typeface="Impact" pitchFamily="34" charset="-120"/>
-              </a:rPr>
-              <a:t>RECORD</a:t>
-            </a:r>
-            <a:endParaRPr lang="en-US" sz="2000" dirty="0"/>
-          </a:p>
-        </p:txBody>
-      </p:sp>
-      <p:sp>
-        <p:nvSpPr>
-          <p:cNvPr id="49" name="Text 46"/>
-          <p:cNvSpPr/>
-          <p:nvPr/>
-        </p:nvSpPr>
-        <p:spPr>
-          <a:xfrm>
-            <a:off x="6958584" y="4526280"/>
-            <a:ext cx="1417320" cy="731520"/>
-          </a:xfrm>
-          <a:prstGeom prst="rect">
-            <a:avLst/>
-          </a:prstGeom>
-          <a:noFill/>
-          <a:ln/>
-        </p:spPr>
-        <p:txBody>
-          <a:bodyPr wrap="square" lIns="0" tIns="0" rIns="0" bIns="0" rtlCol="0" anchor="t"/>
-          <a:lstStyle/>
-          <a:p>
-            <a:pPr algn="l" indent="0" marL="0">
-              <a:lnSpc>
-                <a:spcPct val="110000"/>
-              </a:lnSpc>
-              <a:buNone/>
-            </a:pPr>
-            <a:r>
-              <a:rPr lang="en-US" sz="1250" dirty="0">
-                <a:solidFill>
-                  <a:srgbClr val="555555"/>
+              <a:rPr lang="en-US" sz="1100" b="1" dirty="0">
+                <a:solidFill>
+                  <a:srgbClr val="1E1208"/>
                 </a:solidFill>
                 <a:latin typeface="Arial" pitchFamily="34" charset="0"/>
                 <a:ea typeface="Arial" pitchFamily="34" charset="-122"/>
                 <a:cs typeface="Arial" pitchFamily="34" charset="-120"/>
               </a:rPr>
-              <a:t>Grades are entered</a:t>
-            </a:r>
-            <a:endParaRPr lang="en-US" sz="1250" dirty="0"/>
-          </a:p>
-        </p:txBody>
-      </p:sp>
-      <p:sp>
-        <p:nvSpPr>
-          <p:cNvPr id="50" name="Shape 47"/>
-          <p:cNvSpPr/>
-          <p:nvPr/>
-        </p:nvSpPr>
-        <p:spPr>
-          <a:xfrm>
-            <a:off x="8604504" y="3840480"/>
-            <a:ext cx="2240280" cy="1508760"/>
-          </a:xfrm>
-          <a:prstGeom prst="rect">
-            <a:avLst/>
-          </a:prstGeom>
-          <a:solidFill>
-            <a:srgbClr val="FFFFFF"/>
+              <a:t>Learning gaps found and acted on</a:t>
+            </a:r>
+            <a:endParaRPr lang="en-US" sz="1100" dirty="0"/>
+          </a:p>
+        </p:txBody>
+      </p:sp>
+      <p:sp>
+        <p:nvSpPr>
+          <p:cNvPr id="49" name="Shape 46"/>
+          <p:cNvSpPr/>
+          <p:nvPr/>
+        </p:nvSpPr>
+        <p:spPr>
+          <a:xfrm>
+            <a:off x="9098280" y="4800600"/>
+            <a:ext cx="1783080" cy="1005840"/>
+          </a:xfrm>
+          <a:prstGeom prst="rect">
+            <a:avLst/>
+          </a:prstGeom>
+          <a:solidFill>
+            <a:srgbClr val="FBE9D6"/>
           </a:solidFill>
           <a:ln w="25400">
             <a:solidFill>
@@ -33952,39 +35748,14 @@
       </p:sp>
       <p:sp>
         <p:nvSpPr>
-          <p:cNvPr id="51" name="Shape 48"/>
-          <p:cNvSpPr/>
-          <p:nvPr/>
-        </p:nvSpPr>
-        <p:spPr>
-          <a:xfrm>
-            <a:off x="8604504" y="3840480"/>
-            <a:ext cx="640080" cy="1508760"/>
-          </a:xfrm>
-          <a:prstGeom prst="rect">
-            <a:avLst/>
-          </a:prstGeom>
-          <a:solidFill>
-            <a:srgbClr val="D4762A"/>
-          </a:solidFill>
-          <a:ln w="25400">
-            <a:solidFill>
-              <a:srgbClr val="1E1208"/>
-            </a:solidFill>
-            <a:prstDash val="solid"/>
-          </a:ln>
-        </p:spPr>
-      </p:sp>
-      <p:sp>
-        <p:nvSpPr>
-          <p:cNvPr id="52" name="Text 49"/>
-          <p:cNvSpPr/>
-          <p:nvPr/>
-        </p:nvSpPr>
-        <p:spPr>
-          <a:xfrm>
-            <a:off x="8604504" y="3840480"/>
-            <a:ext cx="640080" cy="1508760"/>
+          <p:cNvPr id="50" name="Text 47"/>
+          <p:cNvSpPr/>
+          <p:nvPr/>
+        </p:nvSpPr>
+        <p:spPr>
+          <a:xfrm>
+            <a:off x="9208008" y="4800600"/>
+            <a:ext cx="1572768" cy="1005840"/>
           </a:xfrm>
           <a:prstGeom prst="rect">
             <a:avLst/>
@@ -33994,48 +35765,6 @@
         </p:spPr>
         <p:txBody>
           <a:bodyPr wrap="square" lIns="0" tIns="0" rIns="0" bIns="0" rtlCol="0" anchor="ctr"/>
-          <a:lstStyle/>
-          <a:p>
-            <a:pPr algn="ctr" indent="0" marL="0">
-              <a:lnSpc>
-                <a:spcPct val="110000"/>
-              </a:lnSpc>
-              <a:buNone/>
-            </a:pPr>
-            <a:r>
-              <a:rPr lang="en-US" sz="3600" dirty="0">
-                <a:solidFill>
-                  <a:srgbClr val="1E1208"/>
-                </a:solidFill>
-                <a:latin typeface="Impact" pitchFamily="34" charset="0"/>
-                <a:ea typeface="Impact" pitchFamily="34" charset="-122"/>
-                <a:cs typeface="Impact" pitchFamily="34" charset="-120"/>
-              </a:rPr>
-              <a:t>8</a:t>
-            </a:r>
-            <a:endParaRPr lang="en-US" sz="3600" dirty="0"/>
-          </a:p>
-        </p:txBody>
-      </p:sp>
-      <p:sp>
-        <p:nvSpPr>
-          <p:cNvPr id="53" name="Text 50"/>
-          <p:cNvSpPr/>
-          <p:nvPr/>
-        </p:nvSpPr>
-        <p:spPr>
-          <a:xfrm>
-            <a:off x="9354312" y="4069080"/>
-            <a:ext cx="1417320" cy="365760"/>
-          </a:xfrm>
-          <a:prstGeom prst="rect">
-            <a:avLst/>
-          </a:prstGeom>
-          <a:noFill/>
-          <a:ln/>
-        </p:spPr>
-        <p:txBody>
-          <a:bodyPr wrap="square" lIns="0" tIns="0" rIns="0" bIns="0" rtlCol="0" anchor="t"/>
           <a:lstStyle/>
           <a:p>
             <a:pPr algn="l" indent="0" marL="0">
@@ -34045,30 +35774,30 @@
               <a:buNone/>
             </a:pPr>
             <a:r>
-              <a:rPr lang="en-US" sz="2000" dirty="0">
-                <a:solidFill>
-                  <a:srgbClr val="1E1208"/>
-                </a:solidFill>
-                <a:latin typeface="Impact" pitchFamily="34" charset="0"/>
-                <a:ea typeface="Impact" pitchFamily="34" charset="-122"/>
-                <a:cs typeface="Impact" pitchFamily="34" charset="-120"/>
-              </a:rPr>
-              <a:t>ANALYSE</a:t>
-            </a:r>
-            <a:endParaRPr lang="en-US" sz="2000" dirty="0"/>
-          </a:p>
-        </p:txBody>
-      </p:sp>
-      <p:sp>
-        <p:nvSpPr>
-          <p:cNvPr id="54" name="Text 51"/>
-          <p:cNvSpPr/>
-          <p:nvPr/>
-        </p:nvSpPr>
-        <p:spPr>
-          <a:xfrm>
-            <a:off x="9354312" y="4526280"/>
-            <a:ext cx="1417320" cy="731520"/>
+              <a:rPr lang="en-US" sz="1100" b="1" dirty="0">
+                <a:solidFill>
+                  <a:srgbClr val="1E1208"/>
+                </a:solidFill>
+                <a:latin typeface="Arial" pitchFamily="34" charset="0"/>
+                <a:ea typeface="Arial" pitchFamily="34" charset="-122"/>
+                <a:cs typeface="Arial" pitchFamily="34" charset="-120"/>
+              </a:rPr>
+              <a:t>Teacher and student feedback</a:t>
+            </a:r>
+            <a:endParaRPr lang="en-US" sz="1100" dirty="0"/>
+          </a:p>
+        </p:txBody>
+      </p:sp>
+      <p:sp>
+        <p:nvSpPr>
+          <p:cNvPr id="51" name="Text 48"/>
+          <p:cNvSpPr/>
+          <p:nvPr/>
+        </p:nvSpPr>
+        <p:spPr>
+          <a:xfrm>
+            <a:off x="1417320" y="6080760"/>
+            <a:ext cx="9509760" cy="365760"/>
           </a:xfrm>
           <a:prstGeom prst="rect">
             <a:avLst/>
@@ -34087,7 +35816,7 @@
               <a:buNone/>
             </a:pPr>
             <a:r>
-              <a:rPr lang="en-US" sz="1250" dirty="0">
+              <a:rPr lang="en-US" sz="1400" dirty="0">
                 <a:solidFill>
                   <a:srgbClr val="555555"/>
                 </a:solidFill>
@@ -34095,111 +35824,7 @@
                 <a:ea typeface="Arial" pitchFamily="34" charset="-122"/>
                 <a:cs typeface="Arial" pitchFamily="34" charset="-120"/>
               </a:rPr>
-              <a:t>Results are interpreted</a:t>
-            </a:r>
-            <a:endParaRPr lang="en-US" sz="1250" dirty="0"/>
-          </a:p>
-        </p:txBody>
-      </p:sp>
-      <p:sp>
-        <p:nvSpPr>
-          <p:cNvPr id="55" name="Shape 52"/>
-          <p:cNvSpPr/>
-          <p:nvPr/>
-        </p:nvSpPr>
-        <p:spPr>
-          <a:xfrm>
-            <a:off x="1417320" y="5623560"/>
-            <a:ext cx="9509760" cy="502920"/>
-          </a:xfrm>
-          <a:prstGeom prst="rect">
-            <a:avLst/>
-          </a:prstGeom>
-          <a:solidFill>
-            <a:srgbClr val="1E1208"/>
-          </a:solidFill>
-          <a:ln/>
-        </p:spPr>
-      </p:sp>
-      <p:sp>
-        <p:nvSpPr>
-          <p:cNvPr id="56" name="Text 53"/>
-          <p:cNvSpPr/>
-          <p:nvPr/>
-        </p:nvSpPr>
-        <p:spPr>
-          <a:xfrm>
-            <a:off x="1600200" y="5623560"/>
-            <a:ext cx="9144000" cy="502920"/>
-          </a:xfrm>
-          <a:prstGeom prst="rect">
-            <a:avLst/>
-          </a:prstGeom>
-          <a:noFill/>
-          <a:ln/>
-        </p:spPr>
-        <p:txBody>
-          <a:bodyPr wrap="square" lIns="0" tIns="0" rIns="0" bIns="0" rtlCol="0" anchor="ctr"/>
-          <a:lstStyle/>
-          <a:p>
-            <a:pPr algn="l" indent="0" marL="0">
-              <a:lnSpc>
-                <a:spcPct val="110000"/>
-              </a:lnSpc>
-              <a:buNone/>
-            </a:pPr>
-            <a:r>
-              <a:rPr lang="en-US" sz="1500" b="1" dirty="0">
-                <a:solidFill>
-                  <a:srgbClr val="FFFFFF"/>
-                </a:solidFill>
-                <a:latin typeface="Arial" pitchFamily="34" charset="0"/>
-                <a:ea typeface="Arial" pitchFamily="34" charset="-122"/>
-                <a:cs typeface="Arial" pitchFamily="34" charset="-120"/>
-              </a:rPr>
-              <a:t>This consumes time, money, paper and administrative effort.</a:t>
-            </a:r>
-            <a:endParaRPr lang="en-US" sz="1500" dirty="0"/>
-          </a:p>
-        </p:txBody>
-      </p:sp>
-      <p:sp>
-        <p:nvSpPr>
-          <p:cNvPr id="57" name="Text 54"/>
-          <p:cNvSpPr/>
-          <p:nvPr/>
-        </p:nvSpPr>
-        <p:spPr>
-          <a:xfrm>
-            <a:off x="1417320" y="6217920"/>
-            <a:ext cx="9509760" cy="320040"/>
-          </a:xfrm>
-          <a:prstGeom prst="rect">
-            <a:avLst/>
-          </a:prstGeom>
-          <a:noFill/>
-          <a:ln/>
-        </p:spPr>
-        <p:txBody>
-          <a:bodyPr wrap="square" lIns="0" tIns="0" rIns="0" bIns="0" rtlCol="0" anchor="t"/>
-          <a:lstStyle/>
-          <a:p>
-            <a:pPr algn="l" indent="0" marL="0">
-              <a:lnSpc>
-                <a:spcPct val="110000"/>
-              </a:lnSpc>
-              <a:buNone/>
-            </a:pPr>
-            <a:r>
-              <a:rPr lang="en-US" sz="1400" dirty="0">
-                <a:solidFill>
-                  <a:srgbClr val="555555"/>
-                </a:solidFill>
-                <a:latin typeface="Arial" pitchFamily="34" charset="0"/>
-                <a:ea typeface="Arial" pitchFamily="34" charset="-122"/>
-                <a:cs typeface="Arial" pitchFamily="34" charset="-120"/>
-              </a:rPr>
-              <a:t>The assessment itself may take one hour. The work around it can take much longer.</a:t>
+              <a:t>Scope, timing and measures are decided with you. This is a starting proposal.</a:t>
             </a:r>
             <a:endParaRPr lang="en-US" sz="1400" dirty="0"/>
           </a:p>
@@ -34213,1747 +35838,9 @@
 </p:sld>
 </file>
 
-<file path=ppt/slides/slide30.xml><?xml version="1.0" encoding="utf-8"?>
+<file path=ppt/slides/slide32.xml><?xml version="1.0" encoding="utf-8"?>
 <p:sld xmlns:a="http://schemas.openxmlformats.org/drawingml/2006/main" xmlns:r="http://schemas.openxmlformats.org/officeDocument/2006/relationships" xmlns:p="http://schemas.openxmlformats.org/presentationml/2006/main">
-  <p:cSld name="Slide 30">
-    <p:bg>
-      <p:bgPr>
-        <a:blipFill dpi="0" rotWithShape="1">
-          <a:blip r:embed="rId1">
-            <a:lum/>
-          </a:blip>
-          <a:srcRect/>
-          <a:stretch>
-            <a:fillRect/>
-          </a:stretch>
-        </a:blipFill>
-        <a:effectLst/>
-      </p:bgPr>
-    </p:bg>
-    <p:spTree>
-      <p:nvGrpSpPr>
-        <p:cNvPr id="1" name=""/>
-        <p:cNvGrpSpPr/>
-        <p:nvPr/>
-      </p:nvGrpSpPr>
-      <p:grpSpPr>
-        <a:xfrm>
-          <a:off x="0" y="0"/>
-          <a:ext cx="0" cy="0"/>
-          <a:chOff x="0" y="0"/>
-          <a:chExt cx="0" cy="0"/>
-        </a:xfrm>
-      </p:grpSpPr>
-      <p:sp>
-        <p:nvSpPr>
-          <p:cNvPr id="2" name="Shape 0"/>
-          <p:cNvSpPr/>
-          <p:nvPr/>
-        </p:nvSpPr>
-        <p:spPr>
-          <a:xfrm>
-            <a:off x="11588191" y="502920"/>
-            <a:ext cx="603504" cy="1152144"/>
-          </a:xfrm>
-          <a:prstGeom prst="rect">
-            <a:avLst/>
-          </a:prstGeom>
-          <a:solidFill>
-            <a:srgbClr val="FDFDFB"/>
-          </a:solidFill>
-          <a:ln w="25400">
-            <a:solidFill>
-              <a:srgbClr val="1E1208"/>
-            </a:solidFill>
-            <a:prstDash val="solid"/>
-          </a:ln>
-        </p:spPr>
-      </p:sp>
-      <p:sp>
-        <p:nvSpPr>
-          <p:cNvPr id="3" name="Text 1"/>
-          <p:cNvSpPr/>
-          <p:nvPr/>
-        </p:nvSpPr>
-        <p:spPr>
-          <a:xfrm>
-            <a:off x="11588191" y="502920"/>
-            <a:ext cx="603504" cy="1152144"/>
-          </a:xfrm>
-          <a:prstGeom prst="rect">
-            <a:avLst/>
-          </a:prstGeom>
-          <a:noFill/>
-          <a:ln/>
-        </p:spPr>
-        <p:txBody>
-          <a:bodyPr wrap="square" lIns="0" tIns="0" rIns="0" bIns="0" rtlCol="0" anchor="ctr" vert="vert270"/>
-          <a:lstStyle/>
-          <a:p>
-            <a:pPr algn="ctr" indent="0" marL="0">
-              <a:buNone/>
-            </a:pPr>
-            <a:r>
-              <a:rPr lang="en-US" sz="1200" b="1" spc="300" kern="0" dirty="0">
-                <a:solidFill>
-                  <a:srgbClr val="1E1208"/>
-                </a:solidFill>
-                <a:latin typeface="Courier New" pitchFamily="34" charset="0"/>
-                <a:ea typeface="Courier New" pitchFamily="34" charset="-122"/>
-                <a:cs typeface="Courier New" pitchFamily="34" charset="-120"/>
-              </a:rPr>
-              <a:t>SURVEY</a:t>
-            </a:r>
-            <a:endParaRPr lang="en-US" sz="1200" dirty="0"/>
-          </a:p>
-        </p:txBody>
-      </p:sp>
-      <p:sp>
-        <p:nvSpPr>
-          <p:cNvPr id="4" name="Shape 2"/>
-          <p:cNvSpPr/>
-          <p:nvPr/>
-        </p:nvSpPr>
-        <p:spPr>
-          <a:xfrm>
-            <a:off x="11588191" y="1764792"/>
-            <a:ext cx="603504" cy="1152144"/>
-          </a:xfrm>
-          <a:prstGeom prst="rect">
-            <a:avLst/>
-          </a:prstGeom>
-          <a:solidFill>
-            <a:srgbClr val="D4762A"/>
-          </a:solidFill>
-          <a:ln w="25400">
-            <a:solidFill>
-              <a:srgbClr val="1E1208"/>
-            </a:solidFill>
-            <a:prstDash val="solid"/>
-          </a:ln>
-        </p:spPr>
-      </p:sp>
-      <p:sp>
-        <p:nvSpPr>
-          <p:cNvPr id="5" name="Text 3"/>
-          <p:cNvSpPr/>
-          <p:nvPr/>
-        </p:nvSpPr>
-        <p:spPr>
-          <a:xfrm>
-            <a:off x="11588191" y="1764792"/>
-            <a:ext cx="603504" cy="1152144"/>
-          </a:xfrm>
-          <a:prstGeom prst="rect">
-            <a:avLst/>
-          </a:prstGeom>
-          <a:noFill/>
-          <a:ln/>
-        </p:spPr>
-        <p:txBody>
-          <a:bodyPr wrap="square" lIns="0" tIns="0" rIns="0" bIns="0" rtlCol="0" anchor="ctr" vert="vert270"/>
-          <a:lstStyle/>
-          <a:p>
-            <a:pPr algn="ctr" indent="0" marL="0">
-              <a:buNone/>
-            </a:pPr>
-            <a:r>
-              <a:rPr lang="en-US" sz="1200" b="1" spc="300" kern="0" dirty="0">
-                <a:solidFill>
-                  <a:srgbClr val="1E1208"/>
-                </a:solidFill>
-                <a:latin typeface="Courier New" pitchFamily="34" charset="0"/>
-                <a:ea typeface="Courier New" pitchFamily="34" charset="-122"/>
-                <a:cs typeface="Courier New" pitchFamily="34" charset="-120"/>
-              </a:rPr>
-              <a:t>ASSESS</a:t>
-            </a:r>
-            <a:endParaRPr lang="en-US" sz="1200" dirty="0"/>
-          </a:p>
-        </p:txBody>
-      </p:sp>
-      <p:sp>
-        <p:nvSpPr>
-          <p:cNvPr id="6" name="Shape 4"/>
-          <p:cNvSpPr/>
-          <p:nvPr/>
-        </p:nvSpPr>
-        <p:spPr>
-          <a:xfrm>
-            <a:off x="11588191" y="3026664"/>
-            <a:ext cx="603504" cy="1152144"/>
-          </a:xfrm>
-          <a:prstGeom prst="rect">
-            <a:avLst/>
-          </a:prstGeom>
-          <a:solidFill>
-            <a:srgbClr val="E3B51E"/>
-          </a:solidFill>
-          <a:ln w="25400">
-            <a:solidFill>
-              <a:srgbClr val="1E1208"/>
-            </a:solidFill>
-            <a:prstDash val="solid"/>
-          </a:ln>
-        </p:spPr>
-      </p:sp>
-      <p:sp>
-        <p:nvSpPr>
-          <p:cNvPr id="7" name="Text 5"/>
-          <p:cNvSpPr/>
-          <p:nvPr/>
-        </p:nvSpPr>
-        <p:spPr>
-          <a:xfrm>
-            <a:off x="11588191" y="3026664"/>
-            <a:ext cx="603504" cy="1152144"/>
-          </a:xfrm>
-          <a:prstGeom prst="rect">
-            <a:avLst/>
-          </a:prstGeom>
-          <a:noFill/>
-          <a:ln/>
-        </p:spPr>
-        <p:txBody>
-          <a:bodyPr wrap="square" lIns="0" tIns="0" rIns="0" bIns="0" rtlCol="0" anchor="ctr" vert="vert270"/>
-          <a:lstStyle/>
-          <a:p>
-            <a:pPr algn="ctr" indent="0" marL="0">
-              <a:buNone/>
-            </a:pPr>
-            <a:r>
-              <a:rPr lang="en-US" sz="1200" b="1" spc="300" kern="0" dirty="0">
-                <a:solidFill>
-                  <a:srgbClr val="1E1208"/>
-                </a:solidFill>
-                <a:latin typeface="Courier New" pitchFamily="34" charset="0"/>
-                <a:ea typeface="Courier New" pitchFamily="34" charset="-122"/>
-                <a:cs typeface="Courier New" pitchFamily="34" charset="-120"/>
-              </a:rPr>
-              <a:t>LEARN</a:t>
-            </a:r>
-            <a:endParaRPr lang="en-US" sz="1200" dirty="0"/>
-          </a:p>
-        </p:txBody>
-      </p:sp>
-      <p:sp>
-        <p:nvSpPr>
-          <p:cNvPr id="8" name="Shape 6"/>
-          <p:cNvSpPr/>
-          <p:nvPr/>
-        </p:nvSpPr>
-        <p:spPr>
-          <a:xfrm>
-            <a:off x="11588191" y="4288536"/>
-            <a:ext cx="603504" cy="1152144"/>
-          </a:xfrm>
-          <a:prstGeom prst="rect">
-            <a:avLst/>
-          </a:prstGeom>
-          <a:solidFill>
-            <a:srgbClr val="1E1208"/>
-          </a:solidFill>
-          <a:ln w="25400">
-            <a:solidFill>
-              <a:srgbClr val="1E1208"/>
-            </a:solidFill>
-            <a:prstDash val="solid"/>
-          </a:ln>
-        </p:spPr>
-      </p:sp>
-      <p:sp>
-        <p:nvSpPr>
-          <p:cNvPr id="9" name="Text 7"/>
-          <p:cNvSpPr/>
-          <p:nvPr/>
-        </p:nvSpPr>
-        <p:spPr>
-          <a:xfrm>
-            <a:off x="11588191" y="4288536"/>
-            <a:ext cx="603504" cy="1152144"/>
-          </a:xfrm>
-          <a:prstGeom prst="rect">
-            <a:avLst/>
-          </a:prstGeom>
-          <a:noFill/>
-          <a:ln/>
-        </p:spPr>
-        <p:txBody>
-          <a:bodyPr wrap="square" lIns="0" tIns="0" rIns="0" bIns="0" rtlCol="0" anchor="ctr" vert="vert270"/>
-          <a:lstStyle/>
-          <a:p>
-            <a:pPr algn="ctr" indent="0" marL="0">
-              <a:buNone/>
-            </a:pPr>
-            <a:r>
-              <a:rPr lang="en-US" sz="1200" b="1" spc="300" kern="0" dirty="0">
-                <a:solidFill>
-                  <a:srgbClr val="FFFFFF"/>
-                </a:solidFill>
-                <a:latin typeface="Courier New" pitchFamily="34" charset="0"/>
-                <a:ea typeface="Courier New" pitchFamily="34" charset="-122"/>
-                <a:cs typeface="Courier New" pitchFamily="34" charset="-120"/>
-              </a:rPr>
-              <a:t>PLAY</a:t>
-            </a:r>
-            <a:endParaRPr lang="en-US" sz="1200" dirty="0"/>
-          </a:p>
-        </p:txBody>
-      </p:sp>
-      <p:sp>
-        <p:nvSpPr>
-          <p:cNvPr id="10" name="Shape 8"/>
-          <p:cNvSpPr/>
-          <p:nvPr/>
-        </p:nvSpPr>
-        <p:spPr>
-          <a:xfrm>
-            <a:off x="11368735" y="5550408"/>
-            <a:ext cx="822960" cy="1152144"/>
-          </a:xfrm>
-          <a:prstGeom prst="rect">
-            <a:avLst/>
-          </a:prstGeom>
-          <a:solidFill>
-            <a:srgbClr val="FDFDFB"/>
-          </a:solidFill>
-          <a:ln w="25400">
-            <a:solidFill>
-              <a:srgbClr val="1E1208"/>
-            </a:solidFill>
-            <a:prstDash val="solid"/>
-          </a:ln>
-        </p:spPr>
-      </p:sp>
-      <p:sp>
-        <p:nvSpPr>
-          <p:cNvPr id="11" name="Text 9"/>
-          <p:cNvSpPr/>
-          <p:nvPr/>
-        </p:nvSpPr>
-        <p:spPr>
-          <a:xfrm>
-            <a:off x="11368735" y="5550408"/>
-            <a:ext cx="822960" cy="1152144"/>
-          </a:xfrm>
-          <a:prstGeom prst="rect">
-            <a:avLst/>
-          </a:prstGeom>
-          <a:noFill/>
-          <a:ln/>
-        </p:spPr>
-        <p:txBody>
-          <a:bodyPr wrap="square" lIns="0" tIns="0" rIns="0" bIns="0" rtlCol="0" anchor="ctr" vert="vert270"/>
-          <a:lstStyle/>
-          <a:p>
-            <a:pPr algn="ctr" indent="0" marL="0">
-              <a:buNone/>
-            </a:pPr>
-            <a:r>
-              <a:rPr lang="en-US" sz="1200" b="1" spc="300" kern="0" dirty="0">
-                <a:solidFill>
-                  <a:srgbClr val="1E1208"/>
-                </a:solidFill>
-                <a:latin typeface="Courier New" pitchFamily="34" charset="0"/>
-                <a:ea typeface="Courier New" pitchFamily="34" charset="-122"/>
-                <a:cs typeface="Courier New" pitchFamily="34" charset="-120"/>
-              </a:rPr>
-              <a:t>WHY US</a:t>
-            </a:r>
-            <a:endParaRPr lang="en-US" sz="1200" dirty="0"/>
-          </a:p>
-        </p:txBody>
-      </p:sp>
-      <p:sp>
-        <p:nvSpPr>
-          <p:cNvPr id="13" name="Text 10"/>
-          <p:cNvSpPr/>
-          <p:nvPr/>
-        </p:nvSpPr>
-        <p:spPr>
-          <a:xfrm>
-            <a:off x="1417320" y="457200"/>
-            <a:ext cx="9144000" cy="274320"/>
-          </a:xfrm>
-          <a:prstGeom prst="rect">
-            <a:avLst/>
-          </a:prstGeom>
-          <a:noFill/>
-          <a:ln/>
-        </p:spPr>
-        <p:txBody>
-          <a:bodyPr wrap="square" lIns="0" tIns="0" rIns="0" bIns="0" rtlCol="0" anchor="ctr"/>
-          <a:lstStyle/>
-          <a:p>
-            <a:pPr indent="0" marL="0">
-              <a:buNone/>
-            </a:pPr>
-            <a:r>
-              <a:rPr lang="en-US" sz="1150" b="1" spc="300" kern="0" dirty="0">
-                <a:solidFill>
-                  <a:srgbClr val="1E1208"/>
-                </a:solidFill>
-                <a:latin typeface="Courier New" pitchFamily="34" charset="0"/>
-                <a:ea typeface="Courier New" pitchFamily="34" charset="-122"/>
-                <a:cs typeface="Courier New" pitchFamily="34" charset="-120"/>
-              </a:rPr>
-              <a:t>THE NEXT STEP</a:t>
-            </a:r>
-            <a:endParaRPr lang="en-US" sz="1150" dirty="0"/>
-          </a:p>
-        </p:txBody>
-      </p:sp>
-      <p:sp>
-        <p:nvSpPr>
-          <p:cNvPr id="14" name="Text 11"/>
-          <p:cNvSpPr/>
-          <p:nvPr/>
-        </p:nvSpPr>
-        <p:spPr>
-          <a:xfrm>
-            <a:off x="1417320" y="777240"/>
-            <a:ext cx="9509760" cy="1005840"/>
-          </a:xfrm>
-          <a:prstGeom prst="rect">
-            <a:avLst/>
-          </a:prstGeom>
-          <a:noFill/>
-          <a:ln/>
-        </p:spPr>
-        <p:txBody>
-          <a:bodyPr wrap="square" lIns="0" tIns="0" rIns="0" bIns="0" rtlCol="0" anchor="t">
-            <a:normAutofit/>
-          </a:bodyPr>
-          <a:lstStyle/>
-          <a:p>
-            <a:pPr indent="0" marL="0">
-              <a:buNone/>
-            </a:pPr>
-            <a:r>
-              <a:rPr lang="en-US" sz="4800" dirty="0">
-                <a:solidFill>
-                  <a:srgbClr val="1E1208"/>
-                </a:solidFill>
-                <a:latin typeface="Impact" pitchFamily="34" charset="0"/>
-                <a:ea typeface="Impact" pitchFamily="34" charset="-122"/>
-                <a:cs typeface="Impact" pitchFamily="34" charset="-120"/>
-              </a:rPr>
-              <a:t>A PATHWAY WE CAN SHAPE TOGETHER</a:t>
-            </a:r>
-            <a:endParaRPr lang="en-US" sz="4800" dirty="0"/>
-          </a:p>
-        </p:txBody>
-      </p:sp>
-      <p:sp>
-        <p:nvSpPr>
-          <p:cNvPr id="15" name="Shape 12"/>
-          <p:cNvSpPr/>
-          <p:nvPr/>
-        </p:nvSpPr>
-        <p:spPr>
-          <a:xfrm>
-            <a:off x="1417320" y="1965960"/>
-            <a:ext cx="1783080" cy="2148840"/>
-          </a:xfrm>
-          <a:prstGeom prst="rect">
-            <a:avLst/>
-          </a:prstGeom>
-          <a:solidFill>
-            <a:srgbClr val="FBE9D6"/>
-          </a:solidFill>
-          <a:ln w="25400">
-            <a:solidFill>
-              <a:srgbClr val="1E1208"/>
-            </a:solidFill>
-            <a:prstDash val="solid"/>
-          </a:ln>
-        </p:spPr>
-      </p:sp>
-      <p:sp>
-        <p:nvSpPr>
-          <p:cNvPr id="16" name="Shape 13"/>
-          <p:cNvSpPr/>
-          <p:nvPr/>
-        </p:nvSpPr>
-        <p:spPr>
-          <a:xfrm>
-            <a:off x="1417320" y="1965960"/>
-            <a:ext cx="1783080" cy="777240"/>
-          </a:xfrm>
-          <a:prstGeom prst="rect">
-            <a:avLst/>
-          </a:prstGeom>
-          <a:solidFill>
-            <a:srgbClr val="D4762A"/>
-          </a:solidFill>
-          <a:ln w="25400">
-            <a:solidFill>
-              <a:srgbClr val="1E1208"/>
-            </a:solidFill>
-            <a:prstDash val="solid"/>
-          </a:ln>
-        </p:spPr>
-      </p:sp>
-      <p:sp>
-        <p:nvSpPr>
-          <p:cNvPr id="17" name="Text 14"/>
-          <p:cNvSpPr/>
-          <p:nvPr/>
-        </p:nvSpPr>
-        <p:spPr>
-          <a:xfrm>
-            <a:off x="1417320" y="1965960"/>
-            <a:ext cx="1783080" cy="777240"/>
-          </a:xfrm>
-          <a:prstGeom prst="rect">
-            <a:avLst/>
-          </a:prstGeom>
-          <a:noFill/>
-          <a:ln/>
-        </p:spPr>
-        <p:txBody>
-          <a:bodyPr wrap="square" lIns="0" tIns="0" rIns="0" bIns="0" rtlCol="0" anchor="ctr"/>
-          <a:lstStyle/>
-          <a:p>
-            <a:pPr algn="ctr" indent="0" marL="0">
-              <a:lnSpc>
-                <a:spcPct val="110000"/>
-              </a:lnSpc>
-              <a:buNone/>
-            </a:pPr>
-            <a:r>
-              <a:rPr lang="en-US" sz="4400" dirty="0">
-                <a:solidFill>
-                  <a:srgbClr val="1E1208"/>
-                </a:solidFill>
-                <a:latin typeface="Impact" pitchFamily="34" charset="0"/>
-                <a:ea typeface="Impact" pitchFamily="34" charset="-122"/>
-                <a:cs typeface="Impact" pitchFamily="34" charset="-120"/>
-              </a:rPr>
-              <a:t>1</a:t>
-            </a:r>
-            <a:endParaRPr lang="en-US" sz="4400" dirty="0"/>
-          </a:p>
-        </p:txBody>
-      </p:sp>
-      <p:sp>
-        <p:nvSpPr>
-          <p:cNvPr id="18" name="Text 15"/>
-          <p:cNvSpPr/>
-          <p:nvPr/>
-        </p:nvSpPr>
-        <p:spPr>
-          <a:xfrm>
-            <a:off x="1545336" y="2834640"/>
-            <a:ext cx="1554480" cy="365760"/>
-          </a:xfrm>
-          <a:prstGeom prst="rect">
-            <a:avLst/>
-          </a:prstGeom>
-          <a:noFill/>
-          <a:ln/>
-        </p:spPr>
-        <p:txBody>
-          <a:bodyPr wrap="square" lIns="0" tIns="0" rIns="0" bIns="0" rtlCol="0" anchor="t"/>
-          <a:lstStyle/>
-          <a:p>
-            <a:pPr algn="l" indent="0" marL="0">
-              <a:lnSpc>
-                <a:spcPct val="110000"/>
-              </a:lnSpc>
-              <a:buNone/>
-            </a:pPr>
-            <a:r>
-              <a:rPr lang="en-US" sz="1700" dirty="0">
-                <a:solidFill>
-                  <a:srgbClr val="1E1208"/>
-                </a:solidFill>
-                <a:latin typeface="Impact" pitchFamily="34" charset="0"/>
-                <a:ea typeface="Impact" pitchFamily="34" charset="-122"/>
-                <a:cs typeface="Impact" pitchFamily="34" charset="-120"/>
-              </a:rPr>
-              <a:t>EXPERIENCE</a:t>
-            </a:r>
-            <a:endParaRPr lang="en-US" sz="1700" dirty="0"/>
-          </a:p>
-        </p:txBody>
-      </p:sp>
-      <p:sp>
-        <p:nvSpPr>
-          <p:cNvPr id="19" name="Text 16"/>
-          <p:cNvSpPr/>
-          <p:nvPr/>
-        </p:nvSpPr>
-        <p:spPr>
-          <a:xfrm>
-            <a:off x="1545336" y="3291840"/>
-            <a:ext cx="1554480" cy="822960"/>
-          </a:xfrm>
-          <a:prstGeom prst="rect">
-            <a:avLst/>
-          </a:prstGeom>
-          <a:noFill/>
-          <a:ln/>
-        </p:spPr>
-        <p:txBody>
-          <a:bodyPr wrap="square" lIns="0" tIns="0" rIns="0" bIns="0" rtlCol="0" anchor="t"/>
-          <a:lstStyle/>
-          <a:p>
-            <a:pPr algn="l" indent="0" marL="0">
-              <a:lnSpc>
-                <a:spcPct val="110000"/>
-              </a:lnSpc>
-              <a:buNone/>
-            </a:pPr>
-            <a:r>
-              <a:rPr lang="en-US" sz="1150" dirty="0">
-                <a:solidFill>
-                  <a:srgbClr val="555555"/>
-                </a:solidFill>
-                <a:latin typeface="Arial" pitchFamily="34" charset="0"/>
-                <a:ea typeface="Arial" pitchFamily="34" charset="-122"/>
-                <a:cs typeface="Arial" pitchFamily="34" charset="-120"/>
-              </a:rPr>
-              <a:t>Today: use it hands-on and tell us what you see.</a:t>
-            </a:r>
-            <a:endParaRPr lang="en-US" sz="1150" dirty="0"/>
-          </a:p>
-        </p:txBody>
-      </p:sp>
-      <p:sp>
-        <p:nvSpPr>
-          <p:cNvPr id="20" name="Shape 17"/>
-          <p:cNvSpPr/>
-          <p:nvPr/>
-        </p:nvSpPr>
-        <p:spPr>
-          <a:xfrm>
-            <a:off x="3337560" y="1965960"/>
-            <a:ext cx="1783080" cy="2148840"/>
-          </a:xfrm>
-          <a:prstGeom prst="rect">
-            <a:avLst/>
-          </a:prstGeom>
-          <a:solidFill>
-            <a:srgbClr val="FFFFFF"/>
-          </a:solidFill>
-          <a:ln w="25400">
-            <a:solidFill>
-              <a:srgbClr val="1E1208"/>
-            </a:solidFill>
-            <a:prstDash val="solid"/>
-          </a:ln>
-        </p:spPr>
-      </p:sp>
-      <p:sp>
-        <p:nvSpPr>
-          <p:cNvPr id="21" name="Shape 18"/>
-          <p:cNvSpPr/>
-          <p:nvPr/>
-        </p:nvSpPr>
-        <p:spPr>
-          <a:xfrm>
-            <a:off x="3337560" y="1965960"/>
-            <a:ext cx="1783080" cy="777240"/>
-          </a:xfrm>
-          <a:prstGeom prst="rect">
-            <a:avLst/>
-          </a:prstGeom>
-          <a:solidFill>
-            <a:srgbClr val="E3B51E"/>
-          </a:solidFill>
-          <a:ln w="25400">
-            <a:solidFill>
-              <a:srgbClr val="1E1208"/>
-            </a:solidFill>
-            <a:prstDash val="solid"/>
-          </a:ln>
-        </p:spPr>
-      </p:sp>
-      <p:sp>
-        <p:nvSpPr>
-          <p:cNvPr id="22" name="Text 19"/>
-          <p:cNvSpPr/>
-          <p:nvPr/>
-        </p:nvSpPr>
-        <p:spPr>
-          <a:xfrm>
-            <a:off x="3337560" y="1965960"/>
-            <a:ext cx="1783080" cy="777240"/>
-          </a:xfrm>
-          <a:prstGeom prst="rect">
-            <a:avLst/>
-          </a:prstGeom>
-          <a:noFill/>
-          <a:ln/>
-        </p:spPr>
-        <p:txBody>
-          <a:bodyPr wrap="square" lIns="0" tIns="0" rIns="0" bIns="0" rtlCol="0" anchor="ctr"/>
-          <a:lstStyle/>
-          <a:p>
-            <a:pPr algn="ctr" indent="0" marL="0">
-              <a:lnSpc>
-                <a:spcPct val="110000"/>
-              </a:lnSpc>
-              <a:buNone/>
-            </a:pPr>
-            <a:r>
-              <a:rPr lang="en-US" sz="4400" dirty="0">
-                <a:solidFill>
-                  <a:srgbClr val="1E1208"/>
-                </a:solidFill>
-                <a:latin typeface="Impact" pitchFamily="34" charset="0"/>
-                <a:ea typeface="Impact" pitchFamily="34" charset="-122"/>
-                <a:cs typeface="Impact" pitchFamily="34" charset="-120"/>
-              </a:rPr>
-              <a:t>2</a:t>
-            </a:r>
-            <a:endParaRPr lang="en-US" sz="4400" dirty="0"/>
-          </a:p>
-        </p:txBody>
-      </p:sp>
-      <p:sp>
-        <p:nvSpPr>
-          <p:cNvPr id="23" name="Text 20"/>
-          <p:cNvSpPr/>
-          <p:nvPr/>
-        </p:nvSpPr>
-        <p:spPr>
-          <a:xfrm>
-            <a:off x="3465576" y="2834640"/>
-            <a:ext cx="1554480" cy="365760"/>
-          </a:xfrm>
-          <a:prstGeom prst="rect">
-            <a:avLst/>
-          </a:prstGeom>
-          <a:noFill/>
-          <a:ln/>
-        </p:spPr>
-        <p:txBody>
-          <a:bodyPr wrap="square" lIns="0" tIns="0" rIns="0" bIns="0" rtlCol="0" anchor="t"/>
-          <a:lstStyle/>
-          <a:p>
-            <a:pPr algn="l" indent="0" marL="0">
-              <a:lnSpc>
-                <a:spcPct val="110000"/>
-              </a:lnSpc>
-              <a:buNone/>
-            </a:pPr>
-            <a:r>
-              <a:rPr lang="en-US" sz="1700" dirty="0">
-                <a:solidFill>
-                  <a:srgbClr val="1E1208"/>
-                </a:solidFill>
-                <a:latin typeface="Impact" pitchFamily="34" charset="0"/>
-                <a:ea typeface="Impact" pitchFamily="34" charset="-122"/>
-                <a:cs typeface="Impact" pitchFamily="34" charset="-120"/>
-              </a:rPr>
-              <a:t>CHOOSE A START</a:t>
-            </a:r>
-            <a:endParaRPr lang="en-US" sz="1700" dirty="0"/>
-          </a:p>
-        </p:txBody>
-      </p:sp>
-      <p:sp>
-        <p:nvSpPr>
-          <p:cNvPr id="24" name="Text 21"/>
-          <p:cNvSpPr/>
-          <p:nvPr/>
-        </p:nvSpPr>
-        <p:spPr>
-          <a:xfrm>
-            <a:off x="3465576" y="3291840"/>
-            <a:ext cx="1554480" cy="822960"/>
-          </a:xfrm>
-          <a:prstGeom prst="rect">
-            <a:avLst/>
-          </a:prstGeom>
-          <a:noFill/>
-          <a:ln/>
-        </p:spPr>
-        <p:txBody>
-          <a:bodyPr wrap="square" lIns="0" tIns="0" rIns="0" bIns="0" rtlCol="0" anchor="t"/>
-          <a:lstStyle/>
-          <a:p>
-            <a:pPr algn="l" indent="0" marL="0">
-              <a:lnSpc>
-                <a:spcPct val="110000"/>
-              </a:lnSpc>
-              <a:buNone/>
-            </a:pPr>
-            <a:r>
-              <a:rPr lang="en-US" sz="1150" dirty="0">
-                <a:solidFill>
-                  <a:srgbClr val="555555"/>
-                </a:solidFill>
-                <a:latin typeface="Arial" pitchFamily="34" charset="0"/>
-                <a:ea typeface="Arial" pitchFamily="34" charset="-122"/>
-                <a:cs typeface="Arial" pitchFamily="34" charset="-120"/>
-              </a:rPr>
-              <a:t>Pick departments, classes and assessment types.</a:t>
-            </a:r>
-            <a:endParaRPr lang="en-US" sz="1150" dirty="0"/>
-          </a:p>
-        </p:txBody>
-      </p:sp>
-      <p:sp>
-        <p:nvSpPr>
-          <p:cNvPr id="25" name="Shape 22"/>
-          <p:cNvSpPr/>
-          <p:nvPr/>
-        </p:nvSpPr>
-        <p:spPr>
-          <a:xfrm>
-            <a:off x="5257800" y="1965960"/>
-            <a:ext cx="1783080" cy="2148840"/>
-          </a:xfrm>
-          <a:prstGeom prst="rect">
-            <a:avLst/>
-          </a:prstGeom>
-          <a:solidFill>
-            <a:srgbClr val="FFFFFF"/>
-          </a:solidFill>
-          <a:ln w="25400">
-            <a:solidFill>
-              <a:srgbClr val="1E1208"/>
-            </a:solidFill>
-            <a:prstDash val="solid"/>
-          </a:ln>
-        </p:spPr>
-      </p:sp>
-      <p:sp>
-        <p:nvSpPr>
-          <p:cNvPr id="26" name="Shape 23"/>
-          <p:cNvSpPr/>
-          <p:nvPr/>
-        </p:nvSpPr>
-        <p:spPr>
-          <a:xfrm>
-            <a:off x="5257800" y="1965960"/>
-            <a:ext cx="1783080" cy="777240"/>
-          </a:xfrm>
-          <a:prstGeom prst="rect">
-            <a:avLst/>
-          </a:prstGeom>
-          <a:solidFill>
-            <a:srgbClr val="E3B51E"/>
-          </a:solidFill>
-          <a:ln w="25400">
-            <a:solidFill>
-              <a:srgbClr val="1E1208"/>
-            </a:solidFill>
-            <a:prstDash val="solid"/>
-          </a:ln>
-        </p:spPr>
-      </p:sp>
-      <p:sp>
-        <p:nvSpPr>
-          <p:cNvPr id="27" name="Text 24"/>
-          <p:cNvSpPr/>
-          <p:nvPr/>
-        </p:nvSpPr>
-        <p:spPr>
-          <a:xfrm>
-            <a:off x="5257800" y="1965960"/>
-            <a:ext cx="1783080" cy="777240"/>
-          </a:xfrm>
-          <a:prstGeom prst="rect">
-            <a:avLst/>
-          </a:prstGeom>
-          <a:noFill/>
-          <a:ln/>
-        </p:spPr>
-        <p:txBody>
-          <a:bodyPr wrap="square" lIns="0" tIns="0" rIns="0" bIns="0" rtlCol="0" anchor="ctr"/>
-          <a:lstStyle/>
-          <a:p>
-            <a:pPr algn="ctr" indent="0" marL="0">
-              <a:lnSpc>
-                <a:spcPct val="110000"/>
-              </a:lnSpc>
-              <a:buNone/>
-            </a:pPr>
-            <a:r>
-              <a:rPr lang="en-US" sz="4400" dirty="0">
-                <a:solidFill>
-                  <a:srgbClr val="1E1208"/>
-                </a:solidFill>
-                <a:latin typeface="Impact" pitchFamily="34" charset="0"/>
-                <a:ea typeface="Impact" pitchFamily="34" charset="-122"/>
-                <a:cs typeface="Impact" pitchFamily="34" charset="-120"/>
-              </a:rPr>
-              <a:t>3</a:t>
-            </a:r>
-            <a:endParaRPr lang="en-US" sz="4400" dirty="0"/>
-          </a:p>
-        </p:txBody>
-      </p:sp>
-      <p:sp>
-        <p:nvSpPr>
-          <p:cNvPr id="28" name="Text 25"/>
-          <p:cNvSpPr/>
-          <p:nvPr/>
-        </p:nvSpPr>
-        <p:spPr>
-          <a:xfrm>
-            <a:off x="5385816" y="2834640"/>
-            <a:ext cx="1554480" cy="365760"/>
-          </a:xfrm>
-          <a:prstGeom prst="rect">
-            <a:avLst/>
-          </a:prstGeom>
-          <a:noFill/>
-          <a:ln/>
-        </p:spPr>
-        <p:txBody>
-          <a:bodyPr wrap="square" lIns="0" tIns="0" rIns="0" bIns="0" rtlCol="0" anchor="t"/>
-          <a:lstStyle/>
-          <a:p>
-            <a:pPr algn="l" indent="0" marL="0">
-              <a:lnSpc>
-                <a:spcPct val="110000"/>
-              </a:lnSpc>
-              <a:buNone/>
-            </a:pPr>
-            <a:r>
-              <a:rPr lang="en-US" sz="1700" dirty="0">
-                <a:solidFill>
-                  <a:srgbClr val="1E1208"/>
-                </a:solidFill>
-                <a:latin typeface="Impact" pitchFamily="34" charset="0"/>
-                <a:ea typeface="Impact" pitchFamily="34" charset="-122"/>
-                <a:cs typeface="Impact" pitchFamily="34" charset="-120"/>
-              </a:rPr>
-              <a:t>PILOT</a:t>
-            </a:r>
-            <a:endParaRPr lang="en-US" sz="1700" dirty="0"/>
-          </a:p>
-        </p:txBody>
-      </p:sp>
-      <p:sp>
-        <p:nvSpPr>
-          <p:cNvPr id="29" name="Text 26"/>
-          <p:cNvSpPr/>
-          <p:nvPr/>
-        </p:nvSpPr>
-        <p:spPr>
-          <a:xfrm>
-            <a:off x="5385816" y="3291840"/>
-            <a:ext cx="1554480" cy="822960"/>
-          </a:xfrm>
-          <a:prstGeom prst="rect">
-            <a:avLst/>
-          </a:prstGeom>
-          <a:noFill/>
-          <a:ln/>
-        </p:spPr>
-        <p:txBody>
-          <a:bodyPr wrap="square" lIns="0" tIns="0" rIns="0" bIns="0" rtlCol="0" anchor="t"/>
-          <a:lstStyle/>
-          <a:p>
-            <a:pPr algn="l" indent="0" marL="0">
-              <a:lnSpc>
-                <a:spcPct val="110000"/>
-              </a:lnSpc>
-              <a:buNone/>
-            </a:pPr>
-            <a:r>
-              <a:rPr lang="en-US" sz="1150" dirty="0">
-                <a:solidFill>
-                  <a:srgbClr val="555555"/>
-                </a:solidFill>
-                <a:latin typeface="Arial" pitchFamily="34" charset="0"/>
-                <a:ea typeface="Arial" pitchFamily="34" charset="-122"/>
-                <a:cs typeface="Arial" pitchFamily="34" charset="-120"/>
-              </a:rPr>
-              <a:t>Run it for a defined period with real classes.</a:t>
-            </a:r>
-            <a:endParaRPr lang="en-US" sz="1150" dirty="0"/>
-          </a:p>
-        </p:txBody>
-      </p:sp>
-      <p:sp>
-        <p:nvSpPr>
-          <p:cNvPr id="30" name="Shape 27"/>
-          <p:cNvSpPr/>
-          <p:nvPr/>
-        </p:nvSpPr>
-        <p:spPr>
-          <a:xfrm>
-            <a:off x="7178040" y="1965960"/>
-            <a:ext cx="1783080" cy="2148840"/>
-          </a:xfrm>
-          <a:prstGeom prst="rect">
-            <a:avLst/>
-          </a:prstGeom>
-          <a:solidFill>
-            <a:srgbClr val="FFFFFF"/>
-          </a:solidFill>
-          <a:ln w="25400">
-            <a:solidFill>
-              <a:srgbClr val="1E1208"/>
-            </a:solidFill>
-            <a:prstDash val="solid"/>
-          </a:ln>
-        </p:spPr>
-      </p:sp>
-      <p:sp>
-        <p:nvSpPr>
-          <p:cNvPr id="31" name="Shape 28"/>
-          <p:cNvSpPr/>
-          <p:nvPr/>
-        </p:nvSpPr>
-        <p:spPr>
-          <a:xfrm>
-            <a:off x="7178040" y="1965960"/>
-            <a:ext cx="1783080" cy="777240"/>
-          </a:xfrm>
-          <a:prstGeom prst="rect">
-            <a:avLst/>
-          </a:prstGeom>
-          <a:solidFill>
-            <a:srgbClr val="E3B51E"/>
-          </a:solidFill>
-          <a:ln w="25400">
-            <a:solidFill>
-              <a:srgbClr val="1E1208"/>
-            </a:solidFill>
-            <a:prstDash val="solid"/>
-          </a:ln>
-        </p:spPr>
-      </p:sp>
-      <p:sp>
-        <p:nvSpPr>
-          <p:cNvPr id="32" name="Text 29"/>
-          <p:cNvSpPr/>
-          <p:nvPr/>
-        </p:nvSpPr>
-        <p:spPr>
-          <a:xfrm>
-            <a:off x="7178040" y="1965960"/>
-            <a:ext cx="1783080" cy="777240"/>
-          </a:xfrm>
-          <a:prstGeom prst="rect">
-            <a:avLst/>
-          </a:prstGeom>
-          <a:noFill/>
-          <a:ln/>
-        </p:spPr>
-        <p:txBody>
-          <a:bodyPr wrap="square" lIns="0" tIns="0" rIns="0" bIns="0" rtlCol="0" anchor="ctr"/>
-          <a:lstStyle/>
-          <a:p>
-            <a:pPr algn="ctr" indent="0" marL="0">
-              <a:lnSpc>
-                <a:spcPct val="110000"/>
-              </a:lnSpc>
-              <a:buNone/>
-            </a:pPr>
-            <a:r>
-              <a:rPr lang="en-US" sz="4400" dirty="0">
-                <a:solidFill>
-                  <a:srgbClr val="1E1208"/>
-                </a:solidFill>
-                <a:latin typeface="Impact" pitchFamily="34" charset="0"/>
-                <a:ea typeface="Impact" pitchFamily="34" charset="-122"/>
-                <a:cs typeface="Impact" pitchFamily="34" charset="-120"/>
-              </a:rPr>
-              <a:t>4</a:t>
-            </a:r>
-            <a:endParaRPr lang="en-US" sz="4400" dirty="0"/>
-          </a:p>
-        </p:txBody>
-      </p:sp>
-      <p:sp>
-        <p:nvSpPr>
-          <p:cNvPr id="33" name="Text 30"/>
-          <p:cNvSpPr/>
-          <p:nvPr/>
-        </p:nvSpPr>
-        <p:spPr>
-          <a:xfrm>
-            <a:off x="7306056" y="2834640"/>
-            <a:ext cx="1554480" cy="365760"/>
-          </a:xfrm>
-          <a:prstGeom prst="rect">
-            <a:avLst/>
-          </a:prstGeom>
-          <a:noFill/>
-          <a:ln/>
-        </p:spPr>
-        <p:txBody>
-          <a:bodyPr wrap="square" lIns="0" tIns="0" rIns="0" bIns="0" rtlCol="0" anchor="t"/>
-          <a:lstStyle/>
-          <a:p>
-            <a:pPr algn="l" indent="0" marL="0">
-              <a:lnSpc>
-                <a:spcPct val="110000"/>
-              </a:lnSpc>
-              <a:buNone/>
-            </a:pPr>
-            <a:r>
-              <a:rPr lang="en-US" sz="1700" dirty="0">
-                <a:solidFill>
-                  <a:srgbClr val="1E1208"/>
-                </a:solidFill>
-                <a:latin typeface="Impact" pitchFamily="34" charset="0"/>
-                <a:ea typeface="Impact" pitchFamily="34" charset="-122"/>
-                <a:cs typeface="Impact" pitchFamily="34" charset="-120"/>
-              </a:rPr>
-              <a:t>REVIEW</a:t>
-            </a:r>
-            <a:endParaRPr lang="en-US" sz="1700" dirty="0"/>
-          </a:p>
-        </p:txBody>
-      </p:sp>
-      <p:sp>
-        <p:nvSpPr>
-          <p:cNvPr id="34" name="Text 31"/>
-          <p:cNvSpPr/>
-          <p:nvPr/>
-        </p:nvSpPr>
-        <p:spPr>
-          <a:xfrm>
-            <a:off x="7306056" y="3291840"/>
-            <a:ext cx="1554480" cy="822960"/>
-          </a:xfrm>
-          <a:prstGeom prst="rect">
-            <a:avLst/>
-          </a:prstGeom>
-          <a:noFill/>
-          <a:ln/>
-        </p:spPr>
-        <p:txBody>
-          <a:bodyPr wrap="square" lIns="0" tIns="0" rIns="0" bIns="0" rtlCol="0" anchor="t"/>
-          <a:lstStyle/>
-          <a:p>
-            <a:pPr algn="l" indent="0" marL="0">
-              <a:lnSpc>
-                <a:spcPct val="110000"/>
-              </a:lnSpc>
-              <a:buNone/>
-            </a:pPr>
-            <a:r>
-              <a:rPr lang="en-US" sz="1150" dirty="0">
-                <a:solidFill>
-                  <a:srgbClr val="555555"/>
-                </a:solidFill>
-                <a:latin typeface="Arial" pitchFamily="34" charset="0"/>
-                <a:ea typeface="Arial" pitchFamily="34" charset="-122"/>
-                <a:cs typeface="Arial" pitchFamily="34" charset="-120"/>
-              </a:rPr>
-              <a:t>Look at the evidence together.</a:t>
-            </a:r>
-            <a:endParaRPr lang="en-US" sz="1150" dirty="0"/>
-          </a:p>
-        </p:txBody>
-      </p:sp>
-      <p:sp>
-        <p:nvSpPr>
-          <p:cNvPr id="35" name="Shape 32"/>
-          <p:cNvSpPr/>
-          <p:nvPr/>
-        </p:nvSpPr>
-        <p:spPr>
-          <a:xfrm>
-            <a:off x="9098280" y="1965960"/>
-            <a:ext cx="1783080" cy="2148840"/>
-          </a:xfrm>
-          <a:prstGeom prst="rect">
-            <a:avLst/>
-          </a:prstGeom>
-          <a:solidFill>
-            <a:srgbClr val="FFFFFF"/>
-          </a:solidFill>
-          <a:ln w="25400">
-            <a:solidFill>
-              <a:srgbClr val="1E1208"/>
-            </a:solidFill>
-            <a:prstDash val="solid"/>
-          </a:ln>
-        </p:spPr>
-      </p:sp>
-      <p:sp>
-        <p:nvSpPr>
-          <p:cNvPr id="36" name="Shape 33"/>
-          <p:cNvSpPr/>
-          <p:nvPr/>
-        </p:nvSpPr>
-        <p:spPr>
-          <a:xfrm>
-            <a:off x="9098280" y="1965960"/>
-            <a:ext cx="1783080" cy="777240"/>
-          </a:xfrm>
-          <a:prstGeom prst="rect">
-            <a:avLst/>
-          </a:prstGeom>
-          <a:solidFill>
-            <a:srgbClr val="E3B51E"/>
-          </a:solidFill>
-          <a:ln w="25400">
-            <a:solidFill>
-              <a:srgbClr val="1E1208"/>
-            </a:solidFill>
-            <a:prstDash val="solid"/>
-          </a:ln>
-        </p:spPr>
-      </p:sp>
-      <p:sp>
-        <p:nvSpPr>
-          <p:cNvPr id="37" name="Text 34"/>
-          <p:cNvSpPr/>
-          <p:nvPr/>
-        </p:nvSpPr>
-        <p:spPr>
-          <a:xfrm>
-            <a:off x="9098280" y="1965960"/>
-            <a:ext cx="1783080" cy="777240"/>
-          </a:xfrm>
-          <a:prstGeom prst="rect">
-            <a:avLst/>
-          </a:prstGeom>
-          <a:noFill/>
-          <a:ln/>
-        </p:spPr>
-        <p:txBody>
-          <a:bodyPr wrap="square" lIns="0" tIns="0" rIns="0" bIns="0" rtlCol="0" anchor="ctr"/>
-          <a:lstStyle/>
-          <a:p>
-            <a:pPr algn="ctr" indent="0" marL="0">
-              <a:lnSpc>
-                <a:spcPct val="110000"/>
-              </a:lnSpc>
-              <a:buNone/>
-            </a:pPr>
-            <a:r>
-              <a:rPr lang="en-US" sz="4400" dirty="0">
-                <a:solidFill>
-                  <a:srgbClr val="1E1208"/>
-                </a:solidFill>
-                <a:latin typeface="Impact" pitchFamily="34" charset="0"/>
-                <a:ea typeface="Impact" pitchFamily="34" charset="-122"/>
-                <a:cs typeface="Impact" pitchFamily="34" charset="-120"/>
-              </a:rPr>
-              <a:t>5</a:t>
-            </a:r>
-            <a:endParaRPr lang="en-US" sz="4400" dirty="0"/>
-          </a:p>
-        </p:txBody>
-      </p:sp>
-      <p:sp>
-        <p:nvSpPr>
-          <p:cNvPr id="38" name="Text 35"/>
-          <p:cNvSpPr/>
-          <p:nvPr/>
-        </p:nvSpPr>
-        <p:spPr>
-          <a:xfrm>
-            <a:off x="9226296" y="2834640"/>
-            <a:ext cx="1554480" cy="365760"/>
-          </a:xfrm>
-          <a:prstGeom prst="rect">
-            <a:avLst/>
-          </a:prstGeom>
-          <a:noFill/>
-          <a:ln/>
-        </p:spPr>
-        <p:txBody>
-          <a:bodyPr wrap="square" lIns="0" tIns="0" rIns="0" bIns="0" rtlCol="0" anchor="t"/>
-          <a:lstStyle/>
-          <a:p>
-            <a:pPr algn="l" indent="0" marL="0">
-              <a:lnSpc>
-                <a:spcPct val="110000"/>
-              </a:lnSpc>
-              <a:buNone/>
-            </a:pPr>
-            <a:r>
-              <a:rPr lang="en-US" sz="1700" dirty="0">
-                <a:solidFill>
-                  <a:srgbClr val="1E1208"/>
-                </a:solidFill>
-                <a:latin typeface="Impact" pitchFamily="34" charset="0"/>
-                <a:ea typeface="Impact" pitchFamily="34" charset="-122"/>
-                <a:cs typeface="Impact" pitchFamily="34" charset="-120"/>
-              </a:rPr>
-              <a:t>EXPAND</a:t>
-            </a:r>
-            <a:endParaRPr lang="en-US" sz="1700" dirty="0"/>
-          </a:p>
-        </p:txBody>
-      </p:sp>
-      <p:sp>
-        <p:nvSpPr>
-          <p:cNvPr id="39" name="Text 36"/>
-          <p:cNvSpPr/>
-          <p:nvPr/>
-        </p:nvSpPr>
-        <p:spPr>
-          <a:xfrm>
-            <a:off x="9226296" y="3291840"/>
-            <a:ext cx="1554480" cy="822960"/>
-          </a:xfrm>
-          <a:prstGeom prst="rect">
-            <a:avLst/>
-          </a:prstGeom>
-          <a:noFill/>
-          <a:ln/>
-        </p:spPr>
-        <p:txBody>
-          <a:bodyPr wrap="square" lIns="0" tIns="0" rIns="0" bIns="0" rtlCol="0" anchor="t"/>
-          <a:lstStyle/>
-          <a:p>
-            <a:pPr algn="l" indent="0" marL="0">
-              <a:lnSpc>
-                <a:spcPct val="110000"/>
-              </a:lnSpc>
-              <a:buNone/>
-            </a:pPr>
-            <a:r>
-              <a:rPr lang="en-US" sz="1150" dirty="0">
-                <a:solidFill>
-                  <a:srgbClr val="555555"/>
-                </a:solidFill>
-                <a:latin typeface="Arial" pitchFamily="34" charset="0"/>
-                <a:ea typeface="Arial" pitchFamily="34" charset="-122"/>
-                <a:cs typeface="Arial" pitchFamily="34" charset="-120"/>
-              </a:rPr>
-              <a:t>Decide how and when to widen it.</a:t>
-            </a:r>
-            <a:endParaRPr lang="en-US" sz="1150" dirty="0"/>
-          </a:p>
-        </p:txBody>
-      </p:sp>
-      <p:sp>
-        <p:nvSpPr>
-          <p:cNvPr id="40" name="Text 37"/>
-          <p:cNvSpPr/>
-          <p:nvPr/>
-        </p:nvSpPr>
-        <p:spPr>
-          <a:xfrm>
-            <a:off x="1417320" y="4434840"/>
-            <a:ext cx="9144000" cy="274320"/>
-          </a:xfrm>
-          <a:prstGeom prst="rect">
-            <a:avLst/>
-          </a:prstGeom>
-          <a:noFill/>
-          <a:ln/>
-        </p:spPr>
-        <p:txBody>
-          <a:bodyPr wrap="square" lIns="0" tIns="0" rIns="0" bIns="0" rtlCol="0" anchor="t"/>
-          <a:lstStyle/>
-          <a:p>
-            <a:pPr algn="l" indent="0" marL="0">
-              <a:lnSpc>
-                <a:spcPct val="110000"/>
-              </a:lnSpc>
-              <a:buNone/>
-            </a:pPr>
-            <a:r>
-              <a:rPr lang="en-US" sz="1100" b="1" spc="200" kern="0" dirty="0">
-                <a:solidFill>
-                  <a:srgbClr val="1E1208"/>
-                </a:solidFill>
-                <a:latin typeface="Courier New" pitchFamily="34" charset="0"/>
-                <a:ea typeface="Courier New" pitchFamily="34" charset="-122"/>
-                <a:cs typeface="Courier New" pitchFamily="34" charset="-120"/>
-              </a:rPr>
-              <a:t>HOW WE WOULD MEASURE SUCCESS</a:t>
-            </a:r>
-            <a:endParaRPr lang="en-US" sz="1100" dirty="0"/>
-          </a:p>
-        </p:txBody>
-      </p:sp>
-      <p:sp>
-        <p:nvSpPr>
-          <p:cNvPr id="41" name="Shape 38"/>
-          <p:cNvSpPr/>
-          <p:nvPr/>
-        </p:nvSpPr>
-        <p:spPr>
-          <a:xfrm>
-            <a:off x="1417320" y="4800600"/>
-            <a:ext cx="1783080" cy="1005840"/>
-          </a:xfrm>
-          <a:prstGeom prst="rect">
-            <a:avLst/>
-          </a:prstGeom>
-          <a:solidFill>
-            <a:srgbClr val="FBE9D6"/>
-          </a:solidFill>
-          <a:ln w="25400">
-            <a:solidFill>
-              <a:srgbClr val="1E1208"/>
-            </a:solidFill>
-            <a:prstDash val="solid"/>
-          </a:ln>
-        </p:spPr>
-      </p:sp>
-      <p:sp>
-        <p:nvSpPr>
-          <p:cNvPr id="42" name="Text 39"/>
-          <p:cNvSpPr/>
-          <p:nvPr/>
-        </p:nvSpPr>
-        <p:spPr>
-          <a:xfrm>
-            <a:off x="1527048" y="4800600"/>
-            <a:ext cx="1572768" cy="1005840"/>
-          </a:xfrm>
-          <a:prstGeom prst="rect">
-            <a:avLst/>
-          </a:prstGeom>
-          <a:noFill/>
-          <a:ln/>
-        </p:spPr>
-        <p:txBody>
-          <a:bodyPr wrap="square" lIns="0" tIns="0" rIns="0" bIns="0" rtlCol="0" anchor="ctr"/>
-          <a:lstStyle/>
-          <a:p>
-            <a:pPr algn="l" indent="0" marL="0">
-              <a:lnSpc>
-                <a:spcPct val="110000"/>
-              </a:lnSpc>
-              <a:buNone/>
-            </a:pPr>
-            <a:r>
-              <a:rPr lang="en-US" sz="1100" b="1" dirty="0">
-                <a:solidFill>
-                  <a:srgbClr val="1E1208"/>
-                </a:solidFill>
-                <a:latin typeface="Arial" pitchFamily="34" charset="0"/>
-                <a:ea typeface="Arial" pitchFamily="34" charset="-122"/>
-                <a:cs typeface="Arial" pitchFamily="34" charset="-120"/>
-              </a:rPr>
-              <a:t>Teacher hours saved marking and preparing</a:t>
-            </a:r>
-            <a:endParaRPr lang="en-US" sz="1100" dirty="0"/>
-          </a:p>
-        </p:txBody>
-      </p:sp>
-      <p:sp>
-        <p:nvSpPr>
-          <p:cNvPr id="43" name="Shape 40"/>
-          <p:cNvSpPr/>
-          <p:nvPr/>
-        </p:nvSpPr>
-        <p:spPr>
-          <a:xfrm>
-            <a:off x="3337560" y="4800600"/>
-            <a:ext cx="1783080" cy="1005840"/>
-          </a:xfrm>
-          <a:prstGeom prst="rect">
-            <a:avLst/>
-          </a:prstGeom>
-          <a:solidFill>
-            <a:srgbClr val="FBE9D6"/>
-          </a:solidFill>
-          <a:ln w="25400">
-            <a:solidFill>
-              <a:srgbClr val="1E1208"/>
-            </a:solidFill>
-            <a:prstDash val="solid"/>
-          </a:ln>
-        </p:spPr>
-      </p:sp>
-      <p:sp>
-        <p:nvSpPr>
-          <p:cNvPr id="44" name="Text 41"/>
-          <p:cNvSpPr/>
-          <p:nvPr/>
-        </p:nvSpPr>
-        <p:spPr>
-          <a:xfrm>
-            <a:off x="3447288" y="4800600"/>
-            <a:ext cx="1572768" cy="1005840"/>
-          </a:xfrm>
-          <a:prstGeom prst="rect">
-            <a:avLst/>
-          </a:prstGeom>
-          <a:noFill/>
-          <a:ln/>
-        </p:spPr>
-        <p:txBody>
-          <a:bodyPr wrap="square" lIns="0" tIns="0" rIns="0" bIns="0" rtlCol="0" anchor="ctr"/>
-          <a:lstStyle/>
-          <a:p>
-            <a:pPr algn="l" indent="0" marL="0">
-              <a:lnSpc>
-                <a:spcPct val="110000"/>
-              </a:lnSpc>
-              <a:buNone/>
-            </a:pPr>
-            <a:r>
-              <a:rPr lang="en-US" sz="1100" b="1" dirty="0">
-                <a:solidFill>
-                  <a:srgbClr val="1E1208"/>
-                </a:solidFill>
-                <a:latin typeface="Arial" pitchFamily="34" charset="0"/>
-                <a:ea typeface="Arial" pitchFamily="34" charset="-122"/>
-                <a:cs typeface="Arial" pitchFamily="34" charset="-120"/>
-              </a:rPr>
-              <a:t>Paper no longer printed and copied</a:t>
-            </a:r>
-            <a:endParaRPr lang="en-US" sz="1100" dirty="0"/>
-          </a:p>
-        </p:txBody>
-      </p:sp>
-      <p:sp>
-        <p:nvSpPr>
-          <p:cNvPr id="45" name="Shape 42"/>
-          <p:cNvSpPr/>
-          <p:nvPr/>
-        </p:nvSpPr>
-        <p:spPr>
-          <a:xfrm>
-            <a:off x="5257800" y="4800600"/>
-            <a:ext cx="1783080" cy="1005840"/>
-          </a:xfrm>
-          <a:prstGeom prst="rect">
-            <a:avLst/>
-          </a:prstGeom>
-          <a:solidFill>
-            <a:srgbClr val="FBE9D6"/>
-          </a:solidFill>
-          <a:ln w="25400">
-            <a:solidFill>
-              <a:srgbClr val="1E1208"/>
-            </a:solidFill>
-            <a:prstDash val="solid"/>
-          </a:ln>
-        </p:spPr>
-      </p:sp>
-      <p:sp>
-        <p:nvSpPr>
-          <p:cNvPr id="46" name="Text 43"/>
-          <p:cNvSpPr/>
-          <p:nvPr/>
-        </p:nvSpPr>
-        <p:spPr>
-          <a:xfrm>
-            <a:off x="5367528" y="4800600"/>
-            <a:ext cx="1572768" cy="1005840"/>
-          </a:xfrm>
-          <a:prstGeom prst="rect">
-            <a:avLst/>
-          </a:prstGeom>
-          <a:noFill/>
-          <a:ln/>
-        </p:spPr>
-        <p:txBody>
-          <a:bodyPr wrap="square" lIns="0" tIns="0" rIns="0" bIns="0" rtlCol="0" anchor="ctr"/>
-          <a:lstStyle/>
-          <a:p>
-            <a:pPr algn="l" indent="0" marL="0">
-              <a:lnSpc>
-                <a:spcPct val="110000"/>
-              </a:lnSpc>
-              <a:buNone/>
-            </a:pPr>
-            <a:r>
-              <a:rPr lang="en-US" sz="1100" b="1" dirty="0">
-                <a:solidFill>
-                  <a:srgbClr val="1E1208"/>
-                </a:solidFill>
-                <a:latin typeface="Arial" pitchFamily="34" charset="0"/>
-                <a:ea typeface="Arial" pitchFamily="34" charset="-122"/>
-                <a:cs typeface="Arial" pitchFamily="34" charset="-120"/>
-              </a:rPr>
-              <a:t>Time from exam to usable results</a:t>
-            </a:r>
-            <a:endParaRPr lang="en-US" sz="1100" dirty="0"/>
-          </a:p>
-        </p:txBody>
-      </p:sp>
-      <p:sp>
-        <p:nvSpPr>
-          <p:cNvPr id="47" name="Shape 44"/>
-          <p:cNvSpPr/>
-          <p:nvPr/>
-        </p:nvSpPr>
-        <p:spPr>
-          <a:xfrm>
-            <a:off x="7178040" y="4800600"/>
-            <a:ext cx="1783080" cy="1005840"/>
-          </a:xfrm>
-          <a:prstGeom prst="rect">
-            <a:avLst/>
-          </a:prstGeom>
-          <a:solidFill>
-            <a:srgbClr val="FBE9D6"/>
-          </a:solidFill>
-          <a:ln w="25400">
-            <a:solidFill>
-              <a:srgbClr val="1E1208"/>
-            </a:solidFill>
-            <a:prstDash val="solid"/>
-          </a:ln>
-        </p:spPr>
-      </p:sp>
-      <p:sp>
-        <p:nvSpPr>
-          <p:cNvPr id="48" name="Text 45"/>
-          <p:cNvSpPr/>
-          <p:nvPr/>
-        </p:nvSpPr>
-        <p:spPr>
-          <a:xfrm>
-            <a:off x="7287768" y="4800600"/>
-            <a:ext cx="1572768" cy="1005840"/>
-          </a:xfrm>
-          <a:prstGeom prst="rect">
-            <a:avLst/>
-          </a:prstGeom>
-          <a:noFill/>
-          <a:ln/>
-        </p:spPr>
-        <p:txBody>
-          <a:bodyPr wrap="square" lIns="0" tIns="0" rIns="0" bIns="0" rtlCol="0" anchor="ctr"/>
-          <a:lstStyle/>
-          <a:p>
-            <a:pPr algn="l" indent="0" marL="0">
-              <a:lnSpc>
-                <a:spcPct val="110000"/>
-              </a:lnSpc>
-              <a:buNone/>
-            </a:pPr>
-            <a:r>
-              <a:rPr lang="en-US" sz="1100" b="1" dirty="0">
-                <a:solidFill>
-                  <a:srgbClr val="1E1208"/>
-                </a:solidFill>
-                <a:latin typeface="Arial" pitchFamily="34" charset="0"/>
-                <a:ea typeface="Arial" pitchFamily="34" charset="-122"/>
-                <a:cs typeface="Arial" pitchFamily="34" charset="-120"/>
-              </a:rPr>
-              <a:t>Learning gaps found and acted on</a:t>
-            </a:r>
-            <a:endParaRPr lang="en-US" sz="1100" dirty="0"/>
-          </a:p>
-        </p:txBody>
-      </p:sp>
-      <p:sp>
-        <p:nvSpPr>
-          <p:cNvPr id="49" name="Shape 46"/>
-          <p:cNvSpPr/>
-          <p:nvPr/>
-        </p:nvSpPr>
-        <p:spPr>
-          <a:xfrm>
-            <a:off x="9098280" y="4800600"/>
-            <a:ext cx="1783080" cy="1005840"/>
-          </a:xfrm>
-          <a:prstGeom prst="rect">
-            <a:avLst/>
-          </a:prstGeom>
-          <a:solidFill>
-            <a:srgbClr val="FBE9D6"/>
-          </a:solidFill>
-          <a:ln w="25400">
-            <a:solidFill>
-              <a:srgbClr val="1E1208"/>
-            </a:solidFill>
-            <a:prstDash val="solid"/>
-          </a:ln>
-        </p:spPr>
-      </p:sp>
-      <p:sp>
-        <p:nvSpPr>
-          <p:cNvPr id="50" name="Text 47"/>
-          <p:cNvSpPr/>
-          <p:nvPr/>
-        </p:nvSpPr>
-        <p:spPr>
-          <a:xfrm>
-            <a:off x="9208008" y="4800600"/>
-            <a:ext cx="1572768" cy="1005840"/>
-          </a:xfrm>
-          <a:prstGeom prst="rect">
-            <a:avLst/>
-          </a:prstGeom>
-          <a:noFill/>
-          <a:ln/>
-        </p:spPr>
-        <p:txBody>
-          <a:bodyPr wrap="square" lIns="0" tIns="0" rIns="0" bIns="0" rtlCol="0" anchor="ctr"/>
-          <a:lstStyle/>
-          <a:p>
-            <a:pPr algn="l" indent="0" marL="0">
-              <a:lnSpc>
-                <a:spcPct val="110000"/>
-              </a:lnSpc>
-              <a:buNone/>
-            </a:pPr>
-            <a:r>
-              <a:rPr lang="en-US" sz="1100" b="1" dirty="0">
-                <a:solidFill>
-                  <a:srgbClr val="1E1208"/>
-                </a:solidFill>
-                <a:latin typeface="Arial" pitchFamily="34" charset="0"/>
-                <a:ea typeface="Arial" pitchFamily="34" charset="-122"/>
-                <a:cs typeface="Arial" pitchFamily="34" charset="-120"/>
-              </a:rPr>
-              <a:t>Teacher and student feedback</a:t>
-            </a:r>
-            <a:endParaRPr lang="en-US" sz="1100" dirty="0"/>
-          </a:p>
-        </p:txBody>
-      </p:sp>
-      <p:sp>
-        <p:nvSpPr>
-          <p:cNvPr id="51" name="Text 48"/>
-          <p:cNvSpPr/>
-          <p:nvPr/>
-        </p:nvSpPr>
-        <p:spPr>
-          <a:xfrm>
-            <a:off x="1417320" y="6080760"/>
-            <a:ext cx="9509760" cy="365760"/>
-          </a:xfrm>
-          <a:prstGeom prst="rect">
-            <a:avLst/>
-          </a:prstGeom>
-          <a:noFill/>
-          <a:ln/>
-        </p:spPr>
-        <p:txBody>
-          <a:bodyPr wrap="square" lIns="0" tIns="0" rIns="0" bIns="0" rtlCol="0" anchor="t"/>
-          <a:lstStyle/>
-          <a:p>
-            <a:pPr algn="l" indent="0" marL="0">
-              <a:lnSpc>
-                <a:spcPct val="110000"/>
-              </a:lnSpc>
-              <a:buNone/>
-            </a:pPr>
-            <a:r>
-              <a:rPr lang="en-US" sz="1400" dirty="0">
-                <a:solidFill>
-                  <a:srgbClr val="555555"/>
-                </a:solidFill>
-                <a:latin typeface="Arial" pitchFamily="34" charset="0"/>
-                <a:ea typeface="Arial" pitchFamily="34" charset="-122"/>
-                <a:cs typeface="Arial" pitchFamily="34" charset="-120"/>
-              </a:rPr>
-              <a:t>Scope, timing and measures are decided with you. This is a starting proposal.</a:t>
-            </a:r>
-            <a:endParaRPr lang="en-US" sz="1400" dirty="0"/>
-          </a:p>
-        </p:txBody>
-      </p:sp>
-    </p:spTree>
-  </p:cSld>
-  <p:clrMapOvr>
-    <a:masterClrMapping/>
-  </p:clrMapOvr>
-</p:sld>
-</file>
-
-<file path=ppt/slides/slide31.xml><?xml version="1.0" encoding="utf-8"?>
-<p:sld xmlns:a="http://schemas.openxmlformats.org/drawingml/2006/main" xmlns:r="http://schemas.openxmlformats.org/officeDocument/2006/relationships" xmlns:p="http://schemas.openxmlformats.org/presentationml/2006/main">
-  <p:cSld name="Slide 31">
+  <p:cSld name="Slide 32">
     <p:bg>
       <p:bgPr>
         <a:blipFill dpi="0" rotWithShape="1">

--- a/marketing/presentation/Smart-Assess-Ja-Manchester-Presentation-v2.pptx
+++ b/marketing/presentation/Smart-Assess-Ja-Manchester-Presentation-v2.pptx
@@ -26710,7 +26710,7 @@
                 <a:ea typeface="Arial" pitchFamily="34" charset="-122"/>
                 <a:cs typeface="Arial" pitchFamily="34" charset="-120"/>
               </a:rPr>
-              <a:t>Smart Assess Ja is designed to connect assessment, learning and practice around the same students, classes and curriculum topics.</a:t>
+              <a:t>Smart Assess JA is designed to connect assessment, learning and practice around the same students, classes and curriculum topics.</a:t>
             </a:r>
             <a:endParaRPr lang="en-US" sz="1800" dirty="0"/>
           </a:p>
@@ -27561,7 +27561,7 @@
                 <a:ea typeface="Arial" pitchFamily="34" charset="-122"/>
                 <a:cs typeface="Arial" pitchFamily="34" charset="-120"/>
               </a:rPr>
-              <a:t>Useful for managing classwork, sharing materials and organising assignments.</a:t>
+              <a:t>Useful for managing classwork, sharing materials and organizing assignments.</a:t>
             </a:r>
             <a:endParaRPr lang="en-US" sz="1700" dirty="0"/>
           </a:p>
@@ -27755,48 +27755,6 @@
               <a:t>The difference is the connected workflow, not just a longer feature list.</a:t>
             </a:r>
             <a:endParaRPr lang="en-US" sz="1600" dirty="0"/>
-          </a:p>
-        </p:txBody>
-      </p:sp>
-      <p:sp>
-        <p:nvSpPr>
-          <p:cNvPr id="24" name="Text 21"/>
-          <p:cNvSpPr/>
-          <p:nvPr/>
-        </p:nvSpPr>
-        <p:spPr>
-          <a:xfrm>
-            <a:off x="1417320" y="6583680"/>
-            <a:ext cx="9509760" cy="274320"/>
-          </a:xfrm>
-          <a:prstGeom prst="rect">
-            <a:avLst/>
-          </a:prstGeom>
-          <a:noFill/>
-          <a:ln/>
-        </p:spPr>
-        <p:txBody>
-          <a:bodyPr wrap="square" lIns="0" tIns="0" rIns="0" bIns="0" rtlCol="0" anchor="t"/>
-          <a:lstStyle/>
-          <a:p>
-            <a:pPr algn="l" indent="0" marL="0">
-              <a:lnSpc>
-                <a:spcPct val="110000"/>
-              </a:lnSpc>
-              <a:buNone/>
-            </a:pPr>
-            <a:r>
-              <a:rPr lang="en-US" sz="900" dirty="0">
-                <a:solidFill>
-                  <a:srgbClr val="555555"/>
-                </a:solidFill>
-                <a:latin typeface="Arial" pitchFamily="34" charset="0"/>
-                <a:ea typeface="Arial" pitchFamily="34" charset="-122"/>
-                <a:cs typeface="Arial" pitchFamily="34" charset="-120"/>
-              </a:rPr>
-              <a:t>Google Classroom: public documentation, October 2026. Every school sets it up differently.</a:t>
-            </a:r>
-            <a:endParaRPr lang="en-US" sz="900" dirty="0"/>
           </a:p>
         </p:txBody>
       </p:sp>

--- a/marketing/presentation/Smart-Assess-Ja-Manchester-Presentation-v2.pptx
+++ b/marketing/presentation/Smart-Assess-Ja-Manchester-Presentation-v2.pptx
@@ -29167,17 +29167,17 @@
                         <a:buNone/>
                       </a:pPr>
                       <a:r>
-                        <a:rPr lang="en-US" sz="800" dirty="0">
+                        <a:rPr lang="en-US" sz="850" b="1" dirty="0">
                           <a:solidFill>
-                            <a:srgbClr val="8A7A62"/>
+                            <a:srgbClr val="1E1208"/>
                           </a:solidFill>
                           <a:latin typeface="Arial" pitchFamily="34" charset="0"/>
                           <a:ea typeface="Arial" pitchFamily="34" charset="-122"/>
                           <a:cs typeface="Arial" pitchFamily="34" charset="-120"/>
                         </a:rPr>
-                        <a:t>–</a:t>
+                        <a:t>✔</a:t>
                       </a:r>
-                      <a:endParaRPr lang="en-US" sz="800" dirty="0">
+                      <a:endParaRPr lang="en-US" sz="850" dirty="0">
                         <a:latin typeface="Arial" charset="0"/>
                         <a:ea typeface="Arial" charset="0"/>
                         <a:cs typeface="Arial" charset="0"/>
@@ -29217,17 +29217,17 @@
                         <a:buNone/>
                       </a:pPr>
                       <a:r>
-                        <a:rPr lang="en-US" sz="800" dirty="0">
+                        <a:rPr lang="en-US" sz="850" b="1" dirty="0">
                           <a:solidFill>
-                            <a:srgbClr val="8A7A62"/>
+                            <a:srgbClr val="1E1208"/>
                           </a:solidFill>
                           <a:latin typeface="Arial" pitchFamily="34" charset="0"/>
                           <a:ea typeface="Arial" pitchFamily="34" charset="-122"/>
                           <a:cs typeface="Arial" pitchFamily="34" charset="-120"/>
                         </a:rPr>
-                        <a:t>–</a:t>
+                        <a:t>✔</a:t>
                       </a:r>
-                      <a:endParaRPr lang="en-US" sz="800" dirty="0">
+                      <a:endParaRPr lang="en-US" sz="850" dirty="0">
                         <a:latin typeface="Arial" charset="0"/>
                         <a:ea typeface="Arial" charset="0"/>
                         <a:cs typeface="Arial" charset="0"/>
@@ -30221,17 +30221,17 @@
                         <a:buNone/>
                       </a:pPr>
                       <a:r>
-                        <a:rPr lang="en-US" sz="680" dirty="0">
+                        <a:rPr lang="en-US" sz="850" b="1" dirty="0">
                           <a:solidFill>
-                            <a:srgbClr val="8A7A62"/>
+                            <a:srgbClr val="1E1208"/>
                           </a:solidFill>
                           <a:latin typeface="Arial" pitchFamily="34" charset="0"/>
                           <a:ea typeface="Arial" pitchFamily="34" charset="-122"/>
                           <a:cs typeface="Arial" pitchFamily="34" charset="-120"/>
                         </a:rPr>
-                        <a:t>Limited</a:t>
+                        <a:t>✔</a:t>
                       </a:r>
-                      <a:endParaRPr lang="en-US" sz="680" dirty="0">
+                      <a:endParaRPr lang="en-US" sz="850" dirty="0">
                         <a:latin typeface="Arial" charset="0"/>
                         <a:ea typeface="Arial" charset="0"/>
                         <a:cs typeface="Arial" charset="0"/>
@@ -30775,17 +30775,17 @@
                         <a:buNone/>
                       </a:pPr>
                       <a:r>
-                        <a:rPr lang="en-US" sz="800" dirty="0">
+                        <a:rPr lang="en-US" sz="850" b="1" dirty="0">
                           <a:solidFill>
-                            <a:srgbClr val="8A7A62"/>
+                            <a:srgbClr val="1E1208"/>
                           </a:solidFill>
                           <a:latin typeface="Arial" pitchFamily="34" charset="0"/>
                           <a:ea typeface="Arial" pitchFamily="34" charset="-122"/>
                           <a:cs typeface="Arial" pitchFamily="34" charset="-120"/>
                         </a:rPr>
-                        <a:t>–</a:t>
+                        <a:t>✔</a:t>
                       </a:r>
-                      <a:endParaRPr lang="en-US" sz="800" dirty="0">
+                      <a:endParaRPr lang="en-US" sz="850" dirty="0">
                         <a:latin typeface="Arial" charset="0"/>
                         <a:ea typeface="Arial" charset="0"/>
                         <a:cs typeface="Arial" charset="0"/>
@@ -30825,17 +30825,17 @@
                         <a:buNone/>
                       </a:pPr>
                       <a:r>
-                        <a:rPr lang="en-US" sz="800" dirty="0">
+                        <a:rPr lang="en-US" sz="850" b="1" dirty="0">
                           <a:solidFill>
-                            <a:srgbClr val="8A7A62"/>
+                            <a:srgbClr val="1E1208"/>
                           </a:solidFill>
                           <a:latin typeface="Arial" pitchFamily="34" charset="0"/>
                           <a:ea typeface="Arial" pitchFamily="34" charset="-122"/>
                           <a:cs typeface="Arial" pitchFamily="34" charset="-120"/>
                         </a:rPr>
-                        <a:t>–</a:t>
+                        <a:t>✔</a:t>
                       </a:r>
-                      <a:endParaRPr lang="en-US" sz="800" dirty="0">
+                      <a:endParaRPr lang="en-US" sz="850" dirty="0">
                         <a:latin typeface="Arial" charset="0"/>
                         <a:ea typeface="Arial" charset="0"/>
                         <a:cs typeface="Arial" charset="0"/>
@@ -31025,7 +31025,7 @@
                         <a:buNone/>
                       </a:pPr>
                       <a:r>
-                        <a:rPr lang="en-US" sz="800" dirty="0">
+                        <a:rPr lang="en-US" sz="680" dirty="0">
                           <a:solidFill>
                             <a:srgbClr val="8A7A62"/>
                           </a:solidFill>
@@ -31033,9 +31033,9 @@
                           <a:ea typeface="Arial" pitchFamily="34" charset="-122"/>
                           <a:cs typeface="Arial" pitchFamily="34" charset="-120"/>
                         </a:rPr>
-                        <a:t>–</a:t>
+                        <a:t>Limited</a:t>
                       </a:r>
-                      <a:endParaRPr lang="en-US" sz="800" dirty="0">
+                      <a:endParaRPr lang="en-US" sz="680" dirty="0">
                         <a:latin typeface="Arial" charset="0"/>
                         <a:ea typeface="Arial" charset="0"/>
                         <a:cs typeface="Arial" charset="0"/>
@@ -31177,7 +31177,7 @@
                         <a:buNone/>
                       </a:pPr>
                       <a:r>
-                        <a:rPr lang="en-US" sz="800" dirty="0">
+                        <a:rPr lang="en-US" sz="680" dirty="0">
                           <a:solidFill>
                             <a:srgbClr val="8A7A62"/>
                           </a:solidFill>
@@ -31185,9 +31185,9 @@
                           <a:ea typeface="Arial" pitchFamily="34" charset="-122"/>
                           <a:cs typeface="Arial" pitchFamily="34" charset="-120"/>
                         </a:rPr>
-                        <a:t>–</a:t>
+                        <a:t>Limited</a:t>
                       </a:r>
-                      <a:endParaRPr lang="en-US" sz="800" dirty="0">
+                      <a:endParaRPr lang="en-US" sz="680" dirty="0">
                         <a:latin typeface="Arial" charset="0"/>
                         <a:ea typeface="Arial" charset="0"/>
                         <a:cs typeface="Arial" charset="0"/>
@@ -31277,7 +31277,7 @@
                         <a:buNone/>
                       </a:pPr>
                       <a:r>
-                        <a:rPr lang="en-US" sz="800" dirty="0">
+                        <a:rPr lang="en-US" sz="680" dirty="0">
                           <a:solidFill>
                             <a:srgbClr val="8A7A62"/>
                           </a:solidFill>
@@ -31285,9 +31285,9 @@
                           <a:ea typeface="Arial" pitchFamily="34" charset="-122"/>
                           <a:cs typeface="Arial" pitchFamily="34" charset="-120"/>
                         </a:rPr>
-                        <a:t>–</a:t>
+                        <a:t>Limited</a:t>
                       </a:r>
-                      <a:endParaRPr lang="en-US" sz="800" dirty="0">
+                      <a:endParaRPr lang="en-US" sz="680" dirty="0">
                         <a:latin typeface="Arial" charset="0"/>
                         <a:ea typeface="Arial" charset="0"/>
                         <a:cs typeface="Arial" charset="0"/>
@@ -31327,7 +31327,7 @@
                         <a:buNone/>
                       </a:pPr>
                       <a:r>
-                        <a:rPr lang="en-US" sz="800" dirty="0">
+                        <a:rPr lang="en-US" sz="680" dirty="0">
                           <a:solidFill>
                             <a:srgbClr val="8A7A62"/>
                           </a:solidFill>
@@ -31335,9 +31335,9 @@
                           <a:ea typeface="Arial" pitchFamily="34" charset="-122"/>
                           <a:cs typeface="Arial" pitchFamily="34" charset="-120"/>
                         </a:rPr>
-                        <a:t>–</a:t>
+                        <a:t>Limited</a:t>
                       </a:r>
-                      <a:endParaRPr lang="en-US" sz="800" dirty="0">
+                      <a:endParaRPr lang="en-US" sz="680" dirty="0">
                         <a:latin typeface="Arial" charset="0"/>
                         <a:ea typeface="Arial" charset="0"/>
                         <a:cs typeface="Arial" charset="0"/>
@@ -31646,7 +31646,7 @@
                         <a:buNone/>
                       </a:pPr>
                       <a:r>
-                        <a:rPr lang="en-US" sz="800" dirty="0">
+                        <a:rPr lang="en-US" sz="680" dirty="0">
                           <a:solidFill>
                             <a:srgbClr val="8A7A62"/>
                           </a:solidFill>
@@ -31654,9 +31654,9 @@
                           <a:ea typeface="Arial" pitchFamily="34" charset="-122"/>
                           <a:cs typeface="Arial" pitchFamily="34" charset="-120"/>
                         </a:rPr>
-                        <a:t>–</a:t>
+                        <a:t>Limited</a:t>
                       </a:r>
-                      <a:endParaRPr lang="en-US" sz="800" dirty="0">
+                      <a:endParaRPr lang="en-US" sz="680" dirty="0">
                         <a:latin typeface="Arial" charset="0"/>
                         <a:ea typeface="Arial" charset="0"/>
                         <a:cs typeface="Arial" charset="0"/>
@@ -31696,7 +31696,7 @@
                         <a:buNone/>
                       </a:pPr>
                       <a:r>
-                        <a:rPr lang="en-US" sz="800" dirty="0">
+                        <a:rPr lang="en-US" sz="680" dirty="0">
                           <a:solidFill>
                             <a:srgbClr val="8A7A62"/>
                           </a:solidFill>
@@ -31704,9 +31704,9 @@
                           <a:ea typeface="Arial" pitchFamily="34" charset="-122"/>
                           <a:cs typeface="Arial" pitchFamily="34" charset="-120"/>
                         </a:rPr>
-                        <a:t>–</a:t>
+                        <a:t>Limited</a:t>
                       </a:r>
-                      <a:endParaRPr lang="en-US" sz="800" dirty="0">
+                      <a:endParaRPr lang="en-US" sz="680" dirty="0">
                         <a:latin typeface="Arial" charset="0"/>
                         <a:ea typeface="Arial" charset="0"/>
                         <a:cs typeface="Arial" charset="0"/>
@@ -32248,7 +32248,7 @@
                         <a:buNone/>
                       </a:pPr>
                       <a:r>
-                        <a:rPr lang="en-US" sz="800" dirty="0">
+                        <a:rPr lang="en-US" sz="680" dirty="0">
                           <a:solidFill>
                             <a:srgbClr val="8A7A62"/>
                           </a:solidFill>
@@ -32256,9 +32256,9 @@
                           <a:ea typeface="Arial" pitchFamily="34" charset="-122"/>
                           <a:cs typeface="Arial" pitchFamily="34" charset="-120"/>
                         </a:rPr>
-                        <a:t>–</a:t>
+                        <a:t>Limited</a:t>
                       </a:r>
-                      <a:endParaRPr lang="en-US" sz="800" dirty="0">
+                      <a:endParaRPr lang="en-US" sz="680" dirty="0">
                         <a:latin typeface="Arial" charset="0"/>
                         <a:ea typeface="Arial" charset="0"/>
                         <a:cs typeface="Arial" charset="0"/>
@@ -32298,17 +32298,17 @@
                         <a:buNone/>
                       </a:pPr>
                       <a:r>
-                        <a:rPr lang="en-US" sz="800" dirty="0">
+                        <a:rPr lang="en-US" sz="850" b="1" dirty="0">
                           <a:solidFill>
-                            <a:srgbClr val="8A7A62"/>
+                            <a:srgbClr val="1E1208"/>
                           </a:solidFill>
                           <a:latin typeface="Arial" pitchFamily="34" charset="0"/>
                           <a:ea typeface="Arial" pitchFamily="34" charset="-122"/>
                           <a:cs typeface="Arial" pitchFamily="34" charset="-120"/>
                         </a:rPr>
-                        <a:t>–</a:t>
+                        <a:t>✔</a:t>
                       </a:r>
-                      <a:endParaRPr lang="en-US" sz="800" dirty="0">
+                      <a:endParaRPr lang="en-US" sz="850" dirty="0">
                         <a:latin typeface="Arial" charset="0"/>
                         <a:ea typeface="Arial" charset="0"/>
                         <a:cs typeface="Arial" charset="0"/>
@@ -32852,17 +32852,67 @@
                         <a:buNone/>
                       </a:pPr>
                       <a:r>
-                        <a:rPr lang="en-US" sz="680" dirty="0">
+                        <a:rPr lang="en-US" sz="850" b="1" dirty="0">
                           <a:solidFill>
-                            <a:srgbClr val="8A7A62"/>
+                            <a:srgbClr val="1E1208"/>
                           </a:solidFill>
                           <a:latin typeface="Arial" pitchFamily="34" charset="0"/>
                           <a:ea typeface="Arial" pitchFamily="34" charset="-122"/>
                           <a:cs typeface="Arial" pitchFamily="34" charset="-120"/>
                         </a:rPr>
-                        <a:t>Limited</a:t>
+                        <a:t>✔</a:t>
                       </a:r>
-                      <a:endParaRPr lang="en-US" sz="680" dirty="0">
+                      <a:endParaRPr lang="en-US" sz="850" dirty="0">
+                        <a:latin typeface="Arial" charset="0"/>
+                        <a:ea typeface="Arial" charset="0"/>
+                        <a:cs typeface="Arial" charset="0"/>
+                      </a:endParaRPr>
+                    </a:p>
+                  </a:txBody>
+                  <a:tcPr marL="18288" marR="18288" marT="0" marB="0" anchor="ctr">
+                    <a:lnL w="0" cap="flat" cmpd="sng" algn="ctr">
+                      <a:noFill/>
+                    </a:lnL>
+                    <a:lnR w="0" cap="flat" cmpd="sng" algn="ctr">
+                      <a:noFill/>
+                    </a:lnR>
+                    <a:lnT w="0" cap="flat" cmpd="sng" algn="ctr">
+                      <a:noFill/>
+                    </a:lnT>
+                    <a:lnB w="6350" cap="flat" cmpd="sng" algn="ctr">
+                      <a:solidFill>
+                        <a:srgbClr val="E5DDD0"/>
+                      </a:solidFill>
+                      <a:prstDash val="solid"/>
+                      <a:round/>
+                      <a:headEnd type="none" w="med" len="med"/>
+                      <a:tailEnd type="none" w="med" len="med"/>
+                    </a:lnB>
+                    <a:solidFill>
+                      <a:srgbClr val="FFFFFF"/>
+                    </a:solidFill>
+                  </a:tcPr>
+                </a:tc>
+                <a:tc>
+                  <a:txBody>
+                    <a:bodyPr/>
+                    <a:lstStyle/>
+                    <a:p>
+                      <a:pPr algn="ctr" indent="0" marL="0">
+                        <a:buNone/>
+                      </a:pPr>
+                      <a:r>
+                        <a:rPr lang="en-US" sz="850" b="1" dirty="0">
+                          <a:solidFill>
+                            <a:srgbClr val="1E1208"/>
+                          </a:solidFill>
+                          <a:latin typeface="Arial" pitchFamily="34" charset="0"/>
+                          <a:ea typeface="Arial" pitchFamily="34" charset="-122"/>
+                          <a:cs typeface="Arial" pitchFamily="34" charset="-120"/>
+                        </a:rPr>
+                        <a:t>✔</a:t>
+                      </a:r>
+                      <a:endParaRPr lang="en-US" sz="850" dirty="0">
                         <a:latin typeface="Arial" charset="0"/>
                         <a:ea typeface="Arial" charset="0"/>
                         <a:cs typeface="Arial" charset="0"/>
@@ -33052,7 +33102,7 @@
                         <a:buNone/>
                       </a:pPr>
                       <a:r>
-                        <a:rPr lang="en-US" sz="800" dirty="0">
+                        <a:rPr lang="en-US" sz="680" dirty="0">
                           <a:solidFill>
                             <a:srgbClr val="8A7A62"/>
                           </a:solidFill>
@@ -33060,59 +33110,9 @@
                           <a:ea typeface="Arial" pitchFamily="34" charset="-122"/>
                           <a:cs typeface="Arial" pitchFamily="34" charset="-120"/>
                         </a:rPr>
-                        <a:t>–</a:t>
+                        <a:t>Limited</a:t>
                       </a:r>
-                      <a:endParaRPr lang="en-US" sz="800" dirty="0">
-                        <a:latin typeface="Arial" charset="0"/>
-                        <a:ea typeface="Arial" charset="0"/>
-                        <a:cs typeface="Arial" charset="0"/>
-                      </a:endParaRPr>
-                    </a:p>
-                  </a:txBody>
-                  <a:tcPr marL="18288" marR="18288" marT="0" marB="0" anchor="ctr">
-                    <a:lnL w="0" cap="flat" cmpd="sng" algn="ctr">
-                      <a:noFill/>
-                    </a:lnL>
-                    <a:lnR w="0" cap="flat" cmpd="sng" algn="ctr">
-                      <a:noFill/>
-                    </a:lnR>
-                    <a:lnT w="0" cap="flat" cmpd="sng" algn="ctr">
-                      <a:noFill/>
-                    </a:lnT>
-                    <a:lnB w="6350" cap="flat" cmpd="sng" algn="ctr">
-                      <a:solidFill>
-                        <a:srgbClr val="E5DDD0"/>
-                      </a:solidFill>
-                      <a:prstDash val="solid"/>
-                      <a:round/>
-                      <a:headEnd type="none" w="med" len="med"/>
-                      <a:tailEnd type="none" w="med" len="med"/>
-                    </a:lnB>
-                    <a:solidFill>
-                      <a:srgbClr val="FFFFFF"/>
-                    </a:solidFill>
-                  </a:tcPr>
-                </a:tc>
-                <a:tc>
-                  <a:txBody>
-                    <a:bodyPr/>
-                    <a:lstStyle/>
-                    <a:p>
-                      <a:pPr algn="ctr" indent="0" marL="0">
-                        <a:buNone/>
-                      </a:pPr>
-                      <a:r>
-                        <a:rPr lang="en-US" sz="800" dirty="0">
-                          <a:solidFill>
-                            <a:srgbClr val="8A7A62"/>
-                          </a:solidFill>
-                          <a:latin typeface="Arial" pitchFamily="34" charset="0"/>
-                          <a:ea typeface="Arial" pitchFamily="34" charset="-122"/>
-                          <a:cs typeface="Arial" pitchFamily="34" charset="-120"/>
-                        </a:rPr>
-                        <a:t>–</a:t>
-                      </a:r>
-                      <a:endParaRPr lang="en-US" sz="800" dirty="0">
+                      <a:endParaRPr lang="en-US" sz="680" dirty="0">
                         <a:latin typeface="Arial" charset="0"/>
                         <a:ea typeface="Arial" charset="0"/>
                         <a:cs typeface="Arial" charset="0"/>
@@ -33454,7 +33454,7 @@
                         <a:buNone/>
                       </a:pPr>
                       <a:r>
-                        <a:rPr lang="en-US" sz="800" dirty="0">
+                        <a:rPr lang="en-US" sz="680" dirty="0">
                           <a:solidFill>
                             <a:srgbClr val="8A7A62"/>
                           </a:solidFill>
@@ -33462,9 +33462,9 @@
                           <a:ea typeface="Arial" pitchFamily="34" charset="-122"/>
                           <a:cs typeface="Arial" pitchFamily="34" charset="-120"/>
                         </a:rPr>
-                        <a:t>–</a:t>
+                        <a:t>Limited</a:t>
                       </a:r>
-                      <a:endParaRPr lang="en-US" sz="800" dirty="0">
+                      <a:endParaRPr lang="en-US" sz="680" dirty="0">
                         <a:latin typeface="Arial" charset="0"/>
                         <a:ea typeface="Arial" charset="0"/>
                         <a:cs typeface="Arial" charset="0"/>
@@ -33504,17 +33504,17 @@
                         <a:buNone/>
                       </a:pPr>
                       <a:r>
-                        <a:rPr lang="en-US" sz="800" dirty="0">
+                        <a:rPr lang="en-US" sz="850" b="1" dirty="0">
                           <a:solidFill>
-                            <a:srgbClr val="8A7A62"/>
+                            <a:srgbClr val="1E1208"/>
                           </a:solidFill>
                           <a:latin typeface="Arial" pitchFamily="34" charset="0"/>
                           <a:ea typeface="Arial" pitchFamily="34" charset="-122"/>
                           <a:cs typeface="Arial" pitchFamily="34" charset="-120"/>
                         </a:rPr>
-                        <a:t>–</a:t>
+                        <a:t>✔</a:t>
                       </a:r>
-                      <a:endParaRPr lang="en-US" sz="800" dirty="0">
+                      <a:endParaRPr lang="en-US" sz="850" dirty="0">
                         <a:latin typeface="Arial" charset="0"/>
                         <a:ea typeface="Arial" charset="0"/>
                         <a:cs typeface="Arial" charset="0"/>
@@ -33656,17 +33656,17 @@
                         <a:buNone/>
                       </a:pPr>
                       <a:r>
-                        <a:rPr lang="en-US" sz="680" dirty="0">
+                        <a:rPr lang="en-US" sz="850" b="1" dirty="0">
                           <a:solidFill>
-                            <a:srgbClr val="8A7A62"/>
+                            <a:srgbClr val="1E1208"/>
                           </a:solidFill>
                           <a:latin typeface="Arial" pitchFamily="34" charset="0"/>
                           <a:ea typeface="Arial" pitchFamily="34" charset="-122"/>
                           <a:cs typeface="Arial" pitchFamily="34" charset="-120"/>
                         </a:rPr>
-                        <a:t>Limited</a:t>
+                        <a:t>✔</a:t>
                       </a:r>
-                      <a:endParaRPr lang="en-US" sz="680" dirty="0">
+                      <a:endParaRPr lang="en-US" sz="850" dirty="0">
                         <a:latin typeface="Arial" charset="0"/>
                         <a:ea typeface="Arial" charset="0"/>
                         <a:cs typeface="Arial" charset="0"/>
@@ -35029,7 +35029,7 @@
                         <a:buNone/>
                       </a:pPr>
                       <a:r>
-                        <a:rPr lang="en-US" sz="800" dirty="0">
+                        <a:rPr lang="en-US" sz="680" dirty="0">
                           <a:solidFill>
                             <a:srgbClr val="8A7A62"/>
                           </a:solidFill>
@@ -35037,9 +35037,9 @@
                           <a:ea typeface="Arial" pitchFamily="34" charset="-122"/>
                           <a:cs typeface="Arial" pitchFamily="34" charset="-120"/>
                         </a:rPr>
-                        <a:t>–</a:t>
+                        <a:t>Limited</a:t>
                       </a:r>
-                      <a:endParaRPr lang="en-US" sz="800" dirty="0">
+                      <a:endParaRPr lang="en-US" sz="680" dirty="0">
                         <a:latin typeface="Arial" charset="0"/>
                         <a:ea typeface="Arial" charset="0"/>
                         <a:cs typeface="Arial" charset="0"/>
@@ -36252,7 +36252,7 @@
                         <a:buNone/>
                       </a:pPr>
                       <a:r>
-                        <a:rPr lang="en-US" sz="800" dirty="0">
+                        <a:rPr lang="en-US" sz="680" dirty="0">
                           <a:solidFill>
                             <a:srgbClr val="8A7A62"/>
                           </a:solidFill>
@@ -36260,9 +36260,9 @@
                           <a:ea typeface="Arial" pitchFamily="34" charset="-122"/>
                           <a:cs typeface="Arial" pitchFamily="34" charset="-120"/>
                         </a:rPr>
-                        <a:t>–</a:t>
+                        <a:t>Limited</a:t>
                       </a:r>
-                      <a:endParaRPr lang="en-US" sz="800" dirty="0">
+                      <a:endParaRPr lang="en-US" sz="680" dirty="0">
                         <a:latin typeface="Arial" charset="0"/>
                         <a:ea typeface="Arial" charset="0"/>
                         <a:cs typeface="Arial" charset="0"/>
